--- a/assets/figures.pptx
+++ b/assets/figures.pptx
@@ -250,7 +250,7 @@
           <a:p>
             <a:fld id="{C07B6569-5EFF-41A8-B6CB-39864A9A9501}" type="datetimeFigureOut">
               <a:rPr lang="de-DE" smtClean="0"/>
-              <a:t>24.01.2026</a:t>
+              <a:t>22.09.2026</a:t>
             </a:fld>
             <a:endParaRPr lang="de-DE"/>
           </a:p>
@@ -420,7 +420,7 @@
           <a:p>
             <a:fld id="{C07B6569-5EFF-41A8-B6CB-39864A9A9501}" type="datetimeFigureOut">
               <a:rPr lang="de-DE" smtClean="0"/>
-              <a:t>24.01.2026</a:t>
+              <a:t>22.09.2026</a:t>
             </a:fld>
             <a:endParaRPr lang="de-DE"/>
           </a:p>
@@ -600,7 +600,7 @@
           <a:p>
             <a:fld id="{C07B6569-5EFF-41A8-B6CB-39864A9A9501}" type="datetimeFigureOut">
               <a:rPr lang="de-DE" smtClean="0"/>
-              <a:t>24.01.2026</a:t>
+              <a:t>22.09.2026</a:t>
             </a:fld>
             <a:endParaRPr lang="de-DE"/>
           </a:p>
@@ -847,7 +847,7 @@
           <a:p>
             <a:fld id="{C07B6569-5EFF-41A8-B6CB-39864A9A9501}" type="datetimeFigureOut">
               <a:rPr lang="de-DE" smtClean="0"/>
-              <a:t>24.01.2026</a:t>
+              <a:t>22.09.2026</a:t>
             </a:fld>
             <a:endParaRPr lang="de-DE"/>
           </a:p>
@@ -1091,7 +1091,7 @@
           <a:p>
             <a:fld id="{C07B6569-5EFF-41A8-B6CB-39864A9A9501}" type="datetimeFigureOut">
               <a:rPr lang="de-DE" smtClean="0"/>
-              <a:t>24.01.2026</a:t>
+              <a:t>22.09.2026</a:t>
             </a:fld>
             <a:endParaRPr lang="de-DE"/>
           </a:p>
@@ -1323,7 +1323,7 @@
           <a:p>
             <a:fld id="{C07B6569-5EFF-41A8-B6CB-39864A9A9501}" type="datetimeFigureOut">
               <a:rPr lang="de-DE" smtClean="0"/>
-              <a:t>24.01.2026</a:t>
+              <a:t>22.09.2026</a:t>
             </a:fld>
             <a:endParaRPr lang="de-DE"/>
           </a:p>
@@ -1690,7 +1690,7 @@
           <a:p>
             <a:fld id="{C07B6569-5EFF-41A8-B6CB-39864A9A9501}" type="datetimeFigureOut">
               <a:rPr lang="de-DE" smtClean="0"/>
-              <a:t>24.01.2026</a:t>
+              <a:t>22.09.2026</a:t>
             </a:fld>
             <a:endParaRPr lang="de-DE"/>
           </a:p>
@@ -1808,7 +1808,7 @@
           <a:p>
             <a:fld id="{C07B6569-5EFF-41A8-B6CB-39864A9A9501}" type="datetimeFigureOut">
               <a:rPr lang="de-DE" smtClean="0"/>
-              <a:t>24.01.2026</a:t>
+              <a:t>22.09.2026</a:t>
             </a:fld>
             <a:endParaRPr lang="de-DE"/>
           </a:p>
@@ -1903,7 +1903,7 @@
           <a:p>
             <a:fld id="{C07B6569-5EFF-41A8-B6CB-39864A9A9501}" type="datetimeFigureOut">
               <a:rPr lang="de-DE" smtClean="0"/>
-              <a:t>24.01.2026</a:t>
+              <a:t>22.09.2026</a:t>
             </a:fld>
             <a:endParaRPr lang="de-DE"/>
           </a:p>
@@ -2180,7 +2180,7 @@
           <a:p>
             <a:fld id="{C07B6569-5EFF-41A8-B6CB-39864A9A9501}" type="datetimeFigureOut">
               <a:rPr lang="de-DE" smtClean="0"/>
-              <a:t>24.01.2026</a:t>
+              <a:t>22.09.2026</a:t>
             </a:fld>
             <a:endParaRPr lang="de-DE"/>
           </a:p>
@@ -2437,7 +2437,7 @@
           <a:p>
             <a:fld id="{C07B6569-5EFF-41A8-B6CB-39864A9A9501}" type="datetimeFigureOut">
               <a:rPr lang="de-DE" smtClean="0"/>
-              <a:t>24.01.2026</a:t>
+              <a:t>22.09.2026</a:t>
             </a:fld>
             <a:endParaRPr lang="de-DE"/>
           </a:p>
@@ -2650,7 +2650,7 @@
           <a:p>
             <a:fld id="{C07B6569-5EFF-41A8-B6CB-39864A9A9501}" type="datetimeFigureOut">
               <a:rPr lang="de-DE" smtClean="0"/>
-              <a:t>24.01.2026</a:t>
+              <a:t>22.09.2026</a:t>
             </a:fld>
             <a:endParaRPr lang="de-DE"/>
           </a:p>
@@ -4030,7 +4030,7 @@
                     <a:srgbClr val="405786"/>
                   </a:solidFill>
                 </a:rPr>
-                <a:t>Assessment Content Package</a:t>
+                <a:t>Assessment Package</a:t>
               </a:r>
             </a:p>
           </p:txBody>
@@ -4846,7 +4846,7 @@
               <a:pPr algn="ctr"/>
               <a:r>
                 <a:rPr lang="de-DE" sz="1200"/>
-                <a:t>IQB-ContentPool</a:t>
+                <a:t>IQB-ContentHub</a:t>
               </a:r>
             </a:p>
           </p:txBody>
@@ -6777,7 +6777,7 @@
         </p:nvSpPr>
         <p:spPr>
           <a:xfrm rot="5400000">
-            <a:off x="3279685" y="5262563"/>
+            <a:off x="3272541" y="5262563"/>
             <a:ext cx="581025" cy="161925"/>
           </a:xfrm>
           <a:prstGeom prst="rect">
@@ -7663,7 +7663,7 @@
                   <a:srgbClr val="405786"/>
                 </a:solidFill>
               </a:rPr>
-              <a:t>Assessment Content Package</a:t>
+              <a:t>Assessment Package</a:t>
             </a:r>
           </a:p>
           <a:p>
@@ -8038,7 +8038,7 @@
         </p:nvSpPr>
         <p:spPr>
           <a:xfrm>
-            <a:off x="3091261" y="5315827"/>
+            <a:off x="3268270" y="5303452"/>
             <a:ext cx="1294332" cy="443249"/>
           </a:xfrm>
           <a:prstGeom prst="rect">
@@ -8100,8 +8100,8 @@
         </p:nvSpPr>
         <p:spPr>
           <a:xfrm rot="16200000">
-            <a:off x="2439140" y="5534319"/>
-            <a:ext cx="873197" cy="317898"/>
+            <a:off x="2409548" y="5393561"/>
+            <a:ext cx="591680" cy="317898"/>
           </a:xfrm>
           <a:prstGeom prst="rightArrow">
             <a:avLst/>
@@ -8152,8 +8152,8 @@
         </p:nvSpPr>
         <p:spPr>
           <a:xfrm>
-            <a:off x="2418787" y="5705344"/>
-            <a:ext cx="912402" cy="465410"/>
+            <a:off x="2288938" y="5841478"/>
+            <a:ext cx="646609" cy="465410"/>
           </a:xfrm>
           <a:prstGeom prst="rect">
             <a:avLst/>
@@ -8191,6 +8191,120 @@
                 </a:solidFill>
               </a:rPr>
               <a:t>Zusatz-items</a:t>
+            </a:r>
+            <a:endParaRPr lang="de-DE" sz="1400">
+              <a:solidFill>
+                <a:srgbClr val="405786"/>
+              </a:solidFill>
+            </a:endParaRPr>
+          </a:p>
+        </p:txBody>
+      </p:sp>
+      <p:sp>
+        <p:nvSpPr>
+          <p:cNvPr id="29" name="Pfeil: nach rechts 28">
+            <a:extLst>
+              <a:ext uri="{FF2B5EF4-FFF2-40B4-BE49-F238E27FC236}">
+                <a16:creationId xmlns:a16="http://schemas.microsoft.com/office/drawing/2014/main" id="{2C84FA60-ECCB-4D17-813F-49C831BF79BD}"/>
+              </a:ext>
+            </a:extLst>
+          </p:cNvPr>
+          <p:cNvSpPr/>
+          <p:nvPr/>
+        </p:nvSpPr>
+        <p:spPr>
+          <a:xfrm rot="16200000">
+            <a:off x="2750597" y="5386689"/>
+            <a:ext cx="591680" cy="317898"/>
+          </a:xfrm>
+          <a:prstGeom prst="rightArrow">
+            <a:avLst/>
+          </a:prstGeom>
+          <a:solidFill>
+            <a:srgbClr val="D6DCE5"/>
+          </a:solidFill>
+          <a:ln>
+            <a:noFill/>
+          </a:ln>
+        </p:spPr>
+        <p:style>
+          <a:lnRef idx="2">
+            <a:schemeClr val="accent1">
+              <a:shade val="50000"/>
+            </a:schemeClr>
+          </a:lnRef>
+          <a:fillRef idx="1">
+            <a:schemeClr val="accent1"/>
+          </a:fillRef>
+          <a:effectRef idx="0">
+            <a:schemeClr val="accent1"/>
+          </a:effectRef>
+          <a:fontRef idx="minor">
+            <a:schemeClr val="lt1"/>
+          </a:fontRef>
+        </p:style>
+        <p:txBody>
+          <a:bodyPr rtlCol="0" anchor="ctr"/>
+          <a:lstStyle/>
+          <a:p>
+            <a:pPr algn="ctr"/>
+            <a:endParaRPr lang="de-DE"/>
+          </a:p>
+        </p:txBody>
+      </p:sp>
+      <p:sp>
+        <p:nvSpPr>
+          <p:cNvPr id="31" name="Rechteck 30">
+            <a:extLst>
+              <a:ext uri="{FF2B5EF4-FFF2-40B4-BE49-F238E27FC236}">
+                <a16:creationId xmlns:a16="http://schemas.microsoft.com/office/drawing/2014/main" id="{36DBFEC0-E32B-4C6A-895C-18974A3E5691}"/>
+              </a:ext>
+            </a:extLst>
+          </p:cNvPr>
+          <p:cNvSpPr/>
+          <p:nvPr/>
+        </p:nvSpPr>
+        <p:spPr>
+          <a:xfrm>
+            <a:off x="2798534" y="5841478"/>
+            <a:ext cx="806679" cy="465410"/>
+          </a:xfrm>
+          <a:prstGeom prst="rect">
+            <a:avLst/>
+          </a:prstGeom>
+          <a:noFill/>
+          <a:ln>
+            <a:noFill/>
+          </a:ln>
+        </p:spPr>
+        <p:style>
+          <a:lnRef idx="2">
+            <a:schemeClr val="accent1">
+              <a:shade val="50000"/>
+            </a:schemeClr>
+          </a:lnRef>
+          <a:fillRef idx="1">
+            <a:schemeClr val="accent1"/>
+          </a:fillRef>
+          <a:effectRef idx="0">
+            <a:schemeClr val="accent1"/>
+          </a:effectRef>
+          <a:fontRef idx="minor">
+            <a:schemeClr val="lt1"/>
+          </a:fontRef>
+        </p:style>
+        <p:txBody>
+          <a:bodyPr rtlCol="0" anchor="t"/>
+          <a:lstStyle/>
+          <a:p>
+            <a:pPr algn="ctr"/>
+            <a:r>
+              <a:rPr lang="de-DE" sz="1200">
+                <a:solidFill>
+                  <a:srgbClr val="405786"/>
+                </a:solidFill>
+              </a:rPr>
+              <a:t>Fähigkeitswerte aus Vorjahr</a:t>
             </a:r>
             <a:endParaRPr lang="de-DE" sz="1400">
               <a:solidFill>
@@ -9570,9 +9684,8 @@
             <a:pPr algn="ctr"/>
             <a:r>
               <a:rPr lang="de-DE" sz="1400"/>
-              <a:t>Assessment Content Pool</a:t>
-            </a:r>
-            <a:endParaRPr lang="de-DE"/>
+              <a:t>IQB-ContentHub</a:t>
+            </a:r>
           </a:p>
         </p:txBody>
       </p:sp>
@@ -9628,7 +9741,7 @@
                   <a:srgbClr val="405786"/>
                 </a:solidFill>
               </a:rPr>
-              <a:t>Content Package</a:t>
+              <a:t>Assessment Package</a:t>
             </a:r>
             <a:endParaRPr lang="de-DE" sz="1400">
               <a:solidFill>
@@ -10844,7 +10957,7 @@
             <a:pPr algn="ctr"/>
             <a:r>
               <a:rPr lang="de-DE" sz="1400"/>
-              <a:t>Assessment Content Pool</a:t>
+              <a:t>IQB-ContentHub</a:t>
             </a:r>
             <a:endParaRPr lang="de-DE"/>
           </a:p>
@@ -10902,7 +11015,7 @@
                   <a:srgbClr val="405786"/>
                 </a:solidFill>
               </a:rPr>
-              <a:t>Content Package</a:t>
+              <a:t>Assessment Package</a:t>
             </a:r>
             <a:endParaRPr lang="de-DE" sz="1400">
               <a:solidFill>

--- a/assets/figures.pptx
+++ b/assets/figures.pptx
@@ -13,6 +13,8 @@
     <p:sldId id="261" r:id="rId7"/>
     <p:sldId id="262" r:id="rId8"/>
     <p:sldId id="260" r:id="rId9"/>
+    <p:sldId id="265" r:id="rId10"/>
+    <p:sldId id="266" r:id="rId11"/>
   </p:sldIdLst>
   <p:sldSz cx="6858000" cy="9144000" type="screen4x3"/>
   <p:notesSz cx="6858000" cy="9144000"/>
@@ -250,7 +252,7 @@
           <a:p>
             <a:fld id="{C07B6569-5EFF-41A8-B6CB-39864A9A9501}" type="datetimeFigureOut">
               <a:rPr lang="de-DE" smtClean="0"/>
-              <a:t>22.09.2026</a:t>
+              <a:t>23.09.2026</a:t>
             </a:fld>
             <a:endParaRPr lang="de-DE"/>
           </a:p>
@@ -420,7 +422,7 @@
           <a:p>
             <a:fld id="{C07B6569-5EFF-41A8-B6CB-39864A9A9501}" type="datetimeFigureOut">
               <a:rPr lang="de-DE" smtClean="0"/>
-              <a:t>22.09.2026</a:t>
+              <a:t>23.09.2026</a:t>
             </a:fld>
             <a:endParaRPr lang="de-DE"/>
           </a:p>
@@ -600,7 +602,7 @@
           <a:p>
             <a:fld id="{C07B6569-5EFF-41A8-B6CB-39864A9A9501}" type="datetimeFigureOut">
               <a:rPr lang="de-DE" smtClean="0"/>
-              <a:t>22.09.2026</a:t>
+              <a:t>23.09.2026</a:t>
             </a:fld>
             <a:endParaRPr lang="de-DE"/>
           </a:p>
@@ -847,7 +849,7 @@
           <a:p>
             <a:fld id="{C07B6569-5EFF-41A8-B6CB-39864A9A9501}" type="datetimeFigureOut">
               <a:rPr lang="de-DE" smtClean="0"/>
-              <a:t>22.09.2026</a:t>
+              <a:t>23.09.2026</a:t>
             </a:fld>
             <a:endParaRPr lang="de-DE"/>
           </a:p>
@@ -1091,7 +1093,7 @@
           <a:p>
             <a:fld id="{C07B6569-5EFF-41A8-B6CB-39864A9A9501}" type="datetimeFigureOut">
               <a:rPr lang="de-DE" smtClean="0"/>
-              <a:t>22.09.2026</a:t>
+              <a:t>23.09.2026</a:t>
             </a:fld>
             <a:endParaRPr lang="de-DE"/>
           </a:p>
@@ -1323,7 +1325,7 @@
           <a:p>
             <a:fld id="{C07B6569-5EFF-41A8-B6CB-39864A9A9501}" type="datetimeFigureOut">
               <a:rPr lang="de-DE" smtClean="0"/>
-              <a:t>22.09.2026</a:t>
+              <a:t>23.09.2026</a:t>
             </a:fld>
             <a:endParaRPr lang="de-DE"/>
           </a:p>
@@ -1690,7 +1692,7 @@
           <a:p>
             <a:fld id="{C07B6569-5EFF-41A8-B6CB-39864A9A9501}" type="datetimeFigureOut">
               <a:rPr lang="de-DE" smtClean="0"/>
-              <a:t>22.09.2026</a:t>
+              <a:t>23.09.2026</a:t>
             </a:fld>
             <a:endParaRPr lang="de-DE"/>
           </a:p>
@@ -1808,7 +1810,7 @@
           <a:p>
             <a:fld id="{C07B6569-5EFF-41A8-B6CB-39864A9A9501}" type="datetimeFigureOut">
               <a:rPr lang="de-DE" smtClean="0"/>
-              <a:t>22.09.2026</a:t>
+              <a:t>23.09.2026</a:t>
             </a:fld>
             <a:endParaRPr lang="de-DE"/>
           </a:p>
@@ -1903,7 +1905,7 @@
           <a:p>
             <a:fld id="{C07B6569-5EFF-41A8-B6CB-39864A9A9501}" type="datetimeFigureOut">
               <a:rPr lang="de-DE" smtClean="0"/>
-              <a:t>22.09.2026</a:t>
+              <a:t>23.09.2026</a:t>
             </a:fld>
             <a:endParaRPr lang="de-DE"/>
           </a:p>
@@ -2180,7 +2182,7 @@
           <a:p>
             <a:fld id="{C07B6569-5EFF-41A8-B6CB-39864A9A9501}" type="datetimeFigureOut">
               <a:rPr lang="de-DE" smtClean="0"/>
-              <a:t>22.09.2026</a:t>
+              <a:t>23.09.2026</a:t>
             </a:fld>
             <a:endParaRPr lang="de-DE"/>
           </a:p>
@@ -2437,7 +2439,7 @@
           <a:p>
             <a:fld id="{C07B6569-5EFF-41A8-B6CB-39864A9A9501}" type="datetimeFigureOut">
               <a:rPr lang="de-DE" smtClean="0"/>
-              <a:t>22.09.2026</a:t>
+              <a:t>23.09.2026</a:t>
             </a:fld>
             <a:endParaRPr lang="de-DE"/>
           </a:p>
@@ -2650,7 +2652,7 @@
           <a:p>
             <a:fld id="{C07B6569-5EFF-41A8-B6CB-39864A9A9501}" type="datetimeFigureOut">
               <a:rPr lang="de-DE" smtClean="0"/>
-              <a:t>22.09.2026</a:t>
+              <a:t>23.09.2026</a:t>
             </a:fld>
             <a:endParaRPr lang="de-DE"/>
           </a:p>
@@ -3189,6 +3191,1276 @@
 </p:sld>
 </file>
 
+<file path=ppt/slides/slide10.xml><?xml version="1.0" encoding="utf-8"?>
+<p:sld xmlns:a="http://schemas.openxmlformats.org/drawingml/2006/main" xmlns:r="http://schemas.openxmlformats.org/officeDocument/2006/relationships" xmlns:p="http://schemas.openxmlformats.org/presentationml/2006/main">
+  <p:cSld>
+    <p:spTree>
+      <p:nvGrpSpPr>
+        <p:cNvPr id="1" name=""/>
+        <p:cNvGrpSpPr/>
+        <p:nvPr/>
+      </p:nvGrpSpPr>
+      <p:grpSpPr>
+        <a:xfrm>
+          <a:off x="0" y="0"/>
+          <a:ext cx="0" cy="0"/>
+          <a:chOff x="0" y="0"/>
+          <a:chExt cx="0" cy="0"/>
+        </a:xfrm>
+      </p:grpSpPr>
+      <p:sp>
+        <p:nvSpPr>
+          <p:cNvPr id="2" name="Titel 1">
+            <a:extLst>
+              <a:ext uri="{FF2B5EF4-FFF2-40B4-BE49-F238E27FC236}">
+                <a16:creationId xmlns:a16="http://schemas.microsoft.com/office/drawing/2014/main" id="{69664993-9ED6-4670-922B-6DCFB75DADAE}"/>
+              </a:ext>
+            </a:extLst>
+          </p:cNvPr>
+          <p:cNvSpPr>
+            <a:spLocks noGrp="1"/>
+          </p:cNvSpPr>
+          <p:nvPr>
+            <p:ph type="title"/>
+          </p:nvPr>
+        </p:nvSpPr>
+        <p:spPr/>
+        <p:txBody>
+          <a:bodyPr/>
+          <a:lstStyle/>
+          <a:p>
+            <a:r>
+              <a:rPr lang="de-DE"/>
+              <a:t>content-hub2.png</a:t>
+            </a:r>
+          </a:p>
+        </p:txBody>
+      </p:sp>
+      <p:sp>
+        <p:nvSpPr>
+          <p:cNvPr id="5" name="Rechteck 4">
+            <a:extLst>
+              <a:ext uri="{FF2B5EF4-FFF2-40B4-BE49-F238E27FC236}">
+                <a16:creationId xmlns:a16="http://schemas.microsoft.com/office/drawing/2014/main" id="{8D7D2D8F-2509-056B-8CAC-4F65CD4080E2}"/>
+              </a:ext>
+            </a:extLst>
+          </p:cNvPr>
+          <p:cNvSpPr/>
+          <p:nvPr/>
+        </p:nvSpPr>
+        <p:spPr>
+          <a:xfrm>
+            <a:off x="673103" y="2924124"/>
+            <a:ext cx="4787898" cy="2439086"/>
+          </a:xfrm>
+          <a:prstGeom prst="rect">
+            <a:avLst/>
+          </a:prstGeom>
+          <a:solidFill>
+            <a:srgbClr val="D6DCE5"/>
+          </a:solidFill>
+          <a:ln>
+            <a:noFill/>
+          </a:ln>
+        </p:spPr>
+        <p:style>
+          <a:lnRef idx="2">
+            <a:schemeClr val="accent1">
+              <a:shade val="50000"/>
+            </a:schemeClr>
+          </a:lnRef>
+          <a:fillRef idx="1">
+            <a:schemeClr val="accent1"/>
+          </a:fillRef>
+          <a:effectRef idx="0">
+            <a:schemeClr val="accent1"/>
+          </a:effectRef>
+          <a:fontRef idx="minor">
+            <a:schemeClr val="lt1"/>
+          </a:fontRef>
+        </p:style>
+        <p:txBody>
+          <a:bodyPr rtlCol="0" anchor="ctr"/>
+          <a:lstStyle/>
+          <a:p>
+            <a:endParaRPr lang="de-DE" sz="1600">
+              <a:solidFill>
+                <a:srgbClr val="405786"/>
+              </a:solidFill>
+            </a:endParaRPr>
+          </a:p>
+        </p:txBody>
+      </p:sp>
+      <p:cxnSp>
+        <p:nvCxnSpPr>
+          <p:cNvPr id="33" name="Gerade Verbindung mit Pfeil 32">
+            <a:extLst>
+              <a:ext uri="{FF2B5EF4-FFF2-40B4-BE49-F238E27FC236}">
+                <a16:creationId xmlns:a16="http://schemas.microsoft.com/office/drawing/2014/main" id="{0F9CB50D-6CAB-7433-6392-E47CC14FC637}"/>
+              </a:ext>
+            </a:extLst>
+          </p:cNvPr>
+          <p:cNvCxnSpPr>
+            <a:cxnSpLocks/>
+            <a:stCxn id="27" idx="0"/>
+            <a:endCxn id="37" idx="2"/>
+          </p:cNvCxnSpPr>
+          <p:nvPr/>
+        </p:nvCxnSpPr>
+        <p:spPr>
+          <a:xfrm flipH="1" flipV="1">
+            <a:off x="3807603" y="2819540"/>
+            <a:ext cx="1" cy="770227"/>
+          </a:xfrm>
+          <a:prstGeom prst="straightConnector1">
+            <a:avLst/>
+          </a:prstGeom>
+          <a:ln w="22225">
+            <a:solidFill>
+              <a:srgbClr val="405786"/>
+            </a:solidFill>
+            <a:headEnd type="arrow"/>
+            <a:tailEnd type="none"/>
+          </a:ln>
+        </p:spPr>
+        <p:style>
+          <a:lnRef idx="1">
+            <a:schemeClr val="accent1"/>
+          </a:lnRef>
+          <a:fillRef idx="0">
+            <a:schemeClr val="accent1"/>
+          </a:fillRef>
+          <a:effectRef idx="0">
+            <a:schemeClr val="accent1"/>
+          </a:effectRef>
+          <a:fontRef idx="minor">
+            <a:schemeClr val="tx1"/>
+          </a:fontRef>
+        </p:style>
+      </p:cxnSp>
+      <p:sp>
+        <p:nvSpPr>
+          <p:cNvPr id="37" name="Rechteck 36">
+            <a:extLst>
+              <a:ext uri="{FF2B5EF4-FFF2-40B4-BE49-F238E27FC236}">
+                <a16:creationId xmlns:a16="http://schemas.microsoft.com/office/drawing/2014/main" id="{6971455E-0E59-66A9-13C7-6EC0E700DC37}"/>
+              </a:ext>
+            </a:extLst>
+          </p:cNvPr>
+          <p:cNvSpPr/>
+          <p:nvPr/>
+        </p:nvSpPr>
+        <p:spPr>
+          <a:xfrm>
+            <a:off x="3374531" y="2525788"/>
+            <a:ext cx="866143" cy="293752"/>
+          </a:xfrm>
+          <a:prstGeom prst="rect">
+            <a:avLst/>
+          </a:prstGeom>
+          <a:noFill/>
+          <a:ln>
+            <a:noFill/>
+          </a:ln>
+        </p:spPr>
+        <p:style>
+          <a:lnRef idx="2">
+            <a:schemeClr val="accent1">
+              <a:shade val="50000"/>
+            </a:schemeClr>
+          </a:lnRef>
+          <a:fillRef idx="1">
+            <a:schemeClr val="accent1"/>
+          </a:fillRef>
+          <a:effectRef idx="0">
+            <a:schemeClr val="accent1"/>
+          </a:effectRef>
+          <a:fontRef idx="minor">
+            <a:schemeClr val="lt1"/>
+          </a:fontRef>
+        </p:style>
+        <p:txBody>
+          <a:bodyPr rtlCol="0" anchor="t"/>
+          <a:lstStyle/>
+          <a:p>
+            <a:pPr algn="ctr"/>
+            <a:r>
+              <a:rPr lang="de-DE" sz="1200">
+                <a:solidFill>
+                  <a:srgbClr val="405786"/>
+                </a:solidFill>
+              </a:rPr>
+              <a:t>eatTBA</a:t>
+            </a:r>
+            <a:endParaRPr lang="de-DE" sz="1400">
+              <a:solidFill>
+                <a:srgbClr val="405786"/>
+              </a:solidFill>
+            </a:endParaRPr>
+          </a:p>
+        </p:txBody>
+      </p:sp>
+      <p:cxnSp>
+        <p:nvCxnSpPr>
+          <p:cNvPr id="38" name="Gerade Verbindung mit Pfeil 37">
+            <a:extLst>
+              <a:ext uri="{FF2B5EF4-FFF2-40B4-BE49-F238E27FC236}">
+                <a16:creationId xmlns:a16="http://schemas.microsoft.com/office/drawing/2014/main" id="{1A197376-C3FE-BB86-D344-E3BF91183682}"/>
+              </a:ext>
+            </a:extLst>
+          </p:cNvPr>
+          <p:cNvCxnSpPr>
+            <a:cxnSpLocks/>
+            <a:stCxn id="44" idx="0"/>
+            <a:endCxn id="28" idx="3"/>
+          </p:cNvCxnSpPr>
+          <p:nvPr/>
+        </p:nvCxnSpPr>
+        <p:spPr>
+          <a:xfrm flipV="1">
+            <a:off x="4771593" y="4352771"/>
+            <a:ext cx="0" cy="1261899"/>
+          </a:xfrm>
+          <a:prstGeom prst="straightConnector1">
+            <a:avLst/>
+          </a:prstGeom>
+          <a:ln w="22225">
+            <a:solidFill>
+              <a:srgbClr val="405786"/>
+            </a:solidFill>
+            <a:headEnd type="arrow"/>
+            <a:tailEnd type="none"/>
+          </a:ln>
+        </p:spPr>
+        <p:style>
+          <a:lnRef idx="1">
+            <a:schemeClr val="accent1"/>
+          </a:lnRef>
+          <a:fillRef idx="0">
+            <a:schemeClr val="accent1"/>
+          </a:fillRef>
+          <a:effectRef idx="0">
+            <a:schemeClr val="accent1"/>
+          </a:effectRef>
+          <a:fontRef idx="minor">
+            <a:schemeClr val="tx1"/>
+          </a:fontRef>
+        </p:style>
+      </p:cxnSp>
+      <p:sp>
+        <p:nvSpPr>
+          <p:cNvPr id="44" name="Rechteck 43">
+            <a:extLst>
+              <a:ext uri="{FF2B5EF4-FFF2-40B4-BE49-F238E27FC236}">
+                <a16:creationId xmlns:a16="http://schemas.microsoft.com/office/drawing/2014/main" id="{E637A302-96ED-7826-494D-88887BBDE1C5}"/>
+              </a:ext>
+            </a:extLst>
+          </p:cNvPr>
+          <p:cNvSpPr/>
+          <p:nvPr/>
+        </p:nvSpPr>
+        <p:spPr>
+          <a:xfrm>
+            <a:off x="4338521" y="5614670"/>
+            <a:ext cx="866143" cy="690934"/>
+          </a:xfrm>
+          <a:prstGeom prst="rect">
+            <a:avLst/>
+          </a:prstGeom>
+          <a:noFill/>
+          <a:ln>
+            <a:noFill/>
+          </a:ln>
+        </p:spPr>
+        <p:style>
+          <a:lnRef idx="2">
+            <a:schemeClr val="accent1">
+              <a:shade val="50000"/>
+            </a:schemeClr>
+          </a:lnRef>
+          <a:fillRef idx="1">
+            <a:schemeClr val="accent1"/>
+          </a:fillRef>
+          <a:effectRef idx="0">
+            <a:schemeClr val="accent1"/>
+          </a:effectRef>
+          <a:fontRef idx="minor">
+            <a:schemeClr val="lt1"/>
+          </a:fontRef>
+        </p:style>
+        <p:txBody>
+          <a:bodyPr rtlCol="0" anchor="t"/>
+          <a:lstStyle/>
+          <a:p>
+            <a:pPr algn="ctr"/>
+            <a:r>
+              <a:rPr lang="de-DE" sz="1200">
+                <a:solidFill>
+                  <a:srgbClr val="405786"/>
+                </a:solidFill>
+              </a:rPr>
+              <a:t>Kodierbox, Testcenter, Studio</a:t>
+            </a:r>
+            <a:endParaRPr lang="de-DE" sz="1400">
+              <a:solidFill>
+                <a:srgbClr val="405786"/>
+              </a:solidFill>
+            </a:endParaRPr>
+          </a:p>
+        </p:txBody>
+      </p:sp>
+      <p:sp>
+        <p:nvSpPr>
+          <p:cNvPr id="45" name="Rechteck: abgerundete Ecken 44">
+            <a:extLst>
+              <a:ext uri="{FF2B5EF4-FFF2-40B4-BE49-F238E27FC236}">
+                <a16:creationId xmlns:a16="http://schemas.microsoft.com/office/drawing/2014/main" id="{21A32612-B86D-A65A-66E1-1FBC8117FB53}"/>
+              </a:ext>
+            </a:extLst>
+          </p:cNvPr>
+          <p:cNvSpPr/>
+          <p:nvPr/>
+        </p:nvSpPr>
+        <p:spPr>
+          <a:xfrm>
+            <a:off x="1563963" y="4754236"/>
+            <a:ext cx="1193748" cy="302977"/>
+          </a:xfrm>
+          <a:prstGeom prst="roundRect">
+            <a:avLst/>
+          </a:prstGeom>
+          <a:solidFill>
+            <a:srgbClr val="008CBA"/>
+          </a:solidFill>
+          <a:ln>
+            <a:noFill/>
+          </a:ln>
+        </p:spPr>
+        <p:style>
+          <a:lnRef idx="2">
+            <a:schemeClr val="accent1">
+              <a:shade val="50000"/>
+            </a:schemeClr>
+          </a:lnRef>
+          <a:fillRef idx="1">
+            <a:schemeClr val="accent1"/>
+          </a:fillRef>
+          <a:effectRef idx="0">
+            <a:schemeClr val="accent1"/>
+          </a:effectRef>
+          <a:fontRef idx="minor">
+            <a:schemeClr val="lt1"/>
+          </a:fontRef>
+        </p:style>
+        <p:txBody>
+          <a:bodyPr rtlCol="0" anchor="ctr"/>
+          <a:lstStyle/>
+          <a:p>
+            <a:pPr algn="ctr"/>
+            <a:r>
+              <a:rPr lang="de-DE" sz="1100"/>
+              <a:t>Booklet-Editor</a:t>
+            </a:r>
+            <a:endParaRPr lang="de-DE" sz="1400"/>
+          </a:p>
+        </p:txBody>
+      </p:sp>
+      <p:sp>
+        <p:nvSpPr>
+          <p:cNvPr id="46" name="Rechteck: abgerundete Ecken 45">
+            <a:extLst>
+              <a:ext uri="{FF2B5EF4-FFF2-40B4-BE49-F238E27FC236}">
+                <a16:creationId xmlns:a16="http://schemas.microsoft.com/office/drawing/2014/main" id="{7DC1F910-59AE-AD5E-9791-7FFB80DBF532}"/>
+              </a:ext>
+            </a:extLst>
+          </p:cNvPr>
+          <p:cNvSpPr/>
+          <p:nvPr/>
+        </p:nvSpPr>
+        <p:spPr>
+          <a:xfrm>
+            <a:off x="1563963" y="4403525"/>
+            <a:ext cx="1176563" cy="302977"/>
+          </a:xfrm>
+          <a:prstGeom prst="roundRect">
+            <a:avLst/>
+          </a:prstGeom>
+          <a:solidFill>
+            <a:srgbClr val="008CBA"/>
+          </a:solidFill>
+          <a:ln>
+            <a:noFill/>
+          </a:ln>
+        </p:spPr>
+        <p:style>
+          <a:lnRef idx="2">
+            <a:schemeClr val="accent1">
+              <a:shade val="50000"/>
+            </a:schemeClr>
+          </a:lnRef>
+          <a:fillRef idx="1">
+            <a:schemeClr val="accent1"/>
+          </a:fillRef>
+          <a:effectRef idx="0">
+            <a:schemeClr val="accent1"/>
+          </a:effectRef>
+          <a:fontRef idx="minor">
+            <a:schemeClr val="lt1"/>
+          </a:fontRef>
+        </p:style>
+        <p:txBody>
+          <a:bodyPr rtlCol="0" anchor="ctr"/>
+          <a:lstStyle/>
+          <a:p>
+            <a:pPr algn="ctr"/>
+            <a:r>
+              <a:rPr lang="de-DE" sz="1100"/>
+              <a:t>AP-Editor</a:t>
+            </a:r>
+            <a:endParaRPr lang="de-DE" sz="1400"/>
+          </a:p>
+        </p:txBody>
+      </p:sp>
+      <p:sp>
+        <p:nvSpPr>
+          <p:cNvPr id="47" name="Rechteck: abgerundete Ecken 46">
+            <a:extLst>
+              <a:ext uri="{FF2B5EF4-FFF2-40B4-BE49-F238E27FC236}">
+                <a16:creationId xmlns:a16="http://schemas.microsoft.com/office/drawing/2014/main" id="{596664A5-4892-9289-BFBE-354B0B2F0BC0}"/>
+              </a:ext>
+            </a:extLst>
+          </p:cNvPr>
+          <p:cNvSpPr/>
+          <p:nvPr/>
+        </p:nvSpPr>
+        <p:spPr>
+          <a:xfrm>
+            <a:off x="3515215" y="4403525"/>
+            <a:ext cx="1167661" cy="302977"/>
+          </a:xfrm>
+          <a:prstGeom prst="roundRect">
+            <a:avLst/>
+          </a:prstGeom>
+          <a:solidFill>
+            <a:srgbClr val="008CBA"/>
+          </a:solidFill>
+          <a:ln>
+            <a:noFill/>
+          </a:ln>
+        </p:spPr>
+        <p:style>
+          <a:lnRef idx="2">
+            <a:schemeClr val="accent1">
+              <a:shade val="50000"/>
+            </a:schemeClr>
+          </a:lnRef>
+          <a:fillRef idx="1">
+            <a:schemeClr val="accent1"/>
+          </a:fillRef>
+          <a:effectRef idx="0">
+            <a:schemeClr val="accent1"/>
+          </a:effectRef>
+          <a:fontRef idx="minor">
+            <a:schemeClr val="lt1"/>
+          </a:fontRef>
+        </p:style>
+        <p:txBody>
+          <a:bodyPr rtlCol="0" anchor="ctr"/>
+          <a:lstStyle/>
+          <a:p>
+            <a:pPr algn="ctr"/>
+            <a:r>
+              <a:rPr lang="de-DE" sz="1100"/>
+              <a:t>Item-Explorer</a:t>
+            </a:r>
+            <a:endParaRPr lang="de-DE" sz="1400"/>
+          </a:p>
+        </p:txBody>
+      </p:sp>
+      <p:cxnSp>
+        <p:nvCxnSpPr>
+          <p:cNvPr id="48" name="Gerade Verbindung mit Pfeil 47">
+            <a:extLst>
+              <a:ext uri="{FF2B5EF4-FFF2-40B4-BE49-F238E27FC236}">
+                <a16:creationId xmlns:a16="http://schemas.microsoft.com/office/drawing/2014/main" id="{8A6A495B-7CCF-28C4-22BE-4C6E2AF1E8DB}"/>
+              </a:ext>
+            </a:extLst>
+          </p:cNvPr>
+          <p:cNvCxnSpPr>
+            <a:cxnSpLocks/>
+            <a:stCxn id="28" idx="1"/>
+            <a:endCxn id="51" idx="2"/>
+          </p:cNvCxnSpPr>
+          <p:nvPr/>
+        </p:nvCxnSpPr>
+        <p:spPr>
+          <a:xfrm flipV="1">
+            <a:off x="4771593" y="2819540"/>
+            <a:ext cx="0" cy="590837"/>
+          </a:xfrm>
+          <a:prstGeom prst="straightConnector1">
+            <a:avLst/>
+          </a:prstGeom>
+          <a:ln w="22225">
+            <a:solidFill>
+              <a:srgbClr val="405786"/>
+            </a:solidFill>
+            <a:headEnd type="arrow"/>
+            <a:tailEnd type="none"/>
+          </a:ln>
+        </p:spPr>
+        <p:style>
+          <a:lnRef idx="1">
+            <a:schemeClr val="accent1"/>
+          </a:lnRef>
+          <a:fillRef idx="0">
+            <a:schemeClr val="accent1"/>
+          </a:fillRef>
+          <a:effectRef idx="0">
+            <a:schemeClr val="accent1"/>
+          </a:effectRef>
+          <a:fontRef idx="minor">
+            <a:schemeClr val="tx1"/>
+          </a:fontRef>
+        </p:style>
+      </p:cxnSp>
+      <p:sp>
+        <p:nvSpPr>
+          <p:cNvPr id="51" name="Rechteck 50">
+            <a:extLst>
+              <a:ext uri="{FF2B5EF4-FFF2-40B4-BE49-F238E27FC236}">
+                <a16:creationId xmlns:a16="http://schemas.microsoft.com/office/drawing/2014/main" id="{9294A9CF-27F9-37F4-0FF8-3C04FAA5328B}"/>
+              </a:ext>
+            </a:extLst>
+          </p:cNvPr>
+          <p:cNvSpPr/>
+          <p:nvPr/>
+        </p:nvSpPr>
+        <p:spPr>
+          <a:xfrm>
+            <a:off x="4338521" y="2525788"/>
+            <a:ext cx="866143" cy="293752"/>
+          </a:xfrm>
+          <a:prstGeom prst="rect">
+            <a:avLst/>
+          </a:prstGeom>
+          <a:noFill/>
+          <a:ln>
+            <a:noFill/>
+          </a:ln>
+        </p:spPr>
+        <p:style>
+          <a:lnRef idx="2">
+            <a:schemeClr val="accent1">
+              <a:shade val="50000"/>
+            </a:schemeClr>
+          </a:lnRef>
+          <a:fillRef idx="1">
+            <a:schemeClr val="accent1"/>
+          </a:fillRef>
+          <a:effectRef idx="0">
+            <a:schemeClr val="accent1"/>
+          </a:effectRef>
+          <a:fontRef idx="minor">
+            <a:schemeClr val="lt1"/>
+          </a:fontRef>
+        </p:style>
+        <p:txBody>
+          <a:bodyPr rtlCol="0" anchor="t"/>
+          <a:lstStyle/>
+          <a:p>
+            <a:pPr algn="ctr"/>
+            <a:r>
+              <a:rPr lang="de-DE" sz="1200">
+                <a:solidFill>
+                  <a:srgbClr val="405786"/>
+                </a:solidFill>
+              </a:rPr>
+              <a:t>Studio</a:t>
+            </a:r>
+            <a:endParaRPr lang="de-DE" sz="1400">
+              <a:solidFill>
+                <a:srgbClr val="405786"/>
+              </a:solidFill>
+            </a:endParaRPr>
+          </a:p>
+        </p:txBody>
+      </p:sp>
+      <p:sp>
+        <p:nvSpPr>
+          <p:cNvPr id="54" name="Rechteck: abgerundete Ecken 53">
+            <a:extLst>
+              <a:ext uri="{FF2B5EF4-FFF2-40B4-BE49-F238E27FC236}">
+                <a16:creationId xmlns:a16="http://schemas.microsoft.com/office/drawing/2014/main" id="{24E4B898-4F8E-7264-6EA6-7F4E96815992}"/>
+              </a:ext>
+            </a:extLst>
+          </p:cNvPr>
+          <p:cNvSpPr/>
+          <p:nvPr/>
+        </p:nvSpPr>
+        <p:spPr>
+          <a:xfrm>
+            <a:off x="3517692" y="4754236"/>
+            <a:ext cx="1167661" cy="302977"/>
+          </a:xfrm>
+          <a:prstGeom prst="roundRect">
+            <a:avLst/>
+          </a:prstGeom>
+          <a:solidFill>
+            <a:srgbClr val="008CBA"/>
+          </a:solidFill>
+          <a:ln>
+            <a:noFill/>
+          </a:ln>
+        </p:spPr>
+        <p:style>
+          <a:lnRef idx="2">
+            <a:schemeClr val="accent1">
+              <a:shade val="50000"/>
+            </a:schemeClr>
+          </a:lnRef>
+          <a:fillRef idx="1">
+            <a:schemeClr val="accent1"/>
+          </a:fillRef>
+          <a:effectRef idx="0">
+            <a:schemeClr val="accent1"/>
+          </a:effectRef>
+          <a:fontRef idx="minor">
+            <a:schemeClr val="lt1"/>
+          </a:fontRef>
+        </p:style>
+        <p:txBody>
+          <a:bodyPr rtlCol="0" anchor="ctr"/>
+          <a:lstStyle/>
+          <a:p>
+            <a:pPr algn="ctr"/>
+            <a:r>
+              <a:rPr lang="de-DE" sz="1100"/>
+              <a:t>Unit-Review</a:t>
+            </a:r>
+            <a:endParaRPr lang="de-DE" sz="1400"/>
+          </a:p>
+        </p:txBody>
+      </p:sp>
+      <p:cxnSp>
+        <p:nvCxnSpPr>
+          <p:cNvPr id="61" name="Gerade Verbindung mit Pfeil 60">
+            <a:extLst>
+              <a:ext uri="{FF2B5EF4-FFF2-40B4-BE49-F238E27FC236}">
+                <a16:creationId xmlns:a16="http://schemas.microsoft.com/office/drawing/2014/main" id="{EB18D02B-1379-4F64-B5ED-0A2795EF24CE}"/>
+              </a:ext>
+            </a:extLst>
+          </p:cNvPr>
+          <p:cNvCxnSpPr>
+            <a:cxnSpLocks/>
+            <a:stCxn id="62" idx="0"/>
+            <a:endCxn id="21" idx="3"/>
+          </p:cNvCxnSpPr>
+          <p:nvPr/>
+        </p:nvCxnSpPr>
+        <p:spPr>
+          <a:xfrm flipV="1">
+            <a:off x="2843613" y="4352771"/>
+            <a:ext cx="1" cy="1261899"/>
+          </a:xfrm>
+          <a:prstGeom prst="straightConnector1">
+            <a:avLst/>
+          </a:prstGeom>
+          <a:ln w="22225">
+            <a:solidFill>
+              <a:srgbClr val="405786"/>
+            </a:solidFill>
+            <a:headEnd type="arrow"/>
+            <a:tailEnd type="none"/>
+          </a:ln>
+        </p:spPr>
+        <p:style>
+          <a:lnRef idx="1">
+            <a:schemeClr val="accent1"/>
+          </a:lnRef>
+          <a:fillRef idx="0">
+            <a:schemeClr val="accent1"/>
+          </a:fillRef>
+          <a:effectRef idx="0">
+            <a:schemeClr val="accent1"/>
+          </a:effectRef>
+          <a:fontRef idx="minor">
+            <a:schemeClr val="tx1"/>
+          </a:fontRef>
+        </p:style>
+      </p:cxnSp>
+      <p:sp>
+        <p:nvSpPr>
+          <p:cNvPr id="62" name="Rechteck 61">
+            <a:extLst>
+              <a:ext uri="{FF2B5EF4-FFF2-40B4-BE49-F238E27FC236}">
+                <a16:creationId xmlns:a16="http://schemas.microsoft.com/office/drawing/2014/main" id="{CC41AD77-5AAA-106A-867F-605A09271D45}"/>
+              </a:ext>
+            </a:extLst>
+          </p:cNvPr>
+          <p:cNvSpPr/>
+          <p:nvPr/>
+        </p:nvSpPr>
+        <p:spPr>
+          <a:xfrm>
+            <a:off x="2410541" y="5614670"/>
+            <a:ext cx="866143" cy="373380"/>
+          </a:xfrm>
+          <a:prstGeom prst="rect">
+            <a:avLst/>
+          </a:prstGeom>
+          <a:noFill/>
+          <a:ln>
+            <a:noFill/>
+          </a:ln>
+        </p:spPr>
+        <p:style>
+          <a:lnRef idx="2">
+            <a:schemeClr val="accent1">
+              <a:shade val="50000"/>
+            </a:schemeClr>
+          </a:lnRef>
+          <a:fillRef idx="1">
+            <a:schemeClr val="accent1"/>
+          </a:fillRef>
+          <a:effectRef idx="0">
+            <a:schemeClr val="accent1"/>
+          </a:effectRef>
+          <a:fontRef idx="minor">
+            <a:schemeClr val="lt1"/>
+          </a:fontRef>
+        </p:style>
+        <p:txBody>
+          <a:bodyPr rtlCol="0" anchor="t"/>
+          <a:lstStyle/>
+          <a:p>
+            <a:pPr algn="ctr"/>
+            <a:r>
+              <a:rPr lang="de-DE" sz="1200">
+                <a:solidFill>
+                  <a:srgbClr val="405786"/>
+                </a:solidFill>
+              </a:rPr>
+              <a:t>Testcenter</a:t>
+            </a:r>
+            <a:endParaRPr lang="de-DE" sz="1400">
+              <a:solidFill>
+                <a:srgbClr val="405786"/>
+              </a:solidFill>
+            </a:endParaRPr>
+          </a:p>
+        </p:txBody>
+      </p:sp>
+      <p:sp>
+        <p:nvSpPr>
+          <p:cNvPr id="70" name="Pfeil: nach links 69">
+            <a:extLst>
+              <a:ext uri="{FF2B5EF4-FFF2-40B4-BE49-F238E27FC236}">
+                <a16:creationId xmlns:a16="http://schemas.microsoft.com/office/drawing/2014/main" id="{8B484C5C-6D69-9DC8-4FBC-0515C7CB2177}"/>
+              </a:ext>
+            </a:extLst>
+          </p:cNvPr>
+          <p:cNvSpPr/>
+          <p:nvPr/>
+        </p:nvSpPr>
+        <p:spPr>
+          <a:xfrm>
+            <a:off x="1926195" y="3730100"/>
+            <a:ext cx="2512455" cy="317898"/>
+          </a:xfrm>
+          <a:prstGeom prst="leftArrow">
+            <a:avLst/>
+          </a:prstGeom>
+          <a:solidFill>
+            <a:srgbClr val="405786"/>
+          </a:solidFill>
+          <a:ln>
+            <a:noFill/>
+          </a:ln>
+        </p:spPr>
+        <p:style>
+          <a:lnRef idx="2">
+            <a:schemeClr val="accent1">
+              <a:shade val="50000"/>
+            </a:schemeClr>
+          </a:lnRef>
+          <a:fillRef idx="1">
+            <a:schemeClr val="accent1"/>
+          </a:fillRef>
+          <a:effectRef idx="0">
+            <a:schemeClr val="accent1"/>
+          </a:effectRef>
+          <a:fontRef idx="minor">
+            <a:schemeClr val="lt1"/>
+          </a:fontRef>
+        </p:style>
+        <p:txBody>
+          <a:bodyPr rtlCol="0" anchor="ctr"/>
+          <a:lstStyle/>
+          <a:p>
+            <a:pPr algn="ctr"/>
+            <a:endParaRPr lang="de-DE"/>
+          </a:p>
+        </p:txBody>
+      </p:sp>
+      <p:sp>
+        <p:nvSpPr>
+          <p:cNvPr id="27" name="Rechteck: abgerundete Ecken 26">
+            <a:extLst>
+              <a:ext uri="{FF2B5EF4-FFF2-40B4-BE49-F238E27FC236}">
+                <a16:creationId xmlns:a16="http://schemas.microsoft.com/office/drawing/2014/main" id="{07071733-ACEA-D25D-4C7B-CD1FB7B4B6F5}"/>
+              </a:ext>
+            </a:extLst>
+          </p:cNvPr>
+          <p:cNvSpPr/>
+          <p:nvPr/>
+        </p:nvSpPr>
+        <p:spPr>
+          <a:xfrm>
+            <a:off x="3516161" y="3589767"/>
+            <a:ext cx="582885" cy="583615"/>
+          </a:xfrm>
+          <a:prstGeom prst="roundRect">
+            <a:avLst/>
+          </a:prstGeom>
+          <a:solidFill>
+            <a:srgbClr val="405786"/>
+          </a:solidFill>
+          <a:ln>
+            <a:solidFill>
+              <a:schemeClr val="bg1"/>
+            </a:solidFill>
+          </a:ln>
+        </p:spPr>
+        <p:style>
+          <a:lnRef idx="2">
+            <a:schemeClr val="accent1">
+              <a:shade val="50000"/>
+            </a:schemeClr>
+          </a:lnRef>
+          <a:fillRef idx="1">
+            <a:schemeClr val="accent1"/>
+          </a:fillRef>
+          <a:effectRef idx="0">
+            <a:schemeClr val="accent1"/>
+          </a:effectRef>
+          <a:fontRef idx="minor">
+            <a:schemeClr val="lt1"/>
+          </a:fontRef>
+        </p:style>
+        <p:txBody>
+          <a:bodyPr rtlCol="0" anchor="ctr"/>
+          <a:lstStyle/>
+          <a:p>
+            <a:pPr algn="ctr"/>
+            <a:r>
+              <a:rPr lang="de-DE" sz="1100"/>
+              <a:t>Item-kenn-werte</a:t>
+            </a:r>
+          </a:p>
+        </p:txBody>
+      </p:sp>
+      <p:sp>
+        <p:nvSpPr>
+          <p:cNvPr id="28" name="Flussdiagramm: Magnetplattenspeicher 27">
+            <a:extLst>
+              <a:ext uri="{FF2B5EF4-FFF2-40B4-BE49-F238E27FC236}">
+                <a16:creationId xmlns:a16="http://schemas.microsoft.com/office/drawing/2014/main" id="{4B77E6B9-BC69-0818-2754-F74A06B8E155}"/>
+              </a:ext>
+            </a:extLst>
+          </p:cNvPr>
+          <p:cNvSpPr/>
+          <p:nvPr/>
+        </p:nvSpPr>
+        <p:spPr>
+          <a:xfrm>
+            <a:off x="4266312" y="3410377"/>
+            <a:ext cx="1010561" cy="942394"/>
+          </a:xfrm>
+          <a:prstGeom prst="flowChartMagneticDisk">
+            <a:avLst/>
+          </a:prstGeom>
+          <a:solidFill>
+            <a:srgbClr val="405786"/>
+          </a:solidFill>
+          <a:ln>
+            <a:solidFill>
+              <a:schemeClr val="bg1"/>
+            </a:solidFill>
+          </a:ln>
+        </p:spPr>
+        <p:style>
+          <a:lnRef idx="2">
+            <a:schemeClr val="accent1">
+              <a:shade val="50000"/>
+            </a:schemeClr>
+          </a:lnRef>
+          <a:fillRef idx="1">
+            <a:schemeClr val="accent1"/>
+          </a:fillRef>
+          <a:effectRef idx="0">
+            <a:schemeClr val="accent1"/>
+          </a:effectRef>
+          <a:fontRef idx="minor">
+            <a:schemeClr val="lt1"/>
+          </a:fontRef>
+        </p:style>
+        <p:txBody>
+          <a:bodyPr rtlCol="0" anchor="ctr"/>
+          <a:lstStyle/>
+          <a:p>
+            <a:pPr algn="ctr"/>
+            <a:r>
+              <a:rPr lang="de-DE" sz="1400"/>
+              <a:t>Units</a:t>
+            </a:r>
+          </a:p>
+        </p:txBody>
+      </p:sp>
+      <p:sp>
+        <p:nvSpPr>
+          <p:cNvPr id="21" name="Flussdiagramm: Magnetplattenspeicher 20">
+            <a:extLst>
+              <a:ext uri="{FF2B5EF4-FFF2-40B4-BE49-F238E27FC236}">
+                <a16:creationId xmlns:a16="http://schemas.microsoft.com/office/drawing/2014/main" id="{C32C1D49-7C7A-B993-42CA-0EED9CF1F2A4}"/>
+              </a:ext>
+            </a:extLst>
+          </p:cNvPr>
+          <p:cNvSpPr/>
+          <p:nvPr/>
+        </p:nvSpPr>
+        <p:spPr>
+          <a:xfrm>
+            <a:off x="2338333" y="3410377"/>
+            <a:ext cx="1010561" cy="942394"/>
+          </a:xfrm>
+          <a:prstGeom prst="flowChartMagneticDisk">
+            <a:avLst/>
+          </a:prstGeom>
+          <a:solidFill>
+            <a:srgbClr val="405786"/>
+          </a:solidFill>
+          <a:ln>
+            <a:solidFill>
+              <a:schemeClr val="bg1"/>
+            </a:solidFill>
+          </a:ln>
+        </p:spPr>
+        <p:style>
+          <a:lnRef idx="2">
+            <a:schemeClr val="accent1">
+              <a:shade val="50000"/>
+            </a:schemeClr>
+          </a:lnRef>
+          <a:fillRef idx="1">
+            <a:schemeClr val="accent1"/>
+          </a:fillRef>
+          <a:effectRef idx="0">
+            <a:schemeClr val="accent1"/>
+          </a:effectRef>
+          <a:fontRef idx="minor">
+            <a:schemeClr val="lt1"/>
+          </a:fontRef>
+        </p:style>
+        <p:txBody>
+          <a:bodyPr rtlCol="0" anchor="ctr"/>
+          <a:lstStyle/>
+          <a:p>
+            <a:pPr algn="ctr"/>
+            <a:r>
+              <a:rPr lang="de-DE" sz="1400"/>
+              <a:t>Studien</a:t>
+            </a:r>
+          </a:p>
+        </p:txBody>
+      </p:sp>
+      <p:sp>
+        <p:nvSpPr>
+          <p:cNvPr id="69" name="Flussdiagramm: Magnetplattenspeicher 68">
+            <a:extLst>
+              <a:ext uri="{FF2B5EF4-FFF2-40B4-BE49-F238E27FC236}">
+                <a16:creationId xmlns:a16="http://schemas.microsoft.com/office/drawing/2014/main" id="{DDE9446D-D51E-2904-B43D-185315EA8514}"/>
+              </a:ext>
+            </a:extLst>
+          </p:cNvPr>
+          <p:cNvSpPr/>
+          <p:nvPr/>
+        </p:nvSpPr>
+        <p:spPr>
+          <a:xfrm>
+            <a:off x="915634" y="3408839"/>
+            <a:ext cx="1010561" cy="942394"/>
+          </a:xfrm>
+          <a:prstGeom prst="flowChartMagneticDisk">
+            <a:avLst/>
+          </a:prstGeom>
+          <a:solidFill>
+            <a:srgbClr val="405786"/>
+          </a:solidFill>
+          <a:ln>
+            <a:solidFill>
+              <a:schemeClr val="bg1"/>
+            </a:solidFill>
+          </a:ln>
+        </p:spPr>
+        <p:style>
+          <a:lnRef idx="2">
+            <a:schemeClr val="accent1">
+              <a:shade val="50000"/>
+            </a:schemeClr>
+          </a:lnRef>
+          <a:fillRef idx="1">
+            <a:schemeClr val="accent1"/>
+          </a:fillRef>
+          <a:effectRef idx="0">
+            <a:schemeClr val="accent1"/>
+          </a:effectRef>
+          <a:fontRef idx="minor">
+            <a:schemeClr val="lt1"/>
+          </a:fontRef>
+        </p:style>
+        <p:txBody>
+          <a:bodyPr rtlCol="0" anchor="ctr"/>
+          <a:lstStyle/>
+          <a:p>
+            <a:pPr algn="ctr"/>
+            <a:r>
+              <a:rPr lang="de-DE" sz="1200"/>
+              <a:t>Assessment Packages</a:t>
+            </a:r>
+          </a:p>
+        </p:txBody>
+      </p:sp>
+      <p:cxnSp>
+        <p:nvCxnSpPr>
+          <p:cNvPr id="71" name="Gerade Verbindung mit Pfeil 70">
+            <a:extLst>
+              <a:ext uri="{FF2B5EF4-FFF2-40B4-BE49-F238E27FC236}">
+                <a16:creationId xmlns:a16="http://schemas.microsoft.com/office/drawing/2014/main" id="{B0D7C2BE-8198-3335-8B85-FC4C9BA222D0}"/>
+              </a:ext>
+            </a:extLst>
+          </p:cNvPr>
+          <p:cNvCxnSpPr>
+            <a:cxnSpLocks/>
+            <a:endCxn id="69" idx="3"/>
+          </p:cNvCxnSpPr>
+          <p:nvPr/>
+        </p:nvCxnSpPr>
+        <p:spPr>
+          <a:xfrm flipV="1">
+            <a:off x="1420913" y="4351233"/>
+            <a:ext cx="2" cy="1267247"/>
+          </a:xfrm>
+          <a:prstGeom prst="straightConnector1">
+            <a:avLst/>
+          </a:prstGeom>
+          <a:ln w="22225">
+            <a:solidFill>
+              <a:srgbClr val="405786"/>
+            </a:solidFill>
+            <a:headEnd type="arrow"/>
+            <a:tailEnd type="none"/>
+          </a:ln>
+        </p:spPr>
+        <p:style>
+          <a:lnRef idx="1">
+            <a:schemeClr val="accent1"/>
+          </a:lnRef>
+          <a:fillRef idx="0">
+            <a:schemeClr val="accent1"/>
+          </a:fillRef>
+          <a:effectRef idx="0">
+            <a:schemeClr val="accent1"/>
+          </a:effectRef>
+          <a:fontRef idx="minor">
+            <a:schemeClr val="tx1"/>
+          </a:fontRef>
+        </p:style>
+      </p:cxnSp>
+      <p:sp>
+        <p:nvSpPr>
+          <p:cNvPr id="73" name="Rechteck 72">
+            <a:extLst>
+              <a:ext uri="{FF2B5EF4-FFF2-40B4-BE49-F238E27FC236}">
+                <a16:creationId xmlns:a16="http://schemas.microsoft.com/office/drawing/2014/main" id="{CD3FFE20-A974-9AD0-A923-EF18E789FC30}"/>
+              </a:ext>
+            </a:extLst>
+          </p:cNvPr>
+          <p:cNvSpPr/>
+          <p:nvPr/>
+        </p:nvSpPr>
+        <p:spPr>
+          <a:xfrm>
+            <a:off x="987841" y="5614670"/>
+            <a:ext cx="866143" cy="373380"/>
+          </a:xfrm>
+          <a:prstGeom prst="rect">
+            <a:avLst/>
+          </a:prstGeom>
+          <a:noFill/>
+          <a:ln>
+            <a:noFill/>
+          </a:ln>
+        </p:spPr>
+        <p:style>
+          <a:lnRef idx="2">
+            <a:schemeClr val="accent1">
+              <a:shade val="50000"/>
+            </a:schemeClr>
+          </a:lnRef>
+          <a:fillRef idx="1">
+            <a:schemeClr val="accent1"/>
+          </a:fillRef>
+          <a:effectRef idx="0">
+            <a:schemeClr val="accent1"/>
+          </a:effectRef>
+          <a:fontRef idx="minor">
+            <a:schemeClr val="lt1"/>
+          </a:fontRef>
+        </p:style>
+        <p:txBody>
+          <a:bodyPr rtlCol="0" anchor="t"/>
+          <a:lstStyle/>
+          <a:p>
+            <a:pPr algn="ctr"/>
+            <a:r>
+              <a:rPr lang="de-DE" sz="1200">
+                <a:solidFill>
+                  <a:srgbClr val="405786"/>
+                </a:solidFill>
+              </a:rPr>
+              <a:t>Länder</a:t>
+            </a:r>
+            <a:endParaRPr lang="de-DE" sz="1400">
+              <a:solidFill>
+                <a:srgbClr val="405786"/>
+              </a:solidFill>
+            </a:endParaRPr>
+          </a:p>
+        </p:txBody>
+      </p:sp>
+      <p:cxnSp>
+        <p:nvCxnSpPr>
+          <p:cNvPr id="74" name="Gerade Verbindung mit Pfeil 73">
+            <a:extLst>
+              <a:ext uri="{FF2B5EF4-FFF2-40B4-BE49-F238E27FC236}">
+                <a16:creationId xmlns:a16="http://schemas.microsoft.com/office/drawing/2014/main" id="{60D643AA-B387-867F-4232-15BF303F53C3}"/>
+              </a:ext>
+            </a:extLst>
+          </p:cNvPr>
+          <p:cNvCxnSpPr>
+            <a:cxnSpLocks/>
+            <a:stCxn id="21" idx="1"/>
+            <a:endCxn id="76" idx="2"/>
+          </p:cNvCxnSpPr>
+          <p:nvPr/>
+        </p:nvCxnSpPr>
+        <p:spPr>
+          <a:xfrm flipH="1" flipV="1">
+            <a:off x="2843613" y="2813963"/>
+            <a:ext cx="1" cy="596414"/>
+          </a:xfrm>
+          <a:prstGeom prst="straightConnector1">
+            <a:avLst/>
+          </a:prstGeom>
+          <a:ln w="22225">
+            <a:solidFill>
+              <a:srgbClr val="405786"/>
+            </a:solidFill>
+            <a:headEnd type="arrow"/>
+            <a:tailEnd type="none"/>
+          </a:ln>
+        </p:spPr>
+        <p:style>
+          <a:lnRef idx="1">
+            <a:schemeClr val="accent1"/>
+          </a:lnRef>
+          <a:fillRef idx="0">
+            <a:schemeClr val="accent1"/>
+          </a:fillRef>
+          <a:effectRef idx="0">
+            <a:schemeClr val="accent1"/>
+          </a:effectRef>
+          <a:fontRef idx="minor">
+            <a:schemeClr val="tx1"/>
+          </a:fontRef>
+        </p:style>
+      </p:cxnSp>
+      <p:sp>
+        <p:nvSpPr>
+          <p:cNvPr id="76" name="Rechteck 75">
+            <a:extLst>
+              <a:ext uri="{FF2B5EF4-FFF2-40B4-BE49-F238E27FC236}">
+                <a16:creationId xmlns:a16="http://schemas.microsoft.com/office/drawing/2014/main" id="{BE383267-29A9-9FC8-CE21-694445340630}"/>
+              </a:ext>
+            </a:extLst>
+          </p:cNvPr>
+          <p:cNvSpPr/>
+          <p:nvPr/>
+        </p:nvSpPr>
+        <p:spPr>
+          <a:xfrm>
+            <a:off x="2410541" y="2399938"/>
+            <a:ext cx="866143" cy="414025"/>
+          </a:xfrm>
+          <a:prstGeom prst="rect">
+            <a:avLst/>
+          </a:prstGeom>
+          <a:noFill/>
+          <a:ln>
+            <a:noFill/>
+          </a:ln>
+        </p:spPr>
+        <p:style>
+          <a:lnRef idx="2">
+            <a:schemeClr val="accent1">
+              <a:shade val="50000"/>
+            </a:schemeClr>
+          </a:lnRef>
+          <a:fillRef idx="1">
+            <a:schemeClr val="accent1"/>
+          </a:fillRef>
+          <a:effectRef idx="0">
+            <a:schemeClr val="accent1"/>
+          </a:effectRef>
+          <a:fontRef idx="minor">
+            <a:schemeClr val="lt1"/>
+          </a:fontRef>
+        </p:style>
+        <p:txBody>
+          <a:bodyPr rtlCol="0" anchor="t"/>
+          <a:lstStyle/>
+          <a:p>
+            <a:pPr algn="ctr"/>
+            <a:r>
+              <a:rPr lang="de-DE" sz="1200">
+                <a:solidFill>
+                  <a:srgbClr val="405786"/>
+                </a:solidFill>
+              </a:rPr>
+              <a:t>AP andere Quellen</a:t>
+            </a:r>
+            <a:endParaRPr lang="de-DE" sz="1400">
+              <a:solidFill>
+                <a:srgbClr val="405786"/>
+              </a:solidFill>
+            </a:endParaRPr>
+          </a:p>
+        </p:txBody>
+      </p:sp>
+    </p:spTree>
+    <p:extLst>
+      <p:ext uri="{BB962C8B-B14F-4D97-AF65-F5344CB8AC3E}">
+        <p14:creationId xmlns:p14="http://schemas.microsoft.com/office/powerpoint/2010/main" val="383421129"/>
+      </p:ext>
+    </p:extLst>
+  </p:cSld>
+  <p:clrMapOvr>
+    <a:masterClrMapping/>
+  </p:clrMapOvr>
+</p:sld>
+</file>
+
 <file path=ppt/slides/slide2.xml><?xml version="1.0" encoding="utf-8"?>
 <p:sld xmlns:a="http://schemas.openxmlformats.org/drawingml/2006/main" xmlns:r="http://schemas.openxmlformats.org/officeDocument/2006/relationships" xmlns:p="http://schemas.openxmlformats.org/presentationml/2006/main">
   <p:cSld>
@@ -10921,7 +12193,7 @@
         </p:nvSpPr>
         <p:spPr>
           <a:xfrm>
-            <a:off x="565608" y="2128711"/>
+            <a:off x="565608" y="2136331"/>
             <a:ext cx="1952967" cy="566909"/>
           </a:xfrm>
           <a:prstGeom prst="roundRect">
@@ -12613,6 +13885,1499 @@
     <p:extLst>
       <p:ext uri="{BB962C8B-B14F-4D97-AF65-F5344CB8AC3E}">
         <p14:creationId xmlns:p14="http://schemas.microsoft.com/office/powerpoint/2010/main" val="3091731184"/>
+      </p:ext>
+    </p:extLst>
+  </p:cSld>
+  <p:clrMapOvr>
+    <a:masterClrMapping/>
+  </p:clrMapOvr>
+</p:sld>
+</file>
+
+<file path=ppt/slides/slide9.xml><?xml version="1.0" encoding="utf-8"?>
+<p:sld xmlns:a="http://schemas.openxmlformats.org/drawingml/2006/main" xmlns:r="http://schemas.openxmlformats.org/officeDocument/2006/relationships" xmlns:p="http://schemas.openxmlformats.org/presentationml/2006/main">
+  <p:cSld>
+    <p:spTree>
+      <p:nvGrpSpPr>
+        <p:cNvPr id="1" name=""/>
+        <p:cNvGrpSpPr/>
+        <p:nvPr/>
+      </p:nvGrpSpPr>
+      <p:grpSpPr>
+        <a:xfrm>
+          <a:off x="0" y="0"/>
+          <a:ext cx="0" cy="0"/>
+          <a:chOff x="0" y="0"/>
+          <a:chExt cx="0" cy="0"/>
+        </a:xfrm>
+      </p:grpSpPr>
+      <p:sp>
+        <p:nvSpPr>
+          <p:cNvPr id="11" name="Pfeil: nach links und rechts 10">
+            <a:extLst>
+              <a:ext uri="{FF2B5EF4-FFF2-40B4-BE49-F238E27FC236}">
+                <a16:creationId xmlns:a16="http://schemas.microsoft.com/office/drawing/2014/main" id="{B373BB0E-CC21-4468-A11B-DA3B56985F35}"/>
+              </a:ext>
+            </a:extLst>
+          </p:cNvPr>
+          <p:cNvSpPr/>
+          <p:nvPr/>
+        </p:nvSpPr>
+        <p:spPr>
+          <a:xfrm rot="3850881">
+            <a:off x="1968300" y="2627138"/>
+            <a:ext cx="933542" cy="317898"/>
+          </a:xfrm>
+          <a:prstGeom prst="leftRightArrow">
+            <a:avLst/>
+          </a:prstGeom>
+          <a:solidFill>
+            <a:srgbClr val="D6DCE5"/>
+          </a:solidFill>
+          <a:ln>
+            <a:noFill/>
+          </a:ln>
+        </p:spPr>
+        <p:style>
+          <a:lnRef idx="2">
+            <a:schemeClr val="accent1">
+              <a:shade val="50000"/>
+            </a:schemeClr>
+          </a:lnRef>
+          <a:fillRef idx="1">
+            <a:schemeClr val="accent1"/>
+          </a:fillRef>
+          <a:effectRef idx="0">
+            <a:schemeClr val="accent1"/>
+          </a:effectRef>
+          <a:fontRef idx="minor">
+            <a:schemeClr val="lt1"/>
+          </a:fontRef>
+        </p:style>
+        <p:txBody>
+          <a:bodyPr rtlCol="0" anchor="ctr"/>
+          <a:lstStyle/>
+          <a:p>
+            <a:pPr algn="ctr"/>
+            <a:endParaRPr lang="de-DE"/>
+          </a:p>
+        </p:txBody>
+      </p:sp>
+      <p:sp>
+        <p:nvSpPr>
+          <p:cNvPr id="2" name="Titel 1">
+            <a:extLst>
+              <a:ext uri="{FF2B5EF4-FFF2-40B4-BE49-F238E27FC236}">
+                <a16:creationId xmlns:a16="http://schemas.microsoft.com/office/drawing/2014/main" id="{69664993-9ED6-4670-922B-6DCFB75DADAE}"/>
+              </a:ext>
+            </a:extLst>
+          </p:cNvPr>
+          <p:cNvSpPr>
+            <a:spLocks noGrp="1"/>
+          </p:cNvSpPr>
+          <p:nvPr>
+            <p:ph type="title"/>
+          </p:nvPr>
+        </p:nvSpPr>
+        <p:spPr/>
+        <p:txBody>
+          <a:bodyPr/>
+          <a:lstStyle/>
+          <a:p>
+            <a:r>
+              <a:rPr lang="de-DE"/>
+              <a:t>content-hub1.png</a:t>
+            </a:r>
+          </a:p>
+        </p:txBody>
+      </p:sp>
+      <p:sp>
+        <p:nvSpPr>
+          <p:cNvPr id="10" name="Rechteck 9">
+            <a:extLst>
+              <a:ext uri="{FF2B5EF4-FFF2-40B4-BE49-F238E27FC236}">
+                <a16:creationId xmlns:a16="http://schemas.microsoft.com/office/drawing/2014/main" id="{719FAA75-2688-4E1B-A8A9-97CF000C9D32}"/>
+              </a:ext>
+            </a:extLst>
+          </p:cNvPr>
+          <p:cNvSpPr/>
+          <p:nvPr/>
+        </p:nvSpPr>
+        <p:spPr>
+          <a:xfrm>
+            <a:off x="1868815" y="2604283"/>
+            <a:ext cx="912402" cy="256528"/>
+          </a:xfrm>
+          <a:prstGeom prst="rect">
+            <a:avLst/>
+          </a:prstGeom>
+          <a:noFill/>
+          <a:ln>
+            <a:noFill/>
+          </a:ln>
+        </p:spPr>
+        <p:style>
+          <a:lnRef idx="2">
+            <a:schemeClr val="accent1">
+              <a:shade val="50000"/>
+            </a:schemeClr>
+          </a:lnRef>
+          <a:fillRef idx="1">
+            <a:schemeClr val="accent1"/>
+          </a:fillRef>
+          <a:effectRef idx="0">
+            <a:schemeClr val="accent1"/>
+          </a:effectRef>
+          <a:fontRef idx="minor">
+            <a:schemeClr val="lt1"/>
+          </a:fontRef>
+        </p:style>
+        <p:txBody>
+          <a:bodyPr rtlCol="0" anchor="t"/>
+          <a:lstStyle/>
+          <a:p>
+            <a:pPr algn="ctr"/>
+            <a:r>
+              <a:rPr lang="de-DE" sz="1200">
+                <a:solidFill>
+                  <a:srgbClr val="405786"/>
+                </a:solidFill>
+              </a:rPr>
+              <a:t>Aufgaben</a:t>
+            </a:r>
+            <a:endParaRPr lang="de-DE" sz="1400">
+              <a:solidFill>
+                <a:srgbClr val="405786"/>
+              </a:solidFill>
+            </a:endParaRPr>
+          </a:p>
+        </p:txBody>
+      </p:sp>
+      <p:sp>
+        <p:nvSpPr>
+          <p:cNvPr id="22" name="Pfeil: nach rechts 21">
+            <a:extLst>
+              <a:ext uri="{FF2B5EF4-FFF2-40B4-BE49-F238E27FC236}">
+                <a16:creationId xmlns:a16="http://schemas.microsoft.com/office/drawing/2014/main" id="{F0ED9A78-65FF-4184-87C8-D2B65CA89911}"/>
+              </a:ext>
+            </a:extLst>
+          </p:cNvPr>
+          <p:cNvSpPr/>
+          <p:nvPr/>
+        </p:nvSpPr>
+        <p:spPr>
+          <a:xfrm>
+            <a:off x="2435072" y="5342284"/>
+            <a:ext cx="1349261" cy="317898"/>
+          </a:xfrm>
+          <a:prstGeom prst="rightArrow">
+            <a:avLst/>
+          </a:prstGeom>
+          <a:solidFill>
+            <a:srgbClr val="D6DCE5"/>
+          </a:solidFill>
+          <a:ln>
+            <a:noFill/>
+          </a:ln>
+        </p:spPr>
+        <p:style>
+          <a:lnRef idx="2">
+            <a:schemeClr val="accent1">
+              <a:shade val="50000"/>
+            </a:schemeClr>
+          </a:lnRef>
+          <a:fillRef idx="1">
+            <a:schemeClr val="accent1"/>
+          </a:fillRef>
+          <a:effectRef idx="0">
+            <a:schemeClr val="accent1"/>
+          </a:effectRef>
+          <a:fontRef idx="minor">
+            <a:schemeClr val="lt1"/>
+          </a:fontRef>
+        </p:style>
+        <p:txBody>
+          <a:bodyPr rtlCol="0" anchor="ctr"/>
+          <a:lstStyle/>
+          <a:p>
+            <a:pPr algn="ctr"/>
+            <a:endParaRPr lang="de-DE"/>
+          </a:p>
+        </p:txBody>
+      </p:sp>
+      <p:sp>
+        <p:nvSpPr>
+          <p:cNvPr id="25" name="Pfeil: nach links 24">
+            <a:extLst>
+              <a:ext uri="{FF2B5EF4-FFF2-40B4-BE49-F238E27FC236}">
+                <a16:creationId xmlns:a16="http://schemas.microsoft.com/office/drawing/2014/main" id="{753FC8FE-F56E-45C4-9E72-DDBA99836111}"/>
+              </a:ext>
+            </a:extLst>
+          </p:cNvPr>
+          <p:cNvSpPr/>
+          <p:nvPr/>
+        </p:nvSpPr>
+        <p:spPr>
+          <a:xfrm rot="17749119" flipH="1">
+            <a:off x="3210439" y="2686662"/>
+            <a:ext cx="1065792" cy="317898"/>
+          </a:xfrm>
+          <a:prstGeom prst="leftArrow">
+            <a:avLst/>
+          </a:prstGeom>
+          <a:solidFill>
+            <a:srgbClr val="D6DCE5"/>
+          </a:solidFill>
+          <a:ln>
+            <a:noFill/>
+          </a:ln>
+        </p:spPr>
+        <p:style>
+          <a:lnRef idx="2">
+            <a:schemeClr val="accent1">
+              <a:shade val="50000"/>
+            </a:schemeClr>
+          </a:lnRef>
+          <a:fillRef idx="1">
+            <a:schemeClr val="accent1"/>
+          </a:fillRef>
+          <a:effectRef idx="0">
+            <a:schemeClr val="accent1"/>
+          </a:effectRef>
+          <a:fontRef idx="minor">
+            <a:schemeClr val="lt1"/>
+          </a:fontRef>
+        </p:style>
+        <p:txBody>
+          <a:bodyPr rtlCol="0" anchor="ctr"/>
+          <a:lstStyle/>
+          <a:p>
+            <a:pPr algn="ctr"/>
+            <a:endParaRPr lang="de-DE"/>
+          </a:p>
+        </p:txBody>
+      </p:sp>
+      <p:sp>
+        <p:nvSpPr>
+          <p:cNvPr id="4" name="Rechteck: abgerundete Ecken 3">
+            <a:extLst>
+              <a:ext uri="{FF2B5EF4-FFF2-40B4-BE49-F238E27FC236}">
+                <a16:creationId xmlns:a16="http://schemas.microsoft.com/office/drawing/2014/main" id="{1D19F10A-674D-4908-9A18-FDAD3BD7BEDC}"/>
+              </a:ext>
+            </a:extLst>
+          </p:cNvPr>
+          <p:cNvSpPr/>
+          <p:nvPr/>
+        </p:nvSpPr>
+        <p:spPr>
+          <a:xfrm>
+            <a:off x="1365847" y="2044000"/>
+            <a:ext cx="1676257" cy="318109"/>
+          </a:xfrm>
+          <a:prstGeom prst="roundRect">
+            <a:avLst/>
+          </a:prstGeom>
+          <a:solidFill>
+            <a:srgbClr val="405786"/>
+          </a:solidFill>
+          <a:ln>
+            <a:noFill/>
+          </a:ln>
+        </p:spPr>
+        <p:style>
+          <a:lnRef idx="2">
+            <a:schemeClr val="accent1">
+              <a:shade val="50000"/>
+            </a:schemeClr>
+          </a:lnRef>
+          <a:fillRef idx="1">
+            <a:schemeClr val="accent1"/>
+          </a:fillRef>
+          <a:effectRef idx="0">
+            <a:schemeClr val="accent1"/>
+          </a:effectRef>
+          <a:fontRef idx="minor">
+            <a:schemeClr val="lt1"/>
+          </a:fontRef>
+        </p:style>
+        <p:txBody>
+          <a:bodyPr rtlCol="0" anchor="ctr"/>
+          <a:lstStyle/>
+          <a:p>
+            <a:pPr algn="ctr"/>
+            <a:r>
+              <a:rPr lang="de-DE" sz="1200"/>
+              <a:t>IQB-Studio</a:t>
+            </a:r>
+          </a:p>
+        </p:txBody>
+      </p:sp>
+      <p:sp>
+        <p:nvSpPr>
+          <p:cNvPr id="6" name="Rechteck: abgerundete Ecken 5">
+            <a:extLst>
+              <a:ext uri="{FF2B5EF4-FFF2-40B4-BE49-F238E27FC236}">
+                <a16:creationId xmlns:a16="http://schemas.microsoft.com/office/drawing/2014/main" id="{2B3200A0-8EF8-4FFF-B02C-41172859B333}"/>
+              </a:ext>
+            </a:extLst>
+          </p:cNvPr>
+          <p:cNvSpPr/>
+          <p:nvPr/>
+        </p:nvSpPr>
+        <p:spPr>
+          <a:xfrm>
+            <a:off x="3408092" y="2038168"/>
+            <a:ext cx="1800154" cy="318109"/>
+          </a:xfrm>
+          <a:prstGeom prst="roundRect">
+            <a:avLst/>
+          </a:prstGeom>
+          <a:solidFill>
+            <a:schemeClr val="bg1"/>
+          </a:solidFill>
+          <a:ln>
+            <a:solidFill>
+              <a:schemeClr val="tx1"/>
+            </a:solidFill>
+          </a:ln>
+        </p:spPr>
+        <p:style>
+          <a:lnRef idx="2">
+            <a:schemeClr val="accent1">
+              <a:shade val="50000"/>
+            </a:schemeClr>
+          </a:lnRef>
+          <a:fillRef idx="1">
+            <a:schemeClr val="accent1"/>
+          </a:fillRef>
+          <a:effectRef idx="0">
+            <a:schemeClr val="accent1"/>
+          </a:effectRef>
+          <a:fontRef idx="minor">
+            <a:schemeClr val="lt1"/>
+          </a:fontRef>
+        </p:style>
+        <p:txBody>
+          <a:bodyPr rtlCol="0" anchor="ctr"/>
+          <a:lstStyle/>
+          <a:p>
+            <a:pPr algn="ctr"/>
+            <a:r>
+              <a:rPr lang="de-DE" sz="1200" b="1">
+                <a:solidFill>
+                  <a:schemeClr val="tx1"/>
+                </a:solidFill>
+              </a:rPr>
+              <a:t>Länder-Durchführung</a:t>
+            </a:r>
+          </a:p>
+        </p:txBody>
+      </p:sp>
+      <p:sp>
+        <p:nvSpPr>
+          <p:cNvPr id="13" name="Rechteck 12">
+            <a:extLst>
+              <a:ext uri="{FF2B5EF4-FFF2-40B4-BE49-F238E27FC236}">
+                <a16:creationId xmlns:a16="http://schemas.microsoft.com/office/drawing/2014/main" id="{A96BB776-D63D-43FB-B470-D03AEB0699BD}"/>
+              </a:ext>
+            </a:extLst>
+          </p:cNvPr>
+          <p:cNvSpPr/>
+          <p:nvPr/>
+        </p:nvSpPr>
+        <p:spPr>
+          <a:xfrm>
+            <a:off x="3449000" y="2578246"/>
+            <a:ext cx="1294330" cy="466578"/>
+          </a:xfrm>
+          <a:prstGeom prst="rect">
+            <a:avLst/>
+          </a:prstGeom>
+          <a:noFill/>
+          <a:ln>
+            <a:noFill/>
+          </a:ln>
+        </p:spPr>
+        <p:style>
+          <a:lnRef idx="2">
+            <a:schemeClr val="accent1">
+              <a:shade val="50000"/>
+            </a:schemeClr>
+          </a:lnRef>
+          <a:fillRef idx="1">
+            <a:schemeClr val="accent1"/>
+          </a:fillRef>
+          <a:effectRef idx="0">
+            <a:schemeClr val="accent1"/>
+          </a:effectRef>
+          <a:fontRef idx="minor">
+            <a:schemeClr val="lt1"/>
+          </a:fontRef>
+        </p:style>
+        <p:txBody>
+          <a:bodyPr rtlCol="0" anchor="t"/>
+          <a:lstStyle/>
+          <a:p>
+            <a:pPr algn="ctr"/>
+            <a:r>
+              <a:rPr lang="de-DE" sz="1200">
+                <a:solidFill>
+                  <a:srgbClr val="405786"/>
+                </a:solidFill>
+              </a:rPr>
+              <a:t>Assessment Package</a:t>
+            </a:r>
+          </a:p>
+        </p:txBody>
+      </p:sp>
+      <p:sp>
+        <p:nvSpPr>
+          <p:cNvPr id="29" name="Pfeil: nach rechts 28">
+            <a:extLst>
+              <a:ext uri="{FF2B5EF4-FFF2-40B4-BE49-F238E27FC236}">
+                <a16:creationId xmlns:a16="http://schemas.microsoft.com/office/drawing/2014/main" id="{45D89B47-52C5-4AD1-841B-8C552476B40A}"/>
+              </a:ext>
+            </a:extLst>
+          </p:cNvPr>
+          <p:cNvSpPr/>
+          <p:nvPr/>
+        </p:nvSpPr>
+        <p:spPr>
+          <a:xfrm rot="3850881">
+            <a:off x="2651901" y="4344640"/>
+            <a:ext cx="1819310" cy="317898"/>
+          </a:xfrm>
+          <a:prstGeom prst="rightArrow">
+            <a:avLst/>
+          </a:prstGeom>
+          <a:solidFill>
+            <a:srgbClr val="D6DCE5"/>
+          </a:solidFill>
+          <a:ln>
+            <a:noFill/>
+          </a:ln>
+        </p:spPr>
+        <p:style>
+          <a:lnRef idx="2">
+            <a:schemeClr val="accent1">
+              <a:shade val="50000"/>
+            </a:schemeClr>
+          </a:lnRef>
+          <a:fillRef idx="1">
+            <a:schemeClr val="accent1"/>
+          </a:fillRef>
+          <a:effectRef idx="0">
+            <a:schemeClr val="accent1"/>
+          </a:effectRef>
+          <a:fontRef idx="minor">
+            <a:schemeClr val="lt1"/>
+          </a:fontRef>
+        </p:style>
+        <p:txBody>
+          <a:bodyPr rtlCol="0" anchor="ctr"/>
+          <a:lstStyle/>
+          <a:p>
+            <a:pPr algn="ctr"/>
+            <a:endParaRPr lang="de-DE"/>
+          </a:p>
+        </p:txBody>
+      </p:sp>
+      <p:sp>
+        <p:nvSpPr>
+          <p:cNvPr id="30" name="Pfeil: nach rechts 29">
+            <a:extLst>
+              <a:ext uri="{FF2B5EF4-FFF2-40B4-BE49-F238E27FC236}">
+                <a16:creationId xmlns:a16="http://schemas.microsoft.com/office/drawing/2014/main" id="{E948116F-D3FA-490C-B367-80E0CEF4121F}"/>
+              </a:ext>
+            </a:extLst>
+          </p:cNvPr>
+          <p:cNvSpPr/>
+          <p:nvPr/>
+        </p:nvSpPr>
+        <p:spPr>
+          <a:xfrm rot="17749119" flipH="1">
+            <a:off x="1347880" y="4336905"/>
+            <a:ext cx="1836493" cy="317898"/>
+          </a:xfrm>
+          <a:prstGeom prst="rightArrow">
+            <a:avLst/>
+          </a:prstGeom>
+          <a:solidFill>
+            <a:srgbClr val="D6DCE5"/>
+          </a:solidFill>
+          <a:ln>
+            <a:noFill/>
+          </a:ln>
+        </p:spPr>
+        <p:style>
+          <a:lnRef idx="2">
+            <a:schemeClr val="accent1">
+              <a:shade val="50000"/>
+            </a:schemeClr>
+          </a:lnRef>
+          <a:fillRef idx="1">
+            <a:schemeClr val="accent1"/>
+          </a:fillRef>
+          <a:effectRef idx="0">
+            <a:schemeClr val="accent1"/>
+          </a:effectRef>
+          <a:fontRef idx="minor">
+            <a:schemeClr val="lt1"/>
+          </a:fontRef>
+        </p:style>
+        <p:txBody>
+          <a:bodyPr rtlCol="0" anchor="ctr"/>
+          <a:lstStyle/>
+          <a:p>
+            <a:pPr algn="ctr"/>
+            <a:endParaRPr lang="de-DE"/>
+          </a:p>
+        </p:txBody>
+      </p:sp>
+      <p:sp>
+        <p:nvSpPr>
+          <p:cNvPr id="31" name="Pfeil: nach rechts 30">
+            <a:extLst>
+              <a:ext uri="{FF2B5EF4-FFF2-40B4-BE49-F238E27FC236}">
+                <a16:creationId xmlns:a16="http://schemas.microsoft.com/office/drawing/2014/main" id="{7E1AE68B-0EA4-4E51-B712-345F46C22250}"/>
+              </a:ext>
+            </a:extLst>
+          </p:cNvPr>
+          <p:cNvSpPr/>
+          <p:nvPr/>
+        </p:nvSpPr>
+        <p:spPr>
+          <a:xfrm rot="3850881" flipH="1" flipV="1">
+            <a:off x="4325604" y="3972049"/>
+            <a:ext cx="802022" cy="317898"/>
+          </a:xfrm>
+          <a:prstGeom prst="rightArrow">
+            <a:avLst/>
+          </a:prstGeom>
+          <a:solidFill>
+            <a:srgbClr val="D6DCE5"/>
+          </a:solidFill>
+          <a:ln>
+            <a:noFill/>
+          </a:ln>
+        </p:spPr>
+        <p:style>
+          <a:lnRef idx="2">
+            <a:schemeClr val="accent1">
+              <a:shade val="50000"/>
+            </a:schemeClr>
+          </a:lnRef>
+          <a:fillRef idx="1">
+            <a:schemeClr val="accent1"/>
+          </a:fillRef>
+          <a:effectRef idx="0">
+            <a:schemeClr val="accent1"/>
+          </a:effectRef>
+          <a:fontRef idx="minor">
+            <a:schemeClr val="lt1"/>
+          </a:fontRef>
+        </p:style>
+        <p:txBody>
+          <a:bodyPr rtlCol="0" anchor="ctr"/>
+          <a:lstStyle/>
+          <a:p>
+            <a:pPr algn="ctr"/>
+            <a:endParaRPr lang="de-DE"/>
+          </a:p>
+        </p:txBody>
+      </p:sp>
+      <p:sp>
+        <p:nvSpPr>
+          <p:cNvPr id="32" name="Pfeil: nach rechts 31">
+            <a:extLst>
+              <a:ext uri="{FF2B5EF4-FFF2-40B4-BE49-F238E27FC236}">
+                <a16:creationId xmlns:a16="http://schemas.microsoft.com/office/drawing/2014/main" id="{77EB62EE-B0EB-405E-A9E7-31819D74898A}"/>
+              </a:ext>
+            </a:extLst>
+          </p:cNvPr>
+          <p:cNvSpPr/>
+          <p:nvPr/>
+        </p:nvSpPr>
+        <p:spPr>
+          <a:xfrm rot="17749119" flipV="1">
+            <a:off x="4321033" y="4977845"/>
+            <a:ext cx="844595" cy="317898"/>
+          </a:xfrm>
+          <a:prstGeom prst="rightArrow">
+            <a:avLst/>
+          </a:prstGeom>
+          <a:solidFill>
+            <a:srgbClr val="D6DCE5"/>
+          </a:solidFill>
+          <a:ln>
+            <a:noFill/>
+          </a:ln>
+        </p:spPr>
+        <p:style>
+          <a:lnRef idx="2">
+            <a:schemeClr val="accent1">
+              <a:shade val="50000"/>
+            </a:schemeClr>
+          </a:lnRef>
+          <a:fillRef idx="1">
+            <a:schemeClr val="accent1"/>
+          </a:fillRef>
+          <a:effectRef idx="0">
+            <a:schemeClr val="accent1"/>
+          </a:effectRef>
+          <a:fontRef idx="minor">
+            <a:schemeClr val="lt1"/>
+          </a:fontRef>
+        </p:style>
+        <p:txBody>
+          <a:bodyPr rtlCol="0" anchor="ctr"/>
+          <a:lstStyle/>
+          <a:p>
+            <a:pPr algn="ctr"/>
+            <a:endParaRPr lang="de-DE"/>
+          </a:p>
+        </p:txBody>
+      </p:sp>
+      <p:sp>
+        <p:nvSpPr>
+          <p:cNvPr id="17" name="Rechteck 16">
+            <a:extLst>
+              <a:ext uri="{FF2B5EF4-FFF2-40B4-BE49-F238E27FC236}">
+                <a16:creationId xmlns:a16="http://schemas.microsoft.com/office/drawing/2014/main" id="{BBC0748C-9234-4B45-8D10-CBF7EEE1374C}"/>
+              </a:ext>
+            </a:extLst>
+          </p:cNvPr>
+          <p:cNvSpPr/>
+          <p:nvPr/>
+        </p:nvSpPr>
+        <p:spPr>
+          <a:xfrm>
+            <a:off x="2877192" y="5363651"/>
+            <a:ext cx="866143" cy="275164"/>
+          </a:xfrm>
+          <a:prstGeom prst="rect">
+            <a:avLst/>
+          </a:prstGeom>
+          <a:noFill/>
+          <a:ln>
+            <a:noFill/>
+          </a:ln>
+        </p:spPr>
+        <p:style>
+          <a:lnRef idx="2">
+            <a:schemeClr val="accent1">
+              <a:shade val="50000"/>
+            </a:schemeClr>
+          </a:lnRef>
+          <a:fillRef idx="1">
+            <a:schemeClr val="accent1"/>
+          </a:fillRef>
+          <a:effectRef idx="0">
+            <a:schemeClr val="accent1"/>
+          </a:effectRef>
+          <a:fontRef idx="minor">
+            <a:schemeClr val="lt1"/>
+          </a:fontRef>
+        </p:style>
+        <p:txBody>
+          <a:bodyPr rtlCol="0" anchor="t"/>
+          <a:lstStyle/>
+          <a:p>
+            <a:pPr algn="ctr"/>
+            <a:r>
+              <a:rPr lang="de-DE" sz="1200">
+                <a:solidFill>
+                  <a:srgbClr val="405786"/>
+                </a:solidFill>
+              </a:rPr>
+              <a:t>Antworten</a:t>
+            </a:r>
+            <a:endParaRPr lang="de-DE" sz="1400">
+              <a:solidFill>
+                <a:srgbClr val="405786"/>
+              </a:solidFill>
+            </a:endParaRPr>
+          </a:p>
+        </p:txBody>
+      </p:sp>
+      <p:sp>
+        <p:nvSpPr>
+          <p:cNvPr id="15" name="Rechteck 14">
+            <a:extLst>
+              <a:ext uri="{FF2B5EF4-FFF2-40B4-BE49-F238E27FC236}">
+                <a16:creationId xmlns:a16="http://schemas.microsoft.com/office/drawing/2014/main" id="{A5BFC3D8-81AB-4B6E-AC39-A38E82FEDBCA}"/>
+              </a:ext>
+            </a:extLst>
+          </p:cNvPr>
+          <p:cNvSpPr/>
+          <p:nvPr/>
+        </p:nvSpPr>
+        <p:spPr>
+          <a:xfrm>
+            <a:off x="1489393" y="4134614"/>
+            <a:ext cx="912402" cy="493304"/>
+          </a:xfrm>
+          <a:prstGeom prst="rect">
+            <a:avLst/>
+          </a:prstGeom>
+          <a:noFill/>
+          <a:ln>
+            <a:noFill/>
+          </a:ln>
+        </p:spPr>
+        <p:style>
+          <a:lnRef idx="2">
+            <a:schemeClr val="accent1">
+              <a:shade val="50000"/>
+            </a:schemeClr>
+          </a:lnRef>
+          <a:fillRef idx="1">
+            <a:schemeClr val="accent1"/>
+          </a:fillRef>
+          <a:effectRef idx="0">
+            <a:schemeClr val="accent1"/>
+          </a:effectRef>
+          <a:fontRef idx="minor">
+            <a:schemeClr val="lt1"/>
+          </a:fontRef>
+        </p:style>
+        <p:txBody>
+          <a:bodyPr rtlCol="0" anchor="t"/>
+          <a:lstStyle/>
+          <a:p>
+            <a:pPr algn="ctr"/>
+            <a:r>
+              <a:rPr lang="de-DE" sz="1200">
+                <a:solidFill>
+                  <a:srgbClr val="405786"/>
+                </a:solidFill>
+              </a:rPr>
+              <a:t>Aufgaben, Testhefte</a:t>
+            </a:r>
+            <a:endParaRPr lang="de-DE" sz="1400">
+              <a:solidFill>
+                <a:srgbClr val="405786"/>
+              </a:solidFill>
+            </a:endParaRPr>
+          </a:p>
+        </p:txBody>
+      </p:sp>
+      <p:sp>
+        <p:nvSpPr>
+          <p:cNvPr id="7" name="Rechteck: abgerundete Ecken 6">
+            <a:extLst>
+              <a:ext uri="{FF2B5EF4-FFF2-40B4-BE49-F238E27FC236}">
+                <a16:creationId xmlns:a16="http://schemas.microsoft.com/office/drawing/2014/main" id="{CA9A0AFC-CDCE-4998-A4B7-46F43B78EA44}"/>
+              </a:ext>
+            </a:extLst>
+          </p:cNvPr>
+          <p:cNvSpPr/>
+          <p:nvPr/>
+        </p:nvSpPr>
+        <p:spPr>
+          <a:xfrm>
+            <a:off x="1197445" y="5342179"/>
+            <a:ext cx="1676257" cy="318109"/>
+          </a:xfrm>
+          <a:prstGeom prst="roundRect">
+            <a:avLst/>
+          </a:prstGeom>
+          <a:solidFill>
+            <a:srgbClr val="405786"/>
+          </a:solidFill>
+          <a:ln>
+            <a:noFill/>
+          </a:ln>
+        </p:spPr>
+        <p:style>
+          <a:lnRef idx="2">
+            <a:schemeClr val="accent1">
+              <a:shade val="50000"/>
+            </a:schemeClr>
+          </a:lnRef>
+          <a:fillRef idx="1">
+            <a:schemeClr val="accent1"/>
+          </a:fillRef>
+          <a:effectRef idx="0">
+            <a:schemeClr val="accent1"/>
+          </a:effectRef>
+          <a:fontRef idx="minor">
+            <a:schemeClr val="lt1"/>
+          </a:fontRef>
+        </p:style>
+        <p:txBody>
+          <a:bodyPr rtlCol="0" anchor="ctr"/>
+          <a:lstStyle/>
+          <a:p>
+            <a:pPr algn="ctr"/>
+            <a:r>
+              <a:rPr lang="de-DE" sz="1200"/>
+              <a:t>IQB-Testcenter</a:t>
+            </a:r>
+          </a:p>
+        </p:txBody>
+      </p:sp>
+      <p:sp>
+        <p:nvSpPr>
+          <p:cNvPr id="12" name="Flussdiagramm: Magnetplattenspeicher 11">
+            <a:extLst>
+              <a:ext uri="{FF2B5EF4-FFF2-40B4-BE49-F238E27FC236}">
+                <a16:creationId xmlns:a16="http://schemas.microsoft.com/office/drawing/2014/main" id="{F796BA9E-5480-793C-C4A2-8A734E31A83C}"/>
+              </a:ext>
+            </a:extLst>
+          </p:cNvPr>
+          <p:cNvSpPr/>
+          <p:nvPr/>
+        </p:nvSpPr>
+        <p:spPr>
+          <a:xfrm>
+            <a:off x="5148991" y="5845787"/>
+            <a:ext cx="986740" cy="944880"/>
+          </a:xfrm>
+          <a:prstGeom prst="flowChartMagneticDisk">
+            <a:avLst/>
+          </a:prstGeom>
+          <a:solidFill>
+            <a:schemeClr val="bg1"/>
+          </a:solidFill>
+          <a:ln>
+            <a:solidFill>
+              <a:schemeClr val="tx1"/>
+            </a:solidFill>
+          </a:ln>
+        </p:spPr>
+        <p:style>
+          <a:lnRef idx="2">
+            <a:schemeClr val="accent1">
+              <a:shade val="50000"/>
+            </a:schemeClr>
+          </a:lnRef>
+          <a:fillRef idx="1">
+            <a:schemeClr val="accent1"/>
+          </a:fillRef>
+          <a:effectRef idx="0">
+            <a:schemeClr val="accent1"/>
+          </a:effectRef>
+          <a:fontRef idx="minor">
+            <a:schemeClr val="lt1"/>
+          </a:fontRef>
+        </p:style>
+        <p:txBody>
+          <a:bodyPr rtlCol="0" anchor="ctr"/>
+          <a:lstStyle/>
+          <a:p>
+            <a:pPr algn="ctr"/>
+            <a:r>
+              <a:rPr lang="de-DE" sz="1200" b="1">
+                <a:solidFill>
+                  <a:schemeClr val="tx1"/>
+                </a:solidFill>
+              </a:rPr>
+              <a:t>Daten-Archiv</a:t>
+            </a:r>
+          </a:p>
+        </p:txBody>
+      </p:sp>
+      <p:sp>
+        <p:nvSpPr>
+          <p:cNvPr id="3" name="Pfeil: nach rechts 2">
+            <a:extLst>
+              <a:ext uri="{FF2B5EF4-FFF2-40B4-BE49-F238E27FC236}">
+                <a16:creationId xmlns:a16="http://schemas.microsoft.com/office/drawing/2014/main" id="{1079D243-BA3D-E2A7-7F1D-465FB352B90A}"/>
+              </a:ext>
+            </a:extLst>
+          </p:cNvPr>
+          <p:cNvSpPr/>
+          <p:nvPr/>
+        </p:nvSpPr>
+        <p:spPr>
+          <a:xfrm rot="5400000">
+            <a:off x="4864600" y="5159826"/>
+            <a:ext cx="1555523" cy="317898"/>
+          </a:xfrm>
+          <a:prstGeom prst="rightArrow">
+            <a:avLst/>
+          </a:prstGeom>
+          <a:solidFill>
+            <a:srgbClr val="D6DCE5"/>
+          </a:solidFill>
+          <a:ln>
+            <a:noFill/>
+          </a:ln>
+        </p:spPr>
+        <p:style>
+          <a:lnRef idx="2">
+            <a:schemeClr val="accent1">
+              <a:shade val="50000"/>
+            </a:schemeClr>
+          </a:lnRef>
+          <a:fillRef idx="1">
+            <a:schemeClr val="accent1"/>
+          </a:fillRef>
+          <a:effectRef idx="0">
+            <a:schemeClr val="accent1"/>
+          </a:effectRef>
+          <a:fontRef idx="minor">
+            <a:schemeClr val="lt1"/>
+          </a:fontRef>
+        </p:style>
+        <p:txBody>
+          <a:bodyPr rtlCol="0" anchor="ctr"/>
+          <a:lstStyle/>
+          <a:p>
+            <a:pPr algn="ctr"/>
+            <a:endParaRPr lang="de-DE"/>
+          </a:p>
+        </p:txBody>
+      </p:sp>
+      <p:sp>
+        <p:nvSpPr>
+          <p:cNvPr id="9" name="Rechteck: abgerundete Ecken 8">
+            <a:extLst>
+              <a:ext uri="{FF2B5EF4-FFF2-40B4-BE49-F238E27FC236}">
+                <a16:creationId xmlns:a16="http://schemas.microsoft.com/office/drawing/2014/main" id="{F4BB3833-2C2A-4D03-85C1-B048B97B60EA}"/>
+              </a:ext>
+            </a:extLst>
+          </p:cNvPr>
+          <p:cNvSpPr/>
+          <p:nvPr/>
+        </p:nvSpPr>
+        <p:spPr>
+          <a:xfrm>
+            <a:off x="4674826" y="4420930"/>
+            <a:ext cx="1387562" cy="318109"/>
+          </a:xfrm>
+          <a:prstGeom prst="roundRect">
+            <a:avLst/>
+          </a:prstGeom>
+          <a:solidFill>
+            <a:schemeClr val="bg1"/>
+          </a:solidFill>
+          <a:ln>
+            <a:solidFill>
+              <a:schemeClr val="tx1"/>
+            </a:solidFill>
+          </a:ln>
+        </p:spPr>
+        <p:style>
+          <a:lnRef idx="2">
+            <a:schemeClr val="accent1">
+              <a:shade val="50000"/>
+            </a:schemeClr>
+          </a:lnRef>
+          <a:fillRef idx="1">
+            <a:schemeClr val="accent1"/>
+          </a:fillRef>
+          <a:effectRef idx="0">
+            <a:schemeClr val="accent1"/>
+          </a:effectRef>
+          <a:fontRef idx="minor">
+            <a:schemeClr val="lt1"/>
+          </a:fontRef>
+        </p:style>
+        <p:txBody>
+          <a:bodyPr rtlCol="0" anchor="ctr"/>
+          <a:lstStyle/>
+          <a:p>
+            <a:pPr algn="ctr"/>
+            <a:r>
+              <a:rPr lang="de-DE" sz="1200" b="1">
+                <a:solidFill>
+                  <a:schemeClr val="tx1"/>
+                </a:solidFill>
+              </a:rPr>
+              <a:t>eatTBA</a:t>
+            </a:r>
+          </a:p>
+        </p:txBody>
+      </p:sp>
+      <p:sp>
+        <p:nvSpPr>
+          <p:cNvPr id="14" name="Rechteck 13">
+            <a:extLst>
+              <a:ext uri="{FF2B5EF4-FFF2-40B4-BE49-F238E27FC236}">
+                <a16:creationId xmlns:a16="http://schemas.microsoft.com/office/drawing/2014/main" id="{4BA86029-B693-FD41-5370-C38B7BF743FB}"/>
+              </a:ext>
+            </a:extLst>
+          </p:cNvPr>
+          <p:cNvSpPr/>
+          <p:nvPr/>
+        </p:nvSpPr>
+        <p:spPr>
+          <a:xfrm>
+            <a:off x="4330789" y="4878635"/>
+            <a:ext cx="866143" cy="456162"/>
+          </a:xfrm>
+          <a:prstGeom prst="rect">
+            <a:avLst/>
+          </a:prstGeom>
+          <a:noFill/>
+          <a:ln>
+            <a:noFill/>
+          </a:ln>
+        </p:spPr>
+        <p:style>
+          <a:lnRef idx="2">
+            <a:schemeClr val="accent1">
+              <a:shade val="50000"/>
+            </a:schemeClr>
+          </a:lnRef>
+          <a:fillRef idx="1">
+            <a:schemeClr val="accent1"/>
+          </a:fillRef>
+          <a:effectRef idx="0">
+            <a:schemeClr val="accent1"/>
+          </a:effectRef>
+          <a:fontRef idx="minor">
+            <a:schemeClr val="lt1"/>
+          </a:fontRef>
+        </p:style>
+        <p:txBody>
+          <a:bodyPr rtlCol="0" anchor="t"/>
+          <a:lstStyle/>
+          <a:p>
+            <a:pPr algn="ctr"/>
+            <a:r>
+              <a:rPr lang="de-DE" sz="1200">
+                <a:solidFill>
+                  <a:srgbClr val="405786"/>
+                </a:solidFill>
+              </a:rPr>
+              <a:t>kodierte Antworten</a:t>
+            </a:r>
+            <a:endParaRPr lang="de-DE" sz="1400">
+              <a:solidFill>
+                <a:srgbClr val="405786"/>
+              </a:solidFill>
+            </a:endParaRPr>
+          </a:p>
+        </p:txBody>
+      </p:sp>
+      <p:sp>
+        <p:nvSpPr>
+          <p:cNvPr id="16" name="Rechteck 15">
+            <a:extLst>
+              <a:ext uri="{FF2B5EF4-FFF2-40B4-BE49-F238E27FC236}">
+                <a16:creationId xmlns:a16="http://schemas.microsoft.com/office/drawing/2014/main" id="{B27ED717-A731-F8F3-4893-8FBB71998940}"/>
+              </a:ext>
+            </a:extLst>
+          </p:cNvPr>
+          <p:cNvSpPr/>
+          <p:nvPr/>
+        </p:nvSpPr>
+        <p:spPr>
+          <a:xfrm>
+            <a:off x="5490159" y="4915216"/>
+            <a:ext cx="895401" cy="891224"/>
+          </a:xfrm>
+          <a:prstGeom prst="rect">
+            <a:avLst/>
+          </a:prstGeom>
+          <a:noFill/>
+          <a:ln>
+            <a:noFill/>
+          </a:ln>
+        </p:spPr>
+        <p:style>
+          <a:lnRef idx="2">
+            <a:schemeClr val="accent1">
+              <a:shade val="50000"/>
+            </a:schemeClr>
+          </a:lnRef>
+          <a:fillRef idx="1">
+            <a:schemeClr val="accent1"/>
+          </a:fillRef>
+          <a:effectRef idx="0">
+            <a:schemeClr val="accent1"/>
+          </a:effectRef>
+          <a:fontRef idx="minor">
+            <a:schemeClr val="lt1"/>
+          </a:fontRef>
+        </p:style>
+        <p:txBody>
+          <a:bodyPr rtlCol="0" anchor="t"/>
+          <a:lstStyle/>
+          <a:p>
+            <a:pPr algn="ctr"/>
+            <a:r>
+              <a:rPr lang="de-DE" sz="1200">
+                <a:solidFill>
+                  <a:srgbClr val="405786"/>
+                </a:solidFill>
+              </a:rPr>
+              <a:t>Antworten, Itemdaten,</a:t>
+            </a:r>
+          </a:p>
+          <a:p>
+            <a:pPr algn="ctr"/>
+            <a:r>
+              <a:rPr lang="de-DE" sz="1200">
+                <a:solidFill>
+                  <a:srgbClr val="405786"/>
+                </a:solidFill>
+              </a:rPr>
+              <a:t>Fähigkeits-werte</a:t>
+            </a:r>
+            <a:endParaRPr lang="de-DE" sz="1400">
+              <a:solidFill>
+                <a:srgbClr val="405786"/>
+              </a:solidFill>
+            </a:endParaRPr>
+          </a:p>
+        </p:txBody>
+      </p:sp>
+      <p:sp>
+        <p:nvSpPr>
+          <p:cNvPr id="18" name="Rechteck 17">
+            <a:extLst>
+              <a:ext uri="{FF2B5EF4-FFF2-40B4-BE49-F238E27FC236}">
+                <a16:creationId xmlns:a16="http://schemas.microsoft.com/office/drawing/2014/main" id="{7EFAB975-7544-FB8E-1E76-1F47B4DB4A1E}"/>
+              </a:ext>
+            </a:extLst>
+          </p:cNvPr>
+          <p:cNvSpPr/>
+          <p:nvPr/>
+        </p:nvSpPr>
+        <p:spPr>
+          <a:xfrm>
+            <a:off x="4458697" y="3888327"/>
+            <a:ext cx="866143" cy="456162"/>
+          </a:xfrm>
+          <a:prstGeom prst="rect">
+            <a:avLst/>
+          </a:prstGeom>
+          <a:noFill/>
+          <a:ln>
+            <a:noFill/>
+          </a:ln>
+        </p:spPr>
+        <p:style>
+          <a:lnRef idx="2">
+            <a:schemeClr val="accent1">
+              <a:shade val="50000"/>
+            </a:schemeClr>
+          </a:lnRef>
+          <a:fillRef idx="1">
+            <a:schemeClr val="accent1"/>
+          </a:fillRef>
+          <a:effectRef idx="0">
+            <a:schemeClr val="accent1"/>
+          </a:effectRef>
+          <a:fontRef idx="minor">
+            <a:schemeClr val="lt1"/>
+          </a:fontRef>
+        </p:style>
+        <p:txBody>
+          <a:bodyPr rtlCol="0" anchor="t"/>
+          <a:lstStyle/>
+          <a:p>
+            <a:pPr algn="ctr"/>
+            <a:r>
+              <a:rPr lang="de-DE" sz="1200">
+                <a:solidFill>
+                  <a:srgbClr val="405786"/>
+                </a:solidFill>
+              </a:rPr>
+              <a:t>Item-kennwerte</a:t>
+            </a:r>
+            <a:endParaRPr lang="de-DE" sz="1400">
+              <a:solidFill>
+                <a:srgbClr val="405786"/>
+              </a:solidFill>
+            </a:endParaRPr>
+          </a:p>
+        </p:txBody>
+      </p:sp>
+      <p:sp>
+        <p:nvSpPr>
+          <p:cNvPr id="19" name="Rechteck 18">
+            <a:extLst>
+              <a:ext uri="{FF2B5EF4-FFF2-40B4-BE49-F238E27FC236}">
+                <a16:creationId xmlns:a16="http://schemas.microsoft.com/office/drawing/2014/main" id="{50A89E02-51E0-1E69-76B2-B5EFA4D16E9D}"/>
+              </a:ext>
+            </a:extLst>
+          </p:cNvPr>
+          <p:cNvSpPr/>
+          <p:nvPr/>
+        </p:nvSpPr>
+        <p:spPr>
+          <a:xfrm>
+            <a:off x="2931072" y="4258006"/>
+            <a:ext cx="835184" cy="317898"/>
+          </a:xfrm>
+          <a:prstGeom prst="rect">
+            <a:avLst/>
+          </a:prstGeom>
+          <a:noFill/>
+          <a:ln>
+            <a:noFill/>
+          </a:ln>
+        </p:spPr>
+        <p:style>
+          <a:lnRef idx="2">
+            <a:schemeClr val="accent1">
+              <a:shade val="50000"/>
+            </a:schemeClr>
+          </a:lnRef>
+          <a:fillRef idx="1">
+            <a:schemeClr val="accent1"/>
+          </a:fillRef>
+          <a:effectRef idx="0">
+            <a:schemeClr val="accent1"/>
+          </a:effectRef>
+          <a:fontRef idx="minor">
+            <a:schemeClr val="lt1"/>
+          </a:fontRef>
+        </p:style>
+        <p:txBody>
+          <a:bodyPr rtlCol="0" anchor="t"/>
+          <a:lstStyle/>
+          <a:p>
+            <a:pPr algn="ctr"/>
+            <a:r>
+              <a:rPr lang="de-DE" sz="1200">
+                <a:solidFill>
+                  <a:srgbClr val="405786"/>
+                </a:solidFill>
+              </a:rPr>
+              <a:t>Aufgaben-UI</a:t>
+            </a:r>
+            <a:endParaRPr lang="de-DE" sz="1400">
+              <a:solidFill>
+                <a:srgbClr val="405786"/>
+              </a:solidFill>
+            </a:endParaRPr>
+          </a:p>
+        </p:txBody>
+      </p:sp>
+      <p:sp>
+        <p:nvSpPr>
+          <p:cNvPr id="20" name="Pfeil: nach rechts 19">
+            <a:extLst>
+              <a:ext uri="{FF2B5EF4-FFF2-40B4-BE49-F238E27FC236}">
+                <a16:creationId xmlns:a16="http://schemas.microsoft.com/office/drawing/2014/main" id="{B39DAA76-38F0-1AF7-02A1-8357E9AB6455}"/>
+              </a:ext>
+            </a:extLst>
+          </p:cNvPr>
+          <p:cNvSpPr/>
+          <p:nvPr/>
+        </p:nvSpPr>
+        <p:spPr>
+          <a:xfrm rot="3850881" flipH="1" flipV="1">
+            <a:off x="3013385" y="4500352"/>
+            <a:ext cx="1822517" cy="194103"/>
+          </a:xfrm>
+          <a:prstGeom prst="rightArrow">
+            <a:avLst/>
+          </a:prstGeom>
+          <a:solidFill>
+            <a:srgbClr val="D6DCE5"/>
+          </a:solidFill>
+          <a:ln>
+            <a:noFill/>
+          </a:ln>
+        </p:spPr>
+        <p:style>
+          <a:lnRef idx="2">
+            <a:schemeClr val="accent1">
+              <a:shade val="50000"/>
+            </a:schemeClr>
+          </a:lnRef>
+          <a:fillRef idx="1">
+            <a:schemeClr val="accent1"/>
+          </a:fillRef>
+          <a:effectRef idx="0">
+            <a:schemeClr val="accent1"/>
+          </a:effectRef>
+          <a:fontRef idx="minor">
+            <a:schemeClr val="lt1"/>
+          </a:fontRef>
+        </p:style>
+        <p:txBody>
+          <a:bodyPr rtlCol="0" anchor="ctr"/>
+          <a:lstStyle/>
+          <a:p>
+            <a:pPr algn="ctr"/>
+            <a:endParaRPr lang="de-DE"/>
+          </a:p>
+        </p:txBody>
+      </p:sp>
+      <p:sp>
+        <p:nvSpPr>
+          <p:cNvPr id="23" name="Rechteck 22">
+            <a:extLst>
+              <a:ext uri="{FF2B5EF4-FFF2-40B4-BE49-F238E27FC236}">
+                <a16:creationId xmlns:a16="http://schemas.microsoft.com/office/drawing/2014/main" id="{28E18734-A6B0-4784-F175-872BFD92F14A}"/>
+              </a:ext>
+            </a:extLst>
+          </p:cNvPr>
+          <p:cNvSpPr/>
+          <p:nvPr/>
+        </p:nvSpPr>
+        <p:spPr>
+          <a:xfrm>
+            <a:off x="3381969" y="4578226"/>
+            <a:ext cx="1102995" cy="287136"/>
+          </a:xfrm>
+          <a:prstGeom prst="rect">
+            <a:avLst/>
+          </a:prstGeom>
+          <a:noFill/>
+          <a:ln>
+            <a:noFill/>
+          </a:ln>
+        </p:spPr>
+        <p:style>
+          <a:lnRef idx="2">
+            <a:schemeClr val="accent1">
+              <a:shade val="50000"/>
+            </a:schemeClr>
+          </a:lnRef>
+          <a:fillRef idx="1">
+            <a:schemeClr val="accent1"/>
+          </a:fillRef>
+          <a:effectRef idx="0">
+            <a:schemeClr val="accent1"/>
+          </a:effectRef>
+          <a:fontRef idx="minor">
+            <a:schemeClr val="lt1"/>
+          </a:fontRef>
+        </p:style>
+        <p:txBody>
+          <a:bodyPr rtlCol="0" anchor="t"/>
+          <a:lstStyle/>
+          <a:p>
+            <a:pPr algn="ctr"/>
+            <a:r>
+              <a:rPr lang="de-DE" sz="1200">
+                <a:solidFill>
+                  <a:srgbClr val="405786"/>
+                </a:solidFill>
+              </a:rPr>
+              <a:t>Kodierschema</a:t>
+            </a:r>
+            <a:endParaRPr lang="de-DE" sz="1400">
+              <a:solidFill>
+                <a:srgbClr val="405786"/>
+              </a:solidFill>
+            </a:endParaRPr>
+          </a:p>
+        </p:txBody>
+      </p:sp>
+      <p:sp>
+        <p:nvSpPr>
+          <p:cNvPr id="8" name="Rechteck: abgerundete Ecken 7">
+            <a:extLst>
+              <a:ext uri="{FF2B5EF4-FFF2-40B4-BE49-F238E27FC236}">
+                <a16:creationId xmlns:a16="http://schemas.microsoft.com/office/drawing/2014/main" id="{C650F3AC-0BB7-413D-9A58-24EF66CF2B4F}"/>
+              </a:ext>
+            </a:extLst>
+          </p:cNvPr>
+          <p:cNvSpPr/>
+          <p:nvPr/>
+        </p:nvSpPr>
+        <p:spPr>
+          <a:xfrm>
+            <a:off x="3784333" y="5342179"/>
+            <a:ext cx="1676257" cy="318109"/>
+          </a:xfrm>
+          <a:prstGeom prst="roundRect">
+            <a:avLst/>
+          </a:prstGeom>
+          <a:solidFill>
+            <a:srgbClr val="405786"/>
+          </a:solidFill>
+          <a:ln>
+            <a:noFill/>
+          </a:ln>
+        </p:spPr>
+        <p:style>
+          <a:lnRef idx="2">
+            <a:schemeClr val="accent1">
+              <a:shade val="50000"/>
+            </a:schemeClr>
+          </a:lnRef>
+          <a:fillRef idx="1">
+            <a:schemeClr val="accent1"/>
+          </a:fillRef>
+          <a:effectRef idx="0">
+            <a:schemeClr val="accent1"/>
+          </a:effectRef>
+          <a:fontRef idx="minor">
+            <a:schemeClr val="lt1"/>
+          </a:fontRef>
+        </p:style>
+        <p:txBody>
+          <a:bodyPr rtlCol="0" anchor="ctr"/>
+          <a:lstStyle/>
+          <a:p>
+            <a:pPr algn="ctr"/>
+            <a:r>
+              <a:rPr lang="de-DE" sz="1200"/>
+              <a:t>IQB-KodierBox</a:t>
+            </a:r>
+          </a:p>
+        </p:txBody>
+      </p:sp>
+      <p:sp>
+        <p:nvSpPr>
+          <p:cNvPr id="24" name="Rechteck: abgerundete Ecken 23">
+            <a:extLst>
+              <a:ext uri="{FF2B5EF4-FFF2-40B4-BE49-F238E27FC236}">
+                <a16:creationId xmlns:a16="http://schemas.microsoft.com/office/drawing/2014/main" id="{3773FEF8-5DEB-241E-0E5B-41E0CE987629}"/>
+              </a:ext>
+            </a:extLst>
+          </p:cNvPr>
+          <p:cNvSpPr/>
+          <p:nvPr/>
+        </p:nvSpPr>
+        <p:spPr>
+          <a:xfrm>
+            <a:off x="1627699" y="3228501"/>
+            <a:ext cx="3365128" cy="528923"/>
+          </a:xfrm>
+          <a:prstGeom prst="roundRect">
+            <a:avLst/>
+          </a:prstGeom>
+          <a:solidFill>
+            <a:srgbClr val="405786"/>
+          </a:solidFill>
+          <a:ln>
+            <a:noFill/>
+          </a:ln>
+        </p:spPr>
+        <p:style>
+          <a:lnRef idx="2">
+            <a:schemeClr val="accent1">
+              <a:shade val="50000"/>
+            </a:schemeClr>
+          </a:lnRef>
+          <a:fillRef idx="1">
+            <a:schemeClr val="accent1"/>
+          </a:fillRef>
+          <a:effectRef idx="0">
+            <a:schemeClr val="accent1"/>
+          </a:effectRef>
+          <a:fontRef idx="minor">
+            <a:schemeClr val="lt1"/>
+          </a:fontRef>
+        </p:style>
+        <p:txBody>
+          <a:bodyPr rtlCol="0" anchor="ctr"/>
+          <a:lstStyle/>
+          <a:p>
+            <a:pPr algn="ctr"/>
+            <a:r>
+              <a:rPr lang="de-DE" sz="1600"/>
+              <a:t>IQB-ContentHub</a:t>
+            </a:r>
+          </a:p>
+        </p:txBody>
+      </p:sp>
+    </p:spTree>
+    <p:extLst>
+      <p:ext uri="{BB962C8B-B14F-4D97-AF65-F5344CB8AC3E}">
+        <p14:creationId xmlns:p14="http://schemas.microsoft.com/office/powerpoint/2010/main" val="3370356040"/>
       </p:ext>
     </p:extLst>
   </p:cSld>

--- a/assets/figures.pptx
+++ b/assets/figures.pptx
@@ -252,7 +252,7 @@
           <a:p>
             <a:fld id="{C07B6569-5EFF-41A8-B6CB-39864A9A9501}" type="datetimeFigureOut">
               <a:rPr lang="de-DE" smtClean="0"/>
-              <a:t>23.09.2026</a:t>
+              <a:t>24.09.2026</a:t>
             </a:fld>
             <a:endParaRPr lang="de-DE"/>
           </a:p>
@@ -422,7 +422,7 @@
           <a:p>
             <a:fld id="{C07B6569-5EFF-41A8-B6CB-39864A9A9501}" type="datetimeFigureOut">
               <a:rPr lang="de-DE" smtClean="0"/>
-              <a:t>23.09.2026</a:t>
+              <a:t>24.09.2026</a:t>
             </a:fld>
             <a:endParaRPr lang="de-DE"/>
           </a:p>
@@ -602,7 +602,7 @@
           <a:p>
             <a:fld id="{C07B6569-5EFF-41A8-B6CB-39864A9A9501}" type="datetimeFigureOut">
               <a:rPr lang="de-DE" smtClean="0"/>
-              <a:t>23.09.2026</a:t>
+              <a:t>24.09.2026</a:t>
             </a:fld>
             <a:endParaRPr lang="de-DE"/>
           </a:p>
@@ -849,7 +849,7 @@
           <a:p>
             <a:fld id="{C07B6569-5EFF-41A8-B6CB-39864A9A9501}" type="datetimeFigureOut">
               <a:rPr lang="de-DE" smtClean="0"/>
-              <a:t>23.09.2026</a:t>
+              <a:t>24.09.2026</a:t>
             </a:fld>
             <a:endParaRPr lang="de-DE"/>
           </a:p>
@@ -1093,7 +1093,7 @@
           <a:p>
             <a:fld id="{C07B6569-5EFF-41A8-B6CB-39864A9A9501}" type="datetimeFigureOut">
               <a:rPr lang="de-DE" smtClean="0"/>
-              <a:t>23.09.2026</a:t>
+              <a:t>24.09.2026</a:t>
             </a:fld>
             <a:endParaRPr lang="de-DE"/>
           </a:p>
@@ -1325,7 +1325,7 @@
           <a:p>
             <a:fld id="{C07B6569-5EFF-41A8-B6CB-39864A9A9501}" type="datetimeFigureOut">
               <a:rPr lang="de-DE" smtClean="0"/>
-              <a:t>23.09.2026</a:t>
+              <a:t>24.09.2026</a:t>
             </a:fld>
             <a:endParaRPr lang="de-DE"/>
           </a:p>
@@ -1692,7 +1692,7 @@
           <a:p>
             <a:fld id="{C07B6569-5EFF-41A8-B6CB-39864A9A9501}" type="datetimeFigureOut">
               <a:rPr lang="de-DE" smtClean="0"/>
-              <a:t>23.09.2026</a:t>
+              <a:t>24.09.2026</a:t>
             </a:fld>
             <a:endParaRPr lang="de-DE"/>
           </a:p>
@@ -1810,7 +1810,7 @@
           <a:p>
             <a:fld id="{C07B6569-5EFF-41A8-B6CB-39864A9A9501}" type="datetimeFigureOut">
               <a:rPr lang="de-DE" smtClean="0"/>
-              <a:t>23.09.2026</a:t>
+              <a:t>24.09.2026</a:t>
             </a:fld>
             <a:endParaRPr lang="de-DE"/>
           </a:p>
@@ -1905,7 +1905,7 @@
           <a:p>
             <a:fld id="{C07B6569-5EFF-41A8-B6CB-39864A9A9501}" type="datetimeFigureOut">
               <a:rPr lang="de-DE" smtClean="0"/>
-              <a:t>23.09.2026</a:t>
+              <a:t>24.09.2026</a:t>
             </a:fld>
             <a:endParaRPr lang="de-DE"/>
           </a:p>
@@ -2182,7 +2182,7 @@
           <a:p>
             <a:fld id="{C07B6569-5EFF-41A8-B6CB-39864A9A9501}" type="datetimeFigureOut">
               <a:rPr lang="de-DE" smtClean="0"/>
-              <a:t>23.09.2026</a:t>
+              <a:t>24.09.2026</a:t>
             </a:fld>
             <a:endParaRPr lang="de-DE"/>
           </a:p>
@@ -2439,7 +2439,7 @@
           <a:p>
             <a:fld id="{C07B6569-5EFF-41A8-B6CB-39864A9A9501}" type="datetimeFigureOut">
               <a:rPr lang="de-DE" smtClean="0"/>
-              <a:t>23.09.2026</a:t>
+              <a:t>24.09.2026</a:t>
             </a:fld>
             <a:endParaRPr lang="de-DE"/>
           </a:p>
@@ -2652,7 +2652,7 @@
           <a:p>
             <a:fld id="{C07B6569-5EFF-41A8-B6CB-39864A9A9501}" type="datetimeFigureOut">
               <a:rPr lang="de-DE" smtClean="0"/>
-              <a:t>23.09.2026</a:t>
+              <a:t>24.09.2026</a:t>
             </a:fld>
             <a:endParaRPr lang="de-DE"/>
           </a:p>
@@ -3390,7 +3390,7 @@
                   <a:srgbClr val="405786"/>
                 </a:solidFill>
               </a:rPr>
-              <a:t>eatTBA</a:t>
+              <a:t>eatPrepTBA</a:t>
             </a:r>
             <a:endParaRPr lang="de-DE" sz="1400">
               <a:solidFill>
@@ -14886,7 +14886,7 @@
                   <a:schemeClr val="tx1"/>
                 </a:solidFill>
               </a:rPr>
-              <a:t>eatTBA</a:t>
+              <a:t>eatPrepTBA</a:t>
             </a:r>
           </a:p>
         </p:txBody>

--- a/assets/figures.pptx
+++ b/assets/figures.pptx
@@ -3352,8 +3352,8 @@
         </p:nvSpPr>
         <p:spPr>
           <a:xfrm>
-            <a:off x="3374531" y="2525788"/>
-            <a:ext cx="866143" cy="293752"/>
+            <a:off x="3348893" y="2525788"/>
+            <a:ext cx="917420" cy="293752"/>
           </a:xfrm>
           <a:prstGeom prst="rect">
             <a:avLst/>

--- a/assets/figures.pptx
+++ b/assets/figures.pptx
@@ -10,11 +10,12 @@
     <p:sldId id="258" r:id="rId4"/>
     <p:sldId id="263" r:id="rId5"/>
     <p:sldId id="259" r:id="rId6"/>
-    <p:sldId id="261" r:id="rId7"/>
-    <p:sldId id="262" r:id="rId8"/>
-    <p:sldId id="260" r:id="rId9"/>
-    <p:sldId id="265" r:id="rId10"/>
-    <p:sldId id="266" r:id="rId11"/>
+    <p:sldId id="267" r:id="rId7"/>
+    <p:sldId id="261" r:id="rId8"/>
+    <p:sldId id="262" r:id="rId9"/>
+    <p:sldId id="260" r:id="rId10"/>
+    <p:sldId id="265" r:id="rId11"/>
+    <p:sldId id="266" r:id="rId12"/>
   </p:sldIdLst>
   <p:sldSz cx="6858000" cy="9144000" type="screen4x3"/>
   <p:notesSz cx="6858000" cy="9144000"/>
@@ -252,7 +253,7 @@
           <a:p>
             <a:fld id="{C07B6569-5EFF-41A8-B6CB-39864A9A9501}" type="datetimeFigureOut">
               <a:rPr lang="de-DE" smtClean="0"/>
-              <a:t>24.09.2026</a:t>
+              <a:t>26.09.2026</a:t>
             </a:fld>
             <a:endParaRPr lang="de-DE"/>
           </a:p>
@@ -422,7 +423,7 @@
           <a:p>
             <a:fld id="{C07B6569-5EFF-41A8-B6CB-39864A9A9501}" type="datetimeFigureOut">
               <a:rPr lang="de-DE" smtClean="0"/>
-              <a:t>24.09.2026</a:t>
+              <a:t>26.09.2026</a:t>
             </a:fld>
             <a:endParaRPr lang="de-DE"/>
           </a:p>
@@ -602,7 +603,7 @@
           <a:p>
             <a:fld id="{C07B6569-5EFF-41A8-B6CB-39864A9A9501}" type="datetimeFigureOut">
               <a:rPr lang="de-DE" smtClean="0"/>
-              <a:t>24.09.2026</a:t>
+              <a:t>26.09.2026</a:t>
             </a:fld>
             <a:endParaRPr lang="de-DE"/>
           </a:p>
@@ -849,7 +850,7 @@
           <a:p>
             <a:fld id="{C07B6569-5EFF-41A8-B6CB-39864A9A9501}" type="datetimeFigureOut">
               <a:rPr lang="de-DE" smtClean="0"/>
-              <a:t>24.09.2026</a:t>
+              <a:t>26.09.2026</a:t>
             </a:fld>
             <a:endParaRPr lang="de-DE"/>
           </a:p>
@@ -1093,7 +1094,7 @@
           <a:p>
             <a:fld id="{C07B6569-5EFF-41A8-B6CB-39864A9A9501}" type="datetimeFigureOut">
               <a:rPr lang="de-DE" smtClean="0"/>
-              <a:t>24.09.2026</a:t>
+              <a:t>26.09.2026</a:t>
             </a:fld>
             <a:endParaRPr lang="de-DE"/>
           </a:p>
@@ -1325,7 +1326,7 @@
           <a:p>
             <a:fld id="{C07B6569-5EFF-41A8-B6CB-39864A9A9501}" type="datetimeFigureOut">
               <a:rPr lang="de-DE" smtClean="0"/>
-              <a:t>24.09.2026</a:t>
+              <a:t>26.09.2026</a:t>
             </a:fld>
             <a:endParaRPr lang="de-DE"/>
           </a:p>
@@ -1692,7 +1693,7 @@
           <a:p>
             <a:fld id="{C07B6569-5EFF-41A8-B6CB-39864A9A9501}" type="datetimeFigureOut">
               <a:rPr lang="de-DE" smtClean="0"/>
-              <a:t>24.09.2026</a:t>
+              <a:t>26.09.2026</a:t>
             </a:fld>
             <a:endParaRPr lang="de-DE"/>
           </a:p>
@@ -1810,7 +1811,7 @@
           <a:p>
             <a:fld id="{C07B6569-5EFF-41A8-B6CB-39864A9A9501}" type="datetimeFigureOut">
               <a:rPr lang="de-DE" smtClean="0"/>
-              <a:t>24.09.2026</a:t>
+              <a:t>26.09.2026</a:t>
             </a:fld>
             <a:endParaRPr lang="de-DE"/>
           </a:p>
@@ -1905,7 +1906,7 @@
           <a:p>
             <a:fld id="{C07B6569-5EFF-41A8-B6CB-39864A9A9501}" type="datetimeFigureOut">
               <a:rPr lang="de-DE" smtClean="0"/>
-              <a:t>24.09.2026</a:t>
+              <a:t>26.09.2026</a:t>
             </a:fld>
             <a:endParaRPr lang="de-DE"/>
           </a:p>
@@ -2182,7 +2183,7 @@
           <a:p>
             <a:fld id="{C07B6569-5EFF-41A8-B6CB-39864A9A9501}" type="datetimeFigureOut">
               <a:rPr lang="de-DE" smtClean="0"/>
-              <a:t>24.09.2026</a:t>
+              <a:t>26.09.2026</a:t>
             </a:fld>
             <a:endParaRPr lang="de-DE"/>
           </a:p>
@@ -2439,7 +2440,7 @@
           <a:p>
             <a:fld id="{C07B6569-5EFF-41A8-B6CB-39864A9A9501}" type="datetimeFigureOut">
               <a:rPr lang="de-DE" smtClean="0"/>
-              <a:t>24.09.2026</a:t>
+              <a:t>26.09.2026</a:t>
             </a:fld>
             <a:endParaRPr lang="de-DE"/>
           </a:p>
@@ -2652,7 +2653,7 @@
           <a:p>
             <a:fld id="{C07B6569-5EFF-41A8-B6CB-39864A9A9501}" type="datetimeFigureOut">
               <a:rPr lang="de-DE" smtClean="0"/>
-              <a:t>24.09.2026</a:t>
+              <a:t>26.09.2026</a:t>
             </a:fld>
             <a:endParaRPr lang="de-DE"/>
           </a:p>
@@ -3210,6 +3211,1499 @@
       </p:grpSpPr>
       <p:sp>
         <p:nvSpPr>
+          <p:cNvPr id="11" name="Pfeil: nach links und rechts 10">
+            <a:extLst>
+              <a:ext uri="{FF2B5EF4-FFF2-40B4-BE49-F238E27FC236}">
+                <a16:creationId xmlns:a16="http://schemas.microsoft.com/office/drawing/2014/main" id="{B373BB0E-CC21-4468-A11B-DA3B56985F35}"/>
+              </a:ext>
+            </a:extLst>
+          </p:cNvPr>
+          <p:cNvSpPr/>
+          <p:nvPr/>
+        </p:nvSpPr>
+        <p:spPr>
+          <a:xfrm rot="3850881">
+            <a:off x="1968300" y="2627138"/>
+            <a:ext cx="933542" cy="317898"/>
+          </a:xfrm>
+          <a:prstGeom prst="leftRightArrow">
+            <a:avLst/>
+          </a:prstGeom>
+          <a:solidFill>
+            <a:srgbClr val="D6DCE5"/>
+          </a:solidFill>
+          <a:ln>
+            <a:noFill/>
+          </a:ln>
+        </p:spPr>
+        <p:style>
+          <a:lnRef idx="2">
+            <a:schemeClr val="accent1">
+              <a:shade val="50000"/>
+            </a:schemeClr>
+          </a:lnRef>
+          <a:fillRef idx="1">
+            <a:schemeClr val="accent1"/>
+          </a:fillRef>
+          <a:effectRef idx="0">
+            <a:schemeClr val="accent1"/>
+          </a:effectRef>
+          <a:fontRef idx="minor">
+            <a:schemeClr val="lt1"/>
+          </a:fontRef>
+        </p:style>
+        <p:txBody>
+          <a:bodyPr rtlCol="0" anchor="ctr"/>
+          <a:lstStyle/>
+          <a:p>
+            <a:pPr algn="ctr"/>
+            <a:endParaRPr lang="de-DE"/>
+          </a:p>
+        </p:txBody>
+      </p:sp>
+      <p:sp>
+        <p:nvSpPr>
+          <p:cNvPr id="2" name="Titel 1">
+            <a:extLst>
+              <a:ext uri="{FF2B5EF4-FFF2-40B4-BE49-F238E27FC236}">
+                <a16:creationId xmlns:a16="http://schemas.microsoft.com/office/drawing/2014/main" id="{69664993-9ED6-4670-922B-6DCFB75DADAE}"/>
+              </a:ext>
+            </a:extLst>
+          </p:cNvPr>
+          <p:cNvSpPr>
+            <a:spLocks noGrp="1"/>
+          </p:cNvSpPr>
+          <p:nvPr>
+            <p:ph type="title"/>
+          </p:nvPr>
+        </p:nvSpPr>
+        <p:spPr/>
+        <p:txBody>
+          <a:bodyPr/>
+          <a:lstStyle/>
+          <a:p>
+            <a:r>
+              <a:rPr lang="de-DE"/>
+              <a:t>content-hub1.png</a:t>
+            </a:r>
+          </a:p>
+        </p:txBody>
+      </p:sp>
+      <p:sp>
+        <p:nvSpPr>
+          <p:cNvPr id="10" name="Rechteck 9">
+            <a:extLst>
+              <a:ext uri="{FF2B5EF4-FFF2-40B4-BE49-F238E27FC236}">
+                <a16:creationId xmlns:a16="http://schemas.microsoft.com/office/drawing/2014/main" id="{719FAA75-2688-4E1B-A8A9-97CF000C9D32}"/>
+              </a:ext>
+            </a:extLst>
+          </p:cNvPr>
+          <p:cNvSpPr/>
+          <p:nvPr/>
+        </p:nvSpPr>
+        <p:spPr>
+          <a:xfrm>
+            <a:off x="1868815" y="2604283"/>
+            <a:ext cx="912402" cy="256528"/>
+          </a:xfrm>
+          <a:prstGeom prst="rect">
+            <a:avLst/>
+          </a:prstGeom>
+          <a:noFill/>
+          <a:ln>
+            <a:noFill/>
+          </a:ln>
+        </p:spPr>
+        <p:style>
+          <a:lnRef idx="2">
+            <a:schemeClr val="accent1">
+              <a:shade val="50000"/>
+            </a:schemeClr>
+          </a:lnRef>
+          <a:fillRef idx="1">
+            <a:schemeClr val="accent1"/>
+          </a:fillRef>
+          <a:effectRef idx="0">
+            <a:schemeClr val="accent1"/>
+          </a:effectRef>
+          <a:fontRef idx="minor">
+            <a:schemeClr val="lt1"/>
+          </a:fontRef>
+        </p:style>
+        <p:txBody>
+          <a:bodyPr rtlCol="0" anchor="t"/>
+          <a:lstStyle/>
+          <a:p>
+            <a:pPr algn="ctr"/>
+            <a:r>
+              <a:rPr lang="de-DE" sz="1200">
+                <a:solidFill>
+                  <a:srgbClr val="405786"/>
+                </a:solidFill>
+              </a:rPr>
+              <a:t>Aufgaben</a:t>
+            </a:r>
+            <a:endParaRPr lang="de-DE" sz="1400">
+              <a:solidFill>
+                <a:srgbClr val="405786"/>
+              </a:solidFill>
+            </a:endParaRPr>
+          </a:p>
+        </p:txBody>
+      </p:sp>
+      <p:sp>
+        <p:nvSpPr>
+          <p:cNvPr id="22" name="Pfeil: nach rechts 21">
+            <a:extLst>
+              <a:ext uri="{FF2B5EF4-FFF2-40B4-BE49-F238E27FC236}">
+                <a16:creationId xmlns:a16="http://schemas.microsoft.com/office/drawing/2014/main" id="{F0ED9A78-65FF-4184-87C8-D2B65CA89911}"/>
+              </a:ext>
+            </a:extLst>
+          </p:cNvPr>
+          <p:cNvSpPr/>
+          <p:nvPr/>
+        </p:nvSpPr>
+        <p:spPr>
+          <a:xfrm>
+            <a:off x="2435072" y="5342284"/>
+            <a:ext cx="1349261" cy="317898"/>
+          </a:xfrm>
+          <a:prstGeom prst="rightArrow">
+            <a:avLst/>
+          </a:prstGeom>
+          <a:solidFill>
+            <a:srgbClr val="D6DCE5"/>
+          </a:solidFill>
+          <a:ln>
+            <a:noFill/>
+          </a:ln>
+        </p:spPr>
+        <p:style>
+          <a:lnRef idx="2">
+            <a:schemeClr val="accent1">
+              <a:shade val="50000"/>
+            </a:schemeClr>
+          </a:lnRef>
+          <a:fillRef idx="1">
+            <a:schemeClr val="accent1"/>
+          </a:fillRef>
+          <a:effectRef idx="0">
+            <a:schemeClr val="accent1"/>
+          </a:effectRef>
+          <a:fontRef idx="minor">
+            <a:schemeClr val="lt1"/>
+          </a:fontRef>
+        </p:style>
+        <p:txBody>
+          <a:bodyPr rtlCol="0" anchor="ctr"/>
+          <a:lstStyle/>
+          <a:p>
+            <a:pPr algn="ctr"/>
+            <a:endParaRPr lang="de-DE"/>
+          </a:p>
+        </p:txBody>
+      </p:sp>
+      <p:sp>
+        <p:nvSpPr>
+          <p:cNvPr id="25" name="Pfeil: nach links 24">
+            <a:extLst>
+              <a:ext uri="{FF2B5EF4-FFF2-40B4-BE49-F238E27FC236}">
+                <a16:creationId xmlns:a16="http://schemas.microsoft.com/office/drawing/2014/main" id="{753FC8FE-F56E-45C4-9E72-DDBA99836111}"/>
+              </a:ext>
+            </a:extLst>
+          </p:cNvPr>
+          <p:cNvSpPr/>
+          <p:nvPr/>
+        </p:nvSpPr>
+        <p:spPr>
+          <a:xfrm rot="17749119" flipH="1">
+            <a:off x="3210439" y="2686662"/>
+            <a:ext cx="1065792" cy="317898"/>
+          </a:xfrm>
+          <a:prstGeom prst="leftArrow">
+            <a:avLst/>
+          </a:prstGeom>
+          <a:solidFill>
+            <a:srgbClr val="D6DCE5"/>
+          </a:solidFill>
+          <a:ln>
+            <a:noFill/>
+          </a:ln>
+        </p:spPr>
+        <p:style>
+          <a:lnRef idx="2">
+            <a:schemeClr val="accent1">
+              <a:shade val="50000"/>
+            </a:schemeClr>
+          </a:lnRef>
+          <a:fillRef idx="1">
+            <a:schemeClr val="accent1"/>
+          </a:fillRef>
+          <a:effectRef idx="0">
+            <a:schemeClr val="accent1"/>
+          </a:effectRef>
+          <a:fontRef idx="minor">
+            <a:schemeClr val="lt1"/>
+          </a:fontRef>
+        </p:style>
+        <p:txBody>
+          <a:bodyPr rtlCol="0" anchor="ctr"/>
+          <a:lstStyle/>
+          <a:p>
+            <a:pPr algn="ctr"/>
+            <a:endParaRPr lang="de-DE"/>
+          </a:p>
+        </p:txBody>
+      </p:sp>
+      <p:sp>
+        <p:nvSpPr>
+          <p:cNvPr id="4" name="Rechteck: abgerundete Ecken 3">
+            <a:extLst>
+              <a:ext uri="{FF2B5EF4-FFF2-40B4-BE49-F238E27FC236}">
+                <a16:creationId xmlns:a16="http://schemas.microsoft.com/office/drawing/2014/main" id="{1D19F10A-674D-4908-9A18-FDAD3BD7BEDC}"/>
+              </a:ext>
+            </a:extLst>
+          </p:cNvPr>
+          <p:cNvSpPr/>
+          <p:nvPr/>
+        </p:nvSpPr>
+        <p:spPr>
+          <a:xfrm>
+            <a:off x="1365847" y="2044000"/>
+            <a:ext cx="1676257" cy="318109"/>
+          </a:xfrm>
+          <a:prstGeom prst="roundRect">
+            <a:avLst/>
+          </a:prstGeom>
+          <a:solidFill>
+            <a:srgbClr val="405786"/>
+          </a:solidFill>
+          <a:ln>
+            <a:noFill/>
+          </a:ln>
+        </p:spPr>
+        <p:style>
+          <a:lnRef idx="2">
+            <a:schemeClr val="accent1">
+              <a:shade val="50000"/>
+            </a:schemeClr>
+          </a:lnRef>
+          <a:fillRef idx="1">
+            <a:schemeClr val="accent1"/>
+          </a:fillRef>
+          <a:effectRef idx="0">
+            <a:schemeClr val="accent1"/>
+          </a:effectRef>
+          <a:fontRef idx="minor">
+            <a:schemeClr val="lt1"/>
+          </a:fontRef>
+        </p:style>
+        <p:txBody>
+          <a:bodyPr rtlCol="0" anchor="ctr"/>
+          <a:lstStyle/>
+          <a:p>
+            <a:pPr algn="ctr"/>
+            <a:r>
+              <a:rPr lang="de-DE" sz="1200"/>
+              <a:t>IQB-Studio</a:t>
+            </a:r>
+          </a:p>
+        </p:txBody>
+      </p:sp>
+      <p:sp>
+        <p:nvSpPr>
+          <p:cNvPr id="6" name="Rechteck: abgerundete Ecken 5">
+            <a:extLst>
+              <a:ext uri="{FF2B5EF4-FFF2-40B4-BE49-F238E27FC236}">
+                <a16:creationId xmlns:a16="http://schemas.microsoft.com/office/drawing/2014/main" id="{2B3200A0-8EF8-4FFF-B02C-41172859B333}"/>
+              </a:ext>
+            </a:extLst>
+          </p:cNvPr>
+          <p:cNvSpPr/>
+          <p:nvPr/>
+        </p:nvSpPr>
+        <p:spPr>
+          <a:xfrm>
+            <a:off x="3408092" y="2038168"/>
+            <a:ext cx="1800154" cy="318109"/>
+          </a:xfrm>
+          <a:prstGeom prst="roundRect">
+            <a:avLst/>
+          </a:prstGeom>
+          <a:solidFill>
+            <a:schemeClr val="bg1"/>
+          </a:solidFill>
+          <a:ln>
+            <a:solidFill>
+              <a:schemeClr val="tx1"/>
+            </a:solidFill>
+          </a:ln>
+        </p:spPr>
+        <p:style>
+          <a:lnRef idx="2">
+            <a:schemeClr val="accent1">
+              <a:shade val="50000"/>
+            </a:schemeClr>
+          </a:lnRef>
+          <a:fillRef idx="1">
+            <a:schemeClr val="accent1"/>
+          </a:fillRef>
+          <a:effectRef idx="0">
+            <a:schemeClr val="accent1"/>
+          </a:effectRef>
+          <a:fontRef idx="minor">
+            <a:schemeClr val="lt1"/>
+          </a:fontRef>
+        </p:style>
+        <p:txBody>
+          <a:bodyPr rtlCol="0" anchor="ctr"/>
+          <a:lstStyle/>
+          <a:p>
+            <a:pPr algn="ctr"/>
+            <a:r>
+              <a:rPr lang="de-DE" sz="1200" b="1">
+                <a:solidFill>
+                  <a:schemeClr val="tx1"/>
+                </a:solidFill>
+              </a:rPr>
+              <a:t>Länder-Durchführung</a:t>
+            </a:r>
+          </a:p>
+        </p:txBody>
+      </p:sp>
+      <p:sp>
+        <p:nvSpPr>
+          <p:cNvPr id="13" name="Rechteck 12">
+            <a:extLst>
+              <a:ext uri="{FF2B5EF4-FFF2-40B4-BE49-F238E27FC236}">
+                <a16:creationId xmlns:a16="http://schemas.microsoft.com/office/drawing/2014/main" id="{A96BB776-D63D-43FB-B470-D03AEB0699BD}"/>
+              </a:ext>
+            </a:extLst>
+          </p:cNvPr>
+          <p:cNvSpPr/>
+          <p:nvPr/>
+        </p:nvSpPr>
+        <p:spPr>
+          <a:xfrm>
+            <a:off x="3449000" y="2578246"/>
+            <a:ext cx="1294330" cy="466578"/>
+          </a:xfrm>
+          <a:prstGeom prst="rect">
+            <a:avLst/>
+          </a:prstGeom>
+          <a:noFill/>
+          <a:ln>
+            <a:noFill/>
+          </a:ln>
+        </p:spPr>
+        <p:style>
+          <a:lnRef idx="2">
+            <a:schemeClr val="accent1">
+              <a:shade val="50000"/>
+            </a:schemeClr>
+          </a:lnRef>
+          <a:fillRef idx="1">
+            <a:schemeClr val="accent1"/>
+          </a:fillRef>
+          <a:effectRef idx="0">
+            <a:schemeClr val="accent1"/>
+          </a:effectRef>
+          <a:fontRef idx="minor">
+            <a:schemeClr val="lt1"/>
+          </a:fontRef>
+        </p:style>
+        <p:txBody>
+          <a:bodyPr rtlCol="0" anchor="t"/>
+          <a:lstStyle/>
+          <a:p>
+            <a:pPr algn="ctr"/>
+            <a:r>
+              <a:rPr lang="de-DE" sz="1200">
+                <a:solidFill>
+                  <a:srgbClr val="405786"/>
+                </a:solidFill>
+              </a:rPr>
+              <a:t>Assessment Package</a:t>
+            </a:r>
+          </a:p>
+        </p:txBody>
+      </p:sp>
+      <p:sp>
+        <p:nvSpPr>
+          <p:cNvPr id="29" name="Pfeil: nach rechts 28">
+            <a:extLst>
+              <a:ext uri="{FF2B5EF4-FFF2-40B4-BE49-F238E27FC236}">
+                <a16:creationId xmlns:a16="http://schemas.microsoft.com/office/drawing/2014/main" id="{45D89B47-52C5-4AD1-841B-8C552476B40A}"/>
+              </a:ext>
+            </a:extLst>
+          </p:cNvPr>
+          <p:cNvSpPr/>
+          <p:nvPr/>
+        </p:nvSpPr>
+        <p:spPr>
+          <a:xfrm rot="3850881">
+            <a:off x="2651901" y="4344640"/>
+            <a:ext cx="1819310" cy="317898"/>
+          </a:xfrm>
+          <a:prstGeom prst="rightArrow">
+            <a:avLst/>
+          </a:prstGeom>
+          <a:solidFill>
+            <a:srgbClr val="D6DCE5"/>
+          </a:solidFill>
+          <a:ln>
+            <a:noFill/>
+          </a:ln>
+        </p:spPr>
+        <p:style>
+          <a:lnRef idx="2">
+            <a:schemeClr val="accent1">
+              <a:shade val="50000"/>
+            </a:schemeClr>
+          </a:lnRef>
+          <a:fillRef idx="1">
+            <a:schemeClr val="accent1"/>
+          </a:fillRef>
+          <a:effectRef idx="0">
+            <a:schemeClr val="accent1"/>
+          </a:effectRef>
+          <a:fontRef idx="minor">
+            <a:schemeClr val="lt1"/>
+          </a:fontRef>
+        </p:style>
+        <p:txBody>
+          <a:bodyPr rtlCol="0" anchor="ctr"/>
+          <a:lstStyle/>
+          <a:p>
+            <a:pPr algn="ctr"/>
+            <a:endParaRPr lang="de-DE"/>
+          </a:p>
+        </p:txBody>
+      </p:sp>
+      <p:sp>
+        <p:nvSpPr>
+          <p:cNvPr id="30" name="Pfeil: nach rechts 29">
+            <a:extLst>
+              <a:ext uri="{FF2B5EF4-FFF2-40B4-BE49-F238E27FC236}">
+                <a16:creationId xmlns:a16="http://schemas.microsoft.com/office/drawing/2014/main" id="{E948116F-D3FA-490C-B367-80E0CEF4121F}"/>
+              </a:ext>
+            </a:extLst>
+          </p:cNvPr>
+          <p:cNvSpPr/>
+          <p:nvPr/>
+        </p:nvSpPr>
+        <p:spPr>
+          <a:xfrm rot="17749119" flipH="1">
+            <a:off x="1347880" y="4336905"/>
+            <a:ext cx="1836493" cy="317898"/>
+          </a:xfrm>
+          <a:prstGeom prst="rightArrow">
+            <a:avLst/>
+          </a:prstGeom>
+          <a:solidFill>
+            <a:srgbClr val="D6DCE5"/>
+          </a:solidFill>
+          <a:ln>
+            <a:noFill/>
+          </a:ln>
+        </p:spPr>
+        <p:style>
+          <a:lnRef idx="2">
+            <a:schemeClr val="accent1">
+              <a:shade val="50000"/>
+            </a:schemeClr>
+          </a:lnRef>
+          <a:fillRef idx="1">
+            <a:schemeClr val="accent1"/>
+          </a:fillRef>
+          <a:effectRef idx="0">
+            <a:schemeClr val="accent1"/>
+          </a:effectRef>
+          <a:fontRef idx="minor">
+            <a:schemeClr val="lt1"/>
+          </a:fontRef>
+        </p:style>
+        <p:txBody>
+          <a:bodyPr rtlCol="0" anchor="ctr"/>
+          <a:lstStyle/>
+          <a:p>
+            <a:pPr algn="ctr"/>
+            <a:endParaRPr lang="de-DE"/>
+          </a:p>
+        </p:txBody>
+      </p:sp>
+      <p:sp>
+        <p:nvSpPr>
+          <p:cNvPr id="31" name="Pfeil: nach rechts 30">
+            <a:extLst>
+              <a:ext uri="{FF2B5EF4-FFF2-40B4-BE49-F238E27FC236}">
+                <a16:creationId xmlns:a16="http://schemas.microsoft.com/office/drawing/2014/main" id="{7E1AE68B-0EA4-4E51-B712-345F46C22250}"/>
+              </a:ext>
+            </a:extLst>
+          </p:cNvPr>
+          <p:cNvSpPr/>
+          <p:nvPr/>
+        </p:nvSpPr>
+        <p:spPr>
+          <a:xfrm rot="3850881" flipH="1" flipV="1">
+            <a:off x="4325604" y="3972049"/>
+            <a:ext cx="802022" cy="317898"/>
+          </a:xfrm>
+          <a:prstGeom prst="rightArrow">
+            <a:avLst/>
+          </a:prstGeom>
+          <a:solidFill>
+            <a:srgbClr val="D6DCE5"/>
+          </a:solidFill>
+          <a:ln>
+            <a:noFill/>
+          </a:ln>
+        </p:spPr>
+        <p:style>
+          <a:lnRef idx="2">
+            <a:schemeClr val="accent1">
+              <a:shade val="50000"/>
+            </a:schemeClr>
+          </a:lnRef>
+          <a:fillRef idx="1">
+            <a:schemeClr val="accent1"/>
+          </a:fillRef>
+          <a:effectRef idx="0">
+            <a:schemeClr val="accent1"/>
+          </a:effectRef>
+          <a:fontRef idx="minor">
+            <a:schemeClr val="lt1"/>
+          </a:fontRef>
+        </p:style>
+        <p:txBody>
+          <a:bodyPr rtlCol="0" anchor="ctr"/>
+          <a:lstStyle/>
+          <a:p>
+            <a:pPr algn="ctr"/>
+            <a:endParaRPr lang="de-DE"/>
+          </a:p>
+        </p:txBody>
+      </p:sp>
+      <p:sp>
+        <p:nvSpPr>
+          <p:cNvPr id="32" name="Pfeil: nach rechts 31">
+            <a:extLst>
+              <a:ext uri="{FF2B5EF4-FFF2-40B4-BE49-F238E27FC236}">
+                <a16:creationId xmlns:a16="http://schemas.microsoft.com/office/drawing/2014/main" id="{77EB62EE-B0EB-405E-A9E7-31819D74898A}"/>
+              </a:ext>
+            </a:extLst>
+          </p:cNvPr>
+          <p:cNvSpPr/>
+          <p:nvPr/>
+        </p:nvSpPr>
+        <p:spPr>
+          <a:xfrm rot="17749119" flipV="1">
+            <a:off x="4321033" y="4977845"/>
+            <a:ext cx="844595" cy="317898"/>
+          </a:xfrm>
+          <a:prstGeom prst="rightArrow">
+            <a:avLst/>
+          </a:prstGeom>
+          <a:solidFill>
+            <a:srgbClr val="D6DCE5"/>
+          </a:solidFill>
+          <a:ln>
+            <a:noFill/>
+          </a:ln>
+        </p:spPr>
+        <p:style>
+          <a:lnRef idx="2">
+            <a:schemeClr val="accent1">
+              <a:shade val="50000"/>
+            </a:schemeClr>
+          </a:lnRef>
+          <a:fillRef idx="1">
+            <a:schemeClr val="accent1"/>
+          </a:fillRef>
+          <a:effectRef idx="0">
+            <a:schemeClr val="accent1"/>
+          </a:effectRef>
+          <a:fontRef idx="minor">
+            <a:schemeClr val="lt1"/>
+          </a:fontRef>
+        </p:style>
+        <p:txBody>
+          <a:bodyPr rtlCol="0" anchor="ctr"/>
+          <a:lstStyle/>
+          <a:p>
+            <a:pPr algn="ctr"/>
+            <a:endParaRPr lang="de-DE"/>
+          </a:p>
+        </p:txBody>
+      </p:sp>
+      <p:sp>
+        <p:nvSpPr>
+          <p:cNvPr id="17" name="Rechteck 16">
+            <a:extLst>
+              <a:ext uri="{FF2B5EF4-FFF2-40B4-BE49-F238E27FC236}">
+                <a16:creationId xmlns:a16="http://schemas.microsoft.com/office/drawing/2014/main" id="{BBC0748C-9234-4B45-8D10-CBF7EEE1374C}"/>
+              </a:ext>
+            </a:extLst>
+          </p:cNvPr>
+          <p:cNvSpPr/>
+          <p:nvPr/>
+        </p:nvSpPr>
+        <p:spPr>
+          <a:xfrm>
+            <a:off x="2877192" y="5363651"/>
+            <a:ext cx="866143" cy="275164"/>
+          </a:xfrm>
+          <a:prstGeom prst="rect">
+            <a:avLst/>
+          </a:prstGeom>
+          <a:noFill/>
+          <a:ln>
+            <a:noFill/>
+          </a:ln>
+        </p:spPr>
+        <p:style>
+          <a:lnRef idx="2">
+            <a:schemeClr val="accent1">
+              <a:shade val="50000"/>
+            </a:schemeClr>
+          </a:lnRef>
+          <a:fillRef idx="1">
+            <a:schemeClr val="accent1"/>
+          </a:fillRef>
+          <a:effectRef idx="0">
+            <a:schemeClr val="accent1"/>
+          </a:effectRef>
+          <a:fontRef idx="minor">
+            <a:schemeClr val="lt1"/>
+          </a:fontRef>
+        </p:style>
+        <p:txBody>
+          <a:bodyPr rtlCol="0" anchor="t"/>
+          <a:lstStyle/>
+          <a:p>
+            <a:pPr algn="ctr"/>
+            <a:r>
+              <a:rPr lang="de-DE" sz="1200">
+                <a:solidFill>
+                  <a:srgbClr val="405786"/>
+                </a:solidFill>
+              </a:rPr>
+              <a:t>Antworten</a:t>
+            </a:r>
+            <a:endParaRPr lang="de-DE" sz="1400">
+              <a:solidFill>
+                <a:srgbClr val="405786"/>
+              </a:solidFill>
+            </a:endParaRPr>
+          </a:p>
+        </p:txBody>
+      </p:sp>
+      <p:sp>
+        <p:nvSpPr>
+          <p:cNvPr id="15" name="Rechteck 14">
+            <a:extLst>
+              <a:ext uri="{FF2B5EF4-FFF2-40B4-BE49-F238E27FC236}">
+                <a16:creationId xmlns:a16="http://schemas.microsoft.com/office/drawing/2014/main" id="{A5BFC3D8-81AB-4B6E-AC39-A38E82FEDBCA}"/>
+              </a:ext>
+            </a:extLst>
+          </p:cNvPr>
+          <p:cNvSpPr/>
+          <p:nvPr/>
+        </p:nvSpPr>
+        <p:spPr>
+          <a:xfrm>
+            <a:off x="1489393" y="4134614"/>
+            <a:ext cx="912402" cy="493304"/>
+          </a:xfrm>
+          <a:prstGeom prst="rect">
+            <a:avLst/>
+          </a:prstGeom>
+          <a:noFill/>
+          <a:ln>
+            <a:noFill/>
+          </a:ln>
+        </p:spPr>
+        <p:style>
+          <a:lnRef idx="2">
+            <a:schemeClr val="accent1">
+              <a:shade val="50000"/>
+            </a:schemeClr>
+          </a:lnRef>
+          <a:fillRef idx="1">
+            <a:schemeClr val="accent1"/>
+          </a:fillRef>
+          <a:effectRef idx="0">
+            <a:schemeClr val="accent1"/>
+          </a:effectRef>
+          <a:fontRef idx="minor">
+            <a:schemeClr val="lt1"/>
+          </a:fontRef>
+        </p:style>
+        <p:txBody>
+          <a:bodyPr rtlCol="0" anchor="t"/>
+          <a:lstStyle/>
+          <a:p>
+            <a:pPr algn="ctr"/>
+            <a:r>
+              <a:rPr lang="de-DE" sz="1200">
+                <a:solidFill>
+                  <a:srgbClr val="405786"/>
+                </a:solidFill>
+              </a:rPr>
+              <a:t>Aufgaben, Testhefte</a:t>
+            </a:r>
+            <a:endParaRPr lang="de-DE" sz="1400">
+              <a:solidFill>
+                <a:srgbClr val="405786"/>
+              </a:solidFill>
+            </a:endParaRPr>
+          </a:p>
+        </p:txBody>
+      </p:sp>
+      <p:sp>
+        <p:nvSpPr>
+          <p:cNvPr id="7" name="Rechteck: abgerundete Ecken 6">
+            <a:extLst>
+              <a:ext uri="{FF2B5EF4-FFF2-40B4-BE49-F238E27FC236}">
+                <a16:creationId xmlns:a16="http://schemas.microsoft.com/office/drawing/2014/main" id="{CA9A0AFC-CDCE-4998-A4B7-46F43B78EA44}"/>
+              </a:ext>
+            </a:extLst>
+          </p:cNvPr>
+          <p:cNvSpPr/>
+          <p:nvPr/>
+        </p:nvSpPr>
+        <p:spPr>
+          <a:xfrm>
+            <a:off x="1197445" y="5342179"/>
+            <a:ext cx="1676257" cy="318109"/>
+          </a:xfrm>
+          <a:prstGeom prst="roundRect">
+            <a:avLst/>
+          </a:prstGeom>
+          <a:solidFill>
+            <a:srgbClr val="405786"/>
+          </a:solidFill>
+          <a:ln>
+            <a:noFill/>
+          </a:ln>
+        </p:spPr>
+        <p:style>
+          <a:lnRef idx="2">
+            <a:schemeClr val="accent1">
+              <a:shade val="50000"/>
+            </a:schemeClr>
+          </a:lnRef>
+          <a:fillRef idx="1">
+            <a:schemeClr val="accent1"/>
+          </a:fillRef>
+          <a:effectRef idx="0">
+            <a:schemeClr val="accent1"/>
+          </a:effectRef>
+          <a:fontRef idx="minor">
+            <a:schemeClr val="lt1"/>
+          </a:fontRef>
+        </p:style>
+        <p:txBody>
+          <a:bodyPr rtlCol="0" anchor="ctr"/>
+          <a:lstStyle/>
+          <a:p>
+            <a:pPr algn="ctr"/>
+            <a:r>
+              <a:rPr lang="de-DE" sz="1200"/>
+              <a:t>IQB-Testcenter</a:t>
+            </a:r>
+          </a:p>
+        </p:txBody>
+      </p:sp>
+      <p:sp>
+        <p:nvSpPr>
+          <p:cNvPr id="12" name="Flussdiagramm: Magnetplattenspeicher 11">
+            <a:extLst>
+              <a:ext uri="{FF2B5EF4-FFF2-40B4-BE49-F238E27FC236}">
+                <a16:creationId xmlns:a16="http://schemas.microsoft.com/office/drawing/2014/main" id="{F796BA9E-5480-793C-C4A2-8A734E31A83C}"/>
+              </a:ext>
+            </a:extLst>
+          </p:cNvPr>
+          <p:cNvSpPr/>
+          <p:nvPr/>
+        </p:nvSpPr>
+        <p:spPr>
+          <a:xfrm>
+            <a:off x="5148991" y="5845787"/>
+            <a:ext cx="986740" cy="944880"/>
+          </a:xfrm>
+          <a:prstGeom prst="flowChartMagneticDisk">
+            <a:avLst/>
+          </a:prstGeom>
+          <a:solidFill>
+            <a:schemeClr val="bg1"/>
+          </a:solidFill>
+          <a:ln>
+            <a:solidFill>
+              <a:schemeClr val="tx1"/>
+            </a:solidFill>
+          </a:ln>
+        </p:spPr>
+        <p:style>
+          <a:lnRef idx="2">
+            <a:schemeClr val="accent1">
+              <a:shade val="50000"/>
+            </a:schemeClr>
+          </a:lnRef>
+          <a:fillRef idx="1">
+            <a:schemeClr val="accent1"/>
+          </a:fillRef>
+          <a:effectRef idx="0">
+            <a:schemeClr val="accent1"/>
+          </a:effectRef>
+          <a:fontRef idx="minor">
+            <a:schemeClr val="lt1"/>
+          </a:fontRef>
+        </p:style>
+        <p:txBody>
+          <a:bodyPr rtlCol="0" anchor="ctr"/>
+          <a:lstStyle/>
+          <a:p>
+            <a:pPr algn="ctr"/>
+            <a:r>
+              <a:rPr lang="de-DE" sz="1200" b="1">
+                <a:solidFill>
+                  <a:schemeClr val="tx1"/>
+                </a:solidFill>
+              </a:rPr>
+              <a:t>Daten-Archiv</a:t>
+            </a:r>
+          </a:p>
+        </p:txBody>
+      </p:sp>
+      <p:sp>
+        <p:nvSpPr>
+          <p:cNvPr id="3" name="Pfeil: nach rechts 2">
+            <a:extLst>
+              <a:ext uri="{FF2B5EF4-FFF2-40B4-BE49-F238E27FC236}">
+                <a16:creationId xmlns:a16="http://schemas.microsoft.com/office/drawing/2014/main" id="{1079D243-BA3D-E2A7-7F1D-465FB352B90A}"/>
+              </a:ext>
+            </a:extLst>
+          </p:cNvPr>
+          <p:cNvSpPr/>
+          <p:nvPr/>
+        </p:nvSpPr>
+        <p:spPr>
+          <a:xfrm rot="5400000">
+            <a:off x="4864600" y="5159826"/>
+            <a:ext cx="1555523" cy="317898"/>
+          </a:xfrm>
+          <a:prstGeom prst="rightArrow">
+            <a:avLst/>
+          </a:prstGeom>
+          <a:solidFill>
+            <a:srgbClr val="D6DCE5"/>
+          </a:solidFill>
+          <a:ln>
+            <a:noFill/>
+          </a:ln>
+        </p:spPr>
+        <p:style>
+          <a:lnRef idx="2">
+            <a:schemeClr val="accent1">
+              <a:shade val="50000"/>
+            </a:schemeClr>
+          </a:lnRef>
+          <a:fillRef idx="1">
+            <a:schemeClr val="accent1"/>
+          </a:fillRef>
+          <a:effectRef idx="0">
+            <a:schemeClr val="accent1"/>
+          </a:effectRef>
+          <a:fontRef idx="minor">
+            <a:schemeClr val="lt1"/>
+          </a:fontRef>
+        </p:style>
+        <p:txBody>
+          <a:bodyPr rtlCol="0" anchor="ctr"/>
+          <a:lstStyle/>
+          <a:p>
+            <a:pPr algn="ctr"/>
+            <a:endParaRPr lang="de-DE"/>
+          </a:p>
+        </p:txBody>
+      </p:sp>
+      <p:sp>
+        <p:nvSpPr>
+          <p:cNvPr id="9" name="Rechteck: abgerundete Ecken 8">
+            <a:extLst>
+              <a:ext uri="{FF2B5EF4-FFF2-40B4-BE49-F238E27FC236}">
+                <a16:creationId xmlns:a16="http://schemas.microsoft.com/office/drawing/2014/main" id="{F4BB3833-2C2A-4D03-85C1-B048B97B60EA}"/>
+              </a:ext>
+            </a:extLst>
+          </p:cNvPr>
+          <p:cNvSpPr/>
+          <p:nvPr/>
+        </p:nvSpPr>
+        <p:spPr>
+          <a:xfrm>
+            <a:off x="4674826" y="4420930"/>
+            <a:ext cx="1387562" cy="318109"/>
+          </a:xfrm>
+          <a:prstGeom prst="roundRect">
+            <a:avLst/>
+          </a:prstGeom>
+          <a:solidFill>
+            <a:schemeClr val="bg1"/>
+          </a:solidFill>
+          <a:ln>
+            <a:solidFill>
+              <a:schemeClr val="tx1"/>
+            </a:solidFill>
+          </a:ln>
+        </p:spPr>
+        <p:style>
+          <a:lnRef idx="2">
+            <a:schemeClr val="accent1">
+              <a:shade val="50000"/>
+            </a:schemeClr>
+          </a:lnRef>
+          <a:fillRef idx="1">
+            <a:schemeClr val="accent1"/>
+          </a:fillRef>
+          <a:effectRef idx="0">
+            <a:schemeClr val="accent1"/>
+          </a:effectRef>
+          <a:fontRef idx="minor">
+            <a:schemeClr val="lt1"/>
+          </a:fontRef>
+        </p:style>
+        <p:txBody>
+          <a:bodyPr rtlCol="0" anchor="ctr"/>
+          <a:lstStyle/>
+          <a:p>
+            <a:pPr algn="ctr"/>
+            <a:r>
+              <a:rPr lang="de-DE" sz="1200" b="1">
+                <a:solidFill>
+                  <a:schemeClr val="tx1"/>
+                </a:solidFill>
+              </a:rPr>
+              <a:t>eatPrepTBA</a:t>
+            </a:r>
+          </a:p>
+        </p:txBody>
+      </p:sp>
+      <p:sp>
+        <p:nvSpPr>
+          <p:cNvPr id="14" name="Rechteck 13">
+            <a:extLst>
+              <a:ext uri="{FF2B5EF4-FFF2-40B4-BE49-F238E27FC236}">
+                <a16:creationId xmlns:a16="http://schemas.microsoft.com/office/drawing/2014/main" id="{4BA86029-B693-FD41-5370-C38B7BF743FB}"/>
+              </a:ext>
+            </a:extLst>
+          </p:cNvPr>
+          <p:cNvSpPr/>
+          <p:nvPr/>
+        </p:nvSpPr>
+        <p:spPr>
+          <a:xfrm>
+            <a:off x="4330789" y="4878635"/>
+            <a:ext cx="866143" cy="456162"/>
+          </a:xfrm>
+          <a:prstGeom prst="rect">
+            <a:avLst/>
+          </a:prstGeom>
+          <a:noFill/>
+          <a:ln>
+            <a:noFill/>
+          </a:ln>
+        </p:spPr>
+        <p:style>
+          <a:lnRef idx="2">
+            <a:schemeClr val="accent1">
+              <a:shade val="50000"/>
+            </a:schemeClr>
+          </a:lnRef>
+          <a:fillRef idx="1">
+            <a:schemeClr val="accent1"/>
+          </a:fillRef>
+          <a:effectRef idx="0">
+            <a:schemeClr val="accent1"/>
+          </a:effectRef>
+          <a:fontRef idx="minor">
+            <a:schemeClr val="lt1"/>
+          </a:fontRef>
+        </p:style>
+        <p:txBody>
+          <a:bodyPr rtlCol="0" anchor="t"/>
+          <a:lstStyle/>
+          <a:p>
+            <a:pPr algn="ctr"/>
+            <a:r>
+              <a:rPr lang="de-DE" sz="1200">
+                <a:solidFill>
+                  <a:srgbClr val="405786"/>
+                </a:solidFill>
+              </a:rPr>
+              <a:t>kodierte Antworten</a:t>
+            </a:r>
+            <a:endParaRPr lang="de-DE" sz="1400">
+              <a:solidFill>
+                <a:srgbClr val="405786"/>
+              </a:solidFill>
+            </a:endParaRPr>
+          </a:p>
+        </p:txBody>
+      </p:sp>
+      <p:sp>
+        <p:nvSpPr>
+          <p:cNvPr id="16" name="Rechteck 15">
+            <a:extLst>
+              <a:ext uri="{FF2B5EF4-FFF2-40B4-BE49-F238E27FC236}">
+                <a16:creationId xmlns:a16="http://schemas.microsoft.com/office/drawing/2014/main" id="{B27ED717-A731-F8F3-4893-8FBB71998940}"/>
+              </a:ext>
+            </a:extLst>
+          </p:cNvPr>
+          <p:cNvSpPr/>
+          <p:nvPr/>
+        </p:nvSpPr>
+        <p:spPr>
+          <a:xfrm>
+            <a:off x="5490159" y="4915216"/>
+            <a:ext cx="895401" cy="891224"/>
+          </a:xfrm>
+          <a:prstGeom prst="rect">
+            <a:avLst/>
+          </a:prstGeom>
+          <a:noFill/>
+          <a:ln>
+            <a:noFill/>
+          </a:ln>
+        </p:spPr>
+        <p:style>
+          <a:lnRef idx="2">
+            <a:schemeClr val="accent1">
+              <a:shade val="50000"/>
+            </a:schemeClr>
+          </a:lnRef>
+          <a:fillRef idx="1">
+            <a:schemeClr val="accent1"/>
+          </a:fillRef>
+          <a:effectRef idx="0">
+            <a:schemeClr val="accent1"/>
+          </a:effectRef>
+          <a:fontRef idx="minor">
+            <a:schemeClr val="lt1"/>
+          </a:fontRef>
+        </p:style>
+        <p:txBody>
+          <a:bodyPr rtlCol="0" anchor="t"/>
+          <a:lstStyle/>
+          <a:p>
+            <a:pPr algn="ctr"/>
+            <a:r>
+              <a:rPr lang="de-DE" sz="1200">
+                <a:solidFill>
+                  <a:srgbClr val="405786"/>
+                </a:solidFill>
+              </a:rPr>
+              <a:t>Antworten, Itemdaten,</a:t>
+            </a:r>
+          </a:p>
+          <a:p>
+            <a:pPr algn="ctr"/>
+            <a:r>
+              <a:rPr lang="de-DE" sz="1200">
+                <a:solidFill>
+                  <a:srgbClr val="405786"/>
+                </a:solidFill>
+              </a:rPr>
+              <a:t>Fähigkeits-werte</a:t>
+            </a:r>
+            <a:endParaRPr lang="de-DE" sz="1400">
+              <a:solidFill>
+                <a:srgbClr val="405786"/>
+              </a:solidFill>
+            </a:endParaRPr>
+          </a:p>
+        </p:txBody>
+      </p:sp>
+      <p:sp>
+        <p:nvSpPr>
+          <p:cNvPr id="18" name="Rechteck 17">
+            <a:extLst>
+              <a:ext uri="{FF2B5EF4-FFF2-40B4-BE49-F238E27FC236}">
+                <a16:creationId xmlns:a16="http://schemas.microsoft.com/office/drawing/2014/main" id="{7EFAB975-7544-FB8E-1E76-1F47B4DB4A1E}"/>
+              </a:ext>
+            </a:extLst>
+          </p:cNvPr>
+          <p:cNvSpPr/>
+          <p:nvPr/>
+        </p:nvSpPr>
+        <p:spPr>
+          <a:xfrm>
+            <a:off x="4458697" y="3888327"/>
+            <a:ext cx="866143" cy="456162"/>
+          </a:xfrm>
+          <a:prstGeom prst="rect">
+            <a:avLst/>
+          </a:prstGeom>
+          <a:noFill/>
+          <a:ln>
+            <a:noFill/>
+          </a:ln>
+        </p:spPr>
+        <p:style>
+          <a:lnRef idx="2">
+            <a:schemeClr val="accent1">
+              <a:shade val="50000"/>
+            </a:schemeClr>
+          </a:lnRef>
+          <a:fillRef idx="1">
+            <a:schemeClr val="accent1"/>
+          </a:fillRef>
+          <a:effectRef idx="0">
+            <a:schemeClr val="accent1"/>
+          </a:effectRef>
+          <a:fontRef idx="minor">
+            <a:schemeClr val="lt1"/>
+          </a:fontRef>
+        </p:style>
+        <p:txBody>
+          <a:bodyPr rtlCol="0" anchor="t"/>
+          <a:lstStyle/>
+          <a:p>
+            <a:pPr algn="ctr"/>
+            <a:r>
+              <a:rPr lang="de-DE" sz="1200">
+                <a:solidFill>
+                  <a:srgbClr val="405786"/>
+                </a:solidFill>
+              </a:rPr>
+              <a:t>Item-kennwerte</a:t>
+            </a:r>
+            <a:endParaRPr lang="de-DE" sz="1400">
+              <a:solidFill>
+                <a:srgbClr val="405786"/>
+              </a:solidFill>
+            </a:endParaRPr>
+          </a:p>
+        </p:txBody>
+      </p:sp>
+      <p:sp>
+        <p:nvSpPr>
+          <p:cNvPr id="19" name="Rechteck 18">
+            <a:extLst>
+              <a:ext uri="{FF2B5EF4-FFF2-40B4-BE49-F238E27FC236}">
+                <a16:creationId xmlns:a16="http://schemas.microsoft.com/office/drawing/2014/main" id="{50A89E02-51E0-1E69-76B2-B5EFA4D16E9D}"/>
+              </a:ext>
+            </a:extLst>
+          </p:cNvPr>
+          <p:cNvSpPr/>
+          <p:nvPr/>
+        </p:nvSpPr>
+        <p:spPr>
+          <a:xfrm>
+            <a:off x="2931072" y="4258006"/>
+            <a:ext cx="835184" cy="317898"/>
+          </a:xfrm>
+          <a:prstGeom prst="rect">
+            <a:avLst/>
+          </a:prstGeom>
+          <a:noFill/>
+          <a:ln>
+            <a:noFill/>
+          </a:ln>
+        </p:spPr>
+        <p:style>
+          <a:lnRef idx="2">
+            <a:schemeClr val="accent1">
+              <a:shade val="50000"/>
+            </a:schemeClr>
+          </a:lnRef>
+          <a:fillRef idx="1">
+            <a:schemeClr val="accent1"/>
+          </a:fillRef>
+          <a:effectRef idx="0">
+            <a:schemeClr val="accent1"/>
+          </a:effectRef>
+          <a:fontRef idx="minor">
+            <a:schemeClr val="lt1"/>
+          </a:fontRef>
+        </p:style>
+        <p:txBody>
+          <a:bodyPr rtlCol="0" anchor="t"/>
+          <a:lstStyle/>
+          <a:p>
+            <a:pPr algn="ctr"/>
+            <a:r>
+              <a:rPr lang="de-DE" sz="1200">
+                <a:solidFill>
+                  <a:srgbClr val="405786"/>
+                </a:solidFill>
+              </a:rPr>
+              <a:t>Aufgaben-UI</a:t>
+            </a:r>
+            <a:endParaRPr lang="de-DE" sz="1400">
+              <a:solidFill>
+                <a:srgbClr val="405786"/>
+              </a:solidFill>
+            </a:endParaRPr>
+          </a:p>
+        </p:txBody>
+      </p:sp>
+      <p:sp>
+        <p:nvSpPr>
+          <p:cNvPr id="20" name="Pfeil: nach rechts 19">
+            <a:extLst>
+              <a:ext uri="{FF2B5EF4-FFF2-40B4-BE49-F238E27FC236}">
+                <a16:creationId xmlns:a16="http://schemas.microsoft.com/office/drawing/2014/main" id="{B39DAA76-38F0-1AF7-02A1-8357E9AB6455}"/>
+              </a:ext>
+            </a:extLst>
+          </p:cNvPr>
+          <p:cNvSpPr/>
+          <p:nvPr/>
+        </p:nvSpPr>
+        <p:spPr>
+          <a:xfrm rot="3850881" flipH="1" flipV="1">
+            <a:off x="3013385" y="4500352"/>
+            <a:ext cx="1822517" cy="194103"/>
+          </a:xfrm>
+          <a:prstGeom prst="rightArrow">
+            <a:avLst/>
+          </a:prstGeom>
+          <a:solidFill>
+            <a:srgbClr val="D6DCE5"/>
+          </a:solidFill>
+          <a:ln>
+            <a:noFill/>
+          </a:ln>
+        </p:spPr>
+        <p:style>
+          <a:lnRef idx="2">
+            <a:schemeClr val="accent1">
+              <a:shade val="50000"/>
+            </a:schemeClr>
+          </a:lnRef>
+          <a:fillRef idx="1">
+            <a:schemeClr val="accent1"/>
+          </a:fillRef>
+          <a:effectRef idx="0">
+            <a:schemeClr val="accent1"/>
+          </a:effectRef>
+          <a:fontRef idx="minor">
+            <a:schemeClr val="lt1"/>
+          </a:fontRef>
+        </p:style>
+        <p:txBody>
+          <a:bodyPr rtlCol="0" anchor="ctr"/>
+          <a:lstStyle/>
+          <a:p>
+            <a:pPr algn="ctr"/>
+            <a:endParaRPr lang="de-DE"/>
+          </a:p>
+        </p:txBody>
+      </p:sp>
+      <p:sp>
+        <p:nvSpPr>
+          <p:cNvPr id="23" name="Rechteck 22">
+            <a:extLst>
+              <a:ext uri="{FF2B5EF4-FFF2-40B4-BE49-F238E27FC236}">
+                <a16:creationId xmlns:a16="http://schemas.microsoft.com/office/drawing/2014/main" id="{28E18734-A6B0-4784-F175-872BFD92F14A}"/>
+              </a:ext>
+            </a:extLst>
+          </p:cNvPr>
+          <p:cNvSpPr/>
+          <p:nvPr/>
+        </p:nvSpPr>
+        <p:spPr>
+          <a:xfrm>
+            <a:off x="3381969" y="4578226"/>
+            <a:ext cx="1102995" cy="287136"/>
+          </a:xfrm>
+          <a:prstGeom prst="rect">
+            <a:avLst/>
+          </a:prstGeom>
+          <a:noFill/>
+          <a:ln>
+            <a:noFill/>
+          </a:ln>
+        </p:spPr>
+        <p:style>
+          <a:lnRef idx="2">
+            <a:schemeClr val="accent1">
+              <a:shade val="50000"/>
+            </a:schemeClr>
+          </a:lnRef>
+          <a:fillRef idx="1">
+            <a:schemeClr val="accent1"/>
+          </a:fillRef>
+          <a:effectRef idx="0">
+            <a:schemeClr val="accent1"/>
+          </a:effectRef>
+          <a:fontRef idx="minor">
+            <a:schemeClr val="lt1"/>
+          </a:fontRef>
+        </p:style>
+        <p:txBody>
+          <a:bodyPr rtlCol="0" anchor="t"/>
+          <a:lstStyle/>
+          <a:p>
+            <a:pPr algn="ctr"/>
+            <a:r>
+              <a:rPr lang="de-DE" sz="1200">
+                <a:solidFill>
+                  <a:srgbClr val="405786"/>
+                </a:solidFill>
+              </a:rPr>
+              <a:t>Kodierschema</a:t>
+            </a:r>
+            <a:endParaRPr lang="de-DE" sz="1400">
+              <a:solidFill>
+                <a:srgbClr val="405786"/>
+              </a:solidFill>
+            </a:endParaRPr>
+          </a:p>
+        </p:txBody>
+      </p:sp>
+      <p:sp>
+        <p:nvSpPr>
+          <p:cNvPr id="8" name="Rechteck: abgerundete Ecken 7">
+            <a:extLst>
+              <a:ext uri="{FF2B5EF4-FFF2-40B4-BE49-F238E27FC236}">
+                <a16:creationId xmlns:a16="http://schemas.microsoft.com/office/drawing/2014/main" id="{C650F3AC-0BB7-413D-9A58-24EF66CF2B4F}"/>
+              </a:ext>
+            </a:extLst>
+          </p:cNvPr>
+          <p:cNvSpPr/>
+          <p:nvPr/>
+        </p:nvSpPr>
+        <p:spPr>
+          <a:xfrm>
+            <a:off x="3784333" y="5342179"/>
+            <a:ext cx="1676257" cy="318109"/>
+          </a:xfrm>
+          <a:prstGeom prst="roundRect">
+            <a:avLst/>
+          </a:prstGeom>
+          <a:solidFill>
+            <a:srgbClr val="405786"/>
+          </a:solidFill>
+          <a:ln>
+            <a:noFill/>
+          </a:ln>
+        </p:spPr>
+        <p:style>
+          <a:lnRef idx="2">
+            <a:schemeClr val="accent1">
+              <a:shade val="50000"/>
+            </a:schemeClr>
+          </a:lnRef>
+          <a:fillRef idx="1">
+            <a:schemeClr val="accent1"/>
+          </a:fillRef>
+          <a:effectRef idx="0">
+            <a:schemeClr val="accent1"/>
+          </a:effectRef>
+          <a:fontRef idx="minor">
+            <a:schemeClr val="lt1"/>
+          </a:fontRef>
+        </p:style>
+        <p:txBody>
+          <a:bodyPr rtlCol="0" anchor="ctr"/>
+          <a:lstStyle/>
+          <a:p>
+            <a:pPr algn="ctr"/>
+            <a:r>
+              <a:rPr lang="de-DE" sz="1200"/>
+              <a:t>IQB-KodierBox</a:t>
+            </a:r>
+          </a:p>
+        </p:txBody>
+      </p:sp>
+      <p:sp>
+        <p:nvSpPr>
+          <p:cNvPr id="24" name="Rechteck: abgerundete Ecken 23">
+            <a:extLst>
+              <a:ext uri="{FF2B5EF4-FFF2-40B4-BE49-F238E27FC236}">
+                <a16:creationId xmlns:a16="http://schemas.microsoft.com/office/drawing/2014/main" id="{3773FEF8-5DEB-241E-0E5B-41E0CE987629}"/>
+              </a:ext>
+            </a:extLst>
+          </p:cNvPr>
+          <p:cNvSpPr/>
+          <p:nvPr/>
+        </p:nvSpPr>
+        <p:spPr>
+          <a:xfrm>
+            <a:off x="1627699" y="3228501"/>
+            <a:ext cx="3365128" cy="528923"/>
+          </a:xfrm>
+          <a:prstGeom prst="roundRect">
+            <a:avLst/>
+          </a:prstGeom>
+          <a:solidFill>
+            <a:srgbClr val="405786"/>
+          </a:solidFill>
+          <a:ln>
+            <a:noFill/>
+          </a:ln>
+        </p:spPr>
+        <p:style>
+          <a:lnRef idx="2">
+            <a:schemeClr val="accent1">
+              <a:shade val="50000"/>
+            </a:schemeClr>
+          </a:lnRef>
+          <a:fillRef idx="1">
+            <a:schemeClr val="accent1"/>
+          </a:fillRef>
+          <a:effectRef idx="0">
+            <a:schemeClr val="accent1"/>
+          </a:effectRef>
+          <a:fontRef idx="minor">
+            <a:schemeClr val="lt1"/>
+          </a:fontRef>
+        </p:style>
+        <p:txBody>
+          <a:bodyPr rtlCol="0" anchor="ctr"/>
+          <a:lstStyle/>
+          <a:p>
+            <a:pPr algn="ctr"/>
+            <a:r>
+              <a:rPr lang="de-DE" sz="1600"/>
+              <a:t>IQB-ContentHub</a:t>
+            </a:r>
+          </a:p>
+        </p:txBody>
+      </p:sp>
+    </p:spTree>
+    <p:extLst>
+      <p:ext uri="{BB962C8B-B14F-4D97-AF65-F5344CB8AC3E}">
+        <p14:creationId xmlns:p14="http://schemas.microsoft.com/office/powerpoint/2010/main" val="3370356040"/>
+      </p:ext>
+    </p:extLst>
+  </p:cSld>
+  <p:clrMapOvr>
+    <a:masterClrMapping/>
+  </p:clrMapOvr>
+</p:sld>
+</file>
+
+<file path=ppt/slides/slide11.xml><?xml version="1.0" encoding="utf-8"?>
+<p:sld xmlns:a="http://schemas.openxmlformats.org/drawingml/2006/main" xmlns:r="http://schemas.openxmlformats.org/officeDocument/2006/relationships" xmlns:p="http://schemas.openxmlformats.org/presentationml/2006/main">
+  <p:cSld>
+    <p:spTree>
+      <p:nvGrpSpPr>
+        <p:cNvPr id="1" name=""/>
+        <p:cNvGrpSpPr/>
+        <p:nvPr/>
+      </p:nvGrpSpPr>
+      <p:grpSpPr>
+        <a:xfrm>
+          <a:off x="0" y="0"/>
+          <a:ext cx="0" cy="0"/>
+          <a:chOff x="0" y="0"/>
+          <a:chExt cx="0" cy="0"/>
+        </a:xfrm>
+      </p:grpSpPr>
+      <p:sp>
+        <p:nvSpPr>
           <p:cNvPr id="2" name="Titel 1">
             <a:extLst>
               <a:ext uri="{FF2B5EF4-FFF2-40B4-BE49-F238E27FC236}">
@@ -9618,238 +11112,25 @@
       </p:grpSpPr>
       <p:sp>
         <p:nvSpPr>
-          <p:cNvPr id="56" name="Pfeil: nach rechts 55">
-            <a:extLst>
-              <a:ext uri="{FF2B5EF4-FFF2-40B4-BE49-F238E27FC236}">
-                <a16:creationId xmlns:a16="http://schemas.microsoft.com/office/drawing/2014/main" id="{8E0770B1-0687-4AE4-A351-D91B3356585F}"/>
-              </a:ext>
-            </a:extLst>
-          </p:cNvPr>
-          <p:cNvSpPr/>
-          <p:nvPr/>
-        </p:nvSpPr>
-        <p:spPr>
-          <a:xfrm rot="10800000" flipH="1">
-            <a:off x="2420232" y="2256760"/>
-            <a:ext cx="1523157" cy="317898"/>
-          </a:xfrm>
-          <a:prstGeom prst="rightArrow">
-            <a:avLst/>
-          </a:prstGeom>
-          <a:solidFill>
-            <a:srgbClr val="D6DCE5"/>
-          </a:solidFill>
-          <a:ln>
-            <a:noFill/>
-          </a:ln>
-        </p:spPr>
-        <p:style>
-          <a:lnRef idx="2">
-            <a:schemeClr val="accent1">
-              <a:shade val="50000"/>
-            </a:schemeClr>
-          </a:lnRef>
-          <a:fillRef idx="1">
-            <a:schemeClr val="accent1"/>
-          </a:fillRef>
-          <a:effectRef idx="0">
-            <a:schemeClr val="accent1"/>
-          </a:effectRef>
-          <a:fontRef idx="minor">
-            <a:schemeClr val="lt1"/>
-          </a:fontRef>
-        </p:style>
-        <p:txBody>
-          <a:bodyPr rtlCol="0" anchor="ctr"/>
-          <a:lstStyle/>
-          <a:p>
-            <a:pPr algn="ctr"/>
-            <a:endParaRPr lang="de-DE"/>
-          </a:p>
-        </p:txBody>
-      </p:sp>
-      <p:sp>
-        <p:nvSpPr>
-          <p:cNvPr id="53" name="Pfeil: nach rechts 52">
-            <a:extLst>
-              <a:ext uri="{FF2B5EF4-FFF2-40B4-BE49-F238E27FC236}">
-                <a16:creationId xmlns:a16="http://schemas.microsoft.com/office/drawing/2014/main" id="{6782127F-7395-40D6-BBE4-A9C252840B16}"/>
-              </a:ext>
-            </a:extLst>
-          </p:cNvPr>
-          <p:cNvSpPr/>
-          <p:nvPr/>
-        </p:nvSpPr>
-        <p:spPr>
-          <a:xfrm rot="10800000">
-            <a:off x="2583262" y="2938205"/>
-            <a:ext cx="1691476" cy="317898"/>
-          </a:xfrm>
-          <a:prstGeom prst="rightArrow">
-            <a:avLst/>
-          </a:prstGeom>
-          <a:solidFill>
-            <a:srgbClr val="D6DCE5"/>
-          </a:solidFill>
-          <a:ln>
-            <a:noFill/>
-          </a:ln>
-        </p:spPr>
-        <p:style>
-          <a:lnRef idx="2">
-            <a:schemeClr val="accent1">
-              <a:shade val="50000"/>
-            </a:schemeClr>
-          </a:lnRef>
-          <a:fillRef idx="1">
-            <a:schemeClr val="accent1"/>
-          </a:fillRef>
-          <a:effectRef idx="0">
-            <a:schemeClr val="accent1"/>
-          </a:effectRef>
-          <a:fontRef idx="minor">
-            <a:schemeClr val="lt1"/>
-          </a:fontRef>
-        </p:style>
-        <p:txBody>
-          <a:bodyPr rtlCol="0" anchor="ctr"/>
-          <a:lstStyle/>
-          <a:p>
-            <a:pPr algn="ctr"/>
-            <a:endParaRPr lang="de-DE"/>
-          </a:p>
-        </p:txBody>
-      </p:sp>
-      <p:sp>
-        <p:nvSpPr>
-          <p:cNvPr id="52" name="Pfeil: nach rechts 51">
-            <a:extLst>
-              <a:ext uri="{FF2B5EF4-FFF2-40B4-BE49-F238E27FC236}">
-                <a16:creationId xmlns:a16="http://schemas.microsoft.com/office/drawing/2014/main" id="{D596ED4A-B066-47F3-883E-6B929CE5C9D4}"/>
-              </a:ext>
-            </a:extLst>
-          </p:cNvPr>
-          <p:cNvSpPr/>
-          <p:nvPr/>
-        </p:nvSpPr>
-        <p:spPr>
-          <a:xfrm rot="10800000" flipH="1">
-            <a:off x="2420232" y="3192469"/>
-            <a:ext cx="1523157" cy="317898"/>
-          </a:xfrm>
-          <a:prstGeom prst="rightArrow">
-            <a:avLst/>
-          </a:prstGeom>
-          <a:solidFill>
-            <a:srgbClr val="D6DCE5"/>
-          </a:solidFill>
-          <a:ln>
-            <a:noFill/>
-          </a:ln>
-        </p:spPr>
-        <p:style>
-          <a:lnRef idx="2">
-            <a:schemeClr val="accent1">
-              <a:shade val="50000"/>
-            </a:schemeClr>
-          </a:lnRef>
-          <a:fillRef idx="1">
-            <a:schemeClr val="accent1"/>
-          </a:fillRef>
-          <a:effectRef idx="0">
-            <a:schemeClr val="accent1"/>
-          </a:effectRef>
-          <a:fontRef idx="minor">
-            <a:schemeClr val="lt1"/>
-          </a:fontRef>
-        </p:style>
-        <p:txBody>
-          <a:bodyPr rtlCol="0" anchor="ctr"/>
-          <a:lstStyle/>
-          <a:p>
-            <a:pPr algn="ctr"/>
-            <a:endParaRPr lang="de-DE"/>
-          </a:p>
-        </p:txBody>
-      </p:sp>
-      <p:sp>
-        <p:nvSpPr>
-          <p:cNvPr id="47" name="Pfeil: nach rechts 46">
-            <a:extLst>
-              <a:ext uri="{FF2B5EF4-FFF2-40B4-BE49-F238E27FC236}">
-                <a16:creationId xmlns:a16="http://schemas.microsoft.com/office/drawing/2014/main" id="{95CEDEDB-F285-455A-8EB9-7D990A4BA321}"/>
-              </a:ext>
-            </a:extLst>
-          </p:cNvPr>
-          <p:cNvSpPr/>
-          <p:nvPr/>
-        </p:nvSpPr>
-        <p:spPr>
-          <a:xfrm rot="10800000" flipH="1">
-            <a:off x="2420232" y="4404850"/>
-            <a:ext cx="1523157" cy="317898"/>
-          </a:xfrm>
-          <a:prstGeom prst="rightArrow">
-            <a:avLst/>
-          </a:prstGeom>
-          <a:solidFill>
-            <a:srgbClr val="D6DCE5"/>
-          </a:solidFill>
-          <a:ln>
-            <a:noFill/>
-          </a:ln>
-        </p:spPr>
-        <p:style>
-          <a:lnRef idx="2">
-            <a:schemeClr val="accent1">
-              <a:shade val="50000"/>
-            </a:schemeClr>
-          </a:lnRef>
-          <a:fillRef idx="1">
-            <a:schemeClr val="accent1"/>
-          </a:fillRef>
-          <a:effectRef idx="0">
-            <a:schemeClr val="accent1"/>
-          </a:effectRef>
-          <a:fontRef idx="minor">
-            <a:schemeClr val="lt1"/>
-          </a:fontRef>
-        </p:style>
-        <p:txBody>
-          <a:bodyPr rtlCol="0" anchor="ctr"/>
-          <a:lstStyle/>
-          <a:p>
-            <a:pPr algn="ctr"/>
-            <a:endParaRPr lang="de-DE"/>
-          </a:p>
-        </p:txBody>
-      </p:sp>
-      <p:sp>
-        <p:nvSpPr>
-          <p:cNvPr id="45" name="Pfeil: nach rechts 44">
-            <a:extLst>
-              <a:ext uri="{FF2B5EF4-FFF2-40B4-BE49-F238E27FC236}">
-                <a16:creationId xmlns:a16="http://schemas.microsoft.com/office/drawing/2014/main" id="{808225D5-188F-4A8B-B9BC-8EBEB9AFF2DE}"/>
-              </a:ext>
-            </a:extLst>
-          </p:cNvPr>
-          <p:cNvSpPr/>
-          <p:nvPr/>
-        </p:nvSpPr>
-        <p:spPr>
-          <a:xfrm rot="10800000">
-            <a:off x="2586771" y="3752796"/>
-            <a:ext cx="1691476" cy="317898"/>
-          </a:xfrm>
-          <a:prstGeom prst="rightArrow">
-            <a:avLst/>
-          </a:prstGeom>
-          <a:solidFill>
-            <a:srgbClr val="D6DCE5"/>
-          </a:solidFill>
-          <a:ln>
-            <a:noFill/>
-          </a:ln>
+          <p:cNvPr id="18" name="Rechteck: abgerundete Ecken 17">
+            <a:extLst>
+              <a:ext uri="{FF2B5EF4-FFF2-40B4-BE49-F238E27FC236}">
+                <a16:creationId xmlns:a16="http://schemas.microsoft.com/office/drawing/2014/main" id="{37EF18E0-4212-4E23-AFBF-5E4C5E72C87F}"/>
+              </a:ext>
+            </a:extLst>
+          </p:cNvPr>
+          <p:cNvSpPr/>
+          <p:nvPr/>
+        </p:nvSpPr>
+        <p:spPr>
+          <a:xfrm>
+            <a:off x="2540000" y="2235200"/>
+            <a:ext cx="2051050" cy="3721100"/>
+          </a:xfrm>
+          <a:prstGeom prst="roundRect">
+            <a:avLst/>
+          </a:prstGeom>
+          <a:noFill/>
         </p:spPr>
         <p:style>
           <a:lnRef idx="2">
@@ -9899,32 +11180,34 @@
           <a:p>
             <a:r>
               <a:rPr lang="de-DE"/>
-              <a:t>response-analyser-vera.png</a:t>
-            </a:r>
-          </a:p>
-        </p:txBody>
-      </p:sp>
-      <p:sp>
-        <p:nvSpPr>
-          <p:cNvPr id="5" name="Rechteck 4">
-            <a:extLst>
-              <a:ext uri="{FF2B5EF4-FFF2-40B4-BE49-F238E27FC236}">
-                <a16:creationId xmlns:a16="http://schemas.microsoft.com/office/drawing/2014/main" id="{8D492F30-5400-4C0A-AFC2-EAC63131E272}"/>
-              </a:ext>
-            </a:extLst>
-          </p:cNvPr>
-          <p:cNvSpPr/>
-          <p:nvPr/>
-        </p:nvSpPr>
-        <p:spPr>
-          <a:xfrm>
-            <a:off x="2660399" y="2950619"/>
-            <a:ext cx="1272142" cy="312190"/>
-          </a:xfrm>
-          <a:prstGeom prst="rect">
-            <a:avLst/>
-          </a:prstGeom>
-          <a:noFill/>
+              <a:t>response-analyser-func.png</a:t>
+            </a:r>
+          </a:p>
+        </p:txBody>
+      </p:sp>
+      <p:sp>
+        <p:nvSpPr>
+          <p:cNvPr id="3" name="Rechteck: abgerundete Ecken 2">
+            <a:extLst>
+              <a:ext uri="{FF2B5EF4-FFF2-40B4-BE49-F238E27FC236}">
+                <a16:creationId xmlns:a16="http://schemas.microsoft.com/office/drawing/2014/main" id="{6B49916C-9FB5-4D32-B4BD-F9242855DD09}"/>
+              </a:ext>
+            </a:extLst>
+          </p:cNvPr>
+          <p:cNvSpPr/>
+          <p:nvPr/>
+        </p:nvSpPr>
+        <p:spPr>
+          <a:xfrm>
+            <a:off x="2782421" y="2487441"/>
+            <a:ext cx="1575297" cy="422193"/>
+          </a:xfrm>
+          <a:prstGeom prst="roundRect">
+            <a:avLst/>
+          </a:prstGeom>
+          <a:solidFill>
+            <a:srgbClr val="405786"/>
+          </a:solidFill>
           <a:ln>
             <a:noFill/>
           </a:ln>
@@ -9946,44 +11229,90 @@
           </a:fontRef>
         </p:style>
         <p:txBody>
-          <a:bodyPr rtlCol="0" anchor="t"/>
-          <a:lstStyle/>
-          <a:p>
-            <a:pPr algn="ctr"/>
-            <a:r>
-              <a:rPr lang="de-DE" sz="1200">
-                <a:solidFill>
-                  <a:srgbClr val="405786"/>
-                </a:solidFill>
-              </a:rPr>
-              <a:t>Testhefte, Logins</a:t>
-            </a:r>
-            <a:endParaRPr lang="de-DE" sz="1400">
-              <a:solidFill>
-                <a:srgbClr val="405786"/>
-              </a:solidFill>
-            </a:endParaRPr>
-          </a:p>
-        </p:txBody>
-      </p:sp>
-      <p:sp>
-        <p:nvSpPr>
-          <p:cNvPr id="24" name="Rechteck: abgerundete Ecken 23">
-            <a:extLst>
-              <a:ext uri="{FF2B5EF4-FFF2-40B4-BE49-F238E27FC236}">
-                <a16:creationId xmlns:a16="http://schemas.microsoft.com/office/drawing/2014/main" id="{55A149B1-1B8A-4A2A-A04E-957240767D97}"/>
-              </a:ext>
-            </a:extLst>
-          </p:cNvPr>
-          <p:cNvSpPr/>
-          <p:nvPr/>
-        </p:nvSpPr>
-        <p:spPr>
-          <a:xfrm>
-            <a:off x="584462" y="2938048"/>
-            <a:ext cx="1934113" cy="566909"/>
+          <a:bodyPr rtlCol="0" anchor="ctr"/>
+          <a:lstStyle/>
+          <a:p>
+            <a:pPr algn="ctr"/>
+            <a:r>
+              <a:rPr lang="de-DE" sz="1200"/>
+              <a:t>Kodierung</a:t>
+            </a:r>
+          </a:p>
+        </p:txBody>
+      </p:sp>
+      <p:sp>
+        <p:nvSpPr>
+          <p:cNvPr id="8" name="Rechteck: abgerundete Ecken 7">
+            <a:extLst>
+              <a:ext uri="{FF2B5EF4-FFF2-40B4-BE49-F238E27FC236}">
+                <a16:creationId xmlns:a16="http://schemas.microsoft.com/office/drawing/2014/main" id="{FC665028-AAC4-4D57-AEAD-4DB95B7E292B}"/>
+              </a:ext>
+            </a:extLst>
+          </p:cNvPr>
+          <p:cNvSpPr/>
+          <p:nvPr/>
+        </p:nvSpPr>
+        <p:spPr>
+          <a:xfrm>
+            <a:off x="2782421" y="3572600"/>
+            <a:ext cx="1575296" cy="434014"/>
           </a:xfrm>
           <a:prstGeom prst="roundRect">
+            <a:avLst/>
+          </a:prstGeom>
+          <a:solidFill>
+            <a:srgbClr val="405786"/>
+          </a:solidFill>
+          <a:ln>
+            <a:noFill/>
+          </a:ln>
+        </p:spPr>
+        <p:style>
+          <a:lnRef idx="2">
+            <a:schemeClr val="accent1">
+              <a:shade val="50000"/>
+            </a:schemeClr>
+          </a:lnRef>
+          <a:fillRef idx="1">
+            <a:schemeClr val="accent1"/>
+          </a:fillRef>
+          <a:effectRef idx="0">
+            <a:schemeClr val="accent1"/>
+          </a:effectRef>
+          <a:fontRef idx="minor">
+            <a:schemeClr val="lt1"/>
+          </a:fontRef>
+        </p:style>
+        <p:txBody>
+          <a:bodyPr rtlCol="0" anchor="ctr"/>
+          <a:lstStyle/>
+          <a:p>
+            <a:pPr algn="ctr"/>
+            <a:r>
+              <a:rPr lang="de-DE" sz="1200"/>
+              <a:t>Item-Mapping</a:t>
+            </a:r>
+          </a:p>
+        </p:txBody>
+      </p:sp>
+      <p:sp>
+        <p:nvSpPr>
+          <p:cNvPr id="38" name="Flussdiagramm: Verbinder zu einer anderen Seite 37">
+            <a:extLst>
+              <a:ext uri="{FF2B5EF4-FFF2-40B4-BE49-F238E27FC236}">
+                <a16:creationId xmlns:a16="http://schemas.microsoft.com/office/drawing/2014/main" id="{9A83CDA0-42D0-4D73-84CE-BC010767B95F}"/>
+              </a:ext>
+            </a:extLst>
+          </p:cNvPr>
+          <p:cNvSpPr/>
+          <p:nvPr/>
+        </p:nvSpPr>
+        <p:spPr>
+          <a:xfrm>
+            <a:off x="3124935" y="2908217"/>
+            <a:ext cx="890268" cy="577545"/>
+          </a:xfrm>
+          <a:prstGeom prst="flowChartOffpageConnector">
             <a:avLst/>
           </a:prstGeom>
           <a:solidFill>
@@ -10010,36 +11339,42 @@
           </a:fontRef>
         </p:style>
         <p:txBody>
-          <a:bodyPr rtlCol="0" anchor="ctr"/>
-          <a:lstStyle/>
-          <a:p>
-            <a:pPr algn="ctr"/>
-            <a:r>
-              <a:rPr lang="de-DE" sz="1400"/>
-              <a:t>IQB-Testcenter</a:t>
-            </a:r>
-            <a:endParaRPr lang="de-DE"/>
-          </a:p>
-        </p:txBody>
-      </p:sp>
-      <p:sp>
-        <p:nvSpPr>
-          <p:cNvPr id="28" name="Rechteck: abgerundete Ecken 27">
-            <a:extLst>
-              <a:ext uri="{FF2B5EF4-FFF2-40B4-BE49-F238E27FC236}">
-                <a16:creationId xmlns:a16="http://schemas.microsoft.com/office/drawing/2014/main" id="{18CDCB2C-10D5-4159-8DD6-1628F42C8F1C}"/>
-              </a:ext>
-            </a:extLst>
-          </p:cNvPr>
-          <p:cNvSpPr/>
-          <p:nvPr/>
-        </p:nvSpPr>
-        <p:spPr>
-          <a:xfrm>
-            <a:off x="584462" y="3776488"/>
-            <a:ext cx="1934114" cy="961458"/>
-          </a:xfrm>
-          <a:prstGeom prst="roundRect">
+          <a:bodyPr lIns="0" tIns="0" rIns="0" bIns="0" rtlCol="0" anchor="ctr"/>
+          <a:lstStyle/>
+          <a:p>
+            <a:pPr algn="ctr"/>
+            <a:r>
+              <a:rPr lang="de-DE" sz="1200"/>
+              <a:t>Kodierte</a:t>
+            </a:r>
+          </a:p>
+          <a:p>
+            <a:pPr algn="ctr"/>
+            <a:r>
+              <a:rPr lang="de-DE" sz="1200"/>
+              <a:t>Antworten</a:t>
+            </a:r>
+          </a:p>
+        </p:txBody>
+      </p:sp>
+      <p:sp>
+        <p:nvSpPr>
+          <p:cNvPr id="39" name="Flussdiagramm: Verbinder zu einer anderen Seite 38">
+            <a:extLst>
+              <a:ext uri="{FF2B5EF4-FFF2-40B4-BE49-F238E27FC236}">
+                <a16:creationId xmlns:a16="http://schemas.microsoft.com/office/drawing/2014/main" id="{6941B918-0806-412E-AC6F-A3ED21A03301}"/>
+              </a:ext>
+            </a:extLst>
+          </p:cNvPr>
+          <p:cNvSpPr/>
+          <p:nvPr/>
+        </p:nvSpPr>
+        <p:spPr>
+          <a:xfrm>
+            <a:off x="3124935" y="1787313"/>
+            <a:ext cx="890268" cy="577545"/>
+          </a:xfrm>
+          <a:prstGeom prst="flowChartOffpageConnector">
             <a:avLst/>
           </a:prstGeom>
           <a:solidFill>
@@ -10066,36 +11401,97 @@
           </a:fontRef>
         </p:style>
         <p:txBody>
-          <a:bodyPr rtlCol="0" anchor="ctr"/>
-          <a:lstStyle/>
-          <a:p>
-            <a:pPr algn="ctr"/>
-            <a:r>
-              <a:rPr lang="de-DE" sz="1400"/>
-              <a:t>IQB-ResponseAnalyser</a:t>
-            </a:r>
-            <a:endParaRPr lang="de-DE"/>
-          </a:p>
-        </p:txBody>
-      </p:sp>
-      <p:sp>
-        <p:nvSpPr>
-          <p:cNvPr id="33" name="Rechteck 32">
-            <a:extLst>
-              <a:ext uri="{FF2B5EF4-FFF2-40B4-BE49-F238E27FC236}">
-                <a16:creationId xmlns:a16="http://schemas.microsoft.com/office/drawing/2014/main" id="{E60FA52C-E5FD-4D73-BD0B-066F95104E73}"/>
-              </a:ext>
-            </a:extLst>
-          </p:cNvPr>
-          <p:cNvSpPr/>
-          <p:nvPr/>
-        </p:nvSpPr>
-        <p:spPr>
-          <a:xfrm>
-            <a:off x="3976878" y="2080260"/>
-            <a:ext cx="2230163" cy="3558540"/>
-          </a:xfrm>
-          <a:prstGeom prst="rect">
+          <a:bodyPr lIns="0" tIns="0" rIns="0" bIns="0" rtlCol="0" anchor="ctr"/>
+          <a:lstStyle/>
+          <a:p>
+            <a:pPr algn="ctr"/>
+            <a:r>
+              <a:rPr lang="de-DE" sz="1200"/>
+              <a:t>Roh-</a:t>
+            </a:r>
+          </a:p>
+          <a:p>
+            <a:pPr algn="ctr"/>
+            <a:r>
+              <a:rPr lang="de-DE" sz="1200"/>
+              <a:t>Antworten</a:t>
+            </a:r>
+          </a:p>
+        </p:txBody>
+      </p:sp>
+      <p:sp>
+        <p:nvSpPr>
+          <p:cNvPr id="42" name="Flussdiagramm: Verbinder zu einer anderen Seite 41">
+            <a:extLst>
+              <a:ext uri="{FF2B5EF4-FFF2-40B4-BE49-F238E27FC236}">
+                <a16:creationId xmlns:a16="http://schemas.microsoft.com/office/drawing/2014/main" id="{64915EDD-FE4C-449C-B1D2-C363D87645D2}"/>
+              </a:ext>
+            </a:extLst>
+          </p:cNvPr>
+          <p:cNvSpPr/>
+          <p:nvPr/>
+        </p:nvSpPr>
+        <p:spPr>
+          <a:xfrm>
+            <a:off x="3124935" y="4008353"/>
+            <a:ext cx="890268" cy="577545"/>
+          </a:xfrm>
+          <a:prstGeom prst="flowChartOffpageConnector">
+            <a:avLst/>
+          </a:prstGeom>
+          <a:solidFill>
+            <a:srgbClr val="008CBA"/>
+          </a:solidFill>
+          <a:ln>
+            <a:noFill/>
+          </a:ln>
+        </p:spPr>
+        <p:style>
+          <a:lnRef idx="2">
+            <a:schemeClr val="accent1">
+              <a:shade val="50000"/>
+            </a:schemeClr>
+          </a:lnRef>
+          <a:fillRef idx="1">
+            <a:schemeClr val="accent1"/>
+          </a:fillRef>
+          <a:effectRef idx="0">
+            <a:schemeClr val="accent1"/>
+          </a:effectRef>
+          <a:fontRef idx="minor">
+            <a:schemeClr val="lt1"/>
+          </a:fontRef>
+        </p:style>
+        <p:txBody>
+          <a:bodyPr lIns="0" tIns="0" rIns="0" bIns="0" rtlCol="0" anchor="ctr"/>
+          <a:lstStyle/>
+          <a:p>
+            <a:pPr algn="ctr"/>
+            <a:r>
+              <a:rPr lang="de-DE" sz="1200"/>
+              <a:t>Item-Array</a:t>
+            </a:r>
+          </a:p>
+        </p:txBody>
+      </p:sp>
+      <p:sp>
+        <p:nvSpPr>
+          <p:cNvPr id="43" name="Pfeil: Fünfeck 42">
+            <a:extLst>
+              <a:ext uri="{FF2B5EF4-FFF2-40B4-BE49-F238E27FC236}">
+                <a16:creationId xmlns:a16="http://schemas.microsoft.com/office/drawing/2014/main" id="{BE463C21-34A1-46C9-BDB6-A4E14D1DAB46}"/>
+              </a:ext>
+            </a:extLst>
+          </p:cNvPr>
+          <p:cNvSpPr/>
+          <p:nvPr/>
+        </p:nvSpPr>
+        <p:spPr>
+          <a:xfrm>
+            <a:off x="1537998" y="3572600"/>
+            <a:ext cx="1223762" cy="424133"/>
+          </a:xfrm>
+          <a:prstGeom prst="homePlate">
             <a:avLst/>
           </a:prstGeom>
           <a:solidFill>
@@ -10125,149 +11521,57 @@
           <a:bodyPr rtlCol="0" anchor="ctr"/>
           <a:lstStyle/>
           <a:p>
-            <a:pPr algn="r"/>
-            <a:endParaRPr lang="de-DE" sz="1600">
-              <a:solidFill>
-                <a:srgbClr val="405786"/>
-              </a:solidFill>
-            </a:endParaRPr>
-          </a:p>
-        </p:txBody>
-      </p:sp>
-      <p:sp>
-        <p:nvSpPr>
-          <p:cNvPr id="37" name="Rechteck 36">
-            <a:extLst>
-              <a:ext uri="{FF2B5EF4-FFF2-40B4-BE49-F238E27FC236}">
-                <a16:creationId xmlns:a16="http://schemas.microsoft.com/office/drawing/2014/main" id="{A169B987-A534-4CB7-A1B9-63A9F65E37E4}"/>
-              </a:ext>
-            </a:extLst>
-          </p:cNvPr>
-          <p:cNvSpPr/>
-          <p:nvPr/>
-        </p:nvSpPr>
-        <p:spPr>
-          <a:xfrm>
-            <a:off x="4124904" y="3182935"/>
-            <a:ext cx="1878368" cy="404398"/>
-          </a:xfrm>
-          <a:prstGeom prst="rect">
-            <a:avLst/>
-          </a:prstGeom>
-          <a:noFill/>
-          <a:ln>
-            <a:noFill/>
-          </a:ln>
-        </p:spPr>
-        <p:style>
-          <a:lnRef idx="2">
-            <a:schemeClr val="accent1">
-              <a:shade val="50000"/>
-            </a:schemeClr>
-          </a:lnRef>
-          <a:fillRef idx="1">
-            <a:schemeClr val="accent1"/>
-          </a:fillRef>
-          <a:effectRef idx="0">
-            <a:schemeClr val="accent1"/>
-          </a:effectRef>
-          <a:fontRef idx="minor">
-            <a:schemeClr val="lt1"/>
-          </a:fontRef>
-        </p:style>
-        <p:txBody>
-          <a:bodyPr rtlCol="0" anchor="t"/>
-          <a:lstStyle/>
-          <a:p>
-            <a:r>
-              <a:rPr lang="de-DE" sz="1200">
+            <a:pPr marL="171450" indent="-171450">
+              <a:buFont typeface="Arial" panose="020B0604020202020204" pitchFamily="34" charset="0"/>
+              <a:buChar char="•"/>
+            </a:pPr>
+            <a:r>
+              <a:rPr lang="de-DE" sz="1100">
                 <a:solidFill>
-                  <a:srgbClr val="405786"/>
+                  <a:schemeClr val="tx1"/>
                 </a:solidFill>
               </a:rPr>
-              <a:t>Transformation Antworten</a:t>
-            </a:r>
-          </a:p>
-        </p:txBody>
-      </p:sp>
-      <p:sp>
-        <p:nvSpPr>
-          <p:cNvPr id="38" name="Rechteck 37">
-            <a:extLst>
-              <a:ext uri="{FF2B5EF4-FFF2-40B4-BE49-F238E27FC236}">
-                <a16:creationId xmlns:a16="http://schemas.microsoft.com/office/drawing/2014/main" id="{36AA9122-78A1-4FE7-93DE-AF0FC8D3F9F2}"/>
-              </a:ext>
-            </a:extLst>
-          </p:cNvPr>
-          <p:cNvSpPr/>
-          <p:nvPr/>
-        </p:nvSpPr>
-        <p:spPr>
-          <a:xfrm>
-            <a:off x="4124904" y="3614576"/>
-            <a:ext cx="1942950" cy="504072"/>
-          </a:xfrm>
-          <a:prstGeom prst="rect">
-            <a:avLst/>
-          </a:prstGeom>
-          <a:noFill/>
-          <a:ln>
-            <a:noFill/>
-          </a:ln>
-        </p:spPr>
-        <p:style>
-          <a:lnRef idx="2">
-            <a:schemeClr val="accent1">
-              <a:shade val="50000"/>
-            </a:schemeClr>
-          </a:lnRef>
-          <a:fillRef idx="1">
-            <a:schemeClr val="accent1"/>
-          </a:fillRef>
-          <a:effectRef idx="0">
-            <a:schemeClr val="accent1"/>
-          </a:effectRef>
-          <a:fontRef idx="minor">
-            <a:schemeClr val="lt1"/>
-          </a:fontRef>
-        </p:style>
-        <p:txBody>
-          <a:bodyPr rtlCol="0" anchor="t"/>
-          <a:lstStyle/>
-          <a:p>
-            <a:r>
-              <a:rPr lang="de-DE" sz="1200">
+              <a:t>Item-Liste</a:t>
+            </a:r>
+          </a:p>
+          <a:p>
+            <a:pPr marL="171450" indent="-171450">
+              <a:buFont typeface="Arial" panose="020B0604020202020204" pitchFamily="34" charset="0"/>
+              <a:buChar char="•"/>
+            </a:pPr>
+            <a:r>
+              <a:rPr lang="de-DE" sz="1100">
                 <a:solidFill>
-                  <a:srgbClr val="405786"/>
+                  <a:schemeClr val="tx1"/>
                 </a:solidFill>
               </a:rPr>
-              <a:t>Zusammenfassung von Personendaten</a:t>
-            </a:r>
-          </a:p>
-        </p:txBody>
-      </p:sp>
-      <p:sp>
-        <p:nvSpPr>
-          <p:cNvPr id="29" name="Rechteck: abgerundete Ecken 28">
-            <a:extLst>
-              <a:ext uri="{FF2B5EF4-FFF2-40B4-BE49-F238E27FC236}">
-                <a16:creationId xmlns:a16="http://schemas.microsoft.com/office/drawing/2014/main" id="{9FDE0028-0EE4-4C14-9A21-5BA76FD49DBA}"/>
-              </a:ext>
-            </a:extLst>
-          </p:cNvPr>
-          <p:cNvSpPr/>
-          <p:nvPr/>
-        </p:nvSpPr>
-        <p:spPr>
-          <a:xfrm>
-            <a:off x="4143415" y="2165014"/>
-            <a:ext cx="1897087" cy="491386"/>
+              <a:t>Missing-Map</a:t>
+            </a:r>
+          </a:p>
+        </p:txBody>
+      </p:sp>
+      <p:sp>
+        <p:nvSpPr>
+          <p:cNvPr id="45" name="Rechteck: abgerundete Ecken 44">
+            <a:extLst>
+              <a:ext uri="{FF2B5EF4-FFF2-40B4-BE49-F238E27FC236}">
+                <a16:creationId xmlns:a16="http://schemas.microsoft.com/office/drawing/2014/main" id="{123DEF27-8C5E-4BD9-8566-7C089C43D140}"/>
+              </a:ext>
+            </a:extLst>
+          </p:cNvPr>
+          <p:cNvSpPr/>
+          <p:nvPr/>
+        </p:nvSpPr>
+        <p:spPr>
+          <a:xfrm>
+            <a:off x="2782421" y="4654787"/>
+            <a:ext cx="1575297" cy="848266"/>
           </a:xfrm>
           <a:prstGeom prst="roundRect">
             <a:avLst/>
           </a:prstGeom>
           <a:solidFill>
-            <a:srgbClr val="7D12B9"/>
+            <a:srgbClr val="405786"/>
           </a:solidFill>
           <a:ln>
             <a:noFill/>
@@ -10295,34 +11599,35 @@
           <a:p>
             <a:pPr algn="ctr"/>
             <a:r>
-              <a:rPr lang="de-DE" sz="1400"/>
-              <a:t>Landesportalsystem</a:t>
-            </a:r>
-            <a:endParaRPr lang="de-DE"/>
-          </a:p>
-        </p:txBody>
-      </p:sp>
-      <p:sp>
-        <p:nvSpPr>
-          <p:cNvPr id="39" name="Rechteck 38">
-            <a:extLst>
-              <a:ext uri="{FF2B5EF4-FFF2-40B4-BE49-F238E27FC236}">
-                <a16:creationId xmlns:a16="http://schemas.microsoft.com/office/drawing/2014/main" id="{2B9FEF30-B504-4280-9D45-C365E076D20C}"/>
-              </a:ext>
-            </a:extLst>
-          </p:cNvPr>
-          <p:cNvSpPr/>
-          <p:nvPr/>
-        </p:nvSpPr>
-        <p:spPr>
-          <a:xfrm>
-            <a:off x="4124904" y="4078823"/>
-            <a:ext cx="1903188" cy="337057"/>
-          </a:xfrm>
-          <a:prstGeom prst="rect">
-            <a:avLst/>
-          </a:prstGeom>
-          <a:noFill/>
+              <a:rPr lang="de-DE" sz="1200"/>
+              <a:t>Skalierung</a:t>
+            </a:r>
+          </a:p>
+        </p:txBody>
+      </p:sp>
+      <p:sp>
+        <p:nvSpPr>
+          <p:cNvPr id="46" name="Flussdiagramm: Verbinder zu einer anderen Seite 45">
+            <a:extLst>
+              <a:ext uri="{FF2B5EF4-FFF2-40B4-BE49-F238E27FC236}">
+                <a16:creationId xmlns:a16="http://schemas.microsoft.com/office/drawing/2014/main" id="{ACAFB794-65DC-47D5-9F93-BA7CB2D3CD86}"/>
+              </a:ext>
+            </a:extLst>
+          </p:cNvPr>
+          <p:cNvSpPr/>
+          <p:nvPr/>
+        </p:nvSpPr>
+        <p:spPr>
+          <a:xfrm>
+            <a:off x="3124935" y="5503052"/>
+            <a:ext cx="890268" cy="577545"/>
+          </a:xfrm>
+          <a:prstGeom prst="flowChartOffpageConnector">
+            <a:avLst/>
+          </a:prstGeom>
+          <a:solidFill>
+            <a:srgbClr val="008CBA"/>
+          </a:solidFill>
           <a:ln>
             <a:noFill/>
           </a:ln>
@@ -10344,94 +11649,35 @@
           </a:fontRef>
         </p:style>
         <p:txBody>
-          <a:bodyPr rtlCol="0" anchor="t"/>
-          <a:lstStyle/>
-          <a:p>
-            <a:r>
-              <a:rPr lang="de-DE" sz="1200">
-                <a:solidFill>
-                  <a:srgbClr val="405786"/>
-                </a:solidFill>
-              </a:rPr>
-              <a:t>Manuelle Kodierung</a:t>
-            </a:r>
-          </a:p>
-        </p:txBody>
-      </p:sp>
-      <p:sp>
-        <p:nvSpPr>
-          <p:cNvPr id="41" name="Rechteck 40">
-            <a:extLst>
-              <a:ext uri="{FF2B5EF4-FFF2-40B4-BE49-F238E27FC236}">
-                <a16:creationId xmlns:a16="http://schemas.microsoft.com/office/drawing/2014/main" id="{11699080-069A-4BBF-89B5-ECD97458B24F}"/>
-              </a:ext>
-            </a:extLst>
-          </p:cNvPr>
-          <p:cNvSpPr/>
-          <p:nvPr/>
-        </p:nvSpPr>
-        <p:spPr>
-          <a:xfrm>
-            <a:off x="4124904" y="2753811"/>
-            <a:ext cx="1676258" cy="436770"/>
-          </a:xfrm>
-          <a:prstGeom prst="rect">
-            <a:avLst/>
-          </a:prstGeom>
-          <a:noFill/>
-          <a:ln>
-            <a:noFill/>
-          </a:ln>
-        </p:spPr>
-        <p:style>
-          <a:lnRef idx="2">
-            <a:schemeClr val="accent1">
-              <a:shade val="50000"/>
-            </a:schemeClr>
-          </a:lnRef>
-          <a:fillRef idx="1">
-            <a:schemeClr val="accent1"/>
-          </a:fillRef>
-          <a:effectRef idx="0">
-            <a:schemeClr val="accent1"/>
-          </a:effectRef>
-          <a:fontRef idx="minor">
-            <a:schemeClr val="lt1"/>
-          </a:fontRef>
-        </p:style>
-        <p:txBody>
-          <a:bodyPr rtlCol="0" anchor="t"/>
-          <a:lstStyle/>
-          <a:p>
-            <a:r>
-              <a:rPr lang="de-DE" sz="1200">
-                <a:solidFill>
-                  <a:srgbClr val="405786"/>
-                </a:solidFill>
-              </a:rPr>
-              <a:t>Zuweisung Personen zu Testheften</a:t>
-            </a:r>
-          </a:p>
-        </p:txBody>
-      </p:sp>
-      <p:sp>
-        <p:nvSpPr>
-          <p:cNvPr id="42" name="Pfeil: nach links und rechts 41">
-            <a:extLst>
-              <a:ext uri="{FF2B5EF4-FFF2-40B4-BE49-F238E27FC236}">
-                <a16:creationId xmlns:a16="http://schemas.microsoft.com/office/drawing/2014/main" id="{DB134E8A-B06F-4954-956A-97E7E41D151E}"/>
-              </a:ext>
-            </a:extLst>
-          </p:cNvPr>
-          <p:cNvSpPr/>
-          <p:nvPr/>
-        </p:nvSpPr>
-        <p:spPr>
-          <a:xfrm rot="10800000">
-            <a:off x="2586772" y="4078823"/>
-            <a:ext cx="1356617" cy="317898"/>
-          </a:xfrm>
-          <a:prstGeom prst="leftRightArrow">
+          <a:bodyPr lIns="0" tIns="0" rIns="0" bIns="0" rtlCol="0" anchor="ctr"/>
+          <a:lstStyle/>
+          <a:p>
+            <a:pPr algn="ctr"/>
+            <a:r>
+              <a:rPr lang="de-DE" sz="1200"/>
+              <a:t>Skill-Set</a:t>
+            </a:r>
+          </a:p>
+        </p:txBody>
+      </p:sp>
+      <p:sp>
+        <p:nvSpPr>
+          <p:cNvPr id="50" name="Pfeil: Fünfeck 49">
+            <a:extLst>
+              <a:ext uri="{FF2B5EF4-FFF2-40B4-BE49-F238E27FC236}">
+                <a16:creationId xmlns:a16="http://schemas.microsoft.com/office/drawing/2014/main" id="{D9D09B6D-6308-49E1-AEAB-9987904C5A95}"/>
+              </a:ext>
+            </a:extLst>
+          </p:cNvPr>
+          <p:cNvSpPr/>
+          <p:nvPr/>
+        </p:nvSpPr>
+        <p:spPr>
+          <a:xfrm>
+            <a:off x="1538995" y="2490414"/>
+            <a:ext cx="1223762" cy="424133"/>
+          </a:xfrm>
+          <a:prstGeom prst="homePlate">
             <a:avLst/>
           </a:prstGeom>
           <a:solidFill>
@@ -10461,94 +11707,44 @@
           <a:bodyPr rtlCol="0" anchor="ctr"/>
           <a:lstStyle/>
           <a:p>
-            <a:pPr algn="ctr"/>
-            <a:endParaRPr lang="de-DE"/>
-          </a:p>
-        </p:txBody>
-      </p:sp>
-      <p:sp>
-        <p:nvSpPr>
-          <p:cNvPr id="43" name="Rechteck 42">
-            <a:extLst>
-              <a:ext uri="{FF2B5EF4-FFF2-40B4-BE49-F238E27FC236}">
-                <a16:creationId xmlns:a16="http://schemas.microsoft.com/office/drawing/2014/main" id="{89E45DD8-5AC8-452A-8CF4-54F340B0E071}"/>
-              </a:ext>
-            </a:extLst>
-          </p:cNvPr>
-          <p:cNvSpPr/>
-          <p:nvPr/>
-        </p:nvSpPr>
-        <p:spPr>
-          <a:xfrm>
-            <a:off x="2747770" y="3211688"/>
-            <a:ext cx="912402" cy="323060"/>
-          </a:xfrm>
-          <a:prstGeom prst="rect">
-            <a:avLst/>
-          </a:prstGeom>
-          <a:noFill/>
-          <a:ln>
-            <a:noFill/>
-          </a:ln>
-        </p:spPr>
-        <p:style>
-          <a:lnRef idx="2">
-            <a:schemeClr val="accent1">
-              <a:shade val="50000"/>
-            </a:schemeClr>
-          </a:lnRef>
-          <a:fillRef idx="1">
-            <a:schemeClr val="accent1"/>
-          </a:fillRef>
-          <a:effectRef idx="0">
-            <a:schemeClr val="accent1"/>
-          </a:effectRef>
-          <a:fontRef idx="minor">
-            <a:schemeClr val="lt1"/>
-          </a:fontRef>
-        </p:style>
-        <p:txBody>
-          <a:bodyPr rtlCol="0" anchor="t"/>
-          <a:lstStyle/>
-          <a:p>
-            <a:pPr algn="ctr"/>
-            <a:r>
-              <a:rPr lang="de-DE" sz="1200">
+            <a:pPr marL="171450" indent="-171450">
+              <a:buFont typeface="Arial" panose="020B0604020202020204" pitchFamily="34" charset="0"/>
+              <a:buChar char="•"/>
+            </a:pPr>
+            <a:r>
+              <a:rPr lang="de-DE" sz="1100">
                 <a:solidFill>
-                  <a:srgbClr val="405786"/>
+                  <a:schemeClr val="tx1"/>
                 </a:solidFill>
               </a:rPr>
-              <a:t>Antworten</a:t>
-            </a:r>
-            <a:endParaRPr lang="de-DE" sz="1400">
-              <a:solidFill>
-                <a:srgbClr val="405786"/>
-              </a:solidFill>
-            </a:endParaRPr>
-          </a:p>
-        </p:txBody>
-      </p:sp>
-      <p:sp>
-        <p:nvSpPr>
-          <p:cNvPr id="46" name="Rechteck 45">
-            <a:extLst>
-              <a:ext uri="{FF2B5EF4-FFF2-40B4-BE49-F238E27FC236}">
-                <a16:creationId xmlns:a16="http://schemas.microsoft.com/office/drawing/2014/main" id="{447F9071-D586-4080-ACEF-639E7E083537}"/>
-              </a:ext>
-            </a:extLst>
-          </p:cNvPr>
-          <p:cNvSpPr/>
-          <p:nvPr/>
-        </p:nvSpPr>
-        <p:spPr>
-          <a:xfrm>
-            <a:off x="2747770" y="3774276"/>
-            <a:ext cx="912402" cy="317898"/>
-          </a:xfrm>
-          <a:prstGeom prst="rect">
-            <a:avLst/>
-          </a:prstGeom>
-          <a:noFill/>
+              <a:t>Kodier-schema</a:t>
+            </a:r>
+          </a:p>
+        </p:txBody>
+      </p:sp>
+      <p:sp>
+        <p:nvSpPr>
+          <p:cNvPr id="51" name="Pfeil: Fünfeck 50">
+            <a:extLst>
+              <a:ext uri="{FF2B5EF4-FFF2-40B4-BE49-F238E27FC236}">
+                <a16:creationId xmlns:a16="http://schemas.microsoft.com/office/drawing/2014/main" id="{7192E30E-AA9C-40B1-93C2-C737AE1E5977}"/>
+              </a:ext>
+            </a:extLst>
+          </p:cNvPr>
+          <p:cNvSpPr/>
+          <p:nvPr/>
+        </p:nvSpPr>
+        <p:spPr>
+          <a:xfrm>
+            <a:off x="1537998" y="4654786"/>
+            <a:ext cx="1220492" cy="424133"/>
+          </a:xfrm>
+          <a:prstGeom prst="homePlate">
+            <a:avLst/>
+          </a:prstGeom>
+          <a:solidFill>
+            <a:srgbClr val="D6DCE5"/>
+          </a:solidFill>
           <a:ln>
             <a:noFill/>
           </a:ln>
@@ -10570,360 +11766,42 @@
           </a:fontRef>
         </p:style>
         <p:txBody>
-          <a:bodyPr rtlCol="0" anchor="t"/>
-          <a:lstStyle/>
-          <a:p>
-            <a:pPr algn="ctr"/>
-            <a:r>
-              <a:rPr lang="de-DE" sz="1200">
+          <a:bodyPr rtlCol="0" anchor="ctr"/>
+          <a:lstStyle/>
+          <a:p>
+            <a:pPr marL="171450" indent="-171450">
+              <a:buFont typeface="Arial" panose="020B0604020202020204" pitchFamily="34" charset="0"/>
+              <a:buChar char="•"/>
+            </a:pPr>
+            <a:r>
+              <a:rPr lang="de-DE" sz="1100">
                 <a:solidFill>
-                  <a:srgbClr val="405786"/>
+                  <a:schemeClr val="tx1"/>
                 </a:solidFill>
               </a:rPr>
-              <a:t>Antworten</a:t>
-            </a:r>
-            <a:endParaRPr lang="de-DE" sz="1400">
-              <a:solidFill>
-                <a:srgbClr val="405786"/>
-              </a:solidFill>
-            </a:endParaRPr>
-          </a:p>
-        </p:txBody>
-      </p:sp>
-      <p:sp>
-        <p:nvSpPr>
-          <p:cNvPr id="48" name="Rechteck 47">
-            <a:extLst>
-              <a:ext uri="{FF2B5EF4-FFF2-40B4-BE49-F238E27FC236}">
-                <a16:creationId xmlns:a16="http://schemas.microsoft.com/office/drawing/2014/main" id="{1E0FABDF-2317-4303-A7BD-8A147CEB1B88}"/>
-              </a:ext>
-            </a:extLst>
-          </p:cNvPr>
-          <p:cNvSpPr/>
-          <p:nvPr/>
-        </p:nvSpPr>
-        <p:spPr>
-          <a:xfrm>
-            <a:off x="2672838" y="4424605"/>
-            <a:ext cx="1062267" cy="323060"/>
-          </a:xfrm>
-          <a:prstGeom prst="rect">
-            <a:avLst/>
-          </a:prstGeom>
-          <a:noFill/>
-          <a:ln>
-            <a:noFill/>
-          </a:ln>
-        </p:spPr>
-        <p:style>
-          <a:lnRef idx="2">
-            <a:schemeClr val="accent1">
-              <a:shade val="50000"/>
-            </a:schemeClr>
-          </a:lnRef>
-          <a:fillRef idx="1">
-            <a:schemeClr val="accent1"/>
-          </a:fillRef>
-          <a:effectRef idx="0">
-            <a:schemeClr val="accent1"/>
-          </a:effectRef>
-          <a:fontRef idx="minor">
-            <a:schemeClr val="lt1"/>
-          </a:fontRef>
-        </p:style>
-        <p:txBody>
-          <a:bodyPr rtlCol="0" anchor="t"/>
-          <a:lstStyle/>
-          <a:p>
-            <a:pPr algn="ctr"/>
-            <a:r>
-              <a:rPr lang="de-DE" sz="1200">
-                <a:solidFill>
-                  <a:srgbClr val="405786"/>
-                </a:solidFill>
-              </a:rPr>
-              <a:t>Skalenwerte</a:t>
-            </a:r>
-            <a:endParaRPr lang="de-DE" sz="1400">
-              <a:solidFill>
-                <a:srgbClr val="405786"/>
-              </a:solidFill>
-            </a:endParaRPr>
-          </a:p>
-        </p:txBody>
-      </p:sp>
-      <p:sp>
-        <p:nvSpPr>
-          <p:cNvPr id="49" name="Rechteck 48">
-            <a:extLst>
-              <a:ext uri="{FF2B5EF4-FFF2-40B4-BE49-F238E27FC236}">
-                <a16:creationId xmlns:a16="http://schemas.microsoft.com/office/drawing/2014/main" id="{9E0FAA92-76A1-43B5-A73E-501E6515C764}"/>
-              </a:ext>
-            </a:extLst>
-          </p:cNvPr>
-          <p:cNvSpPr/>
-          <p:nvPr/>
-        </p:nvSpPr>
-        <p:spPr>
-          <a:xfrm>
-            <a:off x="4124904" y="5305424"/>
-            <a:ext cx="1903188" cy="337057"/>
-          </a:xfrm>
-          <a:prstGeom prst="rect">
-            <a:avLst/>
-          </a:prstGeom>
-          <a:noFill/>
-          <a:ln>
-            <a:noFill/>
-          </a:ln>
-        </p:spPr>
-        <p:style>
-          <a:lnRef idx="2">
-            <a:schemeClr val="accent1">
-              <a:shade val="50000"/>
-            </a:schemeClr>
-          </a:lnRef>
-          <a:fillRef idx="1">
-            <a:schemeClr val="accent1"/>
-          </a:fillRef>
-          <a:effectRef idx="0">
-            <a:schemeClr val="accent1"/>
-          </a:effectRef>
-          <a:fontRef idx="minor">
-            <a:schemeClr val="lt1"/>
-          </a:fontRef>
-        </p:style>
-        <p:txBody>
-          <a:bodyPr rtlCol="0" anchor="t"/>
-          <a:lstStyle/>
-          <a:p>
-            <a:r>
-              <a:rPr lang="de-DE" sz="1200">
-                <a:solidFill>
-                  <a:srgbClr val="405786"/>
-                </a:solidFill>
-              </a:rPr>
-              <a:t>Rückmeldung</a:t>
-            </a:r>
-          </a:p>
-        </p:txBody>
-      </p:sp>
-      <p:sp>
-        <p:nvSpPr>
-          <p:cNvPr id="50" name="Rechteck 49">
-            <a:extLst>
-              <a:ext uri="{FF2B5EF4-FFF2-40B4-BE49-F238E27FC236}">
-                <a16:creationId xmlns:a16="http://schemas.microsoft.com/office/drawing/2014/main" id="{0F10F39A-DEE5-417F-91DF-57AC6B95C10E}"/>
-              </a:ext>
-            </a:extLst>
-          </p:cNvPr>
-          <p:cNvSpPr/>
-          <p:nvPr/>
-        </p:nvSpPr>
-        <p:spPr>
-          <a:xfrm>
-            <a:off x="4124904" y="4413742"/>
-            <a:ext cx="1903188" cy="522105"/>
-          </a:xfrm>
-          <a:prstGeom prst="rect">
-            <a:avLst/>
-          </a:prstGeom>
-          <a:noFill/>
-          <a:ln>
-            <a:noFill/>
-          </a:ln>
-        </p:spPr>
-        <p:style>
-          <a:lnRef idx="2">
-            <a:schemeClr val="accent1">
-              <a:shade val="50000"/>
-            </a:schemeClr>
-          </a:lnRef>
-          <a:fillRef idx="1">
-            <a:schemeClr val="accent1"/>
-          </a:fillRef>
-          <a:effectRef idx="0">
-            <a:schemeClr val="accent1"/>
-          </a:effectRef>
-          <a:fontRef idx="minor">
-            <a:schemeClr val="lt1"/>
-          </a:fontRef>
-        </p:style>
-        <p:txBody>
-          <a:bodyPr rtlCol="0" anchor="t"/>
-          <a:lstStyle/>
-          <a:p>
-            <a:r>
-              <a:rPr lang="de-DE" sz="1200">
-                <a:solidFill>
-                  <a:srgbClr val="405786"/>
-                </a:solidFill>
-              </a:rPr>
-              <a:t>Transformation in eigene Skalen</a:t>
-            </a:r>
-          </a:p>
-        </p:txBody>
-      </p:sp>
-      <p:cxnSp>
-        <p:nvCxnSpPr>
-          <p:cNvPr id="21" name="Gerader Verbinder 20">
-            <a:extLst>
-              <a:ext uri="{FF2B5EF4-FFF2-40B4-BE49-F238E27FC236}">
-                <a16:creationId xmlns:a16="http://schemas.microsoft.com/office/drawing/2014/main" id="{309971D6-DD97-4ABD-8807-E42A785D7F03}"/>
-              </a:ext>
-            </a:extLst>
-          </p:cNvPr>
-          <p:cNvCxnSpPr>
-            <a:cxnSpLocks/>
-          </p:cNvCxnSpPr>
-          <p:nvPr/>
-        </p:nvCxnSpPr>
-        <p:spPr>
-          <a:xfrm>
-            <a:off x="4124904" y="3197114"/>
-            <a:ext cx="1903188" cy="0"/>
-          </a:xfrm>
-          <a:prstGeom prst="line">
-            <a:avLst/>
-          </a:prstGeom>
-          <a:ln>
-            <a:solidFill>
-              <a:srgbClr val="405786"/>
-            </a:solidFill>
-          </a:ln>
-        </p:spPr>
-        <p:style>
-          <a:lnRef idx="1">
-            <a:schemeClr val="accent1"/>
-          </a:lnRef>
-          <a:fillRef idx="0">
-            <a:schemeClr val="accent1"/>
-          </a:fillRef>
-          <a:effectRef idx="0">
-            <a:schemeClr val="accent1"/>
-          </a:effectRef>
-          <a:fontRef idx="minor">
-            <a:schemeClr val="tx1"/>
-          </a:fontRef>
-        </p:style>
-      </p:cxnSp>
-      <p:cxnSp>
-        <p:nvCxnSpPr>
-          <p:cNvPr id="51" name="Gerader Verbinder 50">
-            <a:extLst>
-              <a:ext uri="{FF2B5EF4-FFF2-40B4-BE49-F238E27FC236}">
-                <a16:creationId xmlns:a16="http://schemas.microsoft.com/office/drawing/2014/main" id="{D63E6CDF-7D22-41DD-9734-C92BED2F0A28}"/>
-              </a:ext>
-            </a:extLst>
-          </p:cNvPr>
-          <p:cNvCxnSpPr>
-            <a:cxnSpLocks/>
-          </p:cNvCxnSpPr>
-          <p:nvPr/>
-        </p:nvCxnSpPr>
-        <p:spPr>
-          <a:xfrm>
-            <a:off x="4124904" y="4379976"/>
-            <a:ext cx="1903188" cy="0"/>
-          </a:xfrm>
-          <a:prstGeom prst="line">
-            <a:avLst/>
-          </a:prstGeom>
-          <a:ln>
-            <a:solidFill>
-              <a:srgbClr val="405786"/>
-            </a:solidFill>
-          </a:ln>
-        </p:spPr>
-        <p:style>
-          <a:lnRef idx="1">
-            <a:schemeClr val="accent1"/>
-          </a:lnRef>
-          <a:fillRef idx="0">
-            <a:schemeClr val="accent1"/>
-          </a:fillRef>
-          <a:effectRef idx="0">
-            <a:schemeClr val="accent1"/>
-          </a:effectRef>
-          <a:fontRef idx="minor">
-            <a:schemeClr val="tx1"/>
-          </a:fontRef>
-        </p:style>
-      </p:cxnSp>
-      <p:sp>
-        <p:nvSpPr>
-          <p:cNvPr id="54" name="Rechteck 53">
-            <a:extLst>
-              <a:ext uri="{FF2B5EF4-FFF2-40B4-BE49-F238E27FC236}">
-                <a16:creationId xmlns:a16="http://schemas.microsoft.com/office/drawing/2014/main" id="{19E56569-12D7-4838-9C41-290707F74D50}"/>
-              </a:ext>
-            </a:extLst>
-          </p:cNvPr>
-          <p:cNvSpPr/>
-          <p:nvPr/>
-        </p:nvSpPr>
-        <p:spPr>
-          <a:xfrm>
-            <a:off x="4124904" y="4822062"/>
-            <a:ext cx="1903188" cy="522105"/>
-          </a:xfrm>
-          <a:prstGeom prst="rect">
-            <a:avLst/>
-          </a:prstGeom>
-          <a:noFill/>
-          <a:ln>
-            <a:noFill/>
-          </a:ln>
-        </p:spPr>
-        <p:style>
-          <a:lnRef idx="2">
-            <a:schemeClr val="accent1">
-              <a:shade val="50000"/>
-            </a:schemeClr>
-          </a:lnRef>
-          <a:fillRef idx="1">
-            <a:schemeClr val="accent1"/>
-          </a:fillRef>
-          <a:effectRef idx="0">
-            <a:schemeClr val="accent1"/>
-          </a:effectRef>
-          <a:fontRef idx="minor">
-            <a:schemeClr val="lt1"/>
-          </a:fontRef>
-        </p:style>
-        <p:txBody>
-          <a:bodyPr rtlCol="0" anchor="t"/>
-          <a:lstStyle/>
-          <a:p>
-            <a:r>
-              <a:rPr lang="de-DE" sz="1200">
-                <a:solidFill>
-                  <a:srgbClr val="405786"/>
-                </a:solidFill>
-              </a:rPr>
-              <a:t>Aggregationen Personengruppen</a:t>
-            </a:r>
-          </a:p>
-        </p:txBody>
-      </p:sp>
-      <p:sp>
-        <p:nvSpPr>
-          <p:cNvPr id="55" name="Rechteck: abgerundete Ecken 54">
-            <a:extLst>
-              <a:ext uri="{FF2B5EF4-FFF2-40B4-BE49-F238E27FC236}">
-                <a16:creationId xmlns:a16="http://schemas.microsoft.com/office/drawing/2014/main" id="{D80FD2EA-39F5-4A60-B97E-43A066217136}"/>
-              </a:ext>
-            </a:extLst>
-          </p:cNvPr>
-          <p:cNvSpPr/>
-          <p:nvPr/>
-        </p:nvSpPr>
-        <p:spPr>
-          <a:xfrm>
-            <a:off x="584462" y="2128711"/>
-            <a:ext cx="1934113" cy="566909"/>
-          </a:xfrm>
-          <a:prstGeom prst="roundRect">
+              <a:t>Skalen-definitionen</a:t>
+            </a:r>
+          </a:p>
+        </p:txBody>
+      </p:sp>
+      <p:sp>
+        <p:nvSpPr>
+          <p:cNvPr id="53" name="Pfeil: Fünfeck 52">
+            <a:extLst>
+              <a:ext uri="{FF2B5EF4-FFF2-40B4-BE49-F238E27FC236}">
+                <a16:creationId xmlns:a16="http://schemas.microsoft.com/office/drawing/2014/main" id="{55A377E7-977E-463D-8A87-DFC24843E3CC}"/>
+              </a:ext>
+            </a:extLst>
+          </p:cNvPr>
+          <p:cNvSpPr/>
+          <p:nvPr/>
+        </p:nvSpPr>
+        <p:spPr>
+          <a:xfrm>
+            <a:off x="1537998" y="5078919"/>
+            <a:ext cx="1223762" cy="424133"/>
+          </a:xfrm>
+          <a:prstGeom prst="homePlate">
             <a:avLst/>
           </a:prstGeom>
           <a:solidFill>
@@ -10953,80 +11831,39 @@
           <a:bodyPr rtlCol="0" anchor="ctr"/>
           <a:lstStyle/>
           <a:p>
-            <a:pPr algn="ctr"/>
-            <a:r>
-              <a:rPr lang="de-DE" sz="1400"/>
-              <a:t>IQB-ContentHub</a:t>
-            </a:r>
-          </a:p>
-        </p:txBody>
-      </p:sp>
-      <p:sp>
-        <p:nvSpPr>
-          <p:cNvPr id="57" name="Rechteck 56">
-            <a:extLst>
-              <a:ext uri="{FF2B5EF4-FFF2-40B4-BE49-F238E27FC236}">
-                <a16:creationId xmlns:a16="http://schemas.microsoft.com/office/drawing/2014/main" id="{4F292E1B-316F-4BB3-B8A9-D3804172848E}"/>
-              </a:ext>
-            </a:extLst>
-          </p:cNvPr>
-          <p:cNvSpPr/>
-          <p:nvPr/>
-        </p:nvSpPr>
-        <p:spPr>
-          <a:xfrm>
-            <a:off x="2620175" y="2179648"/>
-            <a:ext cx="1130749" cy="323060"/>
-          </a:xfrm>
-          <a:prstGeom prst="rect">
-            <a:avLst/>
-          </a:prstGeom>
-          <a:noFill/>
-          <a:ln>
-            <a:noFill/>
-          </a:ln>
-        </p:spPr>
-        <p:style>
-          <a:lnRef idx="2">
-            <a:schemeClr val="accent1">
-              <a:shade val="50000"/>
-            </a:schemeClr>
-          </a:lnRef>
-          <a:fillRef idx="1">
-            <a:schemeClr val="accent1"/>
-          </a:fillRef>
-          <a:effectRef idx="0">
-            <a:schemeClr val="accent1"/>
-          </a:effectRef>
-          <a:fontRef idx="minor">
-            <a:schemeClr val="lt1"/>
-          </a:fontRef>
-        </p:style>
-        <p:txBody>
-          <a:bodyPr rtlCol="0" anchor="t"/>
-          <a:lstStyle/>
-          <a:p>
-            <a:pPr algn="ctr"/>
-            <a:r>
-              <a:rPr lang="de-DE" sz="1200">
+            <a:pPr marL="171450" indent="-171450">
+              <a:buFont typeface="Arial" panose="020B0604020202020204" pitchFamily="34" charset="0"/>
+              <a:buChar char="•"/>
+            </a:pPr>
+            <a:r>
+              <a:rPr lang="de-DE" sz="1100">
                 <a:solidFill>
-                  <a:srgbClr val="405786"/>
+                  <a:schemeClr val="bg1"/>
                 </a:solidFill>
               </a:rPr>
-              <a:t>Assessment Package</a:t>
-            </a:r>
-            <a:endParaRPr lang="de-DE" sz="1400">
-              <a:solidFill>
-                <a:srgbClr val="405786"/>
-              </a:solidFill>
-            </a:endParaRPr>
+              <a:t>Item-Array</a:t>
+            </a:r>
+          </a:p>
+          <a:p>
+            <a:pPr marL="171450" indent="-171450">
+              <a:buFont typeface="Arial" panose="020B0604020202020204" pitchFamily="34" charset="0"/>
+              <a:buChar char="•"/>
+            </a:pPr>
+            <a:r>
+              <a:rPr lang="de-DE" sz="1100">
+                <a:solidFill>
+                  <a:schemeClr val="bg1"/>
+                </a:solidFill>
+              </a:rPr>
+              <a:t>Skill-Set</a:t>
+            </a:r>
           </a:p>
         </p:txBody>
       </p:sp>
     </p:spTree>
     <p:extLst>
       <p:ext uri="{BB962C8B-B14F-4D97-AF65-F5344CB8AC3E}">
-        <p14:creationId xmlns:p14="http://schemas.microsoft.com/office/powerpoint/2010/main" val="2712301531"/>
+        <p14:creationId xmlns:p14="http://schemas.microsoft.com/office/powerpoint/2010/main" val="154576466"/>
       </p:ext>
     </p:extLst>
   </p:cSld>
@@ -11223,7 +12060,7 @@
         </p:nvSpPr>
         <p:spPr>
           <a:xfrm rot="10800000" flipH="1">
-            <a:off x="2420232" y="4244830"/>
+            <a:off x="2420232" y="4404850"/>
             <a:ext cx="1523157" cy="317898"/>
           </a:xfrm>
           <a:prstGeom prst="rightArrow">
@@ -11275,7 +12112,7 @@
         </p:nvSpPr>
         <p:spPr>
           <a:xfrm rot="10800000">
-            <a:off x="2586771" y="3928056"/>
+            <a:off x="2586771" y="3752796"/>
             <a:ext cx="1691476" cy="317898"/>
           </a:xfrm>
           <a:prstGeom prst="rightArrow">
@@ -11336,7 +12173,7 @@
           <a:p>
             <a:r>
               <a:rPr lang="de-DE"/>
-              <a:t>response-analyser-stars.png</a:t>
+              <a:t>response-analyser-vera.png</a:t>
             </a:r>
           </a:p>
         </p:txBody>
@@ -11417,8 +12254,8 @@
         </p:nvSpPr>
         <p:spPr>
           <a:xfrm>
-            <a:off x="565608" y="2938048"/>
-            <a:ext cx="1952967" cy="566909"/>
+            <a:off x="584462" y="2938048"/>
+            <a:ext cx="1934113" cy="566909"/>
           </a:xfrm>
           <a:prstGeom prst="roundRect">
             <a:avLst/>
@@ -11473,8 +12310,8 @@
         </p:nvSpPr>
         <p:spPr>
           <a:xfrm>
-            <a:off x="565608" y="3776488"/>
-            <a:ext cx="1952967" cy="961458"/>
+            <a:off x="584462" y="3776488"/>
+            <a:ext cx="1934114" cy="961458"/>
           </a:xfrm>
           <a:prstGeom prst="roundRect">
             <a:avLst/>
@@ -11530,7 +12367,7 @@
         <p:spPr>
           <a:xfrm>
             <a:off x="3976878" y="2080260"/>
-            <a:ext cx="2230163" cy="2983101"/>
+            <a:ext cx="2230163" cy="3558540"/>
           </a:xfrm>
           <a:prstGeom prst="rect">
             <a:avLst/>
@@ -11641,7 +12478,7 @@
         </p:nvSpPr>
         <p:spPr>
           <a:xfrm>
-            <a:off x="4124904" y="3820316"/>
+            <a:off x="4124904" y="3614576"/>
             <a:ext cx="1942950" cy="504072"/>
           </a:xfrm>
           <a:prstGeom prst="rect">
@@ -11741,6 +12578,62 @@
       </p:sp>
       <p:sp>
         <p:nvSpPr>
+          <p:cNvPr id="39" name="Rechteck 38">
+            <a:extLst>
+              <a:ext uri="{FF2B5EF4-FFF2-40B4-BE49-F238E27FC236}">
+                <a16:creationId xmlns:a16="http://schemas.microsoft.com/office/drawing/2014/main" id="{2B9FEF30-B504-4280-9D45-C365E076D20C}"/>
+              </a:ext>
+            </a:extLst>
+          </p:cNvPr>
+          <p:cNvSpPr/>
+          <p:nvPr/>
+        </p:nvSpPr>
+        <p:spPr>
+          <a:xfrm>
+            <a:off x="4124904" y="4078823"/>
+            <a:ext cx="1903188" cy="337057"/>
+          </a:xfrm>
+          <a:prstGeom prst="rect">
+            <a:avLst/>
+          </a:prstGeom>
+          <a:noFill/>
+          <a:ln>
+            <a:noFill/>
+          </a:ln>
+        </p:spPr>
+        <p:style>
+          <a:lnRef idx="2">
+            <a:schemeClr val="accent1">
+              <a:shade val="50000"/>
+            </a:schemeClr>
+          </a:lnRef>
+          <a:fillRef idx="1">
+            <a:schemeClr val="accent1"/>
+          </a:fillRef>
+          <a:effectRef idx="0">
+            <a:schemeClr val="accent1"/>
+          </a:effectRef>
+          <a:fontRef idx="minor">
+            <a:schemeClr val="lt1"/>
+          </a:fontRef>
+        </p:style>
+        <p:txBody>
+          <a:bodyPr rtlCol="0" anchor="t"/>
+          <a:lstStyle/>
+          <a:p>
+            <a:r>
+              <a:rPr lang="de-DE" sz="1200">
+                <a:solidFill>
+                  <a:srgbClr val="405786"/>
+                </a:solidFill>
+              </a:rPr>
+              <a:t>Manuelle Kodierung</a:t>
+            </a:r>
+          </a:p>
+        </p:txBody>
+      </p:sp>
+      <p:sp>
+        <p:nvSpPr>
           <p:cNvPr id="41" name="Rechteck 40">
             <a:extLst>
               <a:ext uri="{FF2B5EF4-FFF2-40B4-BE49-F238E27FC236}">
@@ -11797,6 +12690,58 @@
       </p:sp>
       <p:sp>
         <p:nvSpPr>
+          <p:cNvPr id="42" name="Pfeil: nach links und rechts 41">
+            <a:extLst>
+              <a:ext uri="{FF2B5EF4-FFF2-40B4-BE49-F238E27FC236}">
+                <a16:creationId xmlns:a16="http://schemas.microsoft.com/office/drawing/2014/main" id="{DB134E8A-B06F-4954-956A-97E7E41D151E}"/>
+              </a:ext>
+            </a:extLst>
+          </p:cNvPr>
+          <p:cNvSpPr/>
+          <p:nvPr/>
+        </p:nvSpPr>
+        <p:spPr>
+          <a:xfrm rot="10800000">
+            <a:off x="2586772" y="4078823"/>
+            <a:ext cx="1356617" cy="317898"/>
+          </a:xfrm>
+          <a:prstGeom prst="leftRightArrow">
+            <a:avLst/>
+          </a:prstGeom>
+          <a:solidFill>
+            <a:srgbClr val="D6DCE5"/>
+          </a:solidFill>
+          <a:ln>
+            <a:noFill/>
+          </a:ln>
+        </p:spPr>
+        <p:style>
+          <a:lnRef idx="2">
+            <a:schemeClr val="accent1">
+              <a:shade val="50000"/>
+            </a:schemeClr>
+          </a:lnRef>
+          <a:fillRef idx="1">
+            <a:schemeClr val="accent1"/>
+          </a:fillRef>
+          <a:effectRef idx="0">
+            <a:schemeClr val="accent1"/>
+          </a:effectRef>
+          <a:fontRef idx="minor">
+            <a:schemeClr val="lt1"/>
+          </a:fontRef>
+        </p:style>
+        <p:txBody>
+          <a:bodyPr rtlCol="0" anchor="ctr"/>
+          <a:lstStyle/>
+          <a:p>
+            <a:pPr algn="ctr"/>
+            <a:endParaRPr lang="de-DE"/>
+          </a:p>
+        </p:txBody>
+      </p:sp>
+      <p:sp>
+        <p:nvSpPr>
           <p:cNvPr id="43" name="Rechteck 42">
             <a:extLst>
               <a:ext uri="{FF2B5EF4-FFF2-40B4-BE49-F238E27FC236}">
@@ -11871,7 +12816,7 @@
         </p:nvSpPr>
         <p:spPr>
           <a:xfrm>
-            <a:off x="2747770" y="3949536"/>
+            <a:off x="2747770" y="3774276"/>
             <a:ext cx="912402" cy="317898"/>
           </a:xfrm>
           <a:prstGeom prst="rect">
@@ -11933,7 +12878,7 @@
         </p:nvSpPr>
         <p:spPr>
           <a:xfrm>
-            <a:off x="2672838" y="4264585"/>
+            <a:off x="2672838" y="4424605"/>
             <a:ext cx="1062267" cy="323060"/>
           </a:xfrm>
           <a:prstGeom prst="rect">
@@ -11995,7 +12940,7 @@
         </p:nvSpPr>
         <p:spPr>
           <a:xfrm>
-            <a:off x="4124904" y="4726304"/>
+            <a:off x="4124904" y="5305424"/>
             <a:ext cx="1903188" cy="337057"/>
           </a:xfrm>
           <a:prstGeom prst="rect">
@@ -12037,6 +12982,62 @@
           </a:p>
         </p:txBody>
       </p:sp>
+      <p:sp>
+        <p:nvSpPr>
+          <p:cNvPr id="50" name="Rechteck 49">
+            <a:extLst>
+              <a:ext uri="{FF2B5EF4-FFF2-40B4-BE49-F238E27FC236}">
+                <a16:creationId xmlns:a16="http://schemas.microsoft.com/office/drawing/2014/main" id="{0F10F39A-DEE5-417F-91DF-57AC6B95C10E}"/>
+              </a:ext>
+            </a:extLst>
+          </p:cNvPr>
+          <p:cNvSpPr/>
+          <p:nvPr/>
+        </p:nvSpPr>
+        <p:spPr>
+          <a:xfrm>
+            <a:off x="4124904" y="4413742"/>
+            <a:ext cx="1903188" cy="522105"/>
+          </a:xfrm>
+          <a:prstGeom prst="rect">
+            <a:avLst/>
+          </a:prstGeom>
+          <a:noFill/>
+          <a:ln>
+            <a:noFill/>
+          </a:ln>
+        </p:spPr>
+        <p:style>
+          <a:lnRef idx="2">
+            <a:schemeClr val="accent1">
+              <a:shade val="50000"/>
+            </a:schemeClr>
+          </a:lnRef>
+          <a:fillRef idx="1">
+            <a:schemeClr val="accent1"/>
+          </a:fillRef>
+          <a:effectRef idx="0">
+            <a:schemeClr val="accent1"/>
+          </a:effectRef>
+          <a:fontRef idx="minor">
+            <a:schemeClr val="lt1"/>
+          </a:fontRef>
+        </p:style>
+        <p:txBody>
+          <a:bodyPr rtlCol="0" anchor="t"/>
+          <a:lstStyle/>
+          <a:p>
+            <a:r>
+              <a:rPr lang="de-DE" sz="1200">
+                <a:solidFill>
+                  <a:srgbClr val="405786"/>
+                </a:solidFill>
+              </a:rPr>
+              <a:t>Transformation in eigene Skalen</a:t>
+            </a:r>
+          </a:p>
+        </p:txBody>
+      </p:sp>
       <p:cxnSp>
         <p:nvCxnSpPr>
           <p:cNvPr id="21" name="Gerader Verbinder 20">
@@ -12096,7 +13097,7 @@
         </p:nvCxnSpPr>
         <p:spPr>
           <a:xfrm>
-            <a:off x="4124904" y="4250436"/>
+            <a:off x="4124904" y="4379976"/>
             <a:ext cx="1903188" cy="0"/>
           </a:xfrm>
           <a:prstGeom prst="line">
@@ -12137,7 +13138,7 @@
         </p:nvSpPr>
         <p:spPr>
           <a:xfrm>
-            <a:off x="4124904" y="4242942"/>
+            <a:off x="4124904" y="4822062"/>
             <a:ext cx="1903188" cy="522105"/>
           </a:xfrm>
           <a:prstGeom prst="rect">
@@ -12193,8 +13194,8 @@
         </p:nvSpPr>
         <p:spPr>
           <a:xfrm>
-            <a:off x="565608" y="2136331"/>
-            <a:ext cx="1952967" cy="566909"/>
+            <a:off x="584462" y="2128711"/>
+            <a:ext cx="1934113" cy="566909"/>
           </a:xfrm>
           <a:prstGeom prst="roundRect">
             <a:avLst/>
@@ -12231,7 +13232,6 @@
               <a:rPr lang="de-DE" sz="1400"/>
               <a:t>IQB-ContentHub</a:t>
             </a:r>
-            <a:endParaRPr lang="de-DE"/>
           </a:p>
         </p:txBody>
       </p:sp>
@@ -12300,7 +13300,7 @@
     </p:spTree>
     <p:extLst>
       <p:ext uri="{BB962C8B-B14F-4D97-AF65-F5344CB8AC3E}">
-        <p14:creationId xmlns:p14="http://schemas.microsoft.com/office/powerpoint/2010/main" val="3021817651"/>
+        <p14:creationId xmlns:p14="http://schemas.microsoft.com/office/powerpoint/2010/main" val="2712301531"/>
       </p:ext>
     </p:extLst>
   </p:cSld>
@@ -12329,10 +13329,270 @@
       </p:grpSpPr>
       <p:sp>
         <p:nvSpPr>
+          <p:cNvPr id="56" name="Pfeil: nach rechts 55">
+            <a:extLst>
+              <a:ext uri="{FF2B5EF4-FFF2-40B4-BE49-F238E27FC236}">
+                <a16:creationId xmlns:a16="http://schemas.microsoft.com/office/drawing/2014/main" id="{8E0770B1-0687-4AE4-A351-D91B3356585F}"/>
+              </a:ext>
+            </a:extLst>
+          </p:cNvPr>
+          <p:cNvSpPr/>
+          <p:nvPr/>
+        </p:nvSpPr>
+        <p:spPr>
+          <a:xfrm rot="10800000" flipH="1">
+            <a:off x="2420232" y="2256760"/>
+            <a:ext cx="1523157" cy="317898"/>
+          </a:xfrm>
+          <a:prstGeom prst="rightArrow">
+            <a:avLst/>
+          </a:prstGeom>
+          <a:solidFill>
+            <a:srgbClr val="D6DCE5"/>
+          </a:solidFill>
+          <a:ln>
+            <a:noFill/>
+          </a:ln>
+        </p:spPr>
+        <p:style>
+          <a:lnRef idx="2">
+            <a:schemeClr val="accent1">
+              <a:shade val="50000"/>
+            </a:schemeClr>
+          </a:lnRef>
+          <a:fillRef idx="1">
+            <a:schemeClr val="accent1"/>
+          </a:fillRef>
+          <a:effectRef idx="0">
+            <a:schemeClr val="accent1"/>
+          </a:effectRef>
+          <a:fontRef idx="minor">
+            <a:schemeClr val="lt1"/>
+          </a:fontRef>
+        </p:style>
+        <p:txBody>
+          <a:bodyPr rtlCol="0" anchor="ctr"/>
+          <a:lstStyle/>
+          <a:p>
+            <a:pPr algn="ctr"/>
+            <a:endParaRPr lang="de-DE"/>
+          </a:p>
+        </p:txBody>
+      </p:sp>
+      <p:sp>
+        <p:nvSpPr>
+          <p:cNvPr id="53" name="Pfeil: nach rechts 52">
+            <a:extLst>
+              <a:ext uri="{FF2B5EF4-FFF2-40B4-BE49-F238E27FC236}">
+                <a16:creationId xmlns:a16="http://schemas.microsoft.com/office/drawing/2014/main" id="{6782127F-7395-40D6-BBE4-A9C252840B16}"/>
+              </a:ext>
+            </a:extLst>
+          </p:cNvPr>
+          <p:cNvSpPr/>
+          <p:nvPr/>
+        </p:nvSpPr>
+        <p:spPr>
+          <a:xfrm rot="10800000">
+            <a:off x="2583262" y="2938205"/>
+            <a:ext cx="1691476" cy="317898"/>
+          </a:xfrm>
+          <a:prstGeom prst="rightArrow">
+            <a:avLst/>
+          </a:prstGeom>
+          <a:solidFill>
+            <a:srgbClr val="D6DCE5"/>
+          </a:solidFill>
+          <a:ln>
+            <a:noFill/>
+          </a:ln>
+        </p:spPr>
+        <p:style>
+          <a:lnRef idx="2">
+            <a:schemeClr val="accent1">
+              <a:shade val="50000"/>
+            </a:schemeClr>
+          </a:lnRef>
+          <a:fillRef idx="1">
+            <a:schemeClr val="accent1"/>
+          </a:fillRef>
+          <a:effectRef idx="0">
+            <a:schemeClr val="accent1"/>
+          </a:effectRef>
+          <a:fontRef idx="minor">
+            <a:schemeClr val="lt1"/>
+          </a:fontRef>
+        </p:style>
+        <p:txBody>
+          <a:bodyPr rtlCol="0" anchor="ctr"/>
+          <a:lstStyle/>
+          <a:p>
+            <a:pPr algn="ctr"/>
+            <a:endParaRPr lang="de-DE"/>
+          </a:p>
+        </p:txBody>
+      </p:sp>
+      <p:sp>
+        <p:nvSpPr>
+          <p:cNvPr id="52" name="Pfeil: nach rechts 51">
+            <a:extLst>
+              <a:ext uri="{FF2B5EF4-FFF2-40B4-BE49-F238E27FC236}">
+                <a16:creationId xmlns:a16="http://schemas.microsoft.com/office/drawing/2014/main" id="{D596ED4A-B066-47F3-883E-6B929CE5C9D4}"/>
+              </a:ext>
+            </a:extLst>
+          </p:cNvPr>
+          <p:cNvSpPr/>
+          <p:nvPr/>
+        </p:nvSpPr>
+        <p:spPr>
+          <a:xfrm rot="10800000" flipH="1">
+            <a:off x="2420232" y="3192469"/>
+            <a:ext cx="1523157" cy="317898"/>
+          </a:xfrm>
+          <a:prstGeom prst="rightArrow">
+            <a:avLst/>
+          </a:prstGeom>
+          <a:solidFill>
+            <a:srgbClr val="D6DCE5"/>
+          </a:solidFill>
+          <a:ln>
+            <a:noFill/>
+          </a:ln>
+        </p:spPr>
+        <p:style>
+          <a:lnRef idx="2">
+            <a:schemeClr val="accent1">
+              <a:shade val="50000"/>
+            </a:schemeClr>
+          </a:lnRef>
+          <a:fillRef idx="1">
+            <a:schemeClr val="accent1"/>
+          </a:fillRef>
+          <a:effectRef idx="0">
+            <a:schemeClr val="accent1"/>
+          </a:effectRef>
+          <a:fontRef idx="minor">
+            <a:schemeClr val="lt1"/>
+          </a:fontRef>
+        </p:style>
+        <p:txBody>
+          <a:bodyPr rtlCol="0" anchor="ctr"/>
+          <a:lstStyle/>
+          <a:p>
+            <a:pPr algn="ctr"/>
+            <a:endParaRPr lang="de-DE"/>
+          </a:p>
+        </p:txBody>
+      </p:sp>
+      <p:sp>
+        <p:nvSpPr>
+          <p:cNvPr id="47" name="Pfeil: nach rechts 46">
+            <a:extLst>
+              <a:ext uri="{FF2B5EF4-FFF2-40B4-BE49-F238E27FC236}">
+                <a16:creationId xmlns:a16="http://schemas.microsoft.com/office/drawing/2014/main" id="{95CEDEDB-F285-455A-8EB9-7D990A4BA321}"/>
+              </a:ext>
+            </a:extLst>
+          </p:cNvPr>
+          <p:cNvSpPr/>
+          <p:nvPr/>
+        </p:nvSpPr>
+        <p:spPr>
+          <a:xfrm rot="10800000" flipH="1">
+            <a:off x="2420232" y="4244830"/>
+            <a:ext cx="1523157" cy="317898"/>
+          </a:xfrm>
+          <a:prstGeom prst="rightArrow">
+            <a:avLst/>
+          </a:prstGeom>
+          <a:solidFill>
+            <a:srgbClr val="D6DCE5"/>
+          </a:solidFill>
+          <a:ln>
+            <a:noFill/>
+          </a:ln>
+        </p:spPr>
+        <p:style>
+          <a:lnRef idx="2">
+            <a:schemeClr val="accent1">
+              <a:shade val="50000"/>
+            </a:schemeClr>
+          </a:lnRef>
+          <a:fillRef idx="1">
+            <a:schemeClr val="accent1"/>
+          </a:fillRef>
+          <a:effectRef idx="0">
+            <a:schemeClr val="accent1"/>
+          </a:effectRef>
+          <a:fontRef idx="minor">
+            <a:schemeClr val="lt1"/>
+          </a:fontRef>
+        </p:style>
+        <p:txBody>
+          <a:bodyPr rtlCol="0" anchor="ctr"/>
+          <a:lstStyle/>
+          <a:p>
+            <a:pPr algn="ctr"/>
+            <a:endParaRPr lang="de-DE"/>
+          </a:p>
+        </p:txBody>
+      </p:sp>
+      <p:sp>
+        <p:nvSpPr>
+          <p:cNvPr id="45" name="Pfeil: nach rechts 44">
+            <a:extLst>
+              <a:ext uri="{FF2B5EF4-FFF2-40B4-BE49-F238E27FC236}">
+                <a16:creationId xmlns:a16="http://schemas.microsoft.com/office/drawing/2014/main" id="{808225D5-188F-4A8B-B9BC-8EBEB9AFF2DE}"/>
+              </a:ext>
+            </a:extLst>
+          </p:cNvPr>
+          <p:cNvSpPr/>
+          <p:nvPr/>
+        </p:nvSpPr>
+        <p:spPr>
+          <a:xfrm rot="10800000">
+            <a:off x="2586771" y="3928056"/>
+            <a:ext cx="1691476" cy="317898"/>
+          </a:xfrm>
+          <a:prstGeom prst="rightArrow">
+            <a:avLst/>
+          </a:prstGeom>
+          <a:solidFill>
+            <a:srgbClr val="D6DCE5"/>
+          </a:solidFill>
+          <a:ln>
+            <a:noFill/>
+          </a:ln>
+        </p:spPr>
+        <p:style>
+          <a:lnRef idx="2">
+            <a:schemeClr val="accent1">
+              <a:shade val="50000"/>
+            </a:schemeClr>
+          </a:lnRef>
+          <a:fillRef idx="1">
+            <a:schemeClr val="accent1"/>
+          </a:fillRef>
+          <a:effectRef idx="0">
+            <a:schemeClr val="accent1"/>
+          </a:effectRef>
+          <a:fontRef idx="minor">
+            <a:schemeClr val="lt1"/>
+          </a:fontRef>
+        </p:style>
+        <p:txBody>
+          <a:bodyPr rtlCol="0" anchor="ctr"/>
+          <a:lstStyle/>
+          <a:p>
+            <a:pPr algn="ctr"/>
+            <a:endParaRPr lang="de-DE"/>
+          </a:p>
+        </p:txBody>
+      </p:sp>
+      <p:sp>
+        <p:nvSpPr>
           <p:cNvPr id="2" name="Titel 1">
             <a:extLst>
               <a:ext uri="{FF2B5EF4-FFF2-40B4-BE49-F238E27FC236}">
-                <a16:creationId xmlns:a16="http://schemas.microsoft.com/office/drawing/2014/main" id="{8865118E-31D4-4331-9C25-009701848EC7}"/>
+                <a16:creationId xmlns:a16="http://schemas.microsoft.com/office/drawing/2014/main" id="{0551B04D-69E8-4BFE-9F1D-951E570F0118}"/>
               </a:ext>
             </a:extLst>
           </p:cNvPr>
@@ -12350,34 +13610,32 @@
           <a:p>
             <a:r>
               <a:rPr lang="de-DE"/>
-              <a:t>booklet-structure.png</a:t>
-            </a:r>
-          </a:p>
-        </p:txBody>
-      </p:sp>
-      <p:sp>
-        <p:nvSpPr>
-          <p:cNvPr id="3" name="Rechteck 2">
-            <a:extLst>
-              <a:ext uri="{FF2B5EF4-FFF2-40B4-BE49-F238E27FC236}">
-                <a16:creationId xmlns:a16="http://schemas.microsoft.com/office/drawing/2014/main" id="{FE558467-B3F4-4A05-828A-3DD593F7168D}"/>
-              </a:ext>
-            </a:extLst>
-          </p:cNvPr>
-          <p:cNvSpPr/>
-          <p:nvPr/>
-        </p:nvSpPr>
-        <p:spPr>
-          <a:xfrm>
-            <a:off x="650959" y="2604038"/>
-            <a:ext cx="1567585" cy="3236692"/>
+              <a:t>response-analyser-stars.png</a:t>
+            </a:r>
+          </a:p>
+        </p:txBody>
+      </p:sp>
+      <p:sp>
+        <p:nvSpPr>
+          <p:cNvPr id="5" name="Rechteck 4">
+            <a:extLst>
+              <a:ext uri="{FF2B5EF4-FFF2-40B4-BE49-F238E27FC236}">
+                <a16:creationId xmlns:a16="http://schemas.microsoft.com/office/drawing/2014/main" id="{8D492F30-5400-4C0A-AFC2-EAC63131E272}"/>
+              </a:ext>
+            </a:extLst>
+          </p:cNvPr>
+          <p:cNvSpPr/>
+          <p:nvPr/>
+        </p:nvSpPr>
+        <p:spPr>
+          <a:xfrm>
+            <a:off x="2660399" y="2950619"/>
+            <a:ext cx="1272142" cy="312190"/>
           </a:xfrm>
           <a:prstGeom prst="rect">
             <a:avLst/>
           </a:prstGeom>
-          <a:solidFill>
-            <a:srgbClr val="D6DCE5"/>
-          </a:solidFill>
+          <a:noFill/>
           <a:ln>
             <a:noFill/>
           </a:ln>
@@ -12404,34 +13662,39 @@
           <a:p>
             <a:pPr algn="ctr"/>
             <a:r>
-              <a:rPr lang="de-DE" sz="1600">
+              <a:rPr lang="de-DE" sz="1200">
                 <a:solidFill>
                   <a:srgbClr val="405786"/>
                 </a:solidFill>
               </a:rPr>
-              <a:t>Testheft 1</a:t>
-            </a:r>
-          </a:p>
-        </p:txBody>
-      </p:sp>
-      <p:sp>
-        <p:nvSpPr>
-          <p:cNvPr id="4" name="Rechteck 3">
-            <a:extLst>
-              <a:ext uri="{FF2B5EF4-FFF2-40B4-BE49-F238E27FC236}">
-                <a16:creationId xmlns:a16="http://schemas.microsoft.com/office/drawing/2014/main" id="{CE3D1E40-06BD-4A0F-92D8-C2261B665773}"/>
-              </a:ext>
-            </a:extLst>
-          </p:cNvPr>
-          <p:cNvSpPr/>
-          <p:nvPr/>
-        </p:nvSpPr>
-        <p:spPr>
-          <a:xfrm>
-            <a:off x="781843" y="2981853"/>
-            <a:ext cx="1305816" cy="1290906"/>
-          </a:xfrm>
-          <a:prstGeom prst="rect">
+              <a:t>Testhefte, Logins</a:t>
+            </a:r>
+            <a:endParaRPr lang="de-DE" sz="1400">
+              <a:solidFill>
+                <a:srgbClr val="405786"/>
+              </a:solidFill>
+            </a:endParaRPr>
+          </a:p>
+        </p:txBody>
+      </p:sp>
+      <p:sp>
+        <p:nvSpPr>
+          <p:cNvPr id="24" name="Rechteck: abgerundete Ecken 23">
+            <a:extLst>
+              <a:ext uri="{FF2B5EF4-FFF2-40B4-BE49-F238E27FC236}">
+                <a16:creationId xmlns:a16="http://schemas.microsoft.com/office/drawing/2014/main" id="{55A149B1-1B8A-4A2A-A04E-957240767D97}"/>
+              </a:ext>
+            </a:extLst>
+          </p:cNvPr>
+          <p:cNvSpPr/>
+          <p:nvPr/>
+        </p:nvSpPr>
+        <p:spPr>
+          <a:xfrm>
+            <a:off x="565608" y="2938048"/>
+            <a:ext cx="1952967" cy="566909"/>
+          </a:xfrm>
+          <a:prstGeom prst="roundRect">
             <a:avLst/>
           </a:prstGeom>
           <a:solidFill>
@@ -12458,80 +13721,36 @@
           </a:fontRef>
         </p:style>
         <p:txBody>
-          <a:bodyPr rtlCol="0" anchor="t"/>
-          <a:lstStyle/>
-          <a:p>
-            <a:pPr algn="ctr"/>
-            <a:r>
-              <a:rPr lang="de-DE" sz="2000" b="1">
-                <a:solidFill>
-                  <a:schemeClr val="bg1"/>
-                </a:solidFill>
-              </a:rPr>
-              <a:t>Modul 1</a:t>
-            </a:r>
-          </a:p>
-          <a:p>
-            <a:pPr algn="ctr"/>
-            <a:endParaRPr lang="de-DE" sz="1000">
-              <a:solidFill>
-                <a:schemeClr val="bg1"/>
-              </a:solidFill>
-            </a:endParaRPr>
-          </a:p>
-          <a:p>
-            <a:pPr algn="ctr"/>
-            <a:r>
-              <a:rPr lang="de-DE" sz="1600">
-                <a:solidFill>
-                  <a:schemeClr val="bg1"/>
-                </a:solidFill>
-              </a:rPr>
-              <a:t>Unit A</a:t>
-            </a:r>
-          </a:p>
-          <a:p>
-            <a:pPr algn="ctr"/>
-            <a:r>
-              <a:rPr lang="de-DE" sz="1600">
-                <a:solidFill>
-                  <a:schemeClr val="bg1"/>
-                </a:solidFill>
-              </a:rPr>
-              <a:t>Unit B</a:t>
-            </a:r>
-          </a:p>
-          <a:p>
-            <a:pPr algn="ctr"/>
-            <a:r>
-              <a:rPr lang="de-DE" sz="1600">
-                <a:solidFill>
-                  <a:schemeClr val="bg1"/>
-                </a:solidFill>
-              </a:rPr>
-              <a:t>Unit C</a:t>
-            </a:r>
-          </a:p>
-        </p:txBody>
-      </p:sp>
-      <p:sp>
-        <p:nvSpPr>
-          <p:cNvPr id="6" name="Rechteck 5">
-            <a:extLst>
-              <a:ext uri="{FF2B5EF4-FFF2-40B4-BE49-F238E27FC236}">
-                <a16:creationId xmlns:a16="http://schemas.microsoft.com/office/drawing/2014/main" id="{F8DA2B19-A799-499D-9544-537F1372B927}"/>
-              </a:ext>
-            </a:extLst>
-          </p:cNvPr>
-          <p:cNvSpPr/>
-          <p:nvPr/>
-        </p:nvSpPr>
-        <p:spPr>
-          <a:xfrm>
-            <a:off x="781843" y="4379988"/>
-            <a:ext cx="1305816" cy="1290906"/>
-          </a:xfrm>
-          <a:prstGeom prst="rect">
+          <a:bodyPr rtlCol="0" anchor="ctr"/>
+          <a:lstStyle/>
+          <a:p>
+            <a:pPr algn="ctr"/>
+            <a:r>
+              <a:rPr lang="de-DE" sz="1400"/>
+              <a:t>IQB-Testcenter</a:t>
+            </a:r>
+            <a:endParaRPr lang="de-DE"/>
+          </a:p>
+        </p:txBody>
+      </p:sp>
+      <p:sp>
+        <p:nvSpPr>
+          <p:cNvPr id="28" name="Rechteck: abgerundete Ecken 27">
+            <a:extLst>
+              <a:ext uri="{FF2B5EF4-FFF2-40B4-BE49-F238E27FC236}">
+                <a16:creationId xmlns:a16="http://schemas.microsoft.com/office/drawing/2014/main" id="{18CDCB2C-10D5-4159-8DD6-1628F42C8F1C}"/>
+              </a:ext>
+            </a:extLst>
+          </p:cNvPr>
+          <p:cNvSpPr/>
+          <p:nvPr/>
+        </p:nvSpPr>
+        <p:spPr>
+          <a:xfrm>
+            <a:off x="565608" y="3776488"/>
+            <a:ext cx="1952967" cy="961458"/>
+          </a:xfrm>
+          <a:prstGeom prst="roundRect">
             <a:avLst/>
           </a:prstGeom>
           <a:solidFill>
@@ -12558,78 +13777,34 @@
           </a:fontRef>
         </p:style>
         <p:txBody>
-          <a:bodyPr rtlCol="0" anchor="t"/>
-          <a:lstStyle/>
-          <a:p>
-            <a:pPr algn="ctr"/>
-            <a:r>
-              <a:rPr lang="de-DE" sz="2000" b="1">
-                <a:solidFill>
-                  <a:schemeClr val="bg1"/>
-                </a:solidFill>
-              </a:rPr>
-              <a:t>Modul 2</a:t>
-            </a:r>
-          </a:p>
-          <a:p>
-            <a:pPr algn="ctr"/>
-            <a:endParaRPr lang="de-DE" sz="1000">
-              <a:solidFill>
-                <a:schemeClr val="bg1"/>
-              </a:solidFill>
-            </a:endParaRPr>
-          </a:p>
-          <a:p>
-            <a:pPr algn="ctr"/>
-            <a:r>
-              <a:rPr lang="de-DE" sz="1600">
-                <a:solidFill>
-                  <a:schemeClr val="bg1"/>
-                </a:solidFill>
-              </a:rPr>
-              <a:t>Unit D</a:t>
-            </a:r>
-          </a:p>
-          <a:p>
-            <a:pPr algn="ctr"/>
-            <a:r>
-              <a:rPr lang="de-DE" sz="1600">
-                <a:solidFill>
-                  <a:schemeClr val="bg1"/>
-                </a:solidFill>
-              </a:rPr>
-              <a:t>Unit E</a:t>
-            </a:r>
-          </a:p>
-          <a:p>
-            <a:pPr algn="ctr"/>
-            <a:r>
-              <a:rPr lang="de-DE" sz="1600">
-                <a:solidFill>
-                  <a:schemeClr val="bg1"/>
-                </a:solidFill>
-              </a:rPr>
-              <a:t>Unit F</a:t>
-            </a:r>
-          </a:p>
-        </p:txBody>
-      </p:sp>
-      <p:sp>
-        <p:nvSpPr>
-          <p:cNvPr id="8" name="Rechteck 7">
-            <a:extLst>
-              <a:ext uri="{FF2B5EF4-FFF2-40B4-BE49-F238E27FC236}">
-                <a16:creationId xmlns:a16="http://schemas.microsoft.com/office/drawing/2014/main" id="{0A485D1C-EC3D-4C7C-8EDE-133F11ED8FF4}"/>
-              </a:ext>
-            </a:extLst>
-          </p:cNvPr>
-          <p:cNvSpPr/>
-          <p:nvPr/>
-        </p:nvSpPr>
-        <p:spPr>
-          <a:xfrm>
-            <a:off x="4047897" y="2604038"/>
-            <a:ext cx="1567585" cy="3236692"/>
+          <a:bodyPr rtlCol="0" anchor="ctr"/>
+          <a:lstStyle/>
+          <a:p>
+            <a:pPr algn="ctr"/>
+            <a:r>
+              <a:rPr lang="de-DE" sz="1400"/>
+              <a:t>IQB-ResponseAnalyser</a:t>
+            </a:r>
+            <a:endParaRPr lang="de-DE"/>
+          </a:p>
+        </p:txBody>
+      </p:sp>
+      <p:sp>
+        <p:nvSpPr>
+          <p:cNvPr id="33" name="Rechteck 32">
+            <a:extLst>
+              <a:ext uri="{FF2B5EF4-FFF2-40B4-BE49-F238E27FC236}">
+                <a16:creationId xmlns:a16="http://schemas.microsoft.com/office/drawing/2014/main" id="{E60FA52C-E5FD-4D73-BD0B-066F95104E73}"/>
+              </a:ext>
+            </a:extLst>
+          </p:cNvPr>
+          <p:cNvSpPr/>
+          <p:nvPr/>
+        </p:nvSpPr>
+        <p:spPr>
+          <a:xfrm>
+            <a:off x="3976878" y="2080260"/>
+            <a:ext cx="2230163" cy="2983101"/>
           </a:xfrm>
           <a:prstGeom prst="rect">
             <a:avLst/>
@@ -12658,44 +13833,95 @@
           </a:fontRef>
         </p:style>
         <p:txBody>
+          <a:bodyPr rtlCol="0" anchor="ctr"/>
+          <a:lstStyle/>
+          <a:p>
+            <a:pPr algn="r"/>
+            <a:endParaRPr lang="de-DE" sz="1600">
+              <a:solidFill>
+                <a:srgbClr val="405786"/>
+              </a:solidFill>
+            </a:endParaRPr>
+          </a:p>
+        </p:txBody>
+      </p:sp>
+      <p:sp>
+        <p:nvSpPr>
+          <p:cNvPr id="37" name="Rechteck 36">
+            <a:extLst>
+              <a:ext uri="{FF2B5EF4-FFF2-40B4-BE49-F238E27FC236}">
+                <a16:creationId xmlns:a16="http://schemas.microsoft.com/office/drawing/2014/main" id="{A169B987-A534-4CB7-A1B9-63A9F65E37E4}"/>
+              </a:ext>
+            </a:extLst>
+          </p:cNvPr>
+          <p:cNvSpPr/>
+          <p:nvPr/>
+        </p:nvSpPr>
+        <p:spPr>
+          <a:xfrm>
+            <a:off x="4124904" y="3182935"/>
+            <a:ext cx="1878368" cy="404398"/>
+          </a:xfrm>
+          <a:prstGeom prst="rect">
+            <a:avLst/>
+          </a:prstGeom>
+          <a:noFill/>
+          <a:ln>
+            <a:noFill/>
+          </a:ln>
+        </p:spPr>
+        <p:style>
+          <a:lnRef idx="2">
+            <a:schemeClr val="accent1">
+              <a:shade val="50000"/>
+            </a:schemeClr>
+          </a:lnRef>
+          <a:fillRef idx="1">
+            <a:schemeClr val="accent1"/>
+          </a:fillRef>
+          <a:effectRef idx="0">
+            <a:schemeClr val="accent1"/>
+          </a:effectRef>
+          <a:fontRef idx="minor">
+            <a:schemeClr val="lt1"/>
+          </a:fontRef>
+        </p:style>
+        <p:txBody>
           <a:bodyPr rtlCol="0" anchor="t"/>
           <a:lstStyle/>
           <a:p>
-            <a:pPr algn="ctr"/>
-            <a:r>
-              <a:rPr lang="de-DE" sz="1600">
+            <a:r>
+              <a:rPr lang="de-DE" sz="1200">
                 <a:solidFill>
                   <a:srgbClr val="405786"/>
                 </a:solidFill>
               </a:rPr>
-              <a:t>Testheft 2</a:t>
-            </a:r>
-          </a:p>
-        </p:txBody>
-      </p:sp>
-      <p:sp>
-        <p:nvSpPr>
-          <p:cNvPr id="9" name="Rechteck 8">
-            <a:extLst>
-              <a:ext uri="{FF2B5EF4-FFF2-40B4-BE49-F238E27FC236}">
-                <a16:creationId xmlns:a16="http://schemas.microsoft.com/office/drawing/2014/main" id="{4DF4EF8D-0812-476F-9662-390793A58462}"/>
-              </a:ext>
-            </a:extLst>
-          </p:cNvPr>
-          <p:cNvSpPr/>
-          <p:nvPr/>
-        </p:nvSpPr>
-        <p:spPr>
-          <a:xfrm>
-            <a:off x="4178781" y="2981853"/>
-            <a:ext cx="1305816" cy="1290906"/>
+              <a:t>Transformation Antworten</a:t>
+            </a:r>
+          </a:p>
+        </p:txBody>
+      </p:sp>
+      <p:sp>
+        <p:nvSpPr>
+          <p:cNvPr id="38" name="Rechteck 37">
+            <a:extLst>
+              <a:ext uri="{FF2B5EF4-FFF2-40B4-BE49-F238E27FC236}">
+                <a16:creationId xmlns:a16="http://schemas.microsoft.com/office/drawing/2014/main" id="{36AA9122-78A1-4FE7-93DE-AF0FC8D3F9F2}"/>
+              </a:ext>
+            </a:extLst>
+          </p:cNvPr>
+          <p:cNvSpPr/>
+          <p:nvPr/>
+        </p:nvSpPr>
+        <p:spPr>
+          <a:xfrm>
+            <a:off x="4124904" y="3820316"/>
+            <a:ext cx="1942950" cy="504072"/>
           </a:xfrm>
           <a:prstGeom prst="rect">
             <a:avLst/>
           </a:prstGeom>
-          <a:solidFill>
-            <a:srgbClr val="008CBA"/>
-          </a:solidFill>
+          <a:noFill/>
           <a:ln>
             <a:noFill/>
           </a:ln>
@@ -12720,1171 +13946,635 @@
           <a:bodyPr rtlCol="0" anchor="t"/>
           <a:lstStyle/>
           <a:p>
-            <a:pPr algn="ctr"/>
-            <a:r>
-              <a:rPr lang="de-DE" sz="2000" b="1">
-                <a:solidFill>
-                  <a:schemeClr val="bg1"/>
-                </a:solidFill>
-              </a:rPr>
-              <a:t>Modul 1</a:t>
-            </a:r>
-          </a:p>
-          <a:p>
-            <a:pPr algn="ctr"/>
-            <a:endParaRPr lang="de-DE" sz="1000">
-              <a:solidFill>
-                <a:schemeClr val="bg1"/>
-              </a:solidFill>
-            </a:endParaRPr>
-          </a:p>
-          <a:p>
-            <a:pPr algn="ctr"/>
-            <a:r>
-              <a:rPr lang="de-DE" sz="1600">
-                <a:solidFill>
-                  <a:schemeClr val="bg1"/>
-                </a:solidFill>
-              </a:rPr>
-              <a:t>Unit A</a:t>
-            </a:r>
-          </a:p>
-          <a:p>
-            <a:pPr algn="ctr"/>
-            <a:r>
-              <a:rPr lang="de-DE" sz="1600">
-                <a:solidFill>
-                  <a:schemeClr val="bg1"/>
-                </a:solidFill>
-              </a:rPr>
-              <a:t>Unit B</a:t>
-            </a:r>
-          </a:p>
-          <a:p>
-            <a:pPr algn="ctr"/>
-            <a:r>
-              <a:rPr lang="de-DE" sz="1600">
-                <a:solidFill>
-                  <a:schemeClr val="bg1"/>
-                </a:solidFill>
-              </a:rPr>
-              <a:t>Unit C</a:t>
-            </a:r>
-          </a:p>
-        </p:txBody>
-      </p:sp>
-      <p:sp>
-        <p:nvSpPr>
-          <p:cNvPr id="10" name="Rechteck 9">
-            <a:extLst>
-              <a:ext uri="{FF2B5EF4-FFF2-40B4-BE49-F238E27FC236}">
-                <a16:creationId xmlns:a16="http://schemas.microsoft.com/office/drawing/2014/main" id="{4393D6E7-539A-4437-9A43-0DFB51EBC4A3}"/>
-              </a:ext>
-            </a:extLst>
-          </p:cNvPr>
-          <p:cNvSpPr/>
-          <p:nvPr/>
-        </p:nvSpPr>
-        <p:spPr>
-          <a:xfrm>
-            <a:off x="4178781" y="4379988"/>
-            <a:ext cx="1305816" cy="1290906"/>
-          </a:xfrm>
-          <a:prstGeom prst="rect">
-            <a:avLst/>
-          </a:prstGeom>
-          <a:solidFill>
-            <a:srgbClr val="008CBA"/>
-          </a:solidFill>
-          <a:ln>
-            <a:noFill/>
-          </a:ln>
-        </p:spPr>
-        <p:style>
-          <a:lnRef idx="2">
-            <a:schemeClr val="accent1">
-              <a:shade val="50000"/>
-            </a:schemeClr>
-          </a:lnRef>
-          <a:fillRef idx="1">
-            <a:schemeClr val="accent1"/>
-          </a:fillRef>
-          <a:effectRef idx="0">
-            <a:schemeClr val="accent1"/>
-          </a:effectRef>
-          <a:fontRef idx="minor">
-            <a:schemeClr val="lt1"/>
-          </a:fontRef>
-        </p:style>
-        <p:txBody>
-          <a:bodyPr rtlCol="0" anchor="t"/>
-          <a:lstStyle/>
-          <a:p>
-            <a:pPr algn="ctr"/>
-            <a:r>
-              <a:rPr lang="de-DE" sz="2000" b="1">
-                <a:solidFill>
-                  <a:schemeClr val="bg1"/>
-                </a:solidFill>
-              </a:rPr>
-              <a:t>Modul 3</a:t>
-            </a:r>
-          </a:p>
-          <a:p>
-            <a:pPr algn="ctr"/>
-            <a:endParaRPr lang="de-DE" sz="1000">
-              <a:solidFill>
-                <a:schemeClr val="bg1"/>
-              </a:solidFill>
-            </a:endParaRPr>
-          </a:p>
-          <a:p>
-            <a:pPr algn="ctr"/>
-            <a:r>
-              <a:rPr lang="de-DE" sz="1600">
-                <a:solidFill>
-                  <a:schemeClr val="bg1"/>
-                </a:solidFill>
-              </a:rPr>
-              <a:t>Unit D</a:t>
-            </a:r>
-          </a:p>
-          <a:p>
-            <a:pPr algn="ctr"/>
-            <a:r>
-              <a:rPr lang="de-DE" sz="1600">
-                <a:solidFill>
-                  <a:schemeClr val="bg1"/>
-                </a:solidFill>
-              </a:rPr>
-              <a:t>Unit G</a:t>
-            </a:r>
-          </a:p>
-          <a:p>
-            <a:pPr algn="ctr"/>
-            <a:r>
-              <a:rPr lang="de-DE" sz="1600">
-                <a:solidFill>
-                  <a:schemeClr val="bg1"/>
-                </a:solidFill>
-              </a:rPr>
-              <a:t>Unit H</a:t>
-            </a:r>
-          </a:p>
-        </p:txBody>
-      </p:sp>
-      <p:sp>
-        <p:nvSpPr>
-          <p:cNvPr id="11" name="Rechteck 10">
-            <a:extLst>
-              <a:ext uri="{FF2B5EF4-FFF2-40B4-BE49-F238E27FC236}">
-                <a16:creationId xmlns:a16="http://schemas.microsoft.com/office/drawing/2014/main" id="{9B0677E0-1E08-425A-B3AB-6ED4E6D704E7}"/>
-              </a:ext>
-            </a:extLst>
-          </p:cNvPr>
-          <p:cNvSpPr/>
-          <p:nvPr/>
-        </p:nvSpPr>
-        <p:spPr>
-          <a:xfrm>
-            <a:off x="2349428" y="2604038"/>
-            <a:ext cx="1567585" cy="3236692"/>
-          </a:xfrm>
-          <a:prstGeom prst="rect">
-            <a:avLst/>
-          </a:prstGeom>
-          <a:solidFill>
-            <a:srgbClr val="D6DCE5"/>
-          </a:solidFill>
-          <a:ln>
-            <a:noFill/>
-          </a:ln>
-        </p:spPr>
-        <p:style>
-          <a:lnRef idx="2">
-            <a:schemeClr val="accent1">
-              <a:shade val="50000"/>
-            </a:schemeClr>
-          </a:lnRef>
-          <a:fillRef idx="1">
-            <a:schemeClr val="accent1"/>
-          </a:fillRef>
-          <a:effectRef idx="0">
-            <a:schemeClr val="accent1"/>
-          </a:effectRef>
-          <a:fontRef idx="minor">
-            <a:schemeClr val="lt1"/>
-          </a:fontRef>
-        </p:style>
-        <p:txBody>
-          <a:bodyPr rtlCol="0" anchor="t"/>
-          <a:lstStyle/>
-          <a:p>
-            <a:pPr algn="ctr"/>
-            <a:r>
-              <a:rPr lang="de-DE" sz="1600" b="1">
+            <a:r>
+              <a:rPr lang="de-DE" sz="1200">
                 <a:solidFill>
                   <a:srgbClr val="405786"/>
                 </a:solidFill>
               </a:rPr>
-              <a:t>Items</a:t>
-            </a:r>
-          </a:p>
-          <a:p>
-            <a:pPr algn="ctr"/>
-            <a:r>
-              <a:rPr lang="de-DE" sz="1600">
+              <a:t>Zusammenfassung von Personendaten</a:t>
+            </a:r>
+          </a:p>
+        </p:txBody>
+      </p:sp>
+      <p:sp>
+        <p:nvSpPr>
+          <p:cNvPr id="29" name="Rechteck: abgerundete Ecken 28">
+            <a:extLst>
+              <a:ext uri="{FF2B5EF4-FFF2-40B4-BE49-F238E27FC236}">
+                <a16:creationId xmlns:a16="http://schemas.microsoft.com/office/drawing/2014/main" id="{9FDE0028-0EE4-4C14-9A21-5BA76FD49DBA}"/>
+              </a:ext>
+            </a:extLst>
+          </p:cNvPr>
+          <p:cNvSpPr/>
+          <p:nvPr/>
+        </p:nvSpPr>
+        <p:spPr>
+          <a:xfrm>
+            <a:off x="4143415" y="2165014"/>
+            <a:ext cx="1897087" cy="491386"/>
+          </a:xfrm>
+          <a:prstGeom prst="roundRect">
+            <a:avLst/>
+          </a:prstGeom>
+          <a:solidFill>
+            <a:srgbClr val="7D12B9"/>
+          </a:solidFill>
+          <a:ln>
+            <a:noFill/>
+          </a:ln>
+        </p:spPr>
+        <p:style>
+          <a:lnRef idx="2">
+            <a:schemeClr val="accent1">
+              <a:shade val="50000"/>
+            </a:schemeClr>
+          </a:lnRef>
+          <a:fillRef idx="1">
+            <a:schemeClr val="accent1"/>
+          </a:fillRef>
+          <a:effectRef idx="0">
+            <a:schemeClr val="accent1"/>
+          </a:effectRef>
+          <a:fontRef idx="minor">
+            <a:schemeClr val="lt1"/>
+          </a:fontRef>
+        </p:style>
+        <p:txBody>
+          <a:bodyPr rtlCol="0" anchor="ctr"/>
+          <a:lstStyle/>
+          <a:p>
+            <a:pPr algn="ctr"/>
+            <a:r>
+              <a:rPr lang="de-DE" sz="1400"/>
+              <a:t>Landesportalsystem</a:t>
+            </a:r>
+            <a:endParaRPr lang="de-DE"/>
+          </a:p>
+        </p:txBody>
+      </p:sp>
+      <p:sp>
+        <p:nvSpPr>
+          <p:cNvPr id="41" name="Rechteck 40">
+            <a:extLst>
+              <a:ext uri="{FF2B5EF4-FFF2-40B4-BE49-F238E27FC236}">
+                <a16:creationId xmlns:a16="http://schemas.microsoft.com/office/drawing/2014/main" id="{11699080-069A-4BBF-89B5-ECD97458B24F}"/>
+              </a:ext>
+            </a:extLst>
+          </p:cNvPr>
+          <p:cNvSpPr/>
+          <p:nvPr/>
+        </p:nvSpPr>
+        <p:spPr>
+          <a:xfrm>
+            <a:off x="4124904" y="2753811"/>
+            <a:ext cx="1676258" cy="436770"/>
+          </a:xfrm>
+          <a:prstGeom prst="rect">
+            <a:avLst/>
+          </a:prstGeom>
+          <a:noFill/>
+          <a:ln>
+            <a:noFill/>
+          </a:ln>
+        </p:spPr>
+        <p:style>
+          <a:lnRef idx="2">
+            <a:schemeClr val="accent1">
+              <a:shade val="50000"/>
+            </a:schemeClr>
+          </a:lnRef>
+          <a:fillRef idx="1">
+            <a:schemeClr val="accent1"/>
+          </a:fillRef>
+          <a:effectRef idx="0">
+            <a:schemeClr val="accent1"/>
+          </a:effectRef>
+          <a:fontRef idx="minor">
+            <a:schemeClr val="lt1"/>
+          </a:fontRef>
+        </p:style>
+        <p:txBody>
+          <a:bodyPr rtlCol="0" anchor="t"/>
+          <a:lstStyle/>
+          <a:p>
+            <a:r>
+              <a:rPr lang="de-DE" sz="1200">
                 <a:solidFill>
                   <a:srgbClr val="405786"/>
                 </a:solidFill>
               </a:rPr>
-              <a:t>A1</a:t>
-            </a:r>
-          </a:p>
-          <a:p>
-            <a:pPr algn="ctr"/>
-            <a:r>
-              <a:rPr lang="de-DE" sz="1600">
+              <a:t>Zuweisung Personen zu Testheften</a:t>
+            </a:r>
+          </a:p>
+        </p:txBody>
+      </p:sp>
+      <p:sp>
+        <p:nvSpPr>
+          <p:cNvPr id="43" name="Rechteck 42">
+            <a:extLst>
+              <a:ext uri="{FF2B5EF4-FFF2-40B4-BE49-F238E27FC236}">
+                <a16:creationId xmlns:a16="http://schemas.microsoft.com/office/drawing/2014/main" id="{89E45DD8-5AC8-452A-8CF4-54F340B0E071}"/>
+              </a:ext>
+            </a:extLst>
+          </p:cNvPr>
+          <p:cNvSpPr/>
+          <p:nvPr/>
+        </p:nvSpPr>
+        <p:spPr>
+          <a:xfrm>
+            <a:off x="2747770" y="3211688"/>
+            <a:ext cx="912402" cy="323060"/>
+          </a:xfrm>
+          <a:prstGeom prst="rect">
+            <a:avLst/>
+          </a:prstGeom>
+          <a:noFill/>
+          <a:ln>
+            <a:noFill/>
+          </a:ln>
+        </p:spPr>
+        <p:style>
+          <a:lnRef idx="2">
+            <a:schemeClr val="accent1">
+              <a:shade val="50000"/>
+            </a:schemeClr>
+          </a:lnRef>
+          <a:fillRef idx="1">
+            <a:schemeClr val="accent1"/>
+          </a:fillRef>
+          <a:effectRef idx="0">
+            <a:schemeClr val="accent1"/>
+          </a:effectRef>
+          <a:fontRef idx="minor">
+            <a:schemeClr val="lt1"/>
+          </a:fontRef>
+        </p:style>
+        <p:txBody>
+          <a:bodyPr rtlCol="0" anchor="t"/>
+          <a:lstStyle/>
+          <a:p>
+            <a:pPr algn="ctr"/>
+            <a:r>
+              <a:rPr lang="de-DE" sz="1200">
                 <a:solidFill>
                   <a:srgbClr val="405786"/>
                 </a:solidFill>
               </a:rPr>
-              <a:t>A2</a:t>
-            </a:r>
-          </a:p>
-          <a:p>
-            <a:pPr algn="ctr"/>
-            <a:r>
-              <a:rPr lang="de-DE" sz="1600">
+              <a:t>Antworten</a:t>
+            </a:r>
+            <a:endParaRPr lang="de-DE" sz="1400">
+              <a:solidFill>
+                <a:srgbClr val="405786"/>
+              </a:solidFill>
+            </a:endParaRPr>
+          </a:p>
+        </p:txBody>
+      </p:sp>
+      <p:sp>
+        <p:nvSpPr>
+          <p:cNvPr id="46" name="Rechteck 45">
+            <a:extLst>
+              <a:ext uri="{FF2B5EF4-FFF2-40B4-BE49-F238E27FC236}">
+                <a16:creationId xmlns:a16="http://schemas.microsoft.com/office/drawing/2014/main" id="{447F9071-D586-4080-ACEF-639E7E083537}"/>
+              </a:ext>
+            </a:extLst>
+          </p:cNvPr>
+          <p:cNvSpPr/>
+          <p:nvPr/>
+        </p:nvSpPr>
+        <p:spPr>
+          <a:xfrm>
+            <a:off x="2747770" y="3949536"/>
+            <a:ext cx="912402" cy="317898"/>
+          </a:xfrm>
+          <a:prstGeom prst="rect">
+            <a:avLst/>
+          </a:prstGeom>
+          <a:noFill/>
+          <a:ln>
+            <a:noFill/>
+          </a:ln>
+        </p:spPr>
+        <p:style>
+          <a:lnRef idx="2">
+            <a:schemeClr val="accent1">
+              <a:shade val="50000"/>
+            </a:schemeClr>
+          </a:lnRef>
+          <a:fillRef idx="1">
+            <a:schemeClr val="accent1"/>
+          </a:fillRef>
+          <a:effectRef idx="0">
+            <a:schemeClr val="accent1"/>
+          </a:effectRef>
+          <a:fontRef idx="minor">
+            <a:schemeClr val="lt1"/>
+          </a:fontRef>
+        </p:style>
+        <p:txBody>
+          <a:bodyPr rtlCol="0" anchor="t"/>
+          <a:lstStyle/>
+          <a:p>
+            <a:pPr algn="ctr"/>
+            <a:r>
+              <a:rPr lang="de-DE" sz="1200">
                 <a:solidFill>
                   <a:srgbClr val="405786"/>
                 </a:solidFill>
               </a:rPr>
-              <a:t>B1</a:t>
-            </a:r>
-          </a:p>
-          <a:p>
-            <a:pPr algn="ctr"/>
-            <a:r>
-              <a:rPr lang="de-DE" sz="1600">
+              <a:t>Antworten</a:t>
+            </a:r>
+            <a:endParaRPr lang="de-DE" sz="1400">
+              <a:solidFill>
+                <a:srgbClr val="405786"/>
+              </a:solidFill>
+            </a:endParaRPr>
+          </a:p>
+        </p:txBody>
+      </p:sp>
+      <p:sp>
+        <p:nvSpPr>
+          <p:cNvPr id="48" name="Rechteck 47">
+            <a:extLst>
+              <a:ext uri="{FF2B5EF4-FFF2-40B4-BE49-F238E27FC236}">
+                <a16:creationId xmlns:a16="http://schemas.microsoft.com/office/drawing/2014/main" id="{1E0FABDF-2317-4303-A7BD-8A147CEB1B88}"/>
+              </a:ext>
+            </a:extLst>
+          </p:cNvPr>
+          <p:cNvSpPr/>
+          <p:nvPr/>
+        </p:nvSpPr>
+        <p:spPr>
+          <a:xfrm>
+            <a:off x="2672838" y="4264585"/>
+            <a:ext cx="1062267" cy="323060"/>
+          </a:xfrm>
+          <a:prstGeom prst="rect">
+            <a:avLst/>
+          </a:prstGeom>
+          <a:noFill/>
+          <a:ln>
+            <a:noFill/>
+          </a:ln>
+        </p:spPr>
+        <p:style>
+          <a:lnRef idx="2">
+            <a:schemeClr val="accent1">
+              <a:shade val="50000"/>
+            </a:schemeClr>
+          </a:lnRef>
+          <a:fillRef idx="1">
+            <a:schemeClr val="accent1"/>
+          </a:fillRef>
+          <a:effectRef idx="0">
+            <a:schemeClr val="accent1"/>
+          </a:effectRef>
+          <a:fontRef idx="minor">
+            <a:schemeClr val="lt1"/>
+          </a:fontRef>
+        </p:style>
+        <p:txBody>
+          <a:bodyPr rtlCol="0" anchor="t"/>
+          <a:lstStyle/>
+          <a:p>
+            <a:pPr algn="ctr"/>
+            <a:r>
+              <a:rPr lang="de-DE" sz="1200">
                 <a:solidFill>
                   <a:srgbClr val="405786"/>
                 </a:solidFill>
               </a:rPr>
-              <a:t>B2</a:t>
-            </a:r>
-          </a:p>
-          <a:p>
-            <a:pPr algn="ctr"/>
-            <a:r>
-              <a:rPr lang="de-DE" sz="1600">
+              <a:t>Skalenwerte</a:t>
+            </a:r>
+            <a:endParaRPr lang="de-DE" sz="1400">
+              <a:solidFill>
+                <a:srgbClr val="405786"/>
+              </a:solidFill>
+            </a:endParaRPr>
+          </a:p>
+        </p:txBody>
+      </p:sp>
+      <p:sp>
+        <p:nvSpPr>
+          <p:cNvPr id="49" name="Rechteck 48">
+            <a:extLst>
+              <a:ext uri="{FF2B5EF4-FFF2-40B4-BE49-F238E27FC236}">
+                <a16:creationId xmlns:a16="http://schemas.microsoft.com/office/drawing/2014/main" id="{9E0FAA92-76A1-43B5-A73E-501E6515C764}"/>
+              </a:ext>
+            </a:extLst>
+          </p:cNvPr>
+          <p:cNvSpPr/>
+          <p:nvPr/>
+        </p:nvSpPr>
+        <p:spPr>
+          <a:xfrm>
+            <a:off x="4124904" y="4726304"/>
+            <a:ext cx="1903188" cy="337057"/>
+          </a:xfrm>
+          <a:prstGeom prst="rect">
+            <a:avLst/>
+          </a:prstGeom>
+          <a:noFill/>
+          <a:ln>
+            <a:noFill/>
+          </a:ln>
+        </p:spPr>
+        <p:style>
+          <a:lnRef idx="2">
+            <a:schemeClr val="accent1">
+              <a:shade val="50000"/>
+            </a:schemeClr>
+          </a:lnRef>
+          <a:fillRef idx="1">
+            <a:schemeClr val="accent1"/>
+          </a:fillRef>
+          <a:effectRef idx="0">
+            <a:schemeClr val="accent1"/>
+          </a:effectRef>
+          <a:fontRef idx="minor">
+            <a:schemeClr val="lt1"/>
+          </a:fontRef>
+        </p:style>
+        <p:txBody>
+          <a:bodyPr rtlCol="0" anchor="t"/>
+          <a:lstStyle/>
+          <a:p>
+            <a:r>
+              <a:rPr lang="de-DE" sz="1200">
                 <a:solidFill>
                   <a:srgbClr val="405786"/>
                 </a:solidFill>
               </a:rPr>
-              <a:t>C1</a:t>
-            </a:r>
-          </a:p>
-          <a:p>
-            <a:pPr algn="ctr"/>
-            <a:r>
-              <a:rPr lang="de-DE" sz="1600">
+              <a:t>Rückmeldung</a:t>
+            </a:r>
+          </a:p>
+        </p:txBody>
+      </p:sp>
+      <p:cxnSp>
+        <p:nvCxnSpPr>
+          <p:cNvPr id="21" name="Gerader Verbinder 20">
+            <a:extLst>
+              <a:ext uri="{FF2B5EF4-FFF2-40B4-BE49-F238E27FC236}">
+                <a16:creationId xmlns:a16="http://schemas.microsoft.com/office/drawing/2014/main" id="{309971D6-DD97-4ABD-8807-E42A785D7F03}"/>
+              </a:ext>
+            </a:extLst>
+          </p:cNvPr>
+          <p:cNvCxnSpPr>
+            <a:cxnSpLocks/>
+          </p:cNvCxnSpPr>
+          <p:nvPr/>
+        </p:nvCxnSpPr>
+        <p:spPr>
+          <a:xfrm>
+            <a:off x="4124904" y="3197114"/>
+            <a:ext cx="1903188" cy="0"/>
+          </a:xfrm>
+          <a:prstGeom prst="line">
+            <a:avLst/>
+          </a:prstGeom>
+          <a:ln>
+            <a:solidFill>
+              <a:srgbClr val="405786"/>
+            </a:solidFill>
+          </a:ln>
+        </p:spPr>
+        <p:style>
+          <a:lnRef idx="1">
+            <a:schemeClr val="accent1"/>
+          </a:lnRef>
+          <a:fillRef idx="0">
+            <a:schemeClr val="accent1"/>
+          </a:fillRef>
+          <a:effectRef idx="0">
+            <a:schemeClr val="accent1"/>
+          </a:effectRef>
+          <a:fontRef idx="minor">
+            <a:schemeClr val="tx1"/>
+          </a:fontRef>
+        </p:style>
+      </p:cxnSp>
+      <p:cxnSp>
+        <p:nvCxnSpPr>
+          <p:cNvPr id="51" name="Gerader Verbinder 50">
+            <a:extLst>
+              <a:ext uri="{FF2B5EF4-FFF2-40B4-BE49-F238E27FC236}">
+                <a16:creationId xmlns:a16="http://schemas.microsoft.com/office/drawing/2014/main" id="{D63E6CDF-7D22-41DD-9734-C92BED2F0A28}"/>
+              </a:ext>
+            </a:extLst>
+          </p:cNvPr>
+          <p:cNvCxnSpPr>
+            <a:cxnSpLocks/>
+          </p:cNvCxnSpPr>
+          <p:nvPr/>
+        </p:nvCxnSpPr>
+        <p:spPr>
+          <a:xfrm>
+            <a:off x="4124904" y="4250436"/>
+            <a:ext cx="1903188" cy="0"/>
+          </a:xfrm>
+          <a:prstGeom prst="line">
+            <a:avLst/>
+          </a:prstGeom>
+          <a:ln>
+            <a:solidFill>
+              <a:srgbClr val="405786"/>
+            </a:solidFill>
+          </a:ln>
+        </p:spPr>
+        <p:style>
+          <a:lnRef idx="1">
+            <a:schemeClr val="accent1"/>
+          </a:lnRef>
+          <a:fillRef idx="0">
+            <a:schemeClr val="accent1"/>
+          </a:fillRef>
+          <a:effectRef idx="0">
+            <a:schemeClr val="accent1"/>
+          </a:effectRef>
+          <a:fontRef idx="minor">
+            <a:schemeClr val="tx1"/>
+          </a:fontRef>
+        </p:style>
+      </p:cxnSp>
+      <p:sp>
+        <p:nvSpPr>
+          <p:cNvPr id="54" name="Rechteck 53">
+            <a:extLst>
+              <a:ext uri="{FF2B5EF4-FFF2-40B4-BE49-F238E27FC236}">
+                <a16:creationId xmlns:a16="http://schemas.microsoft.com/office/drawing/2014/main" id="{19E56569-12D7-4838-9C41-290707F74D50}"/>
+              </a:ext>
+            </a:extLst>
+          </p:cNvPr>
+          <p:cNvSpPr/>
+          <p:nvPr/>
+        </p:nvSpPr>
+        <p:spPr>
+          <a:xfrm>
+            <a:off x="4124904" y="4242942"/>
+            <a:ext cx="1903188" cy="522105"/>
+          </a:xfrm>
+          <a:prstGeom prst="rect">
+            <a:avLst/>
+          </a:prstGeom>
+          <a:noFill/>
+          <a:ln>
+            <a:noFill/>
+          </a:ln>
+        </p:spPr>
+        <p:style>
+          <a:lnRef idx="2">
+            <a:schemeClr val="accent1">
+              <a:shade val="50000"/>
+            </a:schemeClr>
+          </a:lnRef>
+          <a:fillRef idx="1">
+            <a:schemeClr val="accent1"/>
+          </a:fillRef>
+          <a:effectRef idx="0">
+            <a:schemeClr val="accent1"/>
+          </a:effectRef>
+          <a:fontRef idx="minor">
+            <a:schemeClr val="lt1"/>
+          </a:fontRef>
+        </p:style>
+        <p:txBody>
+          <a:bodyPr rtlCol="0" anchor="t"/>
+          <a:lstStyle/>
+          <a:p>
+            <a:r>
+              <a:rPr lang="de-DE" sz="1200">
                 <a:solidFill>
                   <a:srgbClr val="405786"/>
                 </a:solidFill>
               </a:rPr>
-              <a:t>D1</a:t>
-            </a:r>
-          </a:p>
-          <a:p>
-            <a:pPr algn="ctr"/>
-            <a:r>
-              <a:rPr lang="de-DE" sz="1600">
+              <a:t>Aggregationen Personengruppen</a:t>
+            </a:r>
+          </a:p>
+        </p:txBody>
+      </p:sp>
+      <p:sp>
+        <p:nvSpPr>
+          <p:cNvPr id="55" name="Rechteck: abgerundete Ecken 54">
+            <a:extLst>
+              <a:ext uri="{FF2B5EF4-FFF2-40B4-BE49-F238E27FC236}">
+                <a16:creationId xmlns:a16="http://schemas.microsoft.com/office/drawing/2014/main" id="{D80FD2EA-39F5-4A60-B97E-43A066217136}"/>
+              </a:ext>
+            </a:extLst>
+          </p:cNvPr>
+          <p:cNvSpPr/>
+          <p:nvPr/>
+        </p:nvSpPr>
+        <p:spPr>
+          <a:xfrm>
+            <a:off x="565608" y="2136331"/>
+            <a:ext cx="1952967" cy="566909"/>
+          </a:xfrm>
+          <a:prstGeom prst="roundRect">
+            <a:avLst/>
+          </a:prstGeom>
+          <a:solidFill>
+            <a:srgbClr val="008CBA"/>
+          </a:solidFill>
+          <a:ln>
+            <a:noFill/>
+          </a:ln>
+        </p:spPr>
+        <p:style>
+          <a:lnRef idx="2">
+            <a:schemeClr val="accent1">
+              <a:shade val="50000"/>
+            </a:schemeClr>
+          </a:lnRef>
+          <a:fillRef idx="1">
+            <a:schemeClr val="accent1"/>
+          </a:fillRef>
+          <a:effectRef idx="0">
+            <a:schemeClr val="accent1"/>
+          </a:effectRef>
+          <a:fontRef idx="minor">
+            <a:schemeClr val="lt1"/>
+          </a:fontRef>
+        </p:style>
+        <p:txBody>
+          <a:bodyPr rtlCol="0" anchor="ctr"/>
+          <a:lstStyle/>
+          <a:p>
+            <a:pPr algn="ctr"/>
+            <a:r>
+              <a:rPr lang="de-DE" sz="1400"/>
+              <a:t>IQB-ContentHub</a:t>
+            </a:r>
+            <a:endParaRPr lang="de-DE"/>
+          </a:p>
+        </p:txBody>
+      </p:sp>
+      <p:sp>
+        <p:nvSpPr>
+          <p:cNvPr id="57" name="Rechteck 56">
+            <a:extLst>
+              <a:ext uri="{FF2B5EF4-FFF2-40B4-BE49-F238E27FC236}">
+                <a16:creationId xmlns:a16="http://schemas.microsoft.com/office/drawing/2014/main" id="{4F292E1B-316F-4BB3-B8A9-D3804172848E}"/>
+              </a:ext>
+            </a:extLst>
+          </p:cNvPr>
+          <p:cNvSpPr/>
+          <p:nvPr/>
+        </p:nvSpPr>
+        <p:spPr>
+          <a:xfrm>
+            <a:off x="2620175" y="2179648"/>
+            <a:ext cx="1130749" cy="323060"/>
+          </a:xfrm>
+          <a:prstGeom prst="rect">
+            <a:avLst/>
+          </a:prstGeom>
+          <a:noFill/>
+          <a:ln>
+            <a:noFill/>
+          </a:ln>
+        </p:spPr>
+        <p:style>
+          <a:lnRef idx="2">
+            <a:schemeClr val="accent1">
+              <a:shade val="50000"/>
+            </a:schemeClr>
+          </a:lnRef>
+          <a:fillRef idx="1">
+            <a:schemeClr val="accent1"/>
+          </a:fillRef>
+          <a:effectRef idx="0">
+            <a:schemeClr val="accent1"/>
+          </a:effectRef>
+          <a:fontRef idx="minor">
+            <a:schemeClr val="lt1"/>
+          </a:fontRef>
+        </p:style>
+        <p:txBody>
+          <a:bodyPr rtlCol="0" anchor="t"/>
+          <a:lstStyle/>
+          <a:p>
+            <a:pPr algn="ctr"/>
+            <a:r>
+              <a:rPr lang="de-DE" sz="1200">
                 <a:solidFill>
                   <a:srgbClr val="405786"/>
                 </a:solidFill>
               </a:rPr>
-              <a:t>D2</a:t>
-            </a:r>
-          </a:p>
-          <a:p>
-            <a:pPr algn="ctr"/>
-            <a:r>
-              <a:rPr lang="de-DE" sz="1600">
-                <a:solidFill>
-                  <a:srgbClr val="405786"/>
-                </a:solidFill>
-              </a:rPr>
-              <a:t>E1</a:t>
-            </a:r>
-          </a:p>
-          <a:p>
-            <a:pPr algn="ctr"/>
-            <a:r>
-              <a:rPr lang="de-DE" sz="1600">
-                <a:solidFill>
-                  <a:srgbClr val="405786"/>
-                </a:solidFill>
-              </a:rPr>
-              <a:t>F1</a:t>
-            </a:r>
-          </a:p>
-          <a:p>
-            <a:pPr algn="ctr"/>
-            <a:r>
-              <a:rPr lang="de-DE" sz="1600">
-                <a:solidFill>
-                  <a:srgbClr val="405786"/>
-                </a:solidFill>
-              </a:rPr>
-              <a:t>G1</a:t>
-            </a:r>
-          </a:p>
-          <a:p>
-            <a:pPr algn="ctr"/>
-            <a:r>
-              <a:rPr lang="de-DE" sz="1600">
-                <a:solidFill>
-                  <a:srgbClr val="405786"/>
-                </a:solidFill>
-              </a:rPr>
-              <a:t>H1</a:t>
-            </a:r>
-          </a:p>
-          <a:p>
-            <a:pPr algn="ctr"/>
-            <a:r>
-              <a:rPr lang="de-DE" sz="1600">
-                <a:solidFill>
-                  <a:srgbClr val="405786"/>
-                </a:solidFill>
-              </a:rPr>
-              <a:t>H2</a:t>
-            </a:r>
-          </a:p>
-        </p:txBody>
-      </p:sp>
-      <p:cxnSp>
-        <p:nvCxnSpPr>
-          <p:cNvPr id="13" name="Gerader Verbinder 12">
-            <a:extLst>
-              <a:ext uri="{FF2B5EF4-FFF2-40B4-BE49-F238E27FC236}">
-                <a16:creationId xmlns:a16="http://schemas.microsoft.com/office/drawing/2014/main" id="{52D2D9AE-8439-4737-8314-DAAC6038DCE5}"/>
-              </a:ext>
-            </a:extLst>
-          </p:cNvPr>
-          <p:cNvCxnSpPr>
-            <a:cxnSpLocks/>
-          </p:cNvCxnSpPr>
-          <p:nvPr/>
-        </p:nvCxnSpPr>
-        <p:spPr>
-          <a:xfrm flipV="1">
-            <a:off x="1811494" y="3033166"/>
-            <a:ext cx="1100092" cy="587793"/>
-          </a:xfrm>
-          <a:prstGeom prst="line">
-            <a:avLst/>
-          </a:prstGeom>
-          <a:ln w="12700">
-            <a:solidFill>
-              <a:srgbClr val="D92FC1"/>
-            </a:solidFill>
-          </a:ln>
-        </p:spPr>
-        <p:style>
-          <a:lnRef idx="1">
-            <a:schemeClr val="accent1"/>
-          </a:lnRef>
-          <a:fillRef idx="0">
-            <a:schemeClr val="accent1"/>
-          </a:fillRef>
-          <a:effectRef idx="0">
-            <a:schemeClr val="accent1"/>
-          </a:effectRef>
-          <a:fontRef idx="minor">
-            <a:schemeClr val="tx1"/>
-          </a:fontRef>
-        </p:style>
-      </p:cxnSp>
-      <p:cxnSp>
-        <p:nvCxnSpPr>
-          <p:cNvPr id="17" name="Gerader Verbinder 16">
-            <a:extLst>
-              <a:ext uri="{FF2B5EF4-FFF2-40B4-BE49-F238E27FC236}">
-                <a16:creationId xmlns:a16="http://schemas.microsoft.com/office/drawing/2014/main" id="{F5B54DDE-64D6-48FC-AA0C-8AC6EC280DB2}"/>
-              </a:ext>
-            </a:extLst>
-          </p:cNvPr>
-          <p:cNvCxnSpPr>
-            <a:cxnSpLocks/>
-          </p:cNvCxnSpPr>
-          <p:nvPr/>
-        </p:nvCxnSpPr>
-        <p:spPr>
-          <a:xfrm flipV="1">
-            <a:off x="1811494" y="3275280"/>
-            <a:ext cx="1100092" cy="338909"/>
-          </a:xfrm>
-          <a:prstGeom prst="line">
-            <a:avLst/>
-          </a:prstGeom>
-          <a:ln w="12700">
-            <a:solidFill>
-              <a:srgbClr val="D92FC1"/>
-            </a:solidFill>
-          </a:ln>
-        </p:spPr>
-        <p:style>
-          <a:lnRef idx="1">
-            <a:schemeClr val="accent1"/>
-          </a:lnRef>
-          <a:fillRef idx="0">
-            <a:schemeClr val="accent1"/>
-          </a:fillRef>
-          <a:effectRef idx="0">
-            <a:schemeClr val="accent1"/>
-          </a:effectRef>
-          <a:fontRef idx="minor">
-            <a:schemeClr val="tx1"/>
-          </a:fontRef>
-        </p:style>
-      </p:cxnSp>
-      <p:cxnSp>
-        <p:nvCxnSpPr>
-          <p:cNvPr id="20" name="Gerader Verbinder 19">
-            <a:extLst>
-              <a:ext uri="{FF2B5EF4-FFF2-40B4-BE49-F238E27FC236}">
-                <a16:creationId xmlns:a16="http://schemas.microsoft.com/office/drawing/2014/main" id="{7676A310-B9D1-4130-8172-6409612596A7}"/>
-              </a:ext>
-            </a:extLst>
-          </p:cNvPr>
-          <p:cNvCxnSpPr>
-            <a:cxnSpLocks/>
-          </p:cNvCxnSpPr>
-          <p:nvPr/>
-        </p:nvCxnSpPr>
-        <p:spPr>
-          <a:xfrm flipV="1">
-            <a:off x="1805940" y="3521922"/>
-            <a:ext cx="1105646" cy="342053"/>
-          </a:xfrm>
-          <a:prstGeom prst="line">
-            <a:avLst/>
-          </a:prstGeom>
-          <a:ln w="12700">
-            <a:solidFill>
-              <a:srgbClr val="D92FC1"/>
-            </a:solidFill>
-          </a:ln>
-        </p:spPr>
-        <p:style>
-          <a:lnRef idx="1">
-            <a:schemeClr val="accent1"/>
-          </a:lnRef>
-          <a:fillRef idx="0">
-            <a:schemeClr val="accent1"/>
-          </a:fillRef>
-          <a:effectRef idx="0">
-            <a:schemeClr val="accent1"/>
-          </a:effectRef>
-          <a:fontRef idx="minor">
-            <a:schemeClr val="tx1"/>
-          </a:fontRef>
-        </p:style>
-      </p:cxnSp>
-      <p:cxnSp>
-        <p:nvCxnSpPr>
-          <p:cNvPr id="23" name="Gerader Verbinder 22">
-            <a:extLst>
-              <a:ext uri="{FF2B5EF4-FFF2-40B4-BE49-F238E27FC236}">
-                <a16:creationId xmlns:a16="http://schemas.microsoft.com/office/drawing/2014/main" id="{0D4501E8-A547-407F-A316-96E18564B4D9}"/>
-              </a:ext>
-            </a:extLst>
-          </p:cNvPr>
-          <p:cNvCxnSpPr>
-            <a:cxnSpLocks/>
-          </p:cNvCxnSpPr>
-          <p:nvPr/>
-        </p:nvCxnSpPr>
-        <p:spPr>
-          <a:xfrm flipV="1">
-            <a:off x="1811494" y="4737606"/>
-            <a:ext cx="1100092" cy="512486"/>
-          </a:xfrm>
-          <a:prstGeom prst="line">
-            <a:avLst/>
-          </a:prstGeom>
-          <a:ln w="12700">
-            <a:solidFill>
-              <a:srgbClr val="D92FC1"/>
-            </a:solidFill>
-          </a:ln>
-        </p:spPr>
-        <p:style>
-          <a:lnRef idx="1">
-            <a:schemeClr val="accent1"/>
-          </a:lnRef>
-          <a:fillRef idx="0">
-            <a:schemeClr val="accent1"/>
-          </a:fillRef>
-          <a:effectRef idx="0">
-            <a:schemeClr val="accent1"/>
-          </a:effectRef>
-          <a:fontRef idx="minor">
-            <a:schemeClr val="tx1"/>
-          </a:fontRef>
-        </p:style>
-      </p:cxnSp>
-      <p:cxnSp>
-        <p:nvCxnSpPr>
-          <p:cNvPr id="26" name="Gerader Verbinder 25">
-            <a:extLst>
-              <a:ext uri="{FF2B5EF4-FFF2-40B4-BE49-F238E27FC236}">
-                <a16:creationId xmlns:a16="http://schemas.microsoft.com/office/drawing/2014/main" id="{9907D990-9745-423D-A714-FC6614CA62B2}"/>
-              </a:ext>
-            </a:extLst>
-          </p:cNvPr>
-          <p:cNvCxnSpPr>
-            <a:cxnSpLocks/>
-          </p:cNvCxnSpPr>
-          <p:nvPr/>
-        </p:nvCxnSpPr>
-        <p:spPr>
-          <a:xfrm flipV="1">
-            <a:off x="1801099" y="3761391"/>
-            <a:ext cx="1110487" cy="102585"/>
-          </a:xfrm>
-          <a:prstGeom prst="line">
-            <a:avLst/>
-          </a:prstGeom>
-          <a:ln w="12700">
-            <a:solidFill>
-              <a:srgbClr val="D92FC1"/>
-            </a:solidFill>
-          </a:ln>
-        </p:spPr>
-        <p:style>
-          <a:lnRef idx="1">
-            <a:schemeClr val="accent1"/>
-          </a:lnRef>
-          <a:fillRef idx="0">
-            <a:schemeClr val="accent1"/>
-          </a:fillRef>
-          <a:effectRef idx="0">
-            <a:schemeClr val="accent1"/>
-          </a:effectRef>
-          <a:fontRef idx="minor">
-            <a:schemeClr val="tx1"/>
-          </a:fontRef>
-        </p:style>
-      </p:cxnSp>
-      <p:cxnSp>
-        <p:nvCxnSpPr>
-          <p:cNvPr id="29" name="Gerader Verbinder 28">
-            <a:extLst>
-              <a:ext uri="{FF2B5EF4-FFF2-40B4-BE49-F238E27FC236}">
-                <a16:creationId xmlns:a16="http://schemas.microsoft.com/office/drawing/2014/main" id="{6B1B72B2-BD02-4589-B507-6AFC98E233DB}"/>
-              </a:ext>
-            </a:extLst>
-          </p:cNvPr>
-          <p:cNvCxnSpPr>
-            <a:cxnSpLocks/>
-          </p:cNvCxnSpPr>
-          <p:nvPr/>
-        </p:nvCxnSpPr>
-        <p:spPr>
-          <a:xfrm flipV="1">
-            <a:off x="1811494" y="4006719"/>
-            <a:ext cx="1100092" cy="90022"/>
-          </a:xfrm>
-          <a:prstGeom prst="line">
-            <a:avLst/>
-          </a:prstGeom>
-          <a:ln w="12700">
-            <a:solidFill>
-              <a:srgbClr val="D92FC1"/>
-            </a:solidFill>
-          </a:ln>
-        </p:spPr>
-        <p:style>
-          <a:lnRef idx="1">
-            <a:schemeClr val="accent1"/>
-          </a:lnRef>
-          <a:fillRef idx="0">
-            <a:schemeClr val="accent1"/>
-          </a:fillRef>
-          <a:effectRef idx="0">
-            <a:schemeClr val="accent1"/>
-          </a:effectRef>
-          <a:fontRef idx="minor">
-            <a:schemeClr val="tx1"/>
-          </a:fontRef>
-        </p:style>
-      </p:cxnSp>
-      <p:cxnSp>
-        <p:nvCxnSpPr>
-          <p:cNvPr id="32" name="Gerader Verbinder 31">
-            <a:extLst>
-              <a:ext uri="{FF2B5EF4-FFF2-40B4-BE49-F238E27FC236}">
-                <a16:creationId xmlns:a16="http://schemas.microsoft.com/office/drawing/2014/main" id="{BA077487-7D9A-4C38-B805-7E31F859DFC9}"/>
-              </a:ext>
-            </a:extLst>
-          </p:cNvPr>
-          <p:cNvCxnSpPr>
-            <a:cxnSpLocks/>
-          </p:cNvCxnSpPr>
-          <p:nvPr/>
-        </p:nvCxnSpPr>
-        <p:spPr>
-          <a:xfrm flipV="1">
-            <a:off x="1801099" y="4239484"/>
-            <a:ext cx="1110487" cy="762576"/>
-          </a:xfrm>
-          <a:prstGeom prst="line">
-            <a:avLst/>
-          </a:prstGeom>
-          <a:ln w="12700">
-            <a:solidFill>
-              <a:srgbClr val="D92FC1"/>
-            </a:solidFill>
-          </a:ln>
-        </p:spPr>
-        <p:style>
-          <a:lnRef idx="1">
-            <a:schemeClr val="accent1"/>
-          </a:lnRef>
-          <a:fillRef idx="0">
-            <a:schemeClr val="accent1"/>
-          </a:fillRef>
-          <a:effectRef idx="0">
-            <a:schemeClr val="accent1"/>
-          </a:effectRef>
-          <a:fontRef idx="minor">
-            <a:schemeClr val="tx1"/>
-          </a:fontRef>
-        </p:style>
-      </p:cxnSp>
-      <p:cxnSp>
-        <p:nvCxnSpPr>
-          <p:cNvPr id="34" name="Gerader Verbinder 33">
-            <a:extLst>
-              <a:ext uri="{FF2B5EF4-FFF2-40B4-BE49-F238E27FC236}">
-                <a16:creationId xmlns:a16="http://schemas.microsoft.com/office/drawing/2014/main" id="{9EB0279D-8E8D-4988-8297-D998AA874313}"/>
-              </a:ext>
-            </a:extLst>
-          </p:cNvPr>
-          <p:cNvCxnSpPr>
-            <a:cxnSpLocks/>
-          </p:cNvCxnSpPr>
-          <p:nvPr/>
-        </p:nvCxnSpPr>
-        <p:spPr>
-          <a:xfrm flipV="1">
-            <a:off x="1796539" y="4504335"/>
-            <a:ext cx="1115047" cy="497725"/>
-          </a:xfrm>
-          <a:prstGeom prst="line">
-            <a:avLst/>
-          </a:prstGeom>
-          <a:ln w="12700">
-            <a:solidFill>
-              <a:srgbClr val="D92FC1"/>
-            </a:solidFill>
-          </a:ln>
-        </p:spPr>
-        <p:style>
-          <a:lnRef idx="1">
-            <a:schemeClr val="accent1"/>
-          </a:lnRef>
-          <a:fillRef idx="0">
-            <a:schemeClr val="accent1"/>
-          </a:fillRef>
-          <a:effectRef idx="0">
-            <a:schemeClr val="accent1"/>
-          </a:effectRef>
-          <a:fontRef idx="minor">
-            <a:schemeClr val="tx1"/>
-          </a:fontRef>
-        </p:style>
-      </p:cxnSp>
-      <p:cxnSp>
-        <p:nvCxnSpPr>
-          <p:cNvPr id="37" name="Gerader Verbinder 36">
-            <a:extLst>
-              <a:ext uri="{FF2B5EF4-FFF2-40B4-BE49-F238E27FC236}">
-                <a16:creationId xmlns:a16="http://schemas.microsoft.com/office/drawing/2014/main" id="{0B108F28-E346-409E-819D-E7C8BC5163B2}"/>
-              </a:ext>
-            </a:extLst>
-          </p:cNvPr>
-          <p:cNvCxnSpPr>
-            <a:cxnSpLocks/>
-          </p:cNvCxnSpPr>
-          <p:nvPr/>
-        </p:nvCxnSpPr>
-        <p:spPr>
-          <a:xfrm flipV="1">
-            <a:off x="1805940" y="4987579"/>
-            <a:ext cx="1101087" cy="467391"/>
-          </a:xfrm>
-          <a:prstGeom prst="line">
-            <a:avLst/>
-          </a:prstGeom>
-          <a:ln w="12700">
-            <a:solidFill>
-              <a:srgbClr val="D92FC1"/>
-            </a:solidFill>
-          </a:ln>
-        </p:spPr>
-        <p:style>
-          <a:lnRef idx="1">
-            <a:schemeClr val="accent1"/>
-          </a:lnRef>
-          <a:fillRef idx="0">
-            <a:schemeClr val="accent1"/>
-          </a:fillRef>
-          <a:effectRef idx="0">
-            <a:schemeClr val="accent1"/>
-          </a:effectRef>
-          <a:fontRef idx="minor">
-            <a:schemeClr val="tx1"/>
-          </a:fontRef>
-        </p:style>
-      </p:cxnSp>
-      <p:cxnSp>
-        <p:nvCxnSpPr>
-          <p:cNvPr id="39" name="Gerader Verbinder 38">
-            <a:extLst>
-              <a:ext uri="{FF2B5EF4-FFF2-40B4-BE49-F238E27FC236}">
-                <a16:creationId xmlns:a16="http://schemas.microsoft.com/office/drawing/2014/main" id="{BE68EBDF-3F0E-4840-B20F-8D94C18DFF61}"/>
-              </a:ext>
-            </a:extLst>
-          </p:cNvPr>
-          <p:cNvCxnSpPr>
-            <a:cxnSpLocks/>
-          </p:cNvCxnSpPr>
-          <p:nvPr/>
-        </p:nvCxnSpPr>
-        <p:spPr>
-          <a:xfrm flipH="1" flipV="1">
-            <a:off x="3298090" y="3023530"/>
-            <a:ext cx="1181082" cy="588963"/>
-          </a:xfrm>
-          <a:prstGeom prst="line">
-            <a:avLst/>
-          </a:prstGeom>
-          <a:ln w="12700">
-            <a:solidFill>
-              <a:srgbClr val="D92FC1"/>
-            </a:solidFill>
-          </a:ln>
-        </p:spPr>
-        <p:style>
-          <a:lnRef idx="1">
-            <a:schemeClr val="accent1"/>
-          </a:lnRef>
-          <a:fillRef idx="0">
-            <a:schemeClr val="accent1"/>
-          </a:fillRef>
-          <a:effectRef idx="0">
-            <a:schemeClr val="accent1"/>
-          </a:effectRef>
-          <a:fontRef idx="minor">
-            <a:schemeClr val="tx1"/>
-          </a:fontRef>
-        </p:style>
-      </p:cxnSp>
-      <p:cxnSp>
-        <p:nvCxnSpPr>
-          <p:cNvPr id="42" name="Gerader Verbinder 41">
-            <a:extLst>
-              <a:ext uri="{FF2B5EF4-FFF2-40B4-BE49-F238E27FC236}">
-                <a16:creationId xmlns:a16="http://schemas.microsoft.com/office/drawing/2014/main" id="{1F2EB59A-7A07-4FB7-9F1C-C614E926D90A}"/>
-              </a:ext>
-            </a:extLst>
-          </p:cNvPr>
-          <p:cNvCxnSpPr>
-            <a:cxnSpLocks/>
-          </p:cNvCxnSpPr>
-          <p:nvPr/>
-        </p:nvCxnSpPr>
-        <p:spPr>
-          <a:xfrm flipH="1" flipV="1">
-            <a:off x="3298092" y="3267668"/>
-            <a:ext cx="1181080" cy="346521"/>
-          </a:xfrm>
-          <a:prstGeom prst="line">
-            <a:avLst/>
-          </a:prstGeom>
-          <a:ln w="12700">
-            <a:solidFill>
-              <a:srgbClr val="D92FC1"/>
-            </a:solidFill>
-          </a:ln>
-        </p:spPr>
-        <p:style>
-          <a:lnRef idx="1">
-            <a:schemeClr val="accent1"/>
-          </a:lnRef>
-          <a:fillRef idx="0">
-            <a:schemeClr val="accent1"/>
-          </a:fillRef>
-          <a:effectRef idx="0">
-            <a:schemeClr val="accent1"/>
-          </a:effectRef>
-          <a:fontRef idx="minor">
-            <a:schemeClr val="tx1"/>
-          </a:fontRef>
-        </p:style>
-      </p:cxnSp>
-      <p:cxnSp>
-        <p:nvCxnSpPr>
-          <p:cNvPr id="45" name="Gerader Verbinder 44">
-            <a:extLst>
-              <a:ext uri="{FF2B5EF4-FFF2-40B4-BE49-F238E27FC236}">
-                <a16:creationId xmlns:a16="http://schemas.microsoft.com/office/drawing/2014/main" id="{FC95D828-90F6-4E54-BCA9-CC499045CA14}"/>
-              </a:ext>
-            </a:extLst>
-          </p:cNvPr>
-          <p:cNvCxnSpPr>
-            <a:cxnSpLocks/>
-          </p:cNvCxnSpPr>
-          <p:nvPr/>
-        </p:nvCxnSpPr>
-        <p:spPr>
-          <a:xfrm flipH="1" flipV="1">
-            <a:off x="3302653" y="3755071"/>
-            <a:ext cx="1167965" cy="114388"/>
-          </a:xfrm>
-          <a:prstGeom prst="line">
-            <a:avLst/>
-          </a:prstGeom>
-          <a:ln w="12700">
-            <a:solidFill>
-              <a:srgbClr val="D92FC1"/>
-            </a:solidFill>
-          </a:ln>
-        </p:spPr>
-        <p:style>
-          <a:lnRef idx="1">
-            <a:schemeClr val="accent1"/>
-          </a:lnRef>
-          <a:fillRef idx="0">
-            <a:schemeClr val="accent1"/>
-          </a:fillRef>
-          <a:effectRef idx="0">
-            <a:schemeClr val="accent1"/>
-          </a:effectRef>
-          <a:fontRef idx="minor">
-            <a:schemeClr val="tx1"/>
-          </a:fontRef>
-        </p:style>
-      </p:cxnSp>
-      <p:cxnSp>
-        <p:nvCxnSpPr>
-          <p:cNvPr id="47" name="Gerader Verbinder 46">
-            <a:extLst>
-              <a:ext uri="{FF2B5EF4-FFF2-40B4-BE49-F238E27FC236}">
-                <a16:creationId xmlns:a16="http://schemas.microsoft.com/office/drawing/2014/main" id="{3C522A01-8017-4B74-8A83-E902ABB1745B}"/>
-              </a:ext>
-            </a:extLst>
-          </p:cNvPr>
-          <p:cNvCxnSpPr>
-            <a:cxnSpLocks/>
-          </p:cNvCxnSpPr>
-          <p:nvPr/>
-        </p:nvCxnSpPr>
-        <p:spPr>
-          <a:xfrm flipH="1" flipV="1">
-            <a:off x="3302653" y="4234786"/>
-            <a:ext cx="1167965" cy="767274"/>
-          </a:xfrm>
-          <a:prstGeom prst="line">
-            <a:avLst/>
-          </a:prstGeom>
-          <a:ln w="12700">
-            <a:solidFill>
-              <a:srgbClr val="D92FC1"/>
-            </a:solidFill>
-          </a:ln>
-        </p:spPr>
-        <p:style>
-          <a:lnRef idx="1">
-            <a:schemeClr val="accent1"/>
-          </a:lnRef>
-          <a:fillRef idx="0">
-            <a:schemeClr val="accent1"/>
-          </a:fillRef>
-          <a:effectRef idx="0">
-            <a:schemeClr val="accent1"/>
-          </a:effectRef>
-          <a:fontRef idx="minor">
-            <a:schemeClr val="tx1"/>
-          </a:fontRef>
-        </p:style>
-      </p:cxnSp>
-      <p:cxnSp>
-        <p:nvCxnSpPr>
-          <p:cNvPr id="50" name="Gerader Verbinder 49">
-            <a:extLst>
-              <a:ext uri="{FF2B5EF4-FFF2-40B4-BE49-F238E27FC236}">
-                <a16:creationId xmlns:a16="http://schemas.microsoft.com/office/drawing/2014/main" id="{672C0FD4-B873-4F4F-9B16-CC59CB990DCC}"/>
-              </a:ext>
-            </a:extLst>
-          </p:cNvPr>
-          <p:cNvCxnSpPr>
-            <a:cxnSpLocks/>
-          </p:cNvCxnSpPr>
-          <p:nvPr/>
-        </p:nvCxnSpPr>
-        <p:spPr>
-          <a:xfrm flipH="1" flipV="1">
-            <a:off x="3298091" y="3509842"/>
-            <a:ext cx="1172527" cy="367900"/>
-          </a:xfrm>
-          <a:prstGeom prst="line">
-            <a:avLst/>
-          </a:prstGeom>
-          <a:ln w="12700">
-            <a:solidFill>
-              <a:srgbClr val="D92FC1"/>
-            </a:solidFill>
-          </a:ln>
-        </p:spPr>
-        <p:style>
-          <a:lnRef idx="1">
-            <a:schemeClr val="accent1"/>
-          </a:lnRef>
-          <a:fillRef idx="0">
-            <a:schemeClr val="accent1"/>
-          </a:fillRef>
-          <a:effectRef idx="0">
-            <a:schemeClr val="accent1"/>
-          </a:effectRef>
-          <a:fontRef idx="minor">
-            <a:schemeClr val="tx1"/>
-          </a:fontRef>
-        </p:style>
-      </p:cxnSp>
-      <p:cxnSp>
-        <p:nvCxnSpPr>
-          <p:cNvPr id="53" name="Gerader Verbinder 52">
-            <a:extLst>
-              <a:ext uri="{FF2B5EF4-FFF2-40B4-BE49-F238E27FC236}">
-                <a16:creationId xmlns:a16="http://schemas.microsoft.com/office/drawing/2014/main" id="{A4A6EA9C-3E5E-4A85-A57C-DDFF20B2DE1B}"/>
-              </a:ext>
-            </a:extLst>
-          </p:cNvPr>
-          <p:cNvCxnSpPr>
-            <a:cxnSpLocks/>
-          </p:cNvCxnSpPr>
-          <p:nvPr/>
-        </p:nvCxnSpPr>
-        <p:spPr>
-          <a:xfrm flipH="1" flipV="1">
-            <a:off x="3302652" y="3996155"/>
-            <a:ext cx="1176520" cy="100586"/>
-          </a:xfrm>
-          <a:prstGeom prst="line">
-            <a:avLst/>
-          </a:prstGeom>
-          <a:ln w="12700">
-            <a:solidFill>
-              <a:srgbClr val="D92FC1"/>
-            </a:solidFill>
-          </a:ln>
-        </p:spPr>
-        <p:style>
-          <a:lnRef idx="1">
-            <a:schemeClr val="accent1"/>
-          </a:lnRef>
-          <a:fillRef idx="0">
-            <a:schemeClr val="accent1"/>
-          </a:fillRef>
-          <a:effectRef idx="0">
-            <a:schemeClr val="accent1"/>
-          </a:effectRef>
-          <a:fontRef idx="minor">
-            <a:schemeClr val="tx1"/>
-          </a:fontRef>
-        </p:style>
-      </p:cxnSp>
-      <p:cxnSp>
-        <p:nvCxnSpPr>
-          <p:cNvPr id="56" name="Gerader Verbinder 55">
-            <a:extLst>
-              <a:ext uri="{FF2B5EF4-FFF2-40B4-BE49-F238E27FC236}">
-                <a16:creationId xmlns:a16="http://schemas.microsoft.com/office/drawing/2014/main" id="{11BB2140-0D68-4A55-BEC3-FBBDC76B3FC0}"/>
-              </a:ext>
-            </a:extLst>
-          </p:cNvPr>
-          <p:cNvCxnSpPr>
-            <a:cxnSpLocks/>
-          </p:cNvCxnSpPr>
-          <p:nvPr/>
-        </p:nvCxnSpPr>
-        <p:spPr>
-          <a:xfrm flipH="1" flipV="1">
-            <a:off x="3298090" y="5215758"/>
-            <a:ext cx="1213585" cy="22957"/>
-          </a:xfrm>
-          <a:prstGeom prst="line">
-            <a:avLst/>
-          </a:prstGeom>
-          <a:ln w="12700">
-            <a:solidFill>
-              <a:srgbClr val="D92FC1"/>
-            </a:solidFill>
-          </a:ln>
-        </p:spPr>
-        <p:style>
-          <a:lnRef idx="1">
-            <a:schemeClr val="accent1"/>
-          </a:lnRef>
-          <a:fillRef idx="0">
-            <a:schemeClr val="accent1"/>
-          </a:fillRef>
-          <a:effectRef idx="0">
-            <a:schemeClr val="accent1"/>
-          </a:effectRef>
-          <a:fontRef idx="minor">
-            <a:schemeClr val="tx1"/>
-          </a:fontRef>
-        </p:style>
-      </p:cxnSp>
-      <p:cxnSp>
-        <p:nvCxnSpPr>
-          <p:cNvPr id="58" name="Gerader Verbinder 57">
-            <a:extLst>
-              <a:ext uri="{FF2B5EF4-FFF2-40B4-BE49-F238E27FC236}">
-                <a16:creationId xmlns:a16="http://schemas.microsoft.com/office/drawing/2014/main" id="{F0D5928D-7D1B-4A45-8188-41A8AAB2DBEA}"/>
-              </a:ext>
-            </a:extLst>
-          </p:cNvPr>
-          <p:cNvCxnSpPr>
-            <a:cxnSpLocks/>
-          </p:cNvCxnSpPr>
-          <p:nvPr/>
-        </p:nvCxnSpPr>
-        <p:spPr>
-          <a:xfrm flipH="1" flipV="1">
-            <a:off x="3302652" y="5450709"/>
-            <a:ext cx="1209024" cy="65536"/>
-          </a:xfrm>
-          <a:prstGeom prst="line">
-            <a:avLst/>
-          </a:prstGeom>
-          <a:ln w="12700">
-            <a:solidFill>
-              <a:srgbClr val="D92FC1"/>
-            </a:solidFill>
-          </a:ln>
-        </p:spPr>
-        <p:style>
-          <a:lnRef idx="1">
-            <a:schemeClr val="accent1"/>
-          </a:lnRef>
-          <a:fillRef idx="0">
-            <a:schemeClr val="accent1"/>
-          </a:fillRef>
-          <a:effectRef idx="0">
-            <a:schemeClr val="accent1"/>
-          </a:effectRef>
-          <a:fontRef idx="minor">
-            <a:schemeClr val="tx1"/>
-          </a:fontRef>
-        </p:style>
-      </p:cxnSp>
-      <p:cxnSp>
-        <p:nvCxnSpPr>
-          <p:cNvPr id="61" name="Gerader Verbinder 60">
-            <a:extLst>
-              <a:ext uri="{FF2B5EF4-FFF2-40B4-BE49-F238E27FC236}">
-                <a16:creationId xmlns:a16="http://schemas.microsoft.com/office/drawing/2014/main" id="{EE0F9FB7-847B-4C98-BB72-02A2DA9F1407}"/>
-              </a:ext>
-            </a:extLst>
-          </p:cNvPr>
-          <p:cNvCxnSpPr>
-            <a:cxnSpLocks/>
-          </p:cNvCxnSpPr>
-          <p:nvPr/>
-        </p:nvCxnSpPr>
-        <p:spPr>
-          <a:xfrm flipH="1">
-            <a:off x="3302652" y="5510690"/>
-            <a:ext cx="1209023" cy="176567"/>
-          </a:xfrm>
-          <a:prstGeom prst="line">
-            <a:avLst/>
-          </a:prstGeom>
-          <a:ln w="12700">
-            <a:solidFill>
-              <a:srgbClr val="D92FC1"/>
-            </a:solidFill>
-          </a:ln>
-        </p:spPr>
-        <p:style>
-          <a:lnRef idx="1">
-            <a:schemeClr val="accent1"/>
-          </a:lnRef>
-          <a:fillRef idx="0">
-            <a:schemeClr val="accent1"/>
-          </a:fillRef>
-          <a:effectRef idx="0">
-            <a:schemeClr val="accent1"/>
-          </a:effectRef>
-          <a:fontRef idx="minor">
-            <a:schemeClr val="tx1"/>
-          </a:fontRef>
-        </p:style>
-      </p:cxnSp>
-      <p:cxnSp>
-        <p:nvCxnSpPr>
-          <p:cNvPr id="79" name="Gerader Verbinder 78">
-            <a:extLst>
-              <a:ext uri="{FF2B5EF4-FFF2-40B4-BE49-F238E27FC236}">
-                <a16:creationId xmlns:a16="http://schemas.microsoft.com/office/drawing/2014/main" id="{59B7043D-7BF0-413E-AA4E-1BB4DAD71BE6}"/>
-              </a:ext>
-            </a:extLst>
-          </p:cNvPr>
-          <p:cNvCxnSpPr>
-            <a:cxnSpLocks/>
-          </p:cNvCxnSpPr>
-          <p:nvPr/>
-        </p:nvCxnSpPr>
-        <p:spPr>
-          <a:xfrm flipH="1" flipV="1">
-            <a:off x="3302653" y="4503550"/>
-            <a:ext cx="1176519" cy="498510"/>
-          </a:xfrm>
-          <a:prstGeom prst="line">
-            <a:avLst/>
-          </a:prstGeom>
-          <a:ln w="12700">
-            <a:solidFill>
-              <a:srgbClr val="D92FC1"/>
-            </a:solidFill>
-          </a:ln>
-        </p:spPr>
-        <p:style>
-          <a:lnRef idx="1">
-            <a:schemeClr val="accent1"/>
-          </a:lnRef>
-          <a:fillRef idx="0">
-            <a:schemeClr val="accent1"/>
-          </a:fillRef>
-          <a:effectRef idx="0">
-            <a:schemeClr val="accent1"/>
-          </a:effectRef>
-          <a:fontRef idx="minor">
-            <a:schemeClr val="tx1"/>
-          </a:fontRef>
-        </p:style>
-      </p:cxnSp>
+              <a:t>Assessment Package</a:t>
+            </a:r>
+            <a:endParaRPr lang="de-DE" sz="1400">
+              <a:solidFill>
+                <a:srgbClr val="405786"/>
+              </a:solidFill>
+            </a:endParaRPr>
+          </a:p>
+        </p:txBody>
+      </p:sp>
     </p:spTree>
     <p:extLst>
       <p:ext uri="{BB962C8B-B14F-4D97-AF65-F5344CB8AC3E}">
-        <p14:creationId xmlns:p14="http://schemas.microsoft.com/office/powerpoint/2010/main" val="3091731184"/>
+        <p14:creationId xmlns:p14="http://schemas.microsoft.com/office/powerpoint/2010/main" val="3021817651"/>
       </p:ext>
     </p:extLst>
   </p:cSld>
@@ -13913,62 +14603,10 @@
       </p:grpSpPr>
       <p:sp>
         <p:nvSpPr>
-          <p:cNvPr id="11" name="Pfeil: nach links und rechts 10">
-            <a:extLst>
-              <a:ext uri="{FF2B5EF4-FFF2-40B4-BE49-F238E27FC236}">
-                <a16:creationId xmlns:a16="http://schemas.microsoft.com/office/drawing/2014/main" id="{B373BB0E-CC21-4468-A11B-DA3B56985F35}"/>
-              </a:ext>
-            </a:extLst>
-          </p:cNvPr>
-          <p:cNvSpPr/>
-          <p:nvPr/>
-        </p:nvSpPr>
-        <p:spPr>
-          <a:xfrm rot="3850881">
-            <a:off x="1968300" y="2627138"/>
-            <a:ext cx="933542" cy="317898"/>
-          </a:xfrm>
-          <a:prstGeom prst="leftRightArrow">
-            <a:avLst/>
-          </a:prstGeom>
-          <a:solidFill>
-            <a:srgbClr val="D6DCE5"/>
-          </a:solidFill>
-          <a:ln>
-            <a:noFill/>
-          </a:ln>
-        </p:spPr>
-        <p:style>
-          <a:lnRef idx="2">
-            <a:schemeClr val="accent1">
-              <a:shade val="50000"/>
-            </a:schemeClr>
-          </a:lnRef>
-          <a:fillRef idx="1">
-            <a:schemeClr val="accent1"/>
-          </a:fillRef>
-          <a:effectRef idx="0">
-            <a:schemeClr val="accent1"/>
-          </a:effectRef>
-          <a:fontRef idx="minor">
-            <a:schemeClr val="lt1"/>
-          </a:fontRef>
-        </p:style>
-        <p:txBody>
-          <a:bodyPr rtlCol="0" anchor="ctr"/>
-          <a:lstStyle/>
-          <a:p>
-            <a:pPr algn="ctr"/>
-            <a:endParaRPr lang="de-DE"/>
-          </a:p>
-        </p:txBody>
-      </p:sp>
-      <p:sp>
-        <p:nvSpPr>
           <p:cNvPr id="2" name="Titel 1">
             <a:extLst>
               <a:ext uri="{FF2B5EF4-FFF2-40B4-BE49-F238E27FC236}">
-                <a16:creationId xmlns:a16="http://schemas.microsoft.com/office/drawing/2014/main" id="{69664993-9ED6-4670-922B-6DCFB75DADAE}"/>
+                <a16:creationId xmlns:a16="http://schemas.microsoft.com/office/drawing/2014/main" id="{8865118E-31D4-4331-9C25-009701848EC7}"/>
               </a:ext>
             </a:extLst>
           </p:cNvPr>
@@ -13986,32 +14624,34 @@
           <a:p>
             <a:r>
               <a:rPr lang="de-DE"/>
-              <a:t>content-hub1.png</a:t>
-            </a:r>
-          </a:p>
-        </p:txBody>
-      </p:sp>
-      <p:sp>
-        <p:nvSpPr>
-          <p:cNvPr id="10" name="Rechteck 9">
-            <a:extLst>
-              <a:ext uri="{FF2B5EF4-FFF2-40B4-BE49-F238E27FC236}">
-                <a16:creationId xmlns:a16="http://schemas.microsoft.com/office/drawing/2014/main" id="{719FAA75-2688-4E1B-A8A9-97CF000C9D32}"/>
-              </a:ext>
-            </a:extLst>
-          </p:cNvPr>
-          <p:cNvSpPr/>
-          <p:nvPr/>
-        </p:nvSpPr>
-        <p:spPr>
-          <a:xfrm>
-            <a:off x="1868815" y="2604283"/>
-            <a:ext cx="912402" cy="256528"/>
+              <a:t>booklet-structure.png</a:t>
+            </a:r>
+          </a:p>
+        </p:txBody>
+      </p:sp>
+      <p:sp>
+        <p:nvSpPr>
+          <p:cNvPr id="3" name="Rechteck 2">
+            <a:extLst>
+              <a:ext uri="{FF2B5EF4-FFF2-40B4-BE49-F238E27FC236}">
+                <a16:creationId xmlns:a16="http://schemas.microsoft.com/office/drawing/2014/main" id="{FE558467-B3F4-4A05-828A-3DD593F7168D}"/>
+              </a:ext>
+            </a:extLst>
+          </p:cNvPr>
+          <p:cNvSpPr/>
+          <p:nvPr/>
+        </p:nvSpPr>
+        <p:spPr>
+          <a:xfrm>
+            <a:off x="650959" y="2604038"/>
+            <a:ext cx="1567585" cy="3236692"/>
           </a:xfrm>
           <a:prstGeom prst="rect">
             <a:avLst/>
           </a:prstGeom>
-          <a:noFill/>
+          <a:solidFill>
+            <a:srgbClr val="D6DCE5"/>
+          </a:solidFill>
           <a:ln>
             <a:noFill/>
           </a:ln>
@@ -14038,39 +14678,234 @@
           <a:p>
             <a:pPr algn="ctr"/>
             <a:r>
-              <a:rPr lang="de-DE" sz="1200">
+              <a:rPr lang="de-DE" sz="1600">
                 <a:solidFill>
                   <a:srgbClr val="405786"/>
                 </a:solidFill>
               </a:rPr>
-              <a:t>Aufgaben</a:t>
-            </a:r>
-            <a:endParaRPr lang="de-DE" sz="1400">
+              <a:t>Testheft 1</a:t>
+            </a:r>
+          </a:p>
+        </p:txBody>
+      </p:sp>
+      <p:sp>
+        <p:nvSpPr>
+          <p:cNvPr id="4" name="Rechteck 3">
+            <a:extLst>
+              <a:ext uri="{FF2B5EF4-FFF2-40B4-BE49-F238E27FC236}">
+                <a16:creationId xmlns:a16="http://schemas.microsoft.com/office/drawing/2014/main" id="{CE3D1E40-06BD-4A0F-92D8-C2261B665773}"/>
+              </a:ext>
+            </a:extLst>
+          </p:cNvPr>
+          <p:cNvSpPr/>
+          <p:nvPr/>
+        </p:nvSpPr>
+        <p:spPr>
+          <a:xfrm>
+            <a:off x="781843" y="2981853"/>
+            <a:ext cx="1305816" cy="1290906"/>
+          </a:xfrm>
+          <a:prstGeom prst="rect">
+            <a:avLst/>
+          </a:prstGeom>
+          <a:solidFill>
+            <a:srgbClr val="008CBA"/>
+          </a:solidFill>
+          <a:ln>
+            <a:noFill/>
+          </a:ln>
+        </p:spPr>
+        <p:style>
+          <a:lnRef idx="2">
+            <a:schemeClr val="accent1">
+              <a:shade val="50000"/>
+            </a:schemeClr>
+          </a:lnRef>
+          <a:fillRef idx="1">
+            <a:schemeClr val="accent1"/>
+          </a:fillRef>
+          <a:effectRef idx="0">
+            <a:schemeClr val="accent1"/>
+          </a:effectRef>
+          <a:fontRef idx="minor">
+            <a:schemeClr val="lt1"/>
+          </a:fontRef>
+        </p:style>
+        <p:txBody>
+          <a:bodyPr rtlCol="0" anchor="t"/>
+          <a:lstStyle/>
+          <a:p>
+            <a:pPr algn="ctr"/>
+            <a:r>
+              <a:rPr lang="de-DE" sz="2000" b="1">
+                <a:solidFill>
+                  <a:schemeClr val="bg1"/>
+                </a:solidFill>
+              </a:rPr>
+              <a:t>Modul 1</a:t>
+            </a:r>
+          </a:p>
+          <a:p>
+            <a:pPr algn="ctr"/>
+            <a:endParaRPr lang="de-DE" sz="1000">
               <a:solidFill>
-                <a:srgbClr val="405786"/>
+                <a:schemeClr val="bg1"/>
               </a:solidFill>
             </a:endParaRPr>
           </a:p>
-        </p:txBody>
-      </p:sp>
-      <p:sp>
-        <p:nvSpPr>
-          <p:cNvPr id="22" name="Pfeil: nach rechts 21">
-            <a:extLst>
-              <a:ext uri="{FF2B5EF4-FFF2-40B4-BE49-F238E27FC236}">
-                <a16:creationId xmlns:a16="http://schemas.microsoft.com/office/drawing/2014/main" id="{F0ED9A78-65FF-4184-87C8-D2B65CA89911}"/>
-              </a:ext>
-            </a:extLst>
-          </p:cNvPr>
-          <p:cNvSpPr/>
-          <p:nvPr/>
-        </p:nvSpPr>
-        <p:spPr>
-          <a:xfrm>
-            <a:off x="2435072" y="5342284"/>
-            <a:ext cx="1349261" cy="317898"/>
-          </a:xfrm>
-          <a:prstGeom prst="rightArrow">
+          <a:p>
+            <a:pPr algn="ctr"/>
+            <a:r>
+              <a:rPr lang="de-DE" sz="1600">
+                <a:solidFill>
+                  <a:schemeClr val="bg1"/>
+                </a:solidFill>
+              </a:rPr>
+              <a:t>Unit A</a:t>
+            </a:r>
+          </a:p>
+          <a:p>
+            <a:pPr algn="ctr"/>
+            <a:r>
+              <a:rPr lang="de-DE" sz="1600">
+                <a:solidFill>
+                  <a:schemeClr val="bg1"/>
+                </a:solidFill>
+              </a:rPr>
+              <a:t>Unit B</a:t>
+            </a:r>
+          </a:p>
+          <a:p>
+            <a:pPr algn="ctr"/>
+            <a:r>
+              <a:rPr lang="de-DE" sz="1600">
+                <a:solidFill>
+                  <a:schemeClr val="bg1"/>
+                </a:solidFill>
+              </a:rPr>
+              <a:t>Unit C</a:t>
+            </a:r>
+          </a:p>
+        </p:txBody>
+      </p:sp>
+      <p:sp>
+        <p:nvSpPr>
+          <p:cNvPr id="6" name="Rechteck 5">
+            <a:extLst>
+              <a:ext uri="{FF2B5EF4-FFF2-40B4-BE49-F238E27FC236}">
+                <a16:creationId xmlns:a16="http://schemas.microsoft.com/office/drawing/2014/main" id="{F8DA2B19-A799-499D-9544-537F1372B927}"/>
+              </a:ext>
+            </a:extLst>
+          </p:cNvPr>
+          <p:cNvSpPr/>
+          <p:nvPr/>
+        </p:nvSpPr>
+        <p:spPr>
+          <a:xfrm>
+            <a:off x="781843" y="4379988"/>
+            <a:ext cx="1305816" cy="1290906"/>
+          </a:xfrm>
+          <a:prstGeom prst="rect">
+            <a:avLst/>
+          </a:prstGeom>
+          <a:solidFill>
+            <a:srgbClr val="008CBA"/>
+          </a:solidFill>
+          <a:ln>
+            <a:noFill/>
+          </a:ln>
+        </p:spPr>
+        <p:style>
+          <a:lnRef idx="2">
+            <a:schemeClr val="accent1">
+              <a:shade val="50000"/>
+            </a:schemeClr>
+          </a:lnRef>
+          <a:fillRef idx="1">
+            <a:schemeClr val="accent1"/>
+          </a:fillRef>
+          <a:effectRef idx="0">
+            <a:schemeClr val="accent1"/>
+          </a:effectRef>
+          <a:fontRef idx="minor">
+            <a:schemeClr val="lt1"/>
+          </a:fontRef>
+        </p:style>
+        <p:txBody>
+          <a:bodyPr rtlCol="0" anchor="t"/>
+          <a:lstStyle/>
+          <a:p>
+            <a:pPr algn="ctr"/>
+            <a:r>
+              <a:rPr lang="de-DE" sz="2000" b="1">
+                <a:solidFill>
+                  <a:schemeClr val="bg1"/>
+                </a:solidFill>
+              </a:rPr>
+              <a:t>Modul 2</a:t>
+            </a:r>
+          </a:p>
+          <a:p>
+            <a:pPr algn="ctr"/>
+            <a:endParaRPr lang="de-DE" sz="1000">
+              <a:solidFill>
+                <a:schemeClr val="bg1"/>
+              </a:solidFill>
+            </a:endParaRPr>
+          </a:p>
+          <a:p>
+            <a:pPr algn="ctr"/>
+            <a:r>
+              <a:rPr lang="de-DE" sz="1600">
+                <a:solidFill>
+                  <a:schemeClr val="bg1"/>
+                </a:solidFill>
+              </a:rPr>
+              <a:t>Unit D</a:t>
+            </a:r>
+          </a:p>
+          <a:p>
+            <a:pPr algn="ctr"/>
+            <a:r>
+              <a:rPr lang="de-DE" sz="1600">
+                <a:solidFill>
+                  <a:schemeClr val="bg1"/>
+                </a:solidFill>
+              </a:rPr>
+              <a:t>Unit E</a:t>
+            </a:r>
+          </a:p>
+          <a:p>
+            <a:pPr algn="ctr"/>
+            <a:r>
+              <a:rPr lang="de-DE" sz="1600">
+                <a:solidFill>
+                  <a:schemeClr val="bg1"/>
+                </a:solidFill>
+              </a:rPr>
+              <a:t>Unit F</a:t>
+            </a:r>
+          </a:p>
+        </p:txBody>
+      </p:sp>
+      <p:sp>
+        <p:nvSpPr>
+          <p:cNvPr id="8" name="Rechteck 7">
+            <a:extLst>
+              <a:ext uri="{FF2B5EF4-FFF2-40B4-BE49-F238E27FC236}">
+                <a16:creationId xmlns:a16="http://schemas.microsoft.com/office/drawing/2014/main" id="{0A485D1C-EC3D-4C7C-8EDE-133F11ED8FF4}"/>
+              </a:ext>
+            </a:extLst>
+          </p:cNvPr>
+          <p:cNvSpPr/>
+          <p:nvPr/>
+        </p:nvSpPr>
+        <p:spPr>
+          <a:xfrm>
+            <a:off x="4047897" y="2604038"/>
+            <a:ext cx="1567585" cy="3236692"/>
+          </a:xfrm>
+          <a:prstGeom prst="rect">
             <a:avLst/>
           </a:prstGeom>
           <a:solidFill>
@@ -14097,257 +14932,239 @@
           </a:fontRef>
         </p:style>
         <p:txBody>
-          <a:bodyPr rtlCol="0" anchor="ctr"/>
-          <a:lstStyle/>
-          <a:p>
-            <a:pPr algn="ctr"/>
-            <a:endParaRPr lang="de-DE"/>
-          </a:p>
-        </p:txBody>
-      </p:sp>
-      <p:sp>
-        <p:nvSpPr>
-          <p:cNvPr id="25" name="Pfeil: nach links 24">
-            <a:extLst>
-              <a:ext uri="{FF2B5EF4-FFF2-40B4-BE49-F238E27FC236}">
-                <a16:creationId xmlns:a16="http://schemas.microsoft.com/office/drawing/2014/main" id="{753FC8FE-F56E-45C4-9E72-DDBA99836111}"/>
-              </a:ext>
-            </a:extLst>
-          </p:cNvPr>
-          <p:cNvSpPr/>
-          <p:nvPr/>
-        </p:nvSpPr>
-        <p:spPr>
-          <a:xfrm rot="17749119" flipH="1">
-            <a:off x="3210439" y="2686662"/>
-            <a:ext cx="1065792" cy="317898"/>
-          </a:xfrm>
-          <a:prstGeom prst="leftArrow">
-            <a:avLst/>
-          </a:prstGeom>
-          <a:solidFill>
-            <a:srgbClr val="D6DCE5"/>
-          </a:solidFill>
-          <a:ln>
-            <a:noFill/>
-          </a:ln>
-        </p:spPr>
-        <p:style>
-          <a:lnRef idx="2">
-            <a:schemeClr val="accent1">
-              <a:shade val="50000"/>
-            </a:schemeClr>
-          </a:lnRef>
-          <a:fillRef idx="1">
-            <a:schemeClr val="accent1"/>
-          </a:fillRef>
-          <a:effectRef idx="0">
-            <a:schemeClr val="accent1"/>
-          </a:effectRef>
-          <a:fontRef idx="minor">
-            <a:schemeClr val="lt1"/>
-          </a:fontRef>
-        </p:style>
-        <p:txBody>
-          <a:bodyPr rtlCol="0" anchor="ctr"/>
-          <a:lstStyle/>
-          <a:p>
-            <a:pPr algn="ctr"/>
-            <a:endParaRPr lang="de-DE"/>
-          </a:p>
-        </p:txBody>
-      </p:sp>
-      <p:sp>
-        <p:nvSpPr>
-          <p:cNvPr id="4" name="Rechteck: abgerundete Ecken 3">
-            <a:extLst>
-              <a:ext uri="{FF2B5EF4-FFF2-40B4-BE49-F238E27FC236}">
-                <a16:creationId xmlns:a16="http://schemas.microsoft.com/office/drawing/2014/main" id="{1D19F10A-674D-4908-9A18-FDAD3BD7BEDC}"/>
-              </a:ext>
-            </a:extLst>
-          </p:cNvPr>
-          <p:cNvSpPr/>
-          <p:nvPr/>
-        </p:nvSpPr>
-        <p:spPr>
-          <a:xfrm>
-            <a:off x="1365847" y="2044000"/>
-            <a:ext cx="1676257" cy="318109"/>
-          </a:xfrm>
-          <a:prstGeom prst="roundRect">
-            <a:avLst/>
-          </a:prstGeom>
-          <a:solidFill>
-            <a:srgbClr val="405786"/>
-          </a:solidFill>
-          <a:ln>
-            <a:noFill/>
-          </a:ln>
-        </p:spPr>
-        <p:style>
-          <a:lnRef idx="2">
-            <a:schemeClr val="accent1">
-              <a:shade val="50000"/>
-            </a:schemeClr>
-          </a:lnRef>
-          <a:fillRef idx="1">
-            <a:schemeClr val="accent1"/>
-          </a:fillRef>
-          <a:effectRef idx="0">
-            <a:schemeClr val="accent1"/>
-          </a:effectRef>
-          <a:fontRef idx="minor">
-            <a:schemeClr val="lt1"/>
-          </a:fontRef>
-        </p:style>
-        <p:txBody>
-          <a:bodyPr rtlCol="0" anchor="ctr"/>
-          <a:lstStyle/>
-          <a:p>
-            <a:pPr algn="ctr"/>
-            <a:r>
-              <a:rPr lang="de-DE" sz="1200"/>
-              <a:t>IQB-Studio</a:t>
-            </a:r>
-          </a:p>
-        </p:txBody>
-      </p:sp>
-      <p:sp>
-        <p:nvSpPr>
-          <p:cNvPr id="6" name="Rechteck: abgerundete Ecken 5">
-            <a:extLst>
-              <a:ext uri="{FF2B5EF4-FFF2-40B4-BE49-F238E27FC236}">
-                <a16:creationId xmlns:a16="http://schemas.microsoft.com/office/drawing/2014/main" id="{2B3200A0-8EF8-4FFF-B02C-41172859B333}"/>
-              </a:ext>
-            </a:extLst>
-          </p:cNvPr>
-          <p:cNvSpPr/>
-          <p:nvPr/>
-        </p:nvSpPr>
-        <p:spPr>
-          <a:xfrm>
-            <a:off x="3408092" y="2038168"/>
-            <a:ext cx="1800154" cy="318109"/>
-          </a:xfrm>
-          <a:prstGeom prst="roundRect">
-            <a:avLst/>
-          </a:prstGeom>
-          <a:solidFill>
-            <a:schemeClr val="bg1"/>
-          </a:solidFill>
-          <a:ln>
-            <a:solidFill>
-              <a:schemeClr val="tx1"/>
-            </a:solidFill>
-          </a:ln>
-        </p:spPr>
-        <p:style>
-          <a:lnRef idx="2">
-            <a:schemeClr val="accent1">
-              <a:shade val="50000"/>
-            </a:schemeClr>
-          </a:lnRef>
-          <a:fillRef idx="1">
-            <a:schemeClr val="accent1"/>
-          </a:fillRef>
-          <a:effectRef idx="0">
-            <a:schemeClr val="accent1"/>
-          </a:effectRef>
-          <a:fontRef idx="minor">
-            <a:schemeClr val="lt1"/>
-          </a:fontRef>
-        </p:style>
-        <p:txBody>
-          <a:bodyPr rtlCol="0" anchor="ctr"/>
-          <a:lstStyle/>
-          <a:p>
-            <a:pPr algn="ctr"/>
-            <a:r>
-              <a:rPr lang="de-DE" sz="1200" b="1">
-                <a:solidFill>
-                  <a:schemeClr val="tx1"/>
-                </a:solidFill>
-              </a:rPr>
-              <a:t>Länder-Durchführung</a:t>
-            </a:r>
-          </a:p>
-        </p:txBody>
-      </p:sp>
-      <p:sp>
-        <p:nvSpPr>
-          <p:cNvPr id="13" name="Rechteck 12">
-            <a:extLst>
-              <a:ext uri="{FF2B5EF4-FFF2-40B4-BE49-F238E27FC236}">
-                <a16:creationId xmlns:a16="http://schemas.microsoft.com/office/drawing/2014/main" id="{A96BB776-D63D-43FB-B470-D03AEB0699BD}"/>
-              </a:ext>
-            </a:extLst>
-          </p:cNvPr>
-          <p:cNvSpPr/>
-          <p:nvPr/>
-        </p:nvSpPr>
-        <p:spPr>
-          <a:xfrm>
-            <a:off x="3449000" y="2578246"/>
-            <a:ext cx="1294330" cy="466578"/>
-          </a:xfrm>
-          <a:prstGeom prst="rect">
-            <a:avLst/>
-          </a:prstGeom>
-          <a:noFill/>
-          <a:ln>
-            <a:noFill/>
-          </a:ln>
-        </p:spPr>
-        <p:style>
-          <a:lnRef idx="2">
-            <a:schemeClr val="accent1">
-              <a:shade val="50000"/>
-            </a:schemeClr>
-          </a:lnRef>
-          <a:fillRef idx="1">
-            <a:schemeClr val="accent1"/>
-          </a:fillRef>
-          <a:effectRef idx="0">
-            <a:schemeClr val="accent1"/>
-          </a:effectRef>
-          <a:fontRef idx="minor">
-            <a:schemeClr val="lt1"/>
-          </a:fontRef>
-        </p:style>
-        <p:txBody>
           <a:bodyPr rtlCol="0" anchor="t"/>
           <a:lstStyle/>
           <a:p>
             <a:pPr algn="ctr"/>
             <a:r>
-              <a:rPr lang="de-DE" sz="1200">
+              <a:rPr lang="de-DE" sz="1600">
                 <a:solidFill>
                   <a:srgbClr val="405786"/>
                 </a:solidFill>
               </a:rPr>
-              <a:t>Assessment Package</a:t>
-            </a:r>
-          </a:p>
-        </p:txBody>
-      </p:sp>
-      <p:sp>
-        <p:nvSpPr>
-          <p:cNvPr id="29" name="Pfeil: nach rechts 28">
-            <a:extLst>
-              <a:ext uri="{FF2B5EF4-FFF2-40B4-BE49-F238E27FC236}">
-                <a16:creationId xmlns:a16="http://schemas.microsoft.com/office/drawing/2014/main" id="{45D89B47-52C5-4AD1-841B-8C552476B40A}"/>
-              </a:ext>
-            </a:extLst>
-          </p:cNvPr>
-          <p:cNvSpPr/>
-          <p:nvPr/>
-        </p:nvSpPr>
-        <p:spPr>
-          <a:xfrm rot="3850881">
-            <a:off x="2651901" y="4344640"/>
-            <a:ext cx="1819310" cy="317898"/>
-          </a:xfrm>
-          <a:prstGeom prst="rightArrow">
+              <a:t>Testheft 2</a:t>
+            </a:r>
+          </a:p>
+        </p:txBody>
+      </p:sp>
+      <p:sp>
+        <p:nvSpPr>
+          <p:cNvPr id="9" name="Rechteck 8">
+            <a:extLst>
+              <a:ext uri="{FF2B5EF4-FFF2-40B4-BE49-F238E27FC236}">
+                <a16:creationId xmlns:a16="http://schemas.microsoft.com/office/drawing/2014/main" id="{4DF4EF8D-0812-476F-9662-390793A58462}"/>
+              </a:ext>
+            </a:extLst>
+          </p:cNvPr>
+          <p:cNvSpPr/>
+          <p:nvPr/>
+        </p:nvSpPr>
+        <p:spPr>
+          <a:xfrm>
+            <a:off x="4178781" y="2981853"/>
+            <a:ext cx="1305816" cy="1290906"/>
+          </a:xfrm>
+          <a:prstGeom prst="rect">
+            <a:avLst/>
+          </a:prstGeom>
+          <a:solidFill>
+            <a:srgbClr val="008CBA"/>
+          </a:solidFill>
+          <a:ln>
+            <a:noFill/>
+          </a:ln>
+        </p:spPr>
+        <p:style>
+          <a:lnRef idx="2">
+            <a:schemeClr val="accent1">
+              <a:shade val="50000"/>
+            </a:schemeClr>
+          </a:lnRef>
+          <a:fillRef idx="1">
+            <a:schemeClr val="accent1"/>
+          </a:fillRef>
+          <a:effectRef idx="0">
+            <a:schemeClr val="accent1"/>
+          </a:effectRef>
+          <a:fontRef idx="minor">
+            <a:schemeClr val="lt1"/>
+          </a:fontRef>
+        </p:style>
+        <p:txBody>
+          <a:bodyPr rtlCol="0" anchor="t"/>
+          <a:lstStyle/>
+          <a:p>
+            <a:pPr algn="ctr"/>
+            <a:r>
+              <a:rPr lang="de-DE" sz="2000" b="1">
+                <a:solidFill>
+                  <a:schemeClr val="bg1"/>
+                </a:solidFill>
+              </a:rPr>
+              <a:t>Modul 1</a:t>
+            </a:r>
+          </a:p>
+          <a:p>
+            <a:pPr algn="ctr"/>
+            <a:endParaRPr lang="de-DE" sz="1000">
+              <a:solidFill>
+                <a:schemeClr val="bg1"/>
+              </a:solidFill>
+            </a:endParaRPr>
+          </a:p>
+          <a:p>
+            <a:pPr algn="ctr"/>
+            <a:r>
+              <a:rPr lang="de-DE" sz="1600">
+                <a:solidFill>
+                  <a:schemeClr val="bg1"/>
+                </a:solidFill>
+              </a:rPr>
+              <a:t>Unit A</a:t>
+            </a:r>
+          </a:p>
+          <a:p>
+            <a:pPr algn="ctr"/>
+            <a:r>
+              <a:rPr lang="de-DE" sz="1600">
+                <a:solidFill>
+                  <a:schemeClr val="bg1"/>
+                </a:solidFill>
+              </a:rPr>
+              <a:t>Unit B</a:t>
+            </a:r>
+          </a:p>
+          <a:p>
+            <a:pPr algn="ctr"/>
+            <a:r>
+              <a:rPr lang="de-DE" sz="1600">
+                <a:solidFill>
+                  <a:schemeClr val="bg1"/>
+                </a:solidFill>
+              </a:rPr>
+              <a:t>Unit C</a:t>
+            </a:r>
+          </a:p>
+        </p:txBody>
+      </p:sp>
+      <p:sp>
+        <p:nvSpPr>
+          <p:cNvPr id="10" name="Rechteck 9">
+            <a:extLst>
+              <a:ext uri="{FF2B5EF4-FFF2-40B4-BE49-F238E27FC236}">
+                <a16:creationId xmlns:a16="http://schemas.microsoft.com/office/drawing/2014/main" id="{4393D6E7-539A-4437-9A43-0DFB51EBC4A3}"/>
+              </a:ext>
+            </a:extLst>
+          </p:cNvPr>
+          <p:cNvSpPr/>
+          <p:nvPr/>
+        </p:nvSpPr>
+        <p:spPr>
+          <a:xfrm>
+            <a:off x="4178781" y="4379988"/>
+            <a:ext cx="1305816" cy="1290906"/>
+          </a:xfrm>
+          <a:prstGeom prst="rect">
+            <a:avLst/>
+          </a:prstGeom>
+          <a:solidFill>
+            <a:srgbClr val="008CBA"/>
+          </a:solidFill>
+          <a:ln>
+            <a:noFill/>
+          </a:ln>
+        </p:spPr>
+        <p:style>
+          <a:lnRef idx="2">
+            <a:schemeClr val="accent1">
+              <a:shade val="50000"/>
+            </a:schemeClr>
+          </a:lnRef>
+          <a:fillRef idx="1">
+            <a:schemeClr val="accent1"/>
+          </a:fillRef>
+          <a:effectRef idx="0">
+            <a:schemeClr val="accent1"/>
+          </a:effectRef>
+          <a:fontRef idx="minor">
+            <a:schemeClr val="lt1"/>
+          </a:fontRef>
+        </p:style>
+        <p:txBody>
+          <a:bodyPr rtlCol="0" anchor="t"/>
+          <a:lstStyle/>
+          <a:p>
+            <a:pPr algn="ctr"/>
+            <a:r>
+              <a:rPr lang="de-DE" sz="2000" b="1">
+                <a:solidFill>
+                  <a:schemeClr val="bg1"/>
+                </a:solidFill>
+              </a:rPr>
+              <a:t>Modul 3</a:t>
+            </a:r>
+          </a:p>
+          <a:p>
+            <a:pPr algn="ctr"/>
+            <a:endParaRPr lang="de-DE" sz="1000">
+              <a:solidFill>
+                <a:schemeClr val="bg1"/>
+              </a:solidFill>
+            </a:endParaRPr>
+          </a:p>
+          <a:p>
+            <a:pPr algn="ctr"/>
+            <a:r>
+              <a:rPr lang="de-DE" sz="1600">
+                <a:solidFill>
+                  <a:schemeClr val="bg1"/>
+                </a:solidFill>
+              </a:rPr>
+              <a:t>Unit D</a:t>
+            </a:r>
+          </a:p>
+          <a:p>
+            <a:pPr algn="ctr"/>
+            <a:r>
+              <a:rPr lang="de-DE" sz="1600">
+                <a:solidFill>
+                  <a:schemeClr val="bg1"/>
+                </a:solidFill>
+              </a:rPr>
+              <a:t>Unit G</a:t>
+            </a:r>
+          </a:p>
+          <a:p>
+            <a:pPr algn="ctr"/>
+            <a:r>
+              <a:rPr lang="de-DE" sz="1600">
+                <a:solidFill>
+                  <a:schemeClr val="bg1"/>
+                </a:solidFill>
+              </a:rPr>
+              <a:t>Unit H</a:t>
+            </a:r>
+          </a:p>
+        </p:txBody>
+      </p:sp>
+      <p:sp>
+        <p:nvSpPr>
+          <p:cNvPr id="11" name="Rechteck 10">
+            <a:extLst>
+              <a:ext uri="{FF2B5EF4-FFF2-40B4-BE49-F238E27FC236}">
+                <a16:creationId xmlns:a16="http://schemas.microsoft.com/office/drawing/2014/main" id="{9B0677E0-1E08-425A-B3AB-6ED4E6D704E7}"/>
+              </a:ext>
+            </a:extLst>
+          </p:cNvPr>
+          <p:cNvSpPr/>
+          <p:nvPr/>
+        </p:nvSpPr>
+        <p:spPr>
+          <a:xfrm>
+            <a:off x="2349428" y="2604038"/>
+            <a:ext cx="1567585" cy="3236692"/>
+          </a:xfrm>
+          <a:prstGeom prst="rect">
             <a:avLst/>
           </a:prstGeom>
           <a:solidFill>
@@ -14374,1010 +15191,974 @@
           </a:fontRef>
         </p:style>
         <p:txBody>
-          <a:bodyPr rtlCol="0" anchor="ctr"/>
-          <a:lstStyle/>
-          <a:p>
-            <a:pPr algn="ctr"/>
-            <a:endParaRPr lang="de-DE"/>
-          </a:p>
-        </p:txBody>
-      </p:sp>
-      <p:sp>
-        <p:nvSpPr>
-          <p:cNvPr id="30" name="Pfeil: nach rechts 29">
-            <a:extLst>
-              <a:ext uri="{FF2B5EF4-FFF2-40B4-BE49-F238E27FC236}">
-                <a16:creationId xmlns:a16="http://schemas.microsoft.com/office/drawing/2014/main" id="{E948116F-D3FA-490C-B367-80E0CEF4121F}"/>
-              </a:ext>
-            </a:extLst>
-          </p:cNvPr>
-          <p:cNvSpPr/>
-          <p:nvPr/>
-        </p:nvSpPr>
-        <p:spPr>
-          <a:xfrm rot="17749119" flipH="1">
-            <a:off x="1347880" y="4336905"/>
-            <a:ext cx="1836493" cy="317898"/>
-          </a:xfrm>
-          <a:prstGeom prst="rightArrow">
-            <a:avLst/>
-          </a:prstGeom>
-          <a:solidFill>
-            <a:srgbClr val="D6DCE5"/>
-          </a:solidFill>
-          <a:ln>
-            <a:noFill/>
-          </a:ln>
-        </p:spPr>
-        <p:style>
-          <a:lnRef idx="2">
-            <a:schemeClr val="accent1">
-              <a:shade val="50000"/>
-            </a:schemeClr>
-          </a:lnRef>
-          <a:fillRef idx="1">
-            <a:schemeClr val="accent1"/>
-          </a:fillRef>
-          <a:effectRef idx="0">
-            <a:schemeClr val="accent1"/>
-          </a:effectRef>
-          <a:fontRef idx="minor">
-            <a:schemeClr val="lt1"/>
-          </a:fontRef>
-        </p:style>
-        <p:txBody>
-          <a:bodyPr rtlCol="0" anchor="ctr"/>
-          <a:lstStyle/>
-          <a:p>
-            <a:pPr algn="ctr"/>
-            <a:endParaRPr lang="de-DE"/>
-          </a:p>
-        </p:txBody>
-      </p:sp>
-      <p:sp>
-        <p:nvSpPr>
-          <p:cNvPr id="31" name="Pfeil: nach rechts 30">
-            <a:extLst>
-              <a:ext uri="{FF2B5EF4-FFF2-40B4-BE49-F238E27FC236}">
-                <a16:creationId xmlns:a16="http://schemas.microsoft.com/office/drawing/2014/main" id="{7E1AE68B-0EA4-4E51-B712-345F46C22250}"/>
-              </a:ext>
-            </a:extLst>
-          </p:cNvPr>
-          <p:cNvSpPr/>
-          <p:nvPr/>
-        </p:nvSpPr>
-        <p:spPr>
-          <a:xfrm rot="3850881" flipH="1" flipV="1">
-            <a:off x="4325604" y="3972049"/>
-            <a:ext cx="802022" cy="317898"/>
-          </a:xfrm>
-          <a:prstGeom prst="rightArrow">
-            <a:avLst/>
-          </a:prstGeom>
-          <a:solidFill>
-            <a:srgbClr val="D6DCE5"/>
-          </a:solidFill>
-          <a:ln>
-            <a:noFill/>
-          </a:ln>
-        </p:spPr>
-        <p:style>
-          <a:lnRef idx="2">
-            <a:schemeClr val="accent1">
-              <a:shade val="50000"/>
-            </a:schemeClr>
-          </a:lnRef>
-          <a:fillRef idx="1">
-            <a:schemeClr val="accent1"/>
-          </a:fillRef>
-          <a:effectRef idx="0">
-            <a:schemeClr val="accent1"/>
-          </a:effectRef>
-          <a:fontRef idx="minor">
-            <a:schemeClr val="lt1"/>
-          </a:fontRef>
-        </p:style>
-        <p:txBody>
-          <a:bodyPr rtlCol="0" anchor="ctr"/>
-          <a:lstStyle/>
-          <a:p>
-            <a:pPr algn="ctr"/>
-            <a:endParaRPr lang="de-DE"/>
-          </a:p>
-        </p:txBody>
-      </p:sp>
-      <p:sp>
-        <p:nvSpPr>
-          <p:cNvPr id="32" name="Pfeil: nach rechts 31">
-            <a:extLst>
-              <a:ext uri="{FF2B5EF4-FFF2-40B4-BE49-F238E27FC236}">
-                <a16:creationId xmlns:a16="http://schemas.microsoft.com/office/drawing/2014/main" id="{77EB62EE-B0EB-405E-A9E7-31819D74898A}"/>
-              </a:ext>
-            </a:extLst>
-          </p:cNvPr>
-          <p:cNvSpPr/>
-          <p:nvPr/>
-        </p:nvSpPr>
-        <p:spPr>
-          <a:xfrm rot="17749119" flipV="1">
-            <a:off x="4321033" y="4977845"/>
-            <a:ext cx="844595" cy="317898"/>
-          </a:xfrm>
-          <a:prstGeom prst="rightArrow">
-            <a:avLst/>
-          </a:prstGeom>
-          <a:solidFill>
-            <a:srgbClr val="D6DCE5"/>
-          </a:solidFill>
-          <a:ln>
-            <a:noFill/>
-          </a:ln>
-        </p:spPr>
-        <p:style>
-          <a:lnRef idx="2">
-            <a:schemeClr val="accent1">
-              <a:shade val="50000"/>
-            </a:schemeClr>
-          </a:lnRef>
-          <a:fillRef idx="1">
-            <a:schemeClr val="accent1"/>
-          </a:fillRef>
-          <a:effectRef idx="0">
-            <a:schemeClr val="accent1"/>
-          </a:effectRef>
-          <a:fontRef idx="minor">
-            <a:schemeClr val="lt1"/>
-          </a:fontRef>
-        </p:style>
-        <p:txBody>
-          <a:bodyPr rtlCol="0" anchor="ctr"/>
-          <a:lstStyle/>
-          <a:p>
-            <a:pPr algn="ctr"/>
-            <a:endParaRPr lang="de-DE"/>
-          </a:p>
-        </p:txBody>
-      </p:sp>
-      <p:sp>
-        <p:nvSpPr>
-          <p:cNvPr id="17" name="Rechteck 16">
-            <a:extLst>
-              <a:ext uri="{FF2B5EF4-FFF2-40B4-BE49-F238E27FC236}">
-                <a16:creationId xmlns:a16="http://schemas.microsoft.com/office/drawing/2014/main" id="{BBC0748C-9234-4B45-8D10-CBF7EEE1374C}"/>
-              </a:ext>
-            </a:extLst>
-          </p:cNvPr>
-          <p:cNvSpPr/>
-          <p:nvPr/>
-        </p:nvSpPr>
-        <p:spPr>
-          <a:xfrm>
-            <a:off x="2877192" y="5363651"/>
-            <a:ext cx="866143" cy="275164"/>
-          </a:xfrm>
-          <a:prstGeom prst="rect">
-            <a:avLst/>
-          </a:prstGeom>
-          <a:noFill/>
-          <a:ln>
-            <a:noFill/>
-          </a:ln>
-        </p:spPr>
-        <p:style>
-          <a:lnRef idx="2">
-            <a:schemeClr val="accent1">
-              <a:shade val="50000"/>
-            </a:schemeClr>
-          </a:lnRef>
-          <a:fillRef idx="1">
-            <a:schemeClr val="accent1"/>
-          </a:fillRef>
-          <a:effectRef idx="0">
-            <a:schemeClr val="accent1"/>
-          </a:effectRef>
-          <a:fontRef idx="minor">
-            <a:schemeClr val="lt1"/>
-          </a:fontRef>
-        </p:style>
-        <p:txBody>
           <a:bodyPr rtlCol="0" anchor="t"/>
           <a:lstStyle/>
           <a:p>
             <a:pPr algn="ctr"/>
             <a:r>
-              <a:rPr lang="de-DE" sz="1200">
+              <a:rPr lang="de-DE" sz="1600" b="1">
                 <a:solidFill>
                   <a:srgbClr val="405786"/>
                 </a:solidFill>
               </a:rPr>
-              <a:t>Antworten</a:t>
-            </a:r>
-            <a:endParaRPr lang="de-DE" sz="1400">
-              <a:solidFill>
-                <a:srgbClr val="405786"/>
-              </a:solidFill>
-            </a:endParaRPr>
-          </a:p>
-        </p:txBody>
-      </p:sp>
-      <p:sp>
-        <p:nvSpPr>
-          <p:cNvPr id="15" name="Rechteck 14">
-            <a:extLst>
-              <a:ext uri="{FF2B5EF4-FFF2-40B4-BE49-F238E27FC236}">
-                <a16:creationId xmlns:a16="http://schemas.microsoft.com/office/drawing/2014/main" id="{A5BFC3D8-81AB-4B6E-AC39-A38E82FEDBCA}"/>
-              </a:ext>
-            </a:extLst>
-          </p:cNvPr>
-          <p:cNvSpPr/>
-          <p:nvPr/>
-        </p:nvSpPr>
-        <p:spPr>
-          <a:xfrm>
-            <a:off x="1489393" y="4134614"/>
-            <a:ext cx="912402" cy="493304"/>
-          </a:xfrm>
-          <a:prstGeom prst="rect">
-            <a:avLst/>
-          </a:prstGeom>
-          <a:noFill/>
-          <a:ln>
-            <a:noFill/>
-          </a:ln>
-        </p:spPr>
-        <p:style>
-          <a:lnRef idx="2">
-            <a:schemeClr val="accent1">
-              <a:shade val="50000"/>
-            </a:schemeClr>
-          </a:lnRef>
-          <a:fillRef idx="1">
-            <a:schemeClr val="accent1"/>
-          </a:fillRef>
-          <a:effectRef idx="0">
-            <a:schemeClr val="accent1"/>
-          </a:effectRef>
-          <a:fontRef idx="minor">
-            <a:schemeClr val="lt1"/>
-          </a:fontRef>
-        </p:style>
-        <p:txBody>
-          <a:bodyPr rtlCol="0" anchor="t"/>
-          <a:lstStyle/>
-          <a:p>
-            <a:pPr algn="ctr"/>
-            <a:r>
-              <a:rPr lang="de-DE" sz="1200">
+              <a:t>Items</a:t>
+            </a:r>
+          </a:p>
+          <a:p>
+            <a:pPr algn="ctr"/>
+            <a:r>
+              <a:rPr lang="de-DE" sz="1600">
                 <a:solidFill>
                   <a:srgbClr val="405786"/>
                 </a:solidFill>
               </a:rPr>
-              <a:t>Aufgaben, Testhefte</a:t>
-            </a:r>
-            <a:endParaRPr lang="de-DE" sz="1400">
-              <a:solidFill>
-                <a:srgbClr val="405786"/>
-              </a:solidFill>
-            </a:endParaRPr>
-          </a:p>
-        </p:txBody>
-      </p:sp>
-      <p:sp>
-        <p:nvSpPr>
-          <p:cNvPr id="7" name="Rechteck: abgerundete Ecken 6">
-            <a:extLst>
-              <a:ext uri="{FF2B5EF4-FFF2-40B4-BE49-F238E27FC236}">
-                <a16:creationId xmlns:a16="http://schemas.microsoft.com/office/drawing/2014/main" id="{CA9A0AFC-CDCE-4998-A4B7-46F43B78EA44}"/>
-              </a:ext>
-            </a:extLst>
-          </p:cNvPr>
-          <p:cNvSpPr/>
-          <p:nvPr/>
-        </p:nvSpPr>
-        <p:spPr>
-          <a:xfrm>
-            <a:off x="1197445" y="5342179"/>
-            <a:ext cx="1676257" cy="318109"/>
-          </a:xfrm>
-          <a:prstGeom prst="roundRect">
-            <a:avLst/>
-          </a:prstGeom>
-          <a:solidFill>
-            <a:srgbClr val="405786"/>
-          </a:solidFill>
-          <a:ln>
-            <a:noFill/>
-          </a:ln>
-        </p:spPr>
-        <p:style>
-          <a:lnRef idx="2">
-            <a:schemeClr val="accent1">
-              <a:shade val="50000"/>
-            </a:schemeClr>
-          </a:lnRef>
-          <a:fillRef idx="1">
-            <a:schemeClr val="accent1"/>
-          </a:fillRef>
-          <a:effectRef idx="0">
-            <a:schemeClr val="accent1"/>
-          </a:effectRef>
-          <a:fontRef idx="minor">
-            <a:schemeClr val="lt1"/>
-          </a:fontRef>
-        </p:style>
-        <p:txBody>
-          <a:bodyPr rtlCol="0" anchor="ctr"/>
-          <a:lstStyle/>
-          <a:p>
-            <a:pPr algn="ctr"/>
-            <a:r>
-              <a:rPr lang="de-DE" sz="1200"/>
-              <a:t>IQB-Testcenter</a:t>
-            </a:r>
-          </a:p>
-        </p:txBody>
-      </p:sp>
-      <p:sp>
-        <p:nvSpPr>
-          <p:cNvPr id="12" name="Flussdiagramm: Magnetplattenspeicher 11">
-            <a:extLst>
-              <a:ext uri="{FF2B5EF4-FFF2-40B4-BE49-F238E27FC236}">
-                <a16:creationId xmlns:a16="http://schemas.microsoft.com/office/drawing/2014/main" id="{F796BA9E-5480-793C-C4A2-8A734E31A83C}"/>
-              </a:ext>
-            </a:extLst>
-          </p:cNvPr>
-          <p:cNvSpPr/>
-          <p:nvPr/>
-        </p:nvSpPr>
-        <p:spPr>
-          <a:xfrm>
-            <a:off x="5148991" y="5845787"/>
-            <a:ext cx="986740" cy="944880"/>
-          </a:xfrm>
-          <a:prstGeom prst="flowChartMagneticDisk">
-            <a:avLst/>
-          </a:prstGeom>
-          <a:solidFill>
-            <a:schemeClr val="bg1"/>
-          </a:solidFill>
-          <a:ln>
-            <a:solidFill>
-              <a:schemeClr val="tx1"/>
-            </a:solidFill>
-          </a:ln>
-        </p:spPr>
-        <p:style>
-          <a:lnRef idx="2">
-            <a:schemeClr val="accent1">
-              <a:shade val="50000"/>
-            </a:schemeClr>
-          </a:lnRef>
-          <a:fillRef idx="1">
-            <a:schemeClr val="accent1"/>
-          </a:fillRef>
-          <a:effectRef idx="0">
-            <a:schemeClr val="accent1"/>
-          </a:effectRef>
-          <a:fontRef idx="minor">
-            <a:schemeClr val="lt1"/>
-          </a:fontRef>
-        </p:style>
-        <p:txBody>
-          <a:bodyPr rtlCol="0" anchor="ctr"/>
-          <a:lstStyle/>
-          <a:p>
-            <a:pPr algn="ctr"/>
-            <a:r>
-              <a:rPr lang="de-DE" sz="1200" b="1">
-                <a:solidFill>
-                  <a:schemeClr val="tx1"/>
-                </a:solidFill>
-              </a:rPr>
-              <a:t>Daten-Archiv</a:t>
-            </a:r>
-          </a:p>
-        </p:txBody>
-      </p:sp>
-      <p:sp>
-        <p:nvSpPr>
-          <p:cNvPr id="3" name="Pfeil: nach rechts 2">
-            <a:extLst>
-              <a:ext uri="{FF2B5EF4-FFF2-40B4-BE49-F238E27FC236}">
-                <a16:creationId xmlns:a16="http://schemas.microsoft.com/office/drawing/2014/main" id="{1079D243-BA3D-E2A7-7F1D-465FB352B90A}"/>
-              </a:ext>
-            </a:extLst>
-          </p:cNvPr>
-          <p:cNvSpPr/>
-          <p:nvPr/>
-        </p:nvSpPr>
-        <p:spPr>
-          <a:xfrm rot="5400000">
-            <a:off x="4864600" y="5159826"/>
-            <a:ext cx="1555523" cy="317898"/>
-          </a:xfrm>
-          <a:prstGeom prst="rightArrow">
-            <a:avLst/>
-          </a:prstGeom>
-          <a:solidFill>
-            <a:srgbClr val="D6DCE5"/>
-          </a:solidFill>
-          <a:ln>
-            <a:noFill/>
-          </a:ln>
-        </p:spPr>
-        <p:style>
-          <a:lnRef idx="2">
-            <a:schemeClr val="accent1">
-              <a:shade val="50000"/>
-            </a:schemeClr>
-          </a:lnRef>
-          <a:fillRef idx="1">
-            <a:schemeClr val="accent1"/>
-          </a:fillRef>
-          <a:effectRef idx="0">
-            <a:schemeClr val="accent1"/>
-          </a:effectRef>
-          <a:fontRef idx="minor">
-            <a:schemeClr val="lt1"/>
-          </a:fontRef>
-        </p:style>
-        <p:txBody>
-          <a:bodyPr rtlCol="0" anchor="ctr"/>
-          <a:lstStyle/>
-          <a:p>
-            <a:pPr algn="ctr"/>
-            <a:endParaRPr lang="de-DE"/>
-          </a:p>
-        </p:txBody>
-      </p:sp>
-      <p:sp>
-        <p:nvSpPr>
-          <p:cNvPr id="9" name="Rechteck: abgerundete Ecken 8">
-            <a:extLst>
-              <a:ext uri="{FF2B5EF4-FFF2-40B4-BE49-F238E27FC236}">
-                <a16:creationId xmlns:a16="http://schemas.microsoft.com/office/drawing/2014/main" id="{F4BB3833-2C2A-4D03-85C1-B048B97B60EA}"/>
-              </a:ext>
-            </a:extLst>
-          </p:cNvPr>
-          <p:cNvSpPr/>
-          <p:nvPr/>
-        </p:nvSpPr>
-        <p:spPr>
-          <a:xfrm>
-            <a:off x="4674826" y="4420930"/>
-            <a:ext cx="1387562" cy="318109"/>
-          </a:xfrm>
-          <a:prstGeom prst="roundRect">
-            <a:avLst/>
-          </a:prstGeom>
-          <a:solidFill>
-            <a:schemeClr val="bg1"/>
-          </a:solidFill>
-          <a:ln>
-            <a:solidFill>
-              <a:schemeClr val="tx1"/>
-            </a:solidFill>
-          </a:ln>
-        </p:spPr>
-        <p:style>
-          <a:lnRef idx="2">
-            <a:schemeClr val="accent1">
-              <a:shade val="50000"/>
-            </a:schemeClr>
-          </a:lnRef>
-          <a:fillRef idx="1">
-            <a:schemeClr val="accent1"/>
-          </a:fillRef>
-          <a:effectRef idx="0">
-            <a:schemeClr val="accent1"/>
-          </a:effectRef>
-          <a:fontRef idx="minor">
-            <a:schemeClr val="lt1"/>
-          </a:fontRef>
-        </p:style>
-        <p:txBody>
-          <a:bodyPr rtlCol="0" anchor="ctr"/>
-          <a:lstStyle/>
-          <a:p>
-            <a:pPr algn="ctr"/>
-            <a:r>
-              <a:rPr lang="de-DE" sz="1200" b="1">
-                <a:solidFill>
-                  <a:schemeClr val="tx1"/>
-                </a:solidFill>
-              </a:rPr>
-              <a:t>eatPrepTBA</a:t>
-            </a:r>
-          </a:p>
-        </p:txBody>
-      </p:sp>
-      <p:sp>
-        <p:nvSpPr>
-          <p:cNvPr id="14" name="Rechteck 13">
-            <a:extLst>
-              <a:ext uri="{FF2B5EF4-FFF2-40B4-BE49-F238E27FC236}">
-                <a16:creationId xmlns:a16="http://schemas.microsoft.com/office/drawing/2014/main" id="{4BA86029-B693-FD41-5370-C38B7BF743FB}"/>
-              </a:ext>
-            </a:extLst>
-          </p:cNvPr>
-          <p:cNvSpPr/>
-          <p:nvPr/>
-        </p:nvSpPr>
-        <p:spPr>
-          <a:xfrm>
-            <a:off x="4330789" y="4878635"/>
-            <a:ext cx="866143" cy="456162"/>
-          </a:xfrm>
-          <a:prstGeom prst="rect">
-            <a:avLst/>
-          </a:prstGeom>
-          <a:noFill/>
-          <a:ln>
-            <a:noFill/>
-          </a:ln>
-        </p:spPr>
-        <p:style>
-          <a:lnRef idx="2">
-            <a:schemeClr val="accent1">
-              <a:shade val="50000"/>
-            </a:schemeClr>
-          </a:lnRef>
-          <a:fillRef idx="1">
-            <a:schemeClr val="accent1"/>
-          </a:fillRef>
-          <a:effectRef idx="0">
-            <a:schemeClr val="accent1"/>
-          </a:effectRef>
-          <a:fontRef idx="minor">
-            <a:schemeClr val="lt1"/>
-          </a:fontRef>
-        </p:style>
-        <p:txBody>
-          <a:bodyPr rtlCol="0" anchor="t"/>
-          <a:lstStyle/>
-          <a:p>
-            <a:pPr algn="ctr"/>
-            <a:r>
-              <a:rPr lang="de-DE" sz="1200">
+              <a:t>A1</a:t>
+            </a:r>
+          </a:p>
+          <a:p>
+            <a:pPr algn="ctr"/>
+            <a:r>
+              <a:rPr lang="de-DE" sz="1600">
                 <a:solidFill>
                   <a:srgbClr val="405786"/>
                 </a:solidFill>
               </a:rPr>
-              <a:t>kodierte Antworten</a:t>
-            </a:r>
-            <a:endParaRPr lang="de-DE" sz="1400">
-              <a:solidFill>
-                <a:srgbClr val="405786"/>
-              </a:solidFill>
-            </a:endParaRPr>
-          </a:p>
-        </p:txBody>
-      </p:sp>
-      <p:sp>
-        <p:nvSpPr>
-          <p:cNvPr id="16" name="Rechteck 15">
-            <a:extLst>
-              <a:ext uri="{FF2B5EF4-FFF2-40B4-BE49-F238E27FC236}">
-                <a16:creationId xmlns:a16="http://schemas.microsoft.com/office/drawing/2014/main" id="{B27ED717-A731-F8F3-4893-8FBB71998940}"/>
-              </a:ext>
-            </a:extLst>
-          </p:cNvPr>
-          <p:cNvSpPr/>
-          <p:nvPr/>
-        </p:nvSpPr>
-        <p:spPr>
-          <a:xfrm>
-            <a:off x="5490159" y="4915216"/>
-            <a:ext cx="895401" cy="891224"/>
-          </a:xfrm>
-          <a:prstGeom prst="rect">
-            <a:avLst/>
-          </a:prstGeom>
-          <a:noFill/>
-          <a:ln>
-            <a:noFill/>
-          </a:ln>
-        </p:spPr>
-        <p:style>
-          <a:lnRef idx="2">
-            <a:schemeClr val="accent1">
-              <a:shade val="50000"/>
-            </a:schemeClr>
-          </a:lnRef>
-          <a:fillRef idx="1">
-            <a:schemeClr val="accent1"/>
-          </a:fillRef>
-          <a:effectRef idx="0">
-            <a:schemeClr val="accent1"/>
-          </a:effectRef>
-          <a:fontRef idx="minor">
-            <a:schemeClr val="lt1"/>
-          </a:fontRef>
-        </p:style>
-        <p:txBody>
-          <a:bodyPr rtlCol="0" anchor="t"/>
-          <a:lstStyle/>
-          <a:p>
-            <a:pPr algn="ctr"/>
-            <a:r>
-              <a:rPr lang="de-DE" sz="1200">
+              <a:t>A2</a:t>
+            </a:r>
+          </a:p>
+          <a:p>
+            <a:pPr algn="ctr"/>
+            <a:r>
+              <a:rPr lang="de-DE" sz="1600">
                 <a:solidFill>
                   <a:srgbClr val="405786"/>
                 </a:solidFill>
               </a:rPr>
-              <a:t>Antworten, Itemdaten,</a:t>
-            </a:r>
-          </a:p>
-          <a:p>
-            <a:pPr algn="ctr"/>
-            <a:r>
-              <a:rPr lang="de-DE" sz="1200">
+              <a:t>B1</a:t>
+            </a:r>
+          </a:p>
+          <a:p>
+            <a:pPr algn="ctr"/>
+            <a:r>
+              <a:rPr lang="de-DE" sz="1600">
                 <a:solidFill>
                   <a:srgbClr val="405786"/>
                 </a:solidFill>
               </a:rPr>
-              <a:t>Fähigkeits-werte</a:t>
-            </a:r>
-            <a:endParaRPr lang="de-DE" sz="1400">
-              <a:solidFill>
-                <a:srgbClr val="405786"/>
-              </a:solidFill>
-            </a:endParaRPr>
-          </a:p>
-        </p:txBody>
-      </p:sp>
-      <p:sp>
-        <p:nvSpPr>
-          <p:cNvPr id="18" name="Rechteck 17">
-            <a:extLst>
-              <a:ext uri="{FF2B5EF4-FFF2-40B4-BE49-F238E27FC236}">
-                <a16:creationId xmlns:a16="http://schemas.microsoft.com/office/drawing/2014/main" id="{7EFAB975-7544-FB8E-1E76-1F47B4DB4A1E}"/>
-              </a:ext>
-            </a:extLst>
-          </p:cNvPr>
-          <p:cNvSpPr/>
-          <p:nvPr/>
-        </p:nvSpPr>
-        <p:spPr>
-          <a:xfrm>
-            <a:off x="4458697" y="3888327"/>
-            <a:ext cx="866143" cy="456162"/>
-          </a:xfrm>
-          <a:prstGeom prst="rect">
-            <a:avLst/>
-          </a:prstGeom>
-          <a:noFill/>
-          <a:ln>
-            <a:noFill/>
-          </a:ln>
-        </p:spPr>
-        <p:style>
-          <a:lnRef idx="2">
-            <a:schemeClr val="accent1">
-              <a:shade val="50000"/>
-            </a:schemeClr>
-          </a:lnRef>
-          <a:fillRef idx="1">
-            <a:schemeClr val="accent1"/>
-          </a:fillRef>
-          <a:effectRef idx="0">
-            <a:schemeClr val="accent1"/>
-          </a:effectRef>
-          <a:fontRef idx="minor">
-            <a:schemeClr val="lt1"/>
-          </a:fontRef>
-        </p:style>
-        <p:txBody>
-          <a:bodyPr rtlCol="0" anchor="t"/>
-          <a:lstStyle/>
-          <a:p>
-            <a:pPr algn="ctr"/>
-            <a:r>
-              <a:rPr lang="de-DE" sz="1200">
+              <a:t>B2</a:t>
+            </a:r>
+          </a:p>
+          <a:p>
+            <a:pPr algn="ctr"/>
+            <a:r>
+              <a:rPr lang="de-DE" sz="1600">
                 <a:solidFill>
                   <a:srgbClr val="405786"/>
                 </a:solidFill>
               </a:rPr>
-              <a:t>Item-kennwerte</a:t>
-            </a:r>
-            <a:endParaRPr lang="de-DE" sz="1400">
-              <a:solidFill>
-                <a:srgbClr val="405786"/>
-              </a:solidFill>
-            </a:endParaRPr>
-          </a:p>
-        </p:txBody>
-      </p:sp>
-      <p:sp>
-        <p:nvSpPr>
-          <p:cNvPr id="19" name="Rechteck 18">
-            <a:extLst>
-              <a:ext uri="{FF2B5EF4-FFF2-40B4-BE49-F238E27FC236}">
-                <a16:creationId xmlns:a16="http://schemas.microsoft.com/office/drawing/2014/main" id="{50A89E02-51E0-1E69-76B2-B5EFA4D16E9D}"/>
-              </a:ext>
-            </a:extLst>
-          </p:cNvPr>
-          <p:cNvSpPr/>
-          <p:nvPr/>
-        </p:nvSpPr>
-        <p:spPr>
-          <a:xfrm>
-            <a:off x="2931072" y="4258006"/>
-            <a:ext cx="835184" cy="317898"/>
-          </a:xfrm>
-          <a:prstGeom prst="rect">
-            <a:avLst/>
-          </a:prstGeom>
-          <a:noFill/>
-          <a:ln>
-            <a:noFill/>
-          </a:ln>
-        </p:spPr>
-        <p:style>
-          <a:lnRef idx="2">
-            <a:schemeClr val="accent1">
-              <a:shade val="50000"/>
-            </a:schemeClr>
-          </a:lnRef>
-          <a:fillRef idx="1">
-            <a:schemeClr val="accent1"/>
-          </a:fillRef>
-          <a:effectRef idx="0">
-            <a:schemeClr val="accent1"/>
-          </a:effectRef>
-          <a:fontRef idx="minor">
-            <a:schemeClr val="lt1"/>
-          </a:fontRef>
-        </p:style>
-        <p:txBody>
-          <a:bodyPr rtlCol="0" anchor="t"/>
-          <a:lstStyle/>
-          <a:p>
-            <a:pPr algn="ctr"/>
-            <a:r>
-              <a:rPr lang="de-DE" sz="1200">
+              <a:t>C1</a:t>
+            </a:r>
+          </a:p>
+          <a:p>
+            <a:pPr algn="ctr"/>
+            <a:r>
+              <a:rPr lang="de-DE" sz="1600">
                 <a:solidFill>
                   <a:srgbClr val="405786"/>
                 </a:solidFill>
               </a:rPr>
-              <a:t>Aufgaben-UI</a:t>
-            </a:r>
-            <a:endParaRPr lang="de-DE" sz="1400">
-              <a:solidFill>
-                <a:srgbClr val="405786"/>
-              </a:solidFill>
-            </a:endParaRPr>
-          </a:p>
-        </p:txBody>
-      </p:sp>
-      <p:sp>
-        <p:nvSpPr>
-          <p:cNvPr id="20" name="Pfeil: nach rechts 19">
-            <a:extLst>
-              <a:ext uri="{FF2B5EF4-FFF2-40B4-BE49-F238E27FC236}">
-                <a16:creationId xmlns:a16="http://schemas.microsoft.com/office/drawing/2014/main" id="{B39DAA76-38F0-1AF7-02A1-8357E9AB6455}"/>
-              </a:ext>
-            </a:extLst>
-          </p:cNvPr>
-          <p:cNvSpPr/>
-          <p:nvPr/>
-        </p:nvSpPr>
-        <p:spPr>
-          <a:xfrm rot="3850881" flipH="1" flipV="1">
-            <a:off x="3013385" y="4500352"/>
-            <a:ext cx="1822517" cy="194103"/>
-          </a:xfrm>
-          <a:prstGeom prst="rightArrow">
-            <a:avLst/>
-          </a:prstGeom>
-          <a:solidFill>
-            <a:srgbClr val="D6DCE5"/>
-          </a:solidFill>
-          <a:ln>
-            <a:noFill/>
-          </a:ln>
-        </p:spPr>
-        <p:style>
-          <a:lnRef idx="2">
-            <a:schemeClr val="accent1">
-              <a:shade val="50000"/>
-            </a:schemeClr>
-          </a:lnRef>
-          <a:fillRef idx="1">
-            <a:schemeClr val="accent1"/>
-          </a:fillRef>
-          <a:effectRef idx="0">
-            <a:schemeClr val="accent1"/>
-          </a:effectRef>
-          <a:fontRef idx="minor">
-            <a:schemeClr val="lt1"/>
-          </a:fontRef>
-        </p:style>
-        <p:txBody>
-          <a:bodyPr rtlCol="0" anchor="ctr"/>
-          <a:lstStyle/>
-          <a:p>
-            <a:pPr algn="ctr"/>
-            <a:endParaRPr lang="de-DE"/>
-          </a:p>
-        </p:txBody>
-      </p:sp>
-      <p:sp>
-        <p:nvSpPr>
-          <p:cNvPr id="23" name="Rechteck 22">
-            <a:extLst>
-              <a:ext uri="{FF2B5EF4-FFF2-40B4-BE49-F238E27FC236}">
-                <a16:creationId xmlns:a16="http://schemas.microsoft.com/office/drawing/2014/main" id="{28E18734-A6B0-4784-F175-872BFD92F14A}"/>
-              </a:ext>
-            </a:extLst>
-          </p:cNvPr>
-          <p:cNvSpPr/>
-          <p:nvPr/>
-        </p:nvSpPr>
-        <p:spPr>
-          <a:xfrm>
-            <a:off x="3381969" y="4578226"/>
-            <a:ext cx="1102995" cy="287136"/>
-          </a:xfrm>
-          <a:prstGeom prst="rect">
-            <a:avLst/>
-          </a:prstGeom>
-          <a:noFill/>
-          <a:ln>
-            <a:noFill/>
-          </a:ln>
-        </p:spPr>
-        <p:style>
-          <a:lnRef idx="2">
-            <a:schemeClr val="accent1">
-              <a:shade val="50000"/>
-            </a:schemeClr>
-          </a:lnRef>
-          <a:fillRef idx="1">
-            <a:schemeClr val="accent1"/>
-          </a:fillRef>
-          <a:effectRef idx="0">
-            <a:schemeClr val="accent1"/>
-          </a:effectRef>
-          <a:fontRef idx="minor">
-            <a:schemeClr val="lt1"/>
-          </a:fontRef>
-        </p:style>
-        <p:txBody>
-          <a:bodyPr rtlCol="0" anchor="t"/>
-          <a:lstStyle/>
-          <a:p>
-            <a:pPr algn="ctr"/>
-            <a:r>
-              <a:rPr lang="de-DE" sz="1200">
+              <a:t>D1</a:t>
+            </a:r>
+          </a:p>
+          <a:p>
+            <a:pPr algn="ctr"/>
+            <a:r>
+              <a:rPr lang="de-DE" sz="1600">
                 <a:solidFill>
                   <a:srgbClr val="405786"/>
                 </a:solidFill>
               </a:rPr>
-              <a:t>Kodierschema</a:t>
-            </a:r>
-            <a:endParaRPr lang="de-DE" sz="1400">
-              <a:solidFill>
-                <a:srgbClr val="405786"/>
-              </a:solidFill>
-            </a:endParaRPr>
-          </a:p>
-        </p:txBody>
-      </p:sp>
-      <p:sp>
-        <p:nvSpPr>
-          <p:cNvPr id="8" name="Rechteck: abgerundete Ecken 7">
-            <a:extLst>
-              <a:ext uri="{FF2B5EF4-FFF2-40B4-BE49-F238E27FC236}">
-                <a16:creationId xmlns:a16="http://schemas.microsoft.com/office/drawing/2014/main" id="{C650F3AC-0BB7-413D-9A58-24EF66CF2B4F}"/>
-              </a:ext>
-            </a:extLst>
-          </p:cNvPr>
-          <p:cNvSpPr/>
-          <p:nvPr/>
-        </p:nvSpPr>
-        <p:spPr>
-          <a:xfrm>
-            <a:off x="3784333" y="5342179"/>
-            <a:ext cx="1676257" cy="318109"/>
-          </a:xfrm>
-          <a:prstGeom prst="roundRect">
-            <a:avLst/>
-          </a:prstGeom>
-          <a:solidFill>
-            <a:srgbClr val="405786"/>
-          </a:solidFill>
-          <a:ln>
-            <a:noFill/>
-          </a:ln>
-        </p:spPr>
-        <p:style>
-          <a:lnRef idx="2">
-            <a:schemeClr val="accent1">
-              <a:shade val="50000"/>
-            </a:schemeClr>
-          </a:lnRef>
-          <a:fillRef idx="1">
-            <a:schemeClr val="accent1"/>
-          </a:fillRef>
-          <a:effectRef idx="0">
-            <a:schemeClr val="accent1"/>
-          </a:effectRef>
-          <a:fontRef idx="minor">
-            <a:schemeClr val="lt1"/>
-          </a:fontRef>
-        </p:style>
-        <p:txBody>
-          <a:bodyPr rtlCol="0" anchor="ctr"/>
-          <a:lstStyle/>
-          <a:p>
-            <a:pPr algn="ctr"/>
-            <a:r>
-              <a:rPr lang="de-DE" sz="1200"/>
-              <a:t>IQB-KodierBox</a:t>
-            </a:r>
-          </a:p>
-        </p:txBody>
-      </p:sp>
-      <p:sp>
-        <p:nvSpPr>
-          <p:cNvPr id="24" name="Rechteck: abgerundete Ecken 23">
-            <a:extLst>
-              <a:ext uri="{FF2B5EF4-FFF2-40B4-BE49-F238E27FC236}">
-                <a16:creationId xmlns:a16="http://schemas.microsoft.com/office/drawing/2014/main" id="{3773FEF8-5DEB-241E-0E5B-41E0CE987629}"/>
-              </a:ext>
-            </a:extLst>
-          </p:cNvPr>
-          <p:cNvSpPr/>
-          <p:nvPr/>
-        </p:nvSpPr>
-        <p:spPr>
-          <a:xfrm>
-            <a:off x="1627699" y="3228501"/>
-            <a:ext cx="3365128" cy="528923"/>
-          </a:xfrm>
-          <a:prstGeom prst="roundRect">
-            <a:avLst/>
-          </a:prstGeom>
-          <a:solidFill>
-            <a:srgbClr val="405786"/>
-          </a:solidFill>
-          <a:ln>
-            <a:noFill/>
-          </a:ln>
-        </p:spPr>
-        <p:style>
-          <a:lnRef idx="2">
-            <a:schemeClr val="accent1">
-              <a:shade val="50000"/>
-            </a:schemeClr>
-          </a:lnRef>
-          <a:fillRef idx="1">
-            <a:schemeClr val="accent1"/>
-          </a:fillRef>
-          <a:effectRef idx="0">
-            <a:schemeClr val="accent1"/>
-          </a:effectRef>
-          <a:fontRef idx="minor">
-            <a:schemeClr val="lt1"/>
-          </a:fontRef>
-        </p:style>
-        <p:txBody>
-          <a:bodyPr rtlCol="0" anchor="ctr"/>
-          <a:lstStyle/>
-          <a:p>
-            <a:pPr algn="ctr"/>
-            <a:r>
-              <a:rPr lang="de-DE" sz="1600"/>
-              <a:t>IQB-ContentHub</a:t>
-            </a:r>
-          </a:p>
-        </p:txBody>
-      </p:sp>
+              <a:t>D2</a:t>
+            </a:r>
+          </a:p>
+          <a:p>
+            <a:pPr algn="ctr"/>
+            <a:r>
+              <a:rPr lang="de-DE" sz="1600">
+                <a:solidFill>
+                  <a:srgbClr val="405786"/>
+                </a:solidFill>
+              </a:rPr>
+              <a:t>E1</a:t>
+            </a:r>
+          </a:p>
+          <a:p>
+            <a:pPr algn="ctr"/>
+            <a:r>
+              <a:rPr lang="de-DE" sz="1600">
+                <a:solidFill>
+                  <a:srgbClr val="405786"/>
+                </a:solidFill>
+              </a:rPr>
+              <a:t>F1</a:t>
+            </a:r>
+          </a:p>
+          <a:p>
+            <a:pPr algn="ctr"/>
+            <a:r>
+              <a:rPr lang="de-DE" sz="1600">
+                <a:solidFill>
+                  <a:srgbClr val="405786"/>
+                </a:solidFill>
+              </a:rPr>
+              <a:t>G1</a:t>
+            </a:r>
+          </a:p>
+          <a:p>
+            <a:pPr algn="ctr"/>
+            <a:r>
+              <a:rPr lang="de-DE" sz="1600">
+                <a:solidFill>
+                  <a:srgbClr val="405786"/>
+                </a:solidFill>
+              </a:rPr>
+              <a:t>H1</a:t>
+            </a:r>
+          </a:p>
+          <a:p>
+            <a:pPr algn="ctr"/>
+            <a:r>
+              <a:rPr lang="de-DE" sz="1600">
+                <a:solidFill>
+                  <a:srgbClr val="405786"/>
+                </a:solidFill>
+              </a:rPr>
+              <a:t>H2</a:t>
+            </a:r>
+          </a:p>
+        </p:txBody>
+      </p:sp>
+      <p:cxnSp>
+        <p:nvCxnSpPr>
+          <p:cNvPr id="13" name="Gerader Verbinder 12">
+            <a:extLst>
+              <a:ext uri="{FF2B5EF4-FFF2-40B4-BE49-F238E27FC236}">
+                <a16:creationId xmlns:a16="http://schemas.microsoft.com/office/drawing/2014/main" id="{52D2D9AE-8439-4737-8314-DAAC6038DCE5}"/>
+              </a:ext>
+            </a:extLst>
+          </p:cNvPr>
+          <p:cNvCxnSpPr>
+            <a:cxnSpLocks/>
+          </p:cNvCxnSpPr>
+          <p:nvPr/>
+        </p:nvCxnSpPr>
+        <p:spPr>
+          <a:xfrm flipV="1">
+            <a:off x="1811494" y="3033166"/>
+            <a:ext cx="1100092" cy="587793"/>
+          </a:xfrm>
+          <a:prstGeom prst="line">
+            <a:avLst/>
+          </a:prstGeom>
+          <a:ln w="12700">
+            <a:solidFill>
+              <a:srgbClr val="D92FC1"/>
+            </a:solidFill>
+          </a:ln>
+        </p:spPr>
+        <p:style>
+          <a:lnRef idx="1">
+            <a:schemeClr val="accent1"/>
+          </a:lnRef>
+          <a:fillRef idx="0">
+            <a:schemeClr val="accent1"/>
+          </a:fillRef>
+          <a:effectRef idx="0">
+            <a:schemeClr val="accent1"/>
+          </a:effectRef>
+          <a:fontRef idx="minor">
+            <a:schemeClr val="tx1"/>
+          </a:fontRef>
+        </p:style>
+      </p:cxnSp>
+      <p:cxnSp>
+        <p:nvCxnSpPr>
+          <p:cNvPr id="17" name="Gerader Verbinder 16">
+            <a:extLst>
+              <a:ext uri="{FF2B5EF4-FFF2-40B4-BE49-F238E27FC236}">
+                <a16:creationId xmlns:a16="http://schemas.microsoft.com/office/drawing/2014/main" id="{F5B54DDE-64D6-48FC-AA0C-8AC6EC280DB2}"/>
+              </a:ext>
+            </a:extLst>
+          </p:cNvPr>
+          <p:cNvCxnSpPr>
+            <a:cxnSpLocks/>
+          </p:cNvCxnSpPr>
+          <p:nvPr/>
+        </p:nvCxnSpPr>
+        <p:spPr>
+          <a:xfrm flipV="1">
+            <a:off x="1811494" y="3275280"/>
+            <a:ext cx="1100092" cy="338909"/>
+          </a:xfrm>
+          <a:prstGeom prst="line">
+            <a:avLst/>
+          </a:prstGeom>
+          <a:ln w="12700">
+            <a:solidFill>
+              <a:srgbClr val="D92FC1"/>
+            </a:solidFill>
+          </a:ln>
+        </p:spPr>
+        <p:style>
+          <a:lnRef idx="1">
+            <a:schemeClr val="accent1"/>
+          </a:lnRef>
+          <a:fillRef idx="0">
+            <a:schemeClr val="accent1"/>
+          </a:fillRef>
+          <a:effectRef idx="0">
+            <a:schemeClr val="accent1"/>
+          </a:effectRef>
+          <a:fontRef idx="minor">
+            <a:schemeClr val="tx1"/>
+          </a:fontRef>
+        </p:style>
+      </p:cxnSp>
+      <p:cxnSp>
+        <p:nvCxnSpPr>
+          <p:cNvPr id="20" name="Gerader Verbinder 19">
+            <a:extLst>
+              <a:ext uri="{FF2B5EF4-FFF2-40B4-BE49-F238E27FC236}">
+                <a16:creationId xmlns:a16="http://schemas.microsoft.com/office/drawing/2014/main" id="{7676A310-B9D1-4130-8172-6409612596A7}"/>
+              </a:ext>
+            </a:extLst>
+          </p:cNvPr>
+          <p:cNvCxnSpPr>
+            <a:cxnSpLocks/>
+          </p:cNvCxnSpPr>
+          <p:nvPr/>
+        </p:nvCxnSpPr>
+        <p:spPr>
+          <a:xfrm flipV="1">
+            <a:off x="1805940" y="3521922"/>
+            <a:ext cx="1105646" cy="342053"/>
+          </a:xfrm>
+          <a:prstGeom prst="line">
+            <a:avLst/>
+          </a:prstGeom>
+          <a:ln w="12700">
+            <a:solidFill>
+              <a:srgbClr val="D92FC1"/>
+            </a:solidFill>
+          </a:ln>
+        </p:spPr>
+        <p:style>
+          <a:lnRef idx="1">
+            <a:schemeClr val="accent1"/>
+          </a:lnRef>
+          <a:fillRef idx="0">
+            <a:schemeClr val="accent1"/>
+          </a:fillRef>
+          <a:effectRef idx="0">
+            <a:schemeClr val="accent1"/>
+          </a:effectRef>
+          <a:fontRef idx="minor">
+            <a:schemeClr val="tx1"/>
+          </a:fontRef>
+        </p:style>
+      </p:cxnSp>
+      <p:cxnSp>
+        <p:nvCxnSpPr>
+          <p:cNvPr id="23" name="Gerader Verbinder 22">
+            <a:extLst>
+              <a:ext uri="{FF2B5EF4-FFF2-40B4-BE49-F238E27FC236}">
+                <a16:creationId xmlns:a16="http://schemas.microsoft.com/office/drawing/2014/main" id="{0D4501E8-A547-407F-A316-96E18564B4D9}"/>
+              </a:ext>
+            </a:extLst>
+          </p:cNvPr>
+          <p:cNvCxnSpPr>
+            <a:cxnSpLocks/>
+          </p:cNvCxnSpPr>
+          <p:nvPr/>
+        </p:nvCxnSpPr>
+        <p:spPr>
+          <a:xfrm flipV="1">
+            <a:off x="1811494" y="4737606"/>
+            <a:ext cx="1100092" cy="512486"/>
+          </a:xfrm>
+          <a:prstGeom prst="line">
+            <a:avLst/>
+          </a:prstGeom>
+          <a:ln w="12700">
+            <a:solidFill>
+              <a:srgbClr val="D92FC1"/>
+            </a:solidFill>
+          </a:ln>
+        </p:spPr>
+        <p:style>
+          <a:lnRef idx="1">
+            <a:schemeClr val="accent1"/>
+          </a:lnRef>
+          <a:fillRef idx="0">
+            <a:schemeClr val="accent1"/>
+          </a:fillRef>
+          <a:effectRef idx="0">
+            <a:schemeClr val="accent1"/>
+          </a:effectRef>
+          <a:fontRef idx="minor">
+            <a:schemeClr val="tx1"/>
+          </a:fontRef>
+        </p:style>
+      </p:cxnSp>
+      <p:cxnSp>
+        <p:nvCxnSpPr>
+          <p:cNvPr id="26" name="Gerader Verbinder 25">
+            <a:extLst>
+              <a:ext uri="{FF2B5EF4-FFF2-40B4-BE49-F238E27FC236}">
+                <a16:creationId xmlns:a16="http://schemas.microsoft.com/office/drawing/2014/main" id="{9907D990-9745-423D-A714-FC6614CA62B2}"/>
+              </a:ext>
+            </a:extLst>
+          </p:cNvPr>
+          <p:cNvCxnSpPr>
+            <a:cxnSpLocks/>
+          </p:cNvCxnSpPr>
+          <p:nvPr/>
+        </p:nvCxnSpPr>
+        <p:spPr>
+          <a:xfrm flipV="1">
+            <a:off x="1801099" y="3761391"/>
+            <a:ext cx="1110487" cy="102585"/>
+          </a:xfrm>
+          <a:prstGeom prst="line">
+            <a:avLst/>
+          </a:prstGeom>
+          <a:ln w="12700">
+            <a:solidFill>
+              <a:srgbClr val="D92FC1"/>
+            </a:solidFill>
+          </a:ln>
+        </p:spPr>
+        <p:style>
+          <a:lnRef idx="1">
+            <a:schemeClr val="accent1"/>
+          </a:lnRef>
+          <a:fillRef idx="0">
+            <a:schemeClr val="accent1"/>
+          </a:fillRef>
+          <a:effectRef idx="0">
+            <a:schemeClr val="accent1"/>
+          </a:effectRef>
+          <a:fontRef idx="minor">
+            <a:schemeClr val="tx1"/>
+          </a:fontRef>
+        </p:style>
+      </p:cxnSp>
+      <p:cxnSp>
+        <p:nvCxnSpPr>
+          <p:cNvPr id="29" name="Gerader Verbinder 28">
+            <a:extLst>
+              <a:ext uri="{FF2B5EF4-FFF2-40B4-BE49-F238E27FC236}">
+                <a16:creationId xmlns:a16="http://schemas.microsoft.com/office/drawing/2014/main" id="{6B1B72B2-BD02-4589-B507-6AFC98E233DB}"/>
+              </a:ext>
+            </a:extLst>
+          </p:cNvPr>
+          <p:cNvCxnSpPr>
+            <a:cxnSpLocks/>
+          </p:cNvCxnSpPr>
+          <p:nvPr/>
+        </p:nvCxnSpPr>
+        <p:spPr>
+          <a:xfrm flipV="1">
+            <a:off x="1811494" y="4006719"/>
+            <a:ext cx="1100092" cy="90022"/>
+          </a:xfrm>
+          <a:prstGeom prst="line">
+            <a:avLst/>
+          </a:prstGeom>
+          <a:ln w="12700">
+            <a:solidFill>
+              <a:srgbClr val="D92FC1"/>
+            </a:solidFill>
+          </a:ln>
+        </p:spPr>
+        <p:style>
+          <a:lnRef idx="1">
+            <a:schemeClr val="accent1"/>
+          </a:lnRef>
+          <a:fillRef idx="0">
+            <a:schemeClr val="accent1"/>
+          </a:fillRef>
+          <a:effectRef idx="0">
+            <a:schemeClr val="accent1"/>
+          </a:effectRef>
+          <a:fontRef idx="minor">
+            <a:schemeClr val="tx1"/>
+          </a:fontRef>
+        </p:style>
+      </p:cxnSp>
+      <p:cxnSp>
+        <p:nvCxnSpPr>
+          <p:cNvPr id="32" name="Gerader Verbinder 31">
+            <a:extLst>
+              <a:ext uri="{FF2B5EF4-FFF2-40B4-BE49-F238E27FC236}">
+                <a16:creationId xmlns:a16="http://schemas.microsoft.com/office/drawing/2014/main" id="{BA077487-7D9A-4C38-B805-7E31F859DFC9}"/>
+              </a:ext>
+            </a:extLst>
+          </p:cNvPr>
+          <p:cNvCxnSpPr>
+            <a:cxnSpLocks/>
+          </p:cNvCxnSpPr>
+          <p:nvPr/>
+        </p:nvCxnSpPr>
+        <p:spPr>
+          <a:xfrm flipV="1">
+            <a:off x="1801099" y="4239484"/>
+            <a:ext cx="1110487" cy="762576"/>
+          </a:xfrm>
+          <a:prstGeom prst="line">
+            <a:avLst/>
+          </a:prstGeom>
+          <a:ln w="12700">
+            <a:solidFill>
+              <a:srgbClr val="D92FC1"/>
+            </a:solidFill>
+          </a:ln>
+        </p:spPr>
+        <p:style>
+          <a:lnRef idx="1">
+            <a:schemeClr val="accent1"/>
+          </a:lnRef>
+          <a:fillRef idx="0">
+            <a:schemeClr val="accent1"/>
+          </a:fillRef>
+          <a:effectRef idx="0">
+            <a:schemeClr val="accent1"/>
+          </a:effectRef>
+          <a:fontRef idx="minor">
+            <a:schemeClr val="tx1"/>
+          </a:fontRef>
+        </p:style>
+      </p:cxnSp>
+      <p:cxnSp>
+        <p:nvCxnSpPr>
+          <p:cNvPr id="34" name="Gerader Verbinder 33">
+            <a:extLst>
+              <a:ext uri="{FF2B5EF4-FFF2-40B4-BE49-F238E27FC236}">
+                <a16:creationId xmlns:a16="http://schemas.microsoft.com/office/drawing/2014/main" id="{9EB0279D-8E8D-4988-8297-D998AA874313}"/>
+              </a:ext>
+            </a:extLst>
+          </p:cNvPr>
+          <p:cNvCxnSpPr>
+            <a:cxnSpLocks/>
+          </p:cNvCxnSpPr>
+          <p:nvPr/>
+        </p:nvCxnSpPr>
+        <p:spPr>
+          <a:xfrm flipV="1">
+            <a:off x="1796539" y="4504335"/>
+            <a:ext cx="1115047" cy="497725"/>
+          </a:xfrm>
+          <a:prstGeom prst="line">
+            <a:avLst/>
+          </a:prstGeom>
+          <a:ln w="12700">
+            <a:solidFill>
+              <a:srgbClr val="D92FC1"/>
+            </a:solidFill>
+          </a:ln>
+        </p:spPr>
+        <p:style>
+          <a:lnRef idx="1">
+            <a:schemeClr val="accent1"/>
+          </a:lnRef>
+          <a:fillRef idx="0">
+            <a:schemeClr val="accent1"/>
+          </a:fillRef>
+          <a:effectRef idx="0">
+            <a:schemeClr val="accent1"/>
+          </a:effectRef>
+          <a:fontRef idx="minor">
+            <a:schemeClr val="tx1"/>
+          </a:fontRef>
+        </p:style>
+      </p:cxnSp>
+      <p:cxnSp>
+        <p:nvCxnSpPr>
+          <p:cNvPr id="37" name="Gerader Verbinder 36">
+            <a:extLst>
+              <a:ext uri="{FF2B5EF4-FFF2-40B4-BE49-F238E27FC236}">
+                <a16:creationId xmlns:a16="http://schemas.microsoft.com/office/drawing/2014/main" id="{0B108F28-E346-409E-819D-E7C8BC5163B2}"/>
+              </a:ext>
+            </a:extLst>
+          </p:cNvPr>
+          <p:cNvCxnSpPr>
+            <a:cxnSpLocks/>
+          </p:cNvCxnSpPr>
+          <p:nvPr/>
+        </p:nvCxnSpPr>
+        <p:spPr>
+          <a:xfrm flipV="1">
+            <a:off x="1805940" y="4987579"/>
+            <a:ext cx="1101087" cy="467391"/>
+          </a:xfrm>
+          <a:prstGeom prst="line">
+            <a:avLst/>
+          </a:prstGeom>
+          <a:ln w="12700">
+            <a:solidFill>
+              <a:srgbClr val="D92FC1"/>
+            </a:solidFill>
+          </a:ln>
+        </p:spPr>
+        <p:style>
+          <a:lnRef idx="1">
+            <a:schemeClr val="accent1"/>
+          </a:lnRef>
+          <a:fillRef idx="0">
+            <a:schemeClr val="accent1"/>
+          </a:fillRef>
+          <a:effectRef idx="0">
+            <a:schemeClr val="accent1"/>
+          </a:effectRef>
+          <a:fontRef idx="minor">
+            <a:schemeClr val="tx1"/>
+          </a:fontRef>
+        </p:style>
+      </p:cxnSp>
+      <p:cxnSp>
+        <p:nvCxnSpPr>
+          <p:cNvPr id="39" name="Gerader Verbinder 38">
+            <a:extLst>
+              <a:ext uri="{FF2B5EF4-FFF2-40B4-BE49-F238E27FC236}">
+                <a16:creationId xmlns:a16="http://schemas.microsoft.com/office/drawing/2014/main" id="{BE68EBDF-3F0E-4840-B20F-8D94C18DFF61}"/>
+              </a:ext>
+            </a:extLst>
+          </p:cNvPr>
+          <p:cNvCxnSpPr>
+            <a:cxnSpLocks/>
+          </p:cNvCxnSpPr>
+          <p:nvPr/>
+        </p:nvCxnSpPr>
+        <p:spPr>
+          <a:xfrm flipH="1" flipV="1">
+            <a:off x="3298090" y="3023530"/>
+            <a:ext cx="1181082" cy="588963"/>
+          </a:xfrm>
+          <a:prstGeom prst="line">
+            <a:avLst/>
+          </a:prstGeom>
+          <a:ln w="12700">
+            <a:solidFill>
+              <a:srgbClr val="D92FC1"/>
+            </a:solidFill>
+          </a:ln>
+        </p:spPr>
+        <p:style>
+          <a:lnRef idx="1">
+            <a:schemeClr val="accent1"/>
+          </a:lnRef>
+          <a:fillRef idx="0">
+            <a:schemeClr val="accent1"/>
+          </a:fillRef>
+          <a:effectRef idx="0">
+            <a:schemeClr val="accent1"/>
+          </a:effectRef>
+          <a:fontRef idx="minor">
+            <a:schemeClr val="tx1"/>
+          </a:fontRef>
+        </p:style>
+      </p:cxnSp>
+      <p:cxnSp>
+        <p:nvCxnSpPr>
+          <p:cNvPr id="42" name="Gerader Verbinder 41">
+            <a:extLst>
+              <a:ext uri="{FF2B5EF4-FFF2-40B4-BE49-F238E27FC236}">
+                <a16:creationId xmlns:a16="http://schemas.microsoft.com/office/drawing/2014/main" id="{1F2EB59A-7A07-4FB7-9F1C-C614E926D90A}"/>
+              </a:ext>
+            </a:extLst>
+          </p:cNvPr>
+          <p:cNvCxnSpPr>
+            <a:cxnSpLocks/>
+          </p:cNvCxnSpPr>
+          <p:nvPr/>
+        </p:nvCxnSpPr>
+        <p:spPr>
+          <a:xfrm flipH="1" flipV="1">
+            <a:off x="3298092" y="3267668"/>
+            <a:ext cx="1181080" cy="346521"/>
+          </a:xfrm>
+          <a:prstGeom prst="line">
+            <a:avLst/>
+          </a:prstGeom>
+          <a:ln w="12700">
+            <a:solidFill>
+              <a:srgbClr val="D92FC1"/>
+            </a:solidFill>
+          </a:ln>
+        </p:spPr>
+        <p:style>
+          <a:lnRef idx="1">
+            <a:schemeClr val="accent1"/>
+          </a:lnRef>
+          <a:fillRef idx="0">
+            <a:schemeClr val="accent1"/>
+          </a:fillRef>
+          <a:effectRef idx="0">
+            <a:schemeClr val="accent1"/>
+          </a:effectRef>
+          <a:fontRef idx="minor">
+            <a:schemeClr val="tx1"/>
+          </a:fontRef>
+        </p:style>
+      </p:cxnSp>
+      <p:cxnSp>
+        <p:nvCxnSpPr>
+          <p:cNvPr id="45" name="Gerader Verbinder 44">
+            <a:extLst>
+              <a:ext uri="{FF2B5EF4-FFF2-40B4-BE49-F238E27FC236}">
+                <a16:creationId xmlns:a16="http://schemas.microsoft.com/office/drawing/2014/main" id="{FC95D828-90F6-4E54-BCA9-CC499045CA14}"/>
+              </a:ext>
+            </a:extLst>
+          </p:cNvPr>
+          <p:cNvCxnSpPr>
+            <a:cxnSpLocks/>
+          </p:cNvCxnSpPr>
+          <p:nvPr/>
+        </p:nvCxnSpPr>
+        <p:spPr>
+          <a:xfrm flipH="1" flipV="1">
+            <a:off x="3302653" y="3755071"/>
+            <a:ext cx="1167965" cy="114388"/>
+          </a:xfrm>
+          <a:prstGeom prst="line">
+            <a:avLst/>
+          </a:prstGeom>
+          <a:ln w="12700">
+            <a:solidFill>
+              <a:srgbClr val="D92FC1"/>
+            </a:solidFill>
+          </a:ln>
+        </p:spPr>
+        <p:style>
+          <a:lnRef idx="1">
+            <a:schemeClr val="accent1"/>
+          </a:lnRef>
+          <a:fillRef idx="0">
+            <a:schemeClr val="accent1"/>
+          </a:fillRef>
+          <a:effectRef idx="0">
+            <a:schemeClr val="accent1"/>
+          </a:effectRef>
+          <a:fontRef idx="minor">
+            <a:schemeClr val="tx1"/>
+          </a:fontRef>
+        </p:style>
+      </p:cxnSp>
+      <p:cxnSp>
+        <p:nvCxnSpPr>
+          <p:cNvPr id="47" name="Gerader Verbinder 46">
+            <a:extLst>
+              <a:ext uri="{FF2B5EF4-FFF2-40B4-BE49-F238E27FC236}">
+                <a16:creationId xmlns:a16="http://schemas.microsoft.com/office/drawing/2014/main" id="{3C522A01-8017-4B74-8A83-E902ABB1745B}"/>
+              </a:ext>
+            </a:extLst>
+          </p:cNvPr>
+          <p:cNvCxnSpPr>
+            <a:cxnSpLocks/>
+          </p:cNvCxnSpPr>
+          <p:nvPr/>
+        </p:nvCxnSpPr>
+        <p:spPr>
+          <a:xfrm flipH="1" flipV="1">
+            <a:off x="3302653" y="4234786"/>
+            <a:ext cx="1167965" cy="767274"/>
+          </a:xfrm>
+          <a:prstGeom prst="line">
+            <a:avLst/>
+          </a:prstGeom>
+          <a:ln w="12700">
+            <a:solidFill>
+              <a:srgbClr val="D92FC1"/>
+            </a:solidFill>
+          </a:ln>
+        </p:spPr>
+        <p:style>
+          <a:lnRef idx="1">
+            <a:schemeClr val="accent1"/>
+          </a:lnRef>
+          <a:fillRef idx="0">
+            <a:schemeClr val="accent1"/>
+          </a:fillRef>
+          <a:effectRef idx="0">
+            <a:schemeClr val="accent1"/>
+          </a:effectRef>
+          <a:fontRef idx="minor">
+            <a:schemeClr val="tx1"/>
+          </a:fontRef>
+        </p:style>
+      </p:cxnSp>
+      <p:cxnSp>
+        <p:nvCxnSpPr>
+          <p:cNvPr id="50" name="Gerader Verbinder 49">
+            <a:extLst>
+              <a:ext uri="{FF2B5EF4-FFF2-40B4-BE49-F238E27FC236}">
+                <a16:creationId xmlns:a16="http://schemas.microsoft.com/office/drawing/2014/main" id="{672C0FD4-B873-4F4F-9B16-CC59CB990DCC}"/>
+              </a:ext>
+            </a:extLst>
+          </p:cNvPr>
+          <p:cNvCxnSpPr>
+            <a:cxnSpLocks/>
+          </p:cNvCxnSpPr>
+          <p:nvPr/>
+        </p:nvCxnSpPr>
+        <p:spPr>
+          <a:xfrm flipH="1" flipV="1">
+            <a:off x="3298091" y="3509842"/>
+            <a:ext cx="1172527" cy="367900"/>
+          </a:xfrm>
+          <a:prstGeom prst="line">
+            <a:avLst/>
+          </a:prstGeom>
+          <a:ln w="12700">
+            <a:solidFill>
+              <a:srgbClr val="D92FC1"/>
+            </a:solidFill>
+          </a:ln>
+        </p:spPr>
+        <p:style>
+          <a:lnRef idx="1">
+            <a:schemeClr val="accent1"/>
+          </a:lnRef>
+          <a:fillRef idx="0">
+            <a:schemeClr val="accent1"/>
+          </a:fillRef>
+          <a:effectRef idx="0">
+            <a:schemeClr val="accent1"/>
+          </a:effectRef>
+          <a:fontRef idx="minor">
+            <a:schemeClr val="tx1"/>
+          </a:fontRef>
+        </p:style>
+      </p:cxnSp>
+      <p:cxnSp>
+        <p:nvCxnSpPr>
+          <p:cNvPr id="53" name="Gerader Verbinder 52">
+            <a:extLst>
+              <a:ext uri="{FF2B5EF4-FFF2-40B4-BE49-F238E27FC236}">
+                <a16:creationId xmlns:a16="http://schemas.microsoft.com/office/drawing/2014/main" id="{A4A6EA9C-3E5E-4A85-A57C-DDFF20B2DE1B}"/>
+              </a:ext>
+            </a:extLst>
+          </p:cNvPr>
+          <p:cNvCxnSpPr>
+            <a:cxnSpLocks/>
+          </p:cNvCxnSpPr>
+          <p:nvPr/>
+        </p:nvCxnSpPr>
+        <p:spPr>
+          <a:xfrm flipH="1" flipV="1">
+            <a:off x="3302652" y="3996155"/>
+            <a:ext cx="1176520" cy="100586"/>
+          </a:xfrm>
+          <a:prstGeom prst="line">
+            <a:avLst/>
+          </a:prstGeom>
+          <a:ln w="12700">
+            <a:solidFill>
+              <a:srgbClr val="D92FC1"/>
+            </a:solidFill>
+          </a:ln>
+        </p:spPr>
+        <p:style>
+          <a:lnRef idx="1">
+            <a:schemeClr val="accent1"/>
+          </a:lnRef>
+          <a:fillRef idx="0">
+            <a:schemeClr val="accent1"/>
+          </a:fillRef>
+          <a:effectRef idx="0">
+            <a:schemeClr val="accent1"/>
+          </a:effectRef>
+          <a:fontRef idx="minor">
+            <a:schemeClr val="tx1"/>
+          </a:fontRef>
+        </p:style>
+      </p:cxnSp>
+      <p:cxnSp>
+        <p:nvCxnSpPr>
+          <p:cNvPr id="56" name="Gerader Verbinder 55">
+            <a:extLst>
+              <a:ext uri="{FF2B5EF4-FFF2-40B4-BE49-F238E27FC236}">
+                <a16:creationId xmlns:a16="http://schemas.microsoft.com/office/drawing/2014/main" id="{11BB2140-0D68-4A55-BEC3-FBBDC76B3FC0}"/>
+              </a:ext>
+            </a:extLst>
+          </p:cNvPr>
+          <p:cNvCxnSpPr>
+            <a:cxnSpLocks/>
+          </p:cNvCxnSpPr>
+          <p:nvPr/>
+        </p:nvCxnSpPr>
+        <p:spPr>
+          <a:xfrm flipH="1" flipV="1">
+            <a:off x="3298090" y="5215758"/>
+            <a:ext cx="1213585" cy="22957"/>
+          </a:xfrm>
+          <a:prstGeom prst="line">
+            <a:avLst/>
+          </a:prstGeom>
+          <a:ln w="12700">
+            <a:solidFill>
+              <a:srgbClr val="D92FC1"/>
+            </a:solidFill>
+          </a:ln>
+        </p:spPr>
+        <p:style>
+          <a:lnRef idx="1">
+            <a:schemeClr val="accent1"/>
+          </a:lnRef>
+          <a:fillRef idx="0">
+            <a:schemeClr val="accent1"/>
+          </a:fillRef>
+          <a:effectRef idx="0">
+            <a:schemeClr val="accent1"/>
+          </a:effectRef>
+          <a:fontRef idx="minor">
+            <a:schemeClr val="tx1"/>
+          </a:fontRef>
+        </p:style>
+      </p:cxnSp>
+      <p:cxnSp>
+        <p:nvCxnSpPr>
+          <p:cNvPr id="58" name="Gerader Verbinder 57">
+            <a:extLst>
+              <a:ext uri="{FF2B5EF4-FFF2-40B4-BE49-F238E27FC236}">
+                <a16:creationId xmlns:a16="http://schemas.microsoft.com/office/drawing/2014/main" id="{F0D5928D-7D1B-4A45-8188-41A8AAB2DBEA}"/>
+              </a:ext>
+            </a:extLst>
+          </p:cNvPr>
+          <p:cNvCxnSpPr>
+            <a:cxnSpLocks/>
+          </p:cNvCxnSpPr>
+          <p:nvPr/>
+        </p:nvCxnSpPr>
+        <p:spPr>
+          <a:xfrm flipH="1" flipV="1">
+            <a:off x="3302652" y="5450709"/>
+            <a:ext cx="1209024" cy="65536"/>
+          </a:xfrm>
+          <a:prstGeom prst="line">
+            <a:avLst/>
+          </a:prstGeom>
+          <a:ln w="12700">
+            <a:solidFill>
+              <a:srgbClr val="D92FC1"/>
+            </a:solidFill>
+          </a:ln>
+        </p:spPr>
+        <p:style>
+          <a:lnRef idx="1">
+            <a:schemeClr val="accent1"/>
+          </a:lnRef>
+          <a:fillRef idx="0">
+            <a:schemeClr val="accent1"/>
+          </a:fillRef>
+          <a:effectRef idx="0">
+            <a:schemeClr val="accent1"/>
+          </a:effectRef>
+          <a:fontRef idx="minor">
+            <a:schemeClr val="tx1"/>
+          </a:fontRef>
+        </p:style>
+      </p:cxnSp>
+      <p:cxnSp>
+        <p:nvCxnSpPr>
+          <p:cNvPr id="61" name="Gerader Verbinder 60">
+            <a:extLst>
+              <a:ext uri="{FF2B5EF4-FFF2-40B4-BE49-F238E27FC236}">
+                <a16:creationId xmlns:a16="http://schemas.microsoft.com/office/drawing/2014/main" id="{EE0F9FB7-847B-4C98-BB72-02A2DA9F1407}"/>
+              </a:ext>
+            </a:extLst>
+          </p:cNvPr>
+          <p:cNvCxnSpPr>
+            <a:cxnSpLocks/>
+          </p:cNvCxnSpPr>
+          <p:nvPr/>
+        </p:nvCxnSpPr>
+        <p:spPr>
+          <a:xfrm flipH="1">
+            <a:off x="3302652" y="5510690"/>
+            <a:ext cx="1209023" cy="176567"/>
+          </a:xfrm>
+          <a:prstGeom prst="line">
+            <a:avLst/>
+          </a:prstGeom>
+          <a:ln w="12700">
+            <a:solidFill>
+              <a:srgbClr val="D92FC1"/>
+            </a:solidFill>
+          </a:ln>
+        </p:spPr>
+        <p:style>
+          <a:lnRef idx="1">
+            <a:schemeClr val="accent1"/>
+          </a:lnRef>
+          <a:fillRef idx="0">
+            <a:schemeClr val="accent1"/>
+          </a:fillRef>
+          <a:effectRef idx="0">
+            <a:schemeClr val="accent1"/>
+          </a:effectRef>
+          <a:fontRef idx="minor">
+            <a:schemeClr val="tx1"/>
+          </a:fontRef>
+        </p:style>
+      </p:cxnSp>
+      <p:cxnSp>
+        <p:nvCxnSpPr>
+          <p:cNvPr id="79" name="Gerader Verbinder 78">
+            <a:extLst>
+              <a:ext uri="{FF2B5EF4-FFF2-40B4-BE49-F238E27FC236}">
+                <a16:creationId xmlns:a16="http://schemas.microsoft.com/office/drawing/2014/main" id="{59B7043D-7BF0-413E-AA4E-1BB4DAD71BE6}"/>
+              </a:ext>
+            </a:extLst>
+          </p:cNvPr>
+          <p:cNvCxnSpPr>
+            <a:cxnSpLocks/>
+          </p:cNvCxnSpPr>
+          <p:nvPr/>
+        </p:nvCxnSpPr>
+        <p:spPr>
+          <a:xfrm flipH="1" flipV="1">
+            <a:off x="3302653" y="4503550"/>
+            <a:ext cx="1176519" cy="498510"/>
+          </a:xfrm>
+          <a:prstGeom prst="line">
+            <a:avLst/>
+          </a:prstGeom>
+          <a:ln w="12700">
+            <a:solidFill>
+              <a:srgbClr val="D92FC1"/>
+            </a:solidFill>
+          </a:ln>
+        </p:spPr>
+        <p:style>
+          <a:lnRef idx="1">
+            <a:schemeClr val="accent1"/>
+          </a:lnRef>
+          <a:fillRef idx="0">
+            <a:schemeClr val="accent1"/>
+          </a:fillRef>
+          <a:effectRef idx="0">
+            <a:schemeClr val="accent1"/>
+          </a:effectRef>
+          <a:fontRef idx="minor">
+            <a:schemeClr val="tx1"/>
+          </a:fontRef>
+        </p:style>
+      </p:cxnSp>
     </p:spTree>
     <p:extLst>
       <p:ext uri="{BB962C8B-B14F-4D97-AF65-F5344CB8AC3E}">
-        <p14:creationId xmlns:p14="http://schemas.microsoft.com/office/powerpoint/2010/main" val="3370356040"/>
+        <p14:creationId xmlns:p14="http://schemas.microsoft.com/office/powerpoint/2010/main" val="3091731184"/>
       </p:ext>
     </p:extLst>
   </p:cSld>

--- a/assets/figures.pptx
+++ b/assets/figures.pptx
@@ -253,7 +253,7 @@
           <a:p>
             <a:fld id="{C07B6569-5EFF-41A8-B6CB-39864A9A9501}" type="datetimeFigureOut">
               <a:rPr lang="de-DE" smtClean="0"/>
-              <a:t>26.09.2026</a:t>
+              <a:t>27.09.2026</a:t>
             </a:fld>
             <a:endParaRPr lang="de-DE"/>
           </a:p>
@@ -423,7 +423,7 @@
           <a:p>
             <a:fld id="{C07B6569-5EFF-41A8-B6CB-39864A9A9501}" type="datetimeFigureOut">
               <a:rPr lang="de-DE" smtClean="0"/>
-              <a:t>26.09.2026</a:t>
+              <a:t>27.09.2026</a:t>
             </a:fld>
             <a:endParaRPr lang="de-DE"/>
           </a:p>
@@ -603,7 +603,7 @@
           <a:p>
             <a:fld id="{C07B6569-5EFF-41A8-B6CB-39864A9A9501}" type="datetimeFigureOut">
               <a:rPr lang="de-DE" smtClean="0"/>
-              <a:t>26.09.2026</a:t>
+              <a:t>27.09.2026</a:t>
             </a:fld>
             <a:endParaRPr lang="de-DE"/>
           </a:p>
@@ -850,7 +850,7 @@
           <a:p>
             <a:fld id="{C07B6569-5EFF-41A8-B6CB-39864A9A9501}" type="datetimeFigureOut">
               <a:rPr lang="de-DE" smtClean="0"/>
-              <a:t>26.09.2026</a:t>
+              <a:t>27.09.2026</a:t>
             </a:fld>
             <a:endParaRPr lang="de-DE"/>
           </a:p>
@@ -1094,7 +1094,7 @@
           <a:p>
             <a:fld id="{C07B6569-5EFF-41A8-B6CB-39864A9A9501}" type="datetimeFigureOut">
               <a:rPr lang="de-DE" smtClean="0"/>
-              <a:t>26.09.2026</a:t>
+              <a:t>27.09.2026</a:t>
             </a:fld>
             <a:endParaRPr lang="de-DE"/>
           </a:p>
@@ -1326,7 +1326,7 @@
           <a:p>
             <a:fld id="{C07B6569-5EFF-41A8-B6CB-39864A9A9501}" type="datetimeFigureOut">
               <a:rPr lang="de-DE" smtClean="0"/>
-              <a:t>26.09.2026</a:t>
+              <a:t>27.09.2026</a:t>
             </a:fld>
             <a:endParaRPr lang="de-DE"/>
           </a:p>
@@ -1693,7 +1693,7 @@
           <a:p>
             <a:fld id="{C07B6569-5EFF-41A8-B6CB-39864A9A9501}" type="datetimeFigureOut">
               <a:rPr lang="de-DE" smtClean="0"/>
-              <a:t>26.09.2026</a:t>
+              <a:t>27.09.2026</a:t>
             </a:fld>
             <a:endParaRPr lang="de-DE"/>
           </a:p>
@@ -1811,7 +1811,7 @@
           <a:p>
             <a:fld id="{C07B6569-5EFF-41A8-B6CB-39864A9A9501}" type="datetimeFigureOut">
               <a:rPr lang="de-DE" smtClean="0"/>
-              <a:t>26.09.2026</a:t>
+              <a:t>27.09.2026</a:t>
             </a:fld>
             <a:endParaRPr lang="de-DE"/>
           </a:p>
@@ -1906,7 +1906,7 @@
           <a:p>
             <a:fld id="{C07B6569-5EFF-41A8-B6CB-39864A9A9501}" type="datetimeFigureOut">
               <a:rPr lang="de-DE" smtClean="0"/>
-              <a:t>26.09.2026</a:t>
+              <a:t>27.09.2026</a:t>
             </a:fld>
             <a:endParaRPr lang="de-DE"/>
           </a:p>
@@ -2183,7 +2183,7 @@
           <a:p>
             <a:fld id="{C07B6569-5EFF-41A8-B6CB-39864A9A9501}" type="datetimeFigureOut">
               <a:rPr lang="de-DE" smtClean="0"/>
-              <a:t>26.09.2026</a:t>
+              <a:t>27.09.2026</a:t>
             </a:fld>
             <a:endParaRPr lang="de-DE"/>
           </a:p>
@@ -2440,7 +2440,7 @@
           <a:p>
             <a:fld id="{C07B6569-5EFF-41A8-B6CB-39864A9A9501}" type="datetimeFigureOut">
               <a:rPr lang="de-DE" smtClean="0"/>
-              <a:t>26.09.2026</a:t>
+              <a:t>27.09.2026</a:t>
             </a:fld>
             <a:endParaRPr lang="de-DE"/>
           </a:p>
@@ -2653,7 +2653,7 @@
           <a:p>
             <a:fld id="{C07B6569-5EFF-41A8-B6CB-39864A9A9501}" type="datetimeFigureOut">
               <a:rPr lang="de-DE" smtClean="0"/>
-              <a:t>26.09.2026</a:t>
+              <a:t>27.09.2026</a:t>
             </a:fld>
             <a:endParaRPr lang="de-DE"/>
           </a:p>
@@ -11488,8 +11488,8 @@
         </p:nvSpPr>
         <p:spPr>
           <a:xfrm>
-            <a:off x="1537998" y="3572600"/>
-            <a:ext cx="1223762" cy="424133"/>
+            <a:off x="1462043" y="3572600"/>
+            <a:ext cx="1299717" cy="424133"/>
           </a:xfrm>
           <a:prstGeom prst="homePlate">
             <a:avLst/>
@@ -11534,6 +11534,164 @@
               <a:t>Item-Liste</a:t>
             </a:r>
           </a:p>
+        </p:txBody>
+      </p:sp>
+      <p:sp>
+        <p:nvSpPr>
+          <p:cNvPr id="45" name="Rechteck: abgerundete Ecken 44">
+            <a:extLst>
+              <a:ext uri="{FF2B5EF4-FFF2-40B4-BE49-F238E27FC236}">
+                <a16:creationId xmlns:a16="http://schemas.microsoft.com/office/drawing/2014/main" id="{123DEF27-8C5E-4BD9-8566-7C089C43D140}"/>
+              </a:ext>
+            </a:extLst>
+          </p:cNvPr>
+          <p:cNvSpPr/>
+          <p:nvPr/>
+        </p:nvSpPr>
+        <p:spPr>
+          <a:xfrm>
+            <a:off x="2782421" y="4654787"/>
+            <a:ext cx="1575297" cy="848266"/>
+          </a:xfrm>
+          <a:prstGeom prst="roundRect">
+            <a:avLst/>
+          </a:prstGeom>
+          <a:solidFill>
+            <a:srgbClr val="405786"/>
+          </a:solidFill>
+          <a:ln>
+            <a:noFill/>
+          </a:ln>
+        </p:spPr>
+        <p:style>
+          <a:lnRef idx="2">
+            <a:schemeClr val="accent1">
+              <a:shade val="50000"/>
+            </a:schemeClr>
+          </a:lnRef>
+          <a:fillRef idx="1">
+            <a:schemeClr val="accent1"/>
+          </a:fillRef>
+          <a:effectRef idx="0">
+            <a:schemeClr val="accent1"/>
+          </a:effectRef>
+          <a:fontRef idx="minor">
+            <a:schemeClr val="lt1"/>
+          </a:fontRef>
+        </p:style>
+        <p:txBody>
+          <a:bodyPr rtlCol="0" anchor="ctr"/>
+          <a:lstStyle/>
+          <a:p>
+            <a:pPr algn="ctr"/>
+            <a:r>
+              <a:rPr lang="de-DE" sz="1200"/>
+              <a:t>Skalierung</a:t>
+            </a:r>
+          </a:p>
+        </p:txBody>
+      </p:sp>
+      <p:sp>
+        <p:nvSpPr>
+          <p:cNvPr id="46" name="Flussdiagramm: Verbinder zu einer anderen Seite 45">
+            <a:extLst>
+              <a:ext uri="{FF2B5EF4-FFF2-40B4-BE49-F238E27FC236}">
+                <a16:creationId xmlns:a16="http://schemas.microsoft.com/office/drawing/2014/main" id="{ACAFB794-65DC-47D5-9F93-BA7CB2D3CD86}"/>
+              </a:ext>
+            </a:extLst>
+          </p:cNvPr>
+          <p:cNvSpPr/>
+          <p:nvPr/>
+        </p:nvSpPr>
+        <p:spPr>
+          <a:xfrm>
+            <a:off x="3124935" y="5503052"/>
+            <a:ext cx="890268" cy="577545"/>
+          </a:xfrm>
+          <a:prstGeom prst="flowChartOffpageConnector">
+            <a:avLst/>
+          </a:prstGeom>
+          <a:solidFill>
+            <a:srgbClr val="008CBA"/>
+          </a:solidFill>
+          <a:ln>
+            <a:noFill/>
+          </a:ln>
+        </p:spPr>
+        <p:style>
+          <a:lnRef idx="2">
+            <a:schemeClr val="accent1">
+              <a:shade val="50000"/>
+            </a:schemeClr>
+          </a:lnRef>
+          <a:fillRef idx="1">
+            <a:schemeClr val="accent1"/>
+          </a:fillRef>
+          <a:effectRef idx="0">
+            <a:schemeClr val="accent1"/>
+          </a:effectRef>
+          <a:fontRef idx="minor">
+            <a:schemeClr val="lt1"/>
+          </a:fontRef>
+        </p:style>
+        <p:txBody>
+          <a:bodyPr lIns="0" tIns="0" rIns="0" bIns="0" rtlCol="0" anchor="ctr"/>
+          <a:lstStyle/>
+          <a:p>
+            <a:pPr algn="ctr"/>
+            <a:r>
+              <a:rPr lang="de-DE" sz="1200"/>
+              <a:t>Skill-Set</a:t>
+            </a:r>
+          </a:p>
+        </p:txBody>
+      </p:sp>
+      <p:sp>
+        <p:nvSpPr>
+          <p:cNvPr id="50" name="Pfeil: Fünfeck 49">
+            <a:extLst>
+              <a:ext uri="{FF2B5EF4-FFF2-40B4-BE49-F238E27FC236}">
+                <a16:creationId xmlns:a16="http://schemas.microsoft.com/office/drawing/2014/main" id="{D9D09B6D-6308-49E1-AEAB-9987904C5A95}"/>
+              </a:ext>
+            </a:extLst>
+          </p:cNvPr>
+          <p:cNvSpPr/>
+          <p:nvPr/>
+        </p:nvSpPr>
+        <p:spPr>
+          <a:xfrm>
+            <a:off x="1463040" y="2490414"/>
+            <a:ext cx="1299717" cy="424133"/>
+          </a:xfrm>
+          <a:prstGeom prst="homePlate">
+            <a:avLst/>
+          </a:prstGeom>
+          <a:solidFill>
+            <a:srgbClr val="D6DCE5"/>
+          </a:solidFill>
+          <a:ln>
+            <a:noFill/>
+          </a:ln>
+        </p:spPr>
+        <p:style>
+          <a:lnRef idx="2">
+            <a:schemeClr val="accent1">
+              <a:shade val="50000"/>
+            </a:schemeClr>
+          </a:lnRef>
+          <a:fillRef idx="1">
+            <a:schemeClr val="accent1"/>
+          </a:fillRef>
+          <a:effectRef idx="0">
+            <a:schemeClr val="accent1"/>
+          </a:effectRef>
+          <a:fontRef idx="minor">
+            <a:schemeClr val="lt1"/>
+          </a:fontRef>
+        </p:style>
+        <p:txBody>
+          <a:bodyPr rtlCol="0" anchor="ctr"/>
+          <a:lstStyle/>
           <a:p>
             <a:pPr marL="171450" indent="-171450">
               <a:buFont typeface="Arial" panose="020B0604020202020204" pitchFamily="34" charset="0"/>
@@ -11545,167 +11703,9 @@
                   <a:schemeClr val="tx1"/>
                 </a:solidFill>
               </a:rPr>
-              <a:t>Missing-Map</a:t>
-            </a:r>
-          </a:p>
-        </p:txBody>
-      </p:sp>
-      <p:sp>
-        <p:nvSpPr>
-          <p:cNvPr id="45" name="Rechteck: abgerundete Ecken 44">
-            <a:extLst>
-              <a:ext uri="{FF2B5EF4-FFF2-40B4-BE49-F238E27FC236}">
-                <a16:creationId xmlns:a16="http://schemas.microsoft.com/office/drawing/2014/main" id="{123DEF27-8C5E-4BD9-8566-7C089C43D140}"/>
-              </a:ext>
-            </a:extLst>
-          </p:cNvPr>
-          <p:cNvSpPr/>
-          <p:nvPr/>
-        </p:nvSpPr>
-        <p:spPr>
-          <a:xfrm>
-            <a:off x="2782421" y="4654787"/>
-            <a:ext cx="1575297" cy="848266"/>
-          </a:xfrm>
-          <a:prstGeom prst="roundRect">
-            <a:avLst/>
-          </a:prstGeom>
-          <a:solidFill>
-            <a:srgbClr val="405786"/>
-          </a:solidFill>
-          <a:ln>
-            <a:noFill/>
-          </a:ln>
-        </p:spPr>
-        <p:style>
-          <a:lnRef idx="2">
-            <a:schemeClr val="accent1">
-              <a:shade val="50000"/>
-            </a:schemeClr>
-          </a:lnRef>
-          <a:fillRef idx="1">
-            <a:schemeClr val="accent1"/>
-          </a:fillRef>
-          <a:effectRef idx="0">
-            <a:schemeClr val="accent1"/>
-          </a:effectRef>
-          <a:fontRef idx="minor">
-            <a:schemeClr val="lt1"/>
-          </a:fontRef>
-        </p:style>
-        <p:txBody>
-          <a:bodyPr rtlCol="0" anchor="ctr"/>
-          <a:lstStyle/>
-          <a:p>
-            <a:pPr algn="ctr"/>
-            <a:r>
-              <a:rPr lang="de-DE" sz="1200"/>
-              <a:t>Skalierung</a:t>
-            </a:r>
-          </a:p>
-        </p:txBody>
-      </p:sp>
-      <p:sp>
-        <p:nvSpPr>
-          <p:cNvPr id="46" name="Flussdiagramm: Verbinder zu einer anderen Seite 45">
-            <a:extLst>
-              <a:ext uri="{FF2B5EF4-FFF2-40B4-BE49-F238E27FC236}">
-                <a16:creationId xmlns:a16="http://schemas.microsoft.com/office/drawing/2014/main" id="{ACAFB794-65DC-47D5-9F93-BA7CB2D3CD86}"/>
-              </a:ext>
-            </a:extLst>
-          </p:cNvPr>
-          <p:cNvSpPr/>
-          <p:nvPr/>
-        </p:nvSpPr>
-        <p:spPr>
-          <a:xfrm>
-            <a:off x="3124935" y="5503052"/>
-            <a:ext cx="890268" cy="577545"/>
-          </a:xfrm>
-          <a:prstGeom prst="flowChartOffpageConnector">
-            <a:avLst/>
-          </a:prstGeom>
-          <a:solidFill>
-            <a:srgbClr val="008CBA"/>
-          </a:solidFill>
-          <a:ln>
-            <a:noFill/>
-          </a:ln>
-        </p:spPr>
-        <p:style>
-          <a:lnRef idx="2">
-            <a:schemeClr val="accent1">
-              <a:shade val="50000"/>
-            </a:schemeClr>
-          </a:lnRef>
-          <a:fillRef idx="1">
-            <a:schemeClr val="accent1"/>
-          </a:fillRef>
-          <a:effectRef idx="0">
-            <a:schemeClr val="accent1"/>
-          </a:effectRef>
-          <a:fontRef idx="minor">
-            <a:schemeClr val="lt1"/>
-          </a:fontRef>
-        </p:style>
-        <p:txBody>
-          <a:bodyPr lIns="0" tIns="0" rIns="0" bIns="0" rtlCol="0" anchor="ctr"/>
-          <a:lstStyle/>
-          <a:p>
-            <a:pPr algn="ctr"/>
-            <a:r>
-              <a:rPr lang="de-DE" sz="1200"/>
-              <a:t>Skill-Set</a:t>
-            </a:r>
-          </a:p>
-        </p:txBody>
-      </p:sp>
-      <p:sp>
-        <p:nvSpPr>
-          <p:cNvPr id="50" name="Pfeil: Fünfeck 49">
-            <a:extLst>
-              <a:ext uri="{FF2B5EF4-FFF2-40B4-BE49-F238E27FC236}">
-                <a16:creationId xmlns:a16="http://schemas.microsoft.com/office/drawing/2014/main" id="{D9D09B6D-6308-49E1-AEAB-9987904C5A95}"/>
-              </a:ext>
-            </a:extLst>
-          </p:cNvPr>
-          <p:cNvSpPr/>
-          <p:nvPr/>
-        </p:nvSpPr>
-        <p:spPr>
-          <a:xfrm>
-            <a:off x="1538995" y="2490414"/>
-            <a:ext cx="1223762" cy="424133"/>
-          </a:xfrm>
-          <a:prstGeom prst="homePlate">
-            <a:avLst/>
-          </a:prstGeom>
-          <a:solidFill>
-            <a:srgbClr val="D6DCE5"/>
-          </a:solidFill>
-          <a:ln>
-            <a:noFill/>
-          </a:ln>
-        </p:spPr>
-        <p:style>
-          <a:lnRef idx="2">
-            <a:schemeClr val="accent1">
-              <a:shade val="50000"/>
-            </a:schemeClr>
-          </a:lnRef>
-          <a:fillRef idx="1">
-            <a:schemeClr val="accent1"/>
-          </a:fillRef>
-          <a:effectRef idx="0">
-            <a:schemeClr val="accent1"/>
-          </a:effectRef>
-          <a:fontRef idx="minor">
-            <a:schemeClr val="lt1"/>
-          </a:fontRef>
-        </p:style>
-        <p:txBody>
-          <a:bodyPr rtlCol="0" anchor="ctr"/>
-          <a:lstStyle/>
+              <a:t>Kodierschema</a:t>
+            </a:r>
+          </a:p>
           <a:p>
             <a:pPr marL="171450" indent="-171450">
               <a:buFont typeface="Arial" panose="020B0604020202020204" pitchFamily="34" charset="0"/>
@@ -11717,7 +11717,7 @@
                   <a:schemeClr val="tx1"/>
                 </a:solidFill>
               </a:rPr>
-              <a:t>Kodier-schema</a:t>
+              <a:t>Konfiguration</a:t>
             </a:r>
           </a:p>
         </p:txBody>
@@ -11736,8 +11736,8 @@
         </p:nvSpPr>
         <p:spPr>
           <a:xfrm>
-            <a:off x="1537998" y="4654786"/>
-            <a:ext cx="1220492" cy="424133"/>
+            <a:off x="1458773" y="4654786"/>
+            <a:ext cx="1299717" cy="424133"/>
           </a:xfrm>
           <a:prstGeom prst="homePlate">
             <a:avLst/>
@@ -11798,8 +11798,8 @@
         </p:nvSpPr>
         <p:spPr>
           <a:xfrm>
-            <a:off x="1537998" y="5078919"/>
-            <a:ext cx="1223762" cy="424133"/>
+            <a:off x="1458773" y="5078919"/>
+            <a:ext cx="1302987" cy="424133"/>
           </a:xfrm>
           <a:prstGeom prst="homePlate">
             <a:avLst/>

--- a/assets/figures.pptx
+++ b/assets/figures.pptx
@@ -253,7 +253,7 @@
           <a:p>
             <a:fld id="{C07B6569-5EFF-41A8-B6CB-39864A9A9501}" type="datetimeFigureOut">
               <a:rPr lang="de-DE" smtClean="0"/>
-              <a:t>27.09.2026</a:t>
+              <a:t>01.10.2026</a:t>
             </a:fld>
             <a:endParaRPr lang="de-DE"/>
           </a:p>
@@ -423,7 +423,7 @@
           <a:p>
             <a:fld id="{C07B6569-5EFF-41A8-B6CB-39864A9A9501}" type="datetimeFigureOut">
               <a:rPr lang="de-DE" smtClean="0"/>
-              <a:t>27.09.2026</a:t>
+              <a:t>01.10.2026</a:t>
             </a:fld>
             <a:endParaRPr lang="de-DE"/>
           </a:p>
@@ -603,7 +603,7 @@
           <a:p>
             <a:fld id="{C07B6569-5EFF-41A8-B6CB-39864A9A9501}" type="datetimeFigureOut">
               <a:rPr lang="de-DE" smtClean="0"/>
-              <a:t>27.09.2026</a:t>
+              <a:t>01.10.2026</a:t>
             </a:fld>
             <a:endParaRPr lang="de-DE"/>
           </a:p>
@@ -850,7 +850,7 @@
           <a:p>
             <a:fld id="{C07B6569-5EFF-41A8-B6CB-39864A9A9501}" type="datetimeFigureOut">
               <a:rPr lang="de-DE" smtClean="0"/>
-              <a:t>27.09.2026</a:t>
+              <a:t>01.10.2026</a:t>
             </a:fld>
             <a:endParaRPr lang="de-DE"/>
           </a:p>
@@ -1094,7 +1094,7 @@
           <a:p>
             <a:fld id="{C07B6569-5EFF-41A8-B6CB-39864A9A9501}" type="datetimeFigureOut">
               <a:rPr lang="de-DE" smtClean="0"/>
-              <a:t>27.09.2026</a:t>
+              <a:t>01.10.2026</a:t>
             </a:fld>
             <a:endParaRPr lang="de-DE"/>
           </a:p>
@@ -1326,7 +1326,7 @@
           <a:p>
             <a:fld id="{C07B6569-5EFF-41A8-B6CB-39864A9A9501}" type="datetimeFigureOut">
               <a:rPr lang="de-DE" smtClean="0"/>
-              <a:t>27.09.2026</a:t>
+              <a:t>01.10.2026</a:t>
             </a:fld>
             <a:endParaRPr lang="de-DE"/>
           </a:p>
@@ -1693,7 +1693,7 @@
           <a:p>
             <a:fld id="{C07B6569-5EFF-41A8-B6CB-39864A9A9501}" type="datetimeFigureOut">
               <a:rPr lang="de-DE" smtClean="0"/>
-              <a:t>27.09.2026</a:t>
+              <a:t>01.10.2026</a:t>
             </a:fld>
             <a:endParaRPr lang="de-DE"/>
           </a:p>
@@ -1811,7 +1811,7 @@
           <a:p>
             <a:fld id="{C07B6569-5EFF-41A8-B6CB-39864A9A9501}" type="datetimeFigureOut">
               <a:rPr lang="de-DE" smtClean="0"/>
-              <a:t>27.09.2026</a:t>
+              <a:t>01.10.2026</a:t>
             </a:fld>
             <a:endParaRPr lang="de-DE"/>
           </a:p>
@@ -1906,7 +1906,7 @@
           <a:p>
             <a:fld id="{C07B6569-5EFF-41A8-B6CB-39864A9A9501}" type="datetimeFigureOut">
               <a:rPr lang="de-DE" smtClean="0"/>
-              <a:t>27.09.2026</a:t>
+              <a:t>01.10.2026</a:t>
             </a:fld>
             <a:endParaRPr lang="de-DE"/>
           </a:p>
@@ -2183,7 +2183,7 @@
           <a:p>
             <a:fld id="{C07B6569-5EFF-41A8-B6CB-39864A9A9501}" type="datetimeFigureOut">
               <a:rPr lang="de-DE" smtClean="0"/>
-              <a:t>27.09.2026</a:t>
+              <a:t>01.10.2026</a:t>
             </a:fld>
             <a:endParaRPr lang="de-DE"/>
           </a:p>
@@ -2440,7 +2440,7 @@
           <a:p>
             <a:fld id="{C07B6569-5EFF-41A8-B6CB-39864A9A9501}" type="datetimeFigureOut">
               <a:rPr lang="de-DE" smtClean="0"/>
-              <a:t>27.09.2026</a:t>
+              <a:t>01.10.2026</a:t>
             </a:fld>
             <a:endParaRPr lang="de-DE"/>
           </a:p>
@@ -2653,7 +2653,7 @@
           <a:p>
             <a:fld id="{C07B6569-5EFF-41A8-B6CB-39864A9A9501}" type="datetimeFigureOut">
               <a:rPr lang="de-DE" smtClean="0"/>
-              <a:t>27.09.2026</a:t>
+              <a:t>01.10.2026</a:t>
             </a:fld>
             <a:endParaRPr lang="de-DE"/>
           </a:p>
@@ -11433,7 +11433,7 @@
         </p:nvSpPr>
         <p:spPr>
           <a:xfrm>
-            <a:off x="3124935" y="4008353"/>
+            <a:off x="3124935" y="4002003"/>
             <a:ext cx="890268" cy="577545"/>
           </a:xfrm>
           <a:prstGeom prst="flowChartOffpageConnector">
@@ -11469,7 +11469,7 @@
             <a:pPr algn="ctr"/>
             <a:r>
               <a:rPr lang="de-DE" sz="1200"/>
-              <a:t>Item-Array</a:t>
+              <a:t>Item-matrix</a:t>
             </a:r>
           </a:p>
         </p:txBody>
